--- a/downloads/presentations/modules/lesson-09-synthetic-data-for-public-health-ai.pptx
+++ b/downloads/presentations/modules/lesson-09-synthetic-data-for-public-health-ai.pptx
@@ -24,9 +24,11 @@
     <p:sldId id="272" r:id="rId18"/>
     <p:sldId id="273" r:id="rId19"/>
     <p:sldId id="274" r:id="rId20"/>
+    <p:sldId id="275" r:id="rId21"/>
+    <p:sldId id="276" r:id="rId22"/>
   </p:sldIdLst>
   <p:notesMasterIdLst>
-    <p:notesMasterId r:id="rId21"/>
+    <p:notesMasterId r:id="rId23"/>
   </p:notesMasterIdLst>
   <p:sldSz cx="12192000" cy="6858000"/>
   <p:notesSz cx="6858000" cy="12192000"/>
@@ -609,10 +611,8 @@
           <a:p>
             <a:r>
               <a:rPr lang="en-US" dirty="0"/>
-              <a:t>Risks, Failure Modes, and Guardrails
-A common failure mode is treating the topic as a technical detail rather than a public health control. When staff do not connect technical decisions to authority, workflow, equity, privacy, security, and accountability, the agency may adopt a tool that appears useful but cannot be sustained or defended.
-Another risk is relying on vendor claims without agency-defined evidence. Vendors may provide demonstrations, dashboards, or summary metrics that do not match the agency workflow or data environment. A guardrail is to require documentation, test results, acceptance criteria, and agency-controlled review.
-A third risk is failing to plan for change. Public health data, policies, systems, and emergencies change. Any technical approach must include monitoring, review, versioning, escalation, and retirement pathways so the agency can respond when assumptions no longer hold.</a:t>
+              <a:t>Public Health Example
+A health department may want synthetic eCR data to train disease investigators and test an AI case summary tool without exposing real case narratives. The synthetic data should include realistic combinations of symptoms, lab results, demographics, dates, and missing fields, but should not reproduce unusual cases in ways that could identify real people. The agency should document that the data are intended for training and testing, not for estimating disease burden or measuring model performance in production.</a:t>
             </a:r>
             <a:endParaRPr lang="en-US" dirty="0"/>
           </a:p>
@@ -700,9 +700,10 @@
           <a:p>
             <a:r>
               <a:rPr lang="en-US" dirty="0"/>
-              <a:t>Application to AI-Supported Workflows
-Generative AI, predictive analytics, RAG, automation, and agentic workflows all depend on the controls described in this module. The controls should be scaled to the risk of the use case. A tool that drafts internal training text may require lighter review than a tool that updates case records, prioritizes outreach, or supports public communication during an emergency.
-The module should be applied during readiness assessment, procurement, implementation planning, pilot testing, and post-deployment monitoring. Learners should document how the topic affects data, systems, users, safeguards, and decision-making for the selected workflow.</a:t>
+              <a:t>Technical Deep Dive
+Synthetic data development begins by defining the intended use. Training data for staff exercises can be less statistically faithful than data used for system testing. Model evaluation data require more rigorous review because the synthetic data must preserve patterns relevant to the model task. Public health teams should define whether synthetic data will be used for demonstration, software testing, integration testing, training, simulation, or model development.
+Agencies should evaluate synthetic data for privacy and utility. Privacy review may examine whether rare combinations, dates, locations, or narratives are too similar to real records. Utility review may compare distributions, relationships, missingness, and edge cases against expected patterns. Both reviews should be documented because a dataset can be safe but not useful, or useful but not safe enough for sharing.
+Synthetic data are also helpful for vendor evaluation. Agencies can provide vendors with realistic data structures without sharing protected data during early discovery. However, vendors should not use synthetic data performance as proof that a model will work on real public health data. Production readiness still requires validation against appropriate real-world data under approved governance controls.</a:t>
             </a:r>
             <a:endParaRPr lang="en-US" dirty="0"/>
           </a:p>
@@ -790,10 +791,10 @@
           <a:p>
             <a:r>
               <a:rPr lang="en-US" dirty="0"/>
-              <a:t>Reflection Questions
-Where does this topic appear in one current or proposed AI workflow in your agency?
-What decisions, data sources, users, or partners would be affected if this area is poorly designed?
-What evidence would governance reviewers need before approving the workflow?</a:t>
+              <a:t>Risks, Failure Modes, and Guardrails
+A common failure mode is treating the topic as a technical detail rather than a public health control. When staff do not connect technical decisions to authority, workflow, equity, privacy, security, and accountability, the agency may adopt a tool that appears useful but cannot be sustained or defended.
+Another risk is relying on vendor claims without agency-defined evidence. Vendors may provide demonstrations, dashboards, or summary metrics that do not match the agency workflow or data environment. A guardrail is to require documentation, test results, acceptance criteria, and agency-controlled review.
+A third risk is failing to plan for change. Public health data, policies, systems, and emergencies change. Any technical approach must include monitoring, review, versioning, escalation, and retirement pathways so the agency can respond when assumptions no longer hold.</a:t>
             </a:r>
             <a:endParaRPr lang="en-US" dirty="0"/>
           </a:p>
@@ -881,9 +882,9 @@
           <a:p>
             <a:r>
               <a:rPr lang="en-US" dirty="0"/>
-              <a:t>Reflection Questions
-Which safeguards should be required before pilot testing?
-Who owns ongoing monitoring and review?</a:t>
+              <a:t>Application to AI-Supported Workflows
+Generative AI, predictive analytics, RAG, automation, and agentic workflows all depend on the controls described in this module. The controls should be scaled to the risk of the use case. A tool that drafts internal training text may require lighter review than a tool that updates case records, prioritizes outreach, or supports public communication during an emergency.
+The module should be applied during readiness assessment, procurement, implementation planning, pilot testing, and post-deployment monitoring. Learners should document how the topic affects data, systems, users, safeguards, and decision-making for the selected workflow.</a:t>
             </a:r>
             <a:endParaRPr lang="en-US" dirty="0"/>
           </a:p>
@@ -971,9 +972,10 @@
           <a:p>
             <a:r>
               <a:rPr lang="en-US" dirty="0"/>
-              <a:t>Practical Exercise
-Create a synthetic dataset assessment for one real or realistic public health AI workflow. The artifact should describe the use case, affected users, data sources, system dependencies, risks, guardrails, review points, and unresolved questions.
-The exercise should produce a work product that could be used in a governance meeting, procurement review, implementation planning session, pilot evaluation, or monitoring review. Learners should document assumptions and identify which staff or partners need to be consulted.</a:t>
+              <a:t>Reflection Questions
+Where does this topic appear in one current or proposed AI workflow in your agency?
+What decisions, data sources, users, or partners would be affected if this area is poorly designed?
+What evidence would governance reviewers need before approving the workflow?</a:t>
             </a:r>
             <a:endParaRPr lang="en-US" dirty="0"/>
           </a:p>
@@ -1061,8 +1063,9 @@
           <a:p>
             <a:r>
               <a:rPr lang="en-US" dirty="0"/>
-              <a:t>Expected Artifact or Evidence
-The expected artifact is a completed synthetic dataset assessment. It should be specific to a public health workflow and should include technical dependencies, governance questions, human review expectations, monitoring indicators, and unresolved risks.</a:t>
+              <a:t>Reflection Questions
+Which safeguards should be required before pilot testing?
+Who owns ongoing monitoring and review?</a:t>
             </a:r>
             <a:endParaRPr lang="en-US" dirty="0"/>
           </a:p>
@@ -1150,8 +1153,9 @@
           <a:p>
             <a:r>
               <a:rPr lang="en-US" dirty="0"/>
-              <a:t>Expected Assignment
-The expected artifact is a completed synthetic dataset assessment. It should be specific to a public health workflow and should include technical dependencies, governance questions, human review expectations, monitoring indicators, and unresolved risks.</a:t>
+              <a:t>Practical Exercise
+Create a synthetic dataset assessment for one real or realistic public health AI workflow. The artifact should describe the use case, affected users, data sources, system dependencies, risks, guardrails, review points, and unresolved questions.
+The exercise should produce a work product that could be used in a governance meeting, procurement review, implementation planning session, pilot evaluation, or monitoring review. Learners should document assumptions and identify which staff or partners need to be consulted.</a:t>
             </a:r>
             <a:endParaRPr lang="en-US" dirty="0"/>
           </a:p>
@@ -1239,12 +1243,8 @@
           <a:p>
             <a:r>
               <a:rPr lang="en-US" dirty="0"/>
-              <a:t>Knowledge Check
-1. What is the best reason to address synthetic data for public health ai before deployment?
-2. Which practice best supports responsible implementation?
-3. Which statement best describes a common failure mode?
-4. What should be included in the practical artifact for this module?
-5. When should the issue be escalated for governance or leadership review?</a:t>
+              <a:t>Expected Artifact or Evidence
+The expected artifact is a completed synthetic dataset assessment. It should be specific to a public health workflow and should include technical dependencies, governance questions, human review expectations, monitoring indicators, and unresolved risks.</a:t>
             </a:r>
             <a:endParaRPr lang="en-US" dirty="0"/>
           </a:p>
@@ -1332,12 +1332,8 @@
           <a:p>
             <a:r>
               <a:rPr lang="en-US" dirty="0"/>
-              <a:t>References and Resources
-NIST AI Risk Management Framework: https://www.nist.gov/itl/ai-risk-management-framework
-NIST Privacy Framework and differential privacy resources
-NIST Generative AI Profile: https://www.nist.gov/publications/artificial-intelligence-risk-management-framework-generative-artificial-intelligence
-CDC Public Health Data Strategy and Data Modernization resources: https://www.cdc.gov/public-health-data-strategy/php/about/index.html
-OWASP Top 10 for LLM Applications, when security or AI integrations are relevant</a:t>
+              <a:t>Expected Assignment
+The expected artifact is a completed synthetic dataset assessment. It should be specific to a public health workflow and should include technical dependencies, governance questions, human review expectations, monitoring indicators, and unresolved risks.</a:t>
             </a:r>
             <a:endParaRPr lang="en-US" dirty="0"/>
           </a:p>
@@ -1425,8 +1421,12 @@
           <a:p>
             <a:r>
               <a:rPr lang="en-US" dirty="0"/>
-              <a:t>References and Resources
-Agency privacy, cybersecurity, data governance, procurement, and records management policies</a:t>
+              <a:t>Knowledge Check
+1. What is the best reason to address synthetic data for public health ai before deployment?
+2. Which practice best supports responsible implementation?
+3. Which statement best describes a common failure mode?
+4. What should be included in the practical artifact for this module?
+5. When should the issue be escalated for governance or leadership review?</a:t>
             </a:r>
             <a:endParaRPr lang="en-US" dirty="0"/>
           </a:p>
@@ -1560,6 +1560,188 @@
 </p:notes>
 </file>
 
+<file path=ppt/notesSlides/notesSlide20.xml><?xml version="1.0" encoding="utf-8"?>
+<p:notes xmlns:a="http://schemas.openxmlformats.org/drawingml/2006/main" xmlns:r="http://schemas.openxmlformats.org/officeDocument/2006/relationships" xmlns:p="http://schemas.openxmlformats.org/presentationml/2006/main">
+  <p:cSld>
+    <p:spTree>
+      <p:nvGrpSpPr>
+        <p:cNvPr id="1" name=""/>
+        <p:cNvGrpSpPr/>
+        <p:nvPr/>
+      </p:nvGrpSpPr>
+      <p:grpSpPr>
+        <a:xfrm>
+          <a:off x="0" y="0"/>
+          <a:ext cx="0" cy="0"/>
+          <a:chOff x="0" y="0"/>
+          <a:chExt cx="0" cy="0"/>
+        </a:xfrm>
+      </p:grpSpPr>
+      <p:sp>
+        <p:nvSpPr>
+          <p:cNvPr id="2" name="Slide Image Placeholder 1"/>
+          <p:cNvSpPr>
+            <a:spLocks noGrp="1" noRot="1" noChangeAspect="1"/>
+          </p:cNvSpPr>
+          <p:nvPr>
+            <p:ph type="sldImg"/>
+          </p:nvPr>
+        </p:nvSpPr>
+        <p:spPr/>
+      </p:sp>
+      <p:sp>
+        <p:nvSpPr>
+          <p:cNvPr id="3" name="Notes Placeholder 2"/>
+          <p:cNvSpPr>
+            <a:spLocks noGrp="1"/>
+          </p:cNvSpPr>
+          <p:nvPr>
+            <p:ph type="body" idx="1"/>
+          </p:nvPr>
+        </p:nvSpPr>
+        <p:spPr/>
+        <p:txBody>
+          <a:bodyPr/>
+          <a:lstStyle/>
+          <a:p>
+            <a:r>
+              <a:rPr lang="en-US" dirty="0"/>
+              <a:t>References and Resources
+NIST AI Risk Management Framework: https://www.nist.gov/itl/ai-risk-management-framework
+NIST Privacy Framework and differential privacy resources
+NIST Generative AI Profile: https://www.nist.gov/publications/artificial-intelligence-risk-management-framework-generative-artificial-intelligence
+CDC Public Health Data Strategy and Data Modernization resources: https://www.cdc.gov/public-health-data-strategy/php/about/index.html
+OWASP Top 10 for LLM Applications, when security or AI integrations are relevant</a:t>
+            </a:r>
+            <a:endParaRPr lang="en-US" dirty="0"/>
+          </a:p>
+        </p:txBody>
+      </p:sp>
+      <p:sp>
+        <p:nvSpPr>
+          <p:cNvPr id="4" name="Slide Number Placeholder 3"/>
+          <p:cNvSpPr>
+            <a:spLocks noGrp="1"/>
+          </p:cNvSpPr>
+          <p:nvPr>
+            <p:ph type="sldNum" sz="quarter" idx="10"/>
+          </p:nvPr>
+        </p:nvSpPr>
+        <p:spPr/>
+        <p:txBody>
+          <a:bodyPr/>
+          <a:lstStyle/>
+          <a:p>
+            <a:fld id="{F7021451-1387-4CA6-816F-3879F97B5CBC}" type="slidenum">
+              <a:rPr lang="en-US"/>
+              <a:t>20</a:t>
+            </a:fld>
+            <a:endParaRPr lang="en-US"/>
+          </a:p>
+        </p:txBody>
+      </p:sp>
+    </p:spTree>
+    <p:extLst>
+      <p:ext uri="{BB962C8B-B14F-4D97-AF65-F5344CB8AC3E}">
+        <p14:creationId xmlns:p14="http://schemas.microsoft.com/office/powerpoint/2010/main" val="1024086991"/>
+      </p:ext>
+    </p:extLst>
+  </p:cSld>
+  <p:clrMapOvr>
+    <a:masterClrMapping/>
+  </p:clrMapOvr>
+</p:notes>
+</file>
+
+<file path=ppt/notesSlides/notesSlide21.xml><?xml version="1.0" encoding="utf-8"?>
+<p:notes xmlns:a="http://schemas.openxmlformats.org/drawingml/2006/main" xmlns:r="http://schemas.openxmlformats.org/officeDocument/2006/relationships" xmlns:p="http://schemas.openxmlformats.org/presentationml/2006/main">
+  <p:cSld>
+    <p:spTree>
+      <p:nvGrpSpPr>
+        <p:cNvPr id="1" name=""/>
+        <p:cNvGrpSpPr/>
+        <p:nvPr/>
+      </p:nvGrpSpPr>
+      <p:grpSpPr>
+        <a:xfrm>
+          <a:off x="0" y="0"/>
+          <a:ext cx="0" cy="0"/>
+          <a:chOff x="0" y="0"/>
+          <a:chExt cx="0" cy="0"/>
+        </a:xfrm>
+      </p:grpSpPr>
+      <p:sp>
+        <p:nvSpPr>
+          <p:cNvPr id="2" name="Slide Image Placeholder 1"/>
+          <p:cNvSpPr>
+            <a:spLocks noGrp="1" noRot="1" noChangeAspect="1"/>
+          </p:cNvSpPr>
+          <p:nvPr>
+            <p:ph type="sldImg"/>
+          </p:nvPr>
+        </p:nvSpPr>
+        <p:spPr/>
+      </p:sp>
+      <p:sp>
+        <p:nvSpPr>
+          <p:cNvPr id="3" name="Notes Placeholder 2"/>
+          <p:cNvSpPr>
+            <a:spLocks noGrp="1"/>
+          </p:cNvSpPr>
+          <p:nvPr>
+            <p:ph type="body" idx="1"/>
+          </p:nvPr>
+        </p:nvSpPr>
+        <p:spPr/>
+        <p:txBody>
+          <a:bodyPr/>
+          <a:lstStyle/>
+          <a:p>
+            <a:r>
+              <a:rPr lang="en-US" dirty="0"/>
+              <a:t>References and Resources
+Agency privacy, cybersecurity, data governance, procurement, and records management policies</a:t>
+            </a:r>
+            <a:endParaRPr lang="en-US" dirty="0"/>
+          </a:p>
+        </p:txBody>
+      </p:sp>
+      <p:sp>
+        <p:nvSpPr>
+          <p:cNvPr id="4" name="Slide Number Placeholder 3"/>
+          <p:cNvSpPr>
+            <a:spLocks noGrp="1"/>
+          </p:cNvSpPr>
+          <p:nvPr>
+            <p:ph type="sldNum" sz="quarter" idx="10"/>
+          </p:nvPr>
+        </p:nvSpPr>
+        <p:spPr/>
+        <p:txBody>
+          <a:bodyPr/>
+          <a:lstStyle/>
+          <a:p>
+            <a:fld id="{F7021451-1387-4CA6-816F-3879F97B5CBC}" type="slidenum">
+              <a:rPr lang="en-US"/>
+              <a:t>21</a:t>
+            </a:fld>
+            <a:endParaRPr lang="en-US"/>
+          </a:p>
+        </p:txBody>
+      </p:sp>
+    </p:spTree>
+    <p:extLst>
+      <p:ext uri="{BB962C8B-B14F-4D97-AF65-F5344CB8AC3E}">
+        <p14:creationId xmlns:p14="http://schemas.microsoft.com/office/powerpoint/2010/main" val="1024086991"/>
+      </p:ext>
+    </p:extLst>
+  </p:cSld>
+  <p:clrMapOvr>
+    <a:masterClrMapping/>
+  </p:clrMapOvr>
+</p:notes>
+</file>
+
 <file path=ppt/notesSlides/notesSlide3.xml><?xml version="1.0" encoding="utf-8"?>
 <p:notes xmlns:a="http://schemas.openxmlformats.org/drawingml/2006/main" xmlns:r="http://schemas.openxmlformats.org/officeDocument/2006/relationships" xmlns:p="http://schemas.openxmlformats.org/presentationml/2006/main">
   <p:cSld>
@@ -1606,12 +1788,11 @@
           <a:p>
             <a:r>
               <a:rPr lang="en-US" dirty="0"/>
-              <a:t>Learning Objectives
-Explain the purpose of synthetic data for public health ai in public health AI work.
-Identify the technical, operational, privacy, security, equity, and governance issues associated with the topic.
-Apply the topic to a real or realistic public health workflow, system, or implementation scenario.
-Recognize common failure modes that can affect safety, accuracy, trust, workflow fit, or sustainability.
-Identify practical guardrails that should be documented before implementation.</a:t>
+              <a:t>Related Playbook Plays
+Play 11: Build and Deploy AI Solutions - This lesson informs Play 11 by helping learners connect the lesson topic to build and deploy ai solutions work in the AI Playbook.
+Play 2: Readiness Assessment - This lesson informs Play 2 by helping learners connect the lesson topic to readiness assessment work in the AI Playbook sequence.
+Play 1: Vision &amp; Guardrails - This lesson informs Play 1 by helping learners connect the lesson topic to vision &amp; guardrails work in the AI Playbook sequence.
+Play 7: Prioritize Use Cases - This lesson informs Play 7 by helping learners connect the lesson topic to prioritize use cases work in the AI Playbook sequence.</a:t>
             </a:r>
             <a:endParaRPr lang="en-US" dirty="0"/>
           </a:p>
@@ -1699,8 +1880,13 @@
           <a:p>
             <a:r>
               <a:rPr lang="en-US" dirty="0"/>
-              <a:t>Learning Objectives
-Produce a synthetic dataset assessment that can support readiness assessment, governance review, procurement, implementation, or monitoring.</a:t>
+              <a:t>Related Toolkit Resources
+Tool 4: AI Policy Landscape Scan (Worksheet) - Use AI Policy Landscape Scan to translate this lesson into a documented public health AI planning, governance, implementation,.
+Tool 5: AI Environmental and Resource Impact Review (Checklist) - Use this tool to complete or strengthen the practical exercise for the module using fictional, de-identified, or generalized.
+Tool 6: Human-Centered AI Decision Rule Checklist (Checklist) - Use Human-Centered AI Decision Rule Checklist to translate this lesson into a documented public health AI planning, governance,.
+Tool 8: AI Project Charter (Planning) - Use AI Project Charter to translate this lesson into a documented public health AI planning, governance, implementation, or.
+Tool 9: Data Quality Assessment Checklist (Checklist) - Use this tool to complete or strengthen the practical exercise for the module using fictional, de-identified, or generalized.
+Tool 10: Tiered Data Classification for AI Use (Worksheet) - Use this tool to complete or strengthen the practical exercise for the module using fictional, de-identified, or generalized.</a:t>
             </a:r>
             <a:endParaRPr lang="en-US" dirty="0"/>
           </a:p>
@@ -1788,8 +1974,12 @@
           <a:p>
             <a:r>
               <a:rPr lang="en-US" dirty="0"/>
-              <a:t>Module Overview
-Synthetic data are artificially generated data that are designed to resemble real data without directly copying every record from a real person. In public health, synthetic data can support training, software testing, demonstrations, model prototyping, and vendor evaluation when real data are too sensitive or difficult to share. This module helps learners understand both the promise and limitations of synthetic data, including privacy risk, analytic utility, representativeness, and validation.</a:t>
+              <a:t>Learning Objectives
+Explain the purpose of synthetic data for public health ai in public health AI work.
+Identify the technical, operational, privacy, security, equity, and governance issues associated with the topic.
+Apply the topic to a real or realistic public health workflow, system, or implementation scenario.
+Recognize common failure modes that can affect safety, accuracy, trust, workflow fit, or sustainability.
+Identify practical guardrails that should be documented before implementation.</a:t>
             </a:r>
             <a:endParaRPr lang="en-US" dirty="0"/>
           </a:p>
@@ -1877,9 +2067,8 @@
           <a:p>
             <a:r>
               <a:rPr lang="en-US" dirty="0"/>
-              <a:t>Why This Topic Matters for Public Health AI
-Synthetic Data for Public Health AI matters because AI systems are embedded in public health programs, data systems, and decision processes rather than operating in isolation. The topic affects whether AI outputs are accurate, explainable, safe, equitable, secure, and sustainable. Agencies that ignore this area may create tools that work in a demonstration but fail in actual practice.
-The topic also affects accountability. Public health agencies must be able to explain how data are used, why a tool was approved, what evidence supports the workflow, who reviews outputs, and what happens when the system fails. These responsibilities become more important as AI tools move from experimentation into operational use.</a:t>
+              <a:t>Learning Objectives
+Produce a synthetic dataset assessment that can support readiness assessment, governance review, procurement, implementation, or monitoring.</a:t>
             </a:r>
             <a:endParaRPr lang="en-US" dirty="0"/>
           </a:p>
@@ -1967,10 +2156,8 @@
           <a:p>
             <a:r>
               <a:rPr lang="en-US" dirty="0"/>
-              <a:t>Core Concepts
-Synthetic data are generated data designed to preserve selected patterns of a source dataset while reducing reliance on real individual-level records. The value of synthetic data depends on the purpose. A dataset that is useful for training staff on a dashboard may not be valid for evaluating a predictive model or testing equity performance.
-Privacy risk does not disappear simply because data are synthetic. If synthetic data are too close to the source data, they may leak information about real individuals or rare cases. If they are too different from the source data, they may be safe but not useful. Public health agencies must evaluate both privacy protection and data utility.
-Data utility means the synthetic data are useful for the intended purpose. Utility may involve preserving distributions, relationships between fields, missingness patterns, geographic variation, or time trends. The intended use should be documented before the synthetic data are created or accepted from a vendor.</a:t>
+              <a:t>Module Overview
+Synthetic data are artificially generated data that are designed to resemble real data without directly copying every record from a real person. In public health, synthetic data can support training, software testing, demonstrations, model prototyping, and vendor evaluation when real data are too sensitive or difficult to share. This module helps learners understand both the promise and limitations of synthetic data, including privacy risk, analytic utility, representativeness, and validation.</a:t>
             </a:r>
             <a:endParaRPr lang="en-US" dirty="0"/>
           </a:p>
@@ -2058,8 +2245,9 @@
           <a:p>
             <a:r>
               <a:rPr lang="en-US" dirty="0"/>
-              <a:t>Public Health Example
-A health department may want synthetic eCR data to train disease investigators and test an AI case summary tool without exposing real case narratives. The synthetic data should include realistic combinations of symptoms, lab results, demographics, dates, and missing fields, but should not reproduce unusual cases in ways that could identify real people. The agency should document that the data are intended for training and testing, not for estimating disease burden or measuring model performance in production.</a:t>
+              <a:t>Why This Topic Matters for Public Health AI
+Synthetic Data for Public Health AI matters because AI systems are embedded in public health programs, data systems, and decision processes rather than operating in isolation. The topic affects whether AI outputs are accurate, explainable, safe, equitable, secure, and sustainable. Agencies that ignore this area may create tools that work in a demonstration but fail in actual practice.
+The topic also affects accountability. Public health agencies must be able to explain how data are used, why a tool was approved, what evidence supports the workflow, who reviews outputs, and what happens when the system fails. These responsibilities become more important as AI tools move from experimentation into operational use.</a:t>
             </a:r>
             <a:endParaRPr lang="en-US" dirty="0"/>
           </a:p>
@@ -2147,10 +2335,10 @@
           <a:p>
             <a:r>
               <a:rPr lang="en-US" dirty="0"/>
-              <a:t>Technical Deep Dive
-Synthetic data development begins by defining the intended use. Training data for staff exercises can be less statistically faithful than data used for system testing. Model evaluation data require more rigorous review because the synthetic data must preserve patterns relevant to the model task. Public health teams should define whether synthetic data will be used for demonstration, software testing, integration testing, training, simulation, or model development.
-Agencies should evaluate synthetic data for privacy and utility. Privacy review may examine whether rare combinations, dates, locations, or narratives are too similar to real records. Utility review may compare distributions, relationships, missingness, and edge cases against expected patterns. Both reviews should be documented because a dataset can be safe but not useful, or useful but not safe enough for sharing.
-Synthetic data are also helpful for vendor evaluation. Agencies can provide vendors with realistic data structures without sharing protected data during early discovery. However, vendors should not use synthetic data performance as proof that a model will work on real public health data. Production readiness still requires validation against appropriate real-world data under approved governance controls.</a:t>
+              <a:t>Core Concepts
+Synthetic data are generated data designed to preserve selected patterns of a source dataset while reducing reliance on real individual-level records. The value of synthetic data depends on the purpose. A dataset that is useful for training staff on a dashboard may not be valid for evaluating a predictive model or testing equity performance.
+Privacy risk does not disappear simply because data are synthetic. If synthetic data are too close to the source data, they may leak information about real individuals or rare cases. If they are too different from the source data, they may be safe but not useful. Public health agencies must evaluate both privacy protection and data utility.
+Data utility means the synthetic data are useful for the intended purpose. Utility may involve preserving distributions, relationships between fields, missingness patterns, geographic variation, or time trends. The intended use should be documented before the synthetic data are created or accepted from a vendor.</a:t>
             </a:r>
             <a:endParaRPr lang="en-US" dirty="0"/>
           </a:p>
@@ -2773,7 +2961,32 @@
       </p:sp>
       <p:sp>
         <p:nvSpPr>
-          <p:cNvPr id="3" name="Text 1"/>
+          <p:cNvPr id="3" name="Shape 1"/>
+          <p:cNvSpPr/>
+          <p:nvPr/>
+        </p:nvSpPr>
+        <p:spPr>
+          <a:xfrm>
+            <a:off x="0" y="164592"/>
+            <a:ext cx="146304" cy="6693408"/>
+          </a:xfrm>
+          <a:prstGeom prst="rect">
+            <a:avLst/>
+          </a:prstGeom>
+          <a:solidFill>
+            <a:srgbClr val="2F8A28"/>
+          </a:solidFill>
+          <a:ln w="12700">
+            <a:solidFill>
+              <a:srgbClr val="2F8A28"/>
+            </a:solidFill>
+            <a:prstDash val="solid"/>
+          </a:ln>
+        </p:spPr>
+      </p:sp>
+      <p:sp>
+        <p:nvSpPr>
+          <p:cNvPr id="4" name="Text 2"/>
           <p:cNvSpPr/>
           <p:nvPr/>
         </p:nvSpPr>
@@ -2812,7 +3025,7 @@
       </p:sp>
       <p:sp>
         <p:nvSpPr>
-          <p:cNvPr id="4" name="Text 2"/>
+          <p:cNvPr id="5" name="Text 3"/>
           <p:cNvSpPr/>
           <p:nvPr/>
         </p:nvSpPr>
@@ -2851,7 +3064,7 @@
       </p:sp>
       <p:sp>
         <p:nvSpPr>
-          <p:cNvPr id="5" name="Text 3"/>
+          <p:cNvPr id="6" name="Text 4"/>
           <p:cNvSpPr/>
           <p:nvPr/>
         </p:nvSpPr>
@@ -2890,13 +3103,77 @@
       </p:sp>
       <p:sp>
         <p:nvSpPr>
-          <p:cNvPr id="6" name="Text 4"/>
+          <p:cNvPr id="7" name="Shape 5"/>
           <p:cNvSpPr/>
           <p:nvPr/>
         </p:nvSpPr>
         <p:spPr>
           <a:xfrm>
             <a:off x="640080" y="658368"/>
+            <a:ext cx="420624" cy="420624"/>
+          </a:xfrm>
+          <a:prstGeom prst="ellipse">
+            <a:avLst/>
+          </a:prstGeom>
+          <a:solidFill>
+            <a:srgbClr val="0068B7"/>
+          </a:solidFill>
+          <a:ln w="12700">
+            <a:solidFill>
+              <a:srgbClr val="0068B7"/>
+            </a:solidFill>
+            <a:prstDash val="solid"/>
+          </a:ln>
+        </p:spPr>
+      </p:sp>
+      <p:sp>
+        <p:nvSpPr>
+          <p:cNvPr id="8" name="Text 6"/>
+          <p:cNvSpPr/>
+          <p:nvPr/>
+        </p:nvSpPr>
+        <p:spPr>
+          <a:xfrm>
+            <a:off x="640080" y="731520"/>
+            <a:ext cx="420624" cy="164592"/>
+          </a:xfrm>
+          <a:prstGeom prst="rect">
+            <a:avLst/>
+          </a:prstGeom>
+          <a:noFill/>
+          <a:ln/>
+        </p:spPr>
+        <p:txBody>
+          <a:bodyPr wrap="square" lIns="0" tIns="0" rIns="0" bIns="0" rtlCol="0" anchor="ctr"/>
+          <a:lstStyle/>
+          <a:p>
+            <a:pPr algn="ctr" indent="0" marL="0">
+              <a:buNone/>
+            </a:pPr>
+            <a:r>
+              <a:rPr lang="en-US" sz="1100" b="1" dirty="0">
+                <a:solidFill>
+                  <a:srgbClr val="FFFFFF"/>
+                </a:solidFill>
+                <a:latin typeface="Aptos" pitchFamily="34" charset="0"/>
+                <a:ea typeface="Aptos" pitchFamily="34" charset="-122"/>
+                <a:cs typeface="Aptos" pitchFamily="34" charset="-120"/>
+              </a:rPr>
+              <a:t>5</a:t>
+            </a:r>
+            <a:endParaRPr lang="en-US" sz="1100" dirty="0"/>
+          </a:p>
+        </p:txBody>
+      </p:sp>
+      <p:sp>
+        <p:nvSpPr>
+          <p:cNvPr id="9" name="Text 7"/>
+          <p:cNvSpPr/>
+          <p:nvPr/>
+        </p:nvSpPr>
+        <p:spPr>
+          <a:xfrm>
+            <a:off x="640080" y="621792"/>
             <a:ext cx="10881360" cy="566928"/>
           </a:xfrm>
           <a:prstGeom prst="rect">
@@ -2923,7 +3200,7 @@
                 <a:ea typeface="Aptos Display" pitchFamily="34" charset="-122"/>
                 <a:cs typeface="Aptos Display" pitchFamily="34" charset="-120"/>
               </a:rPr>
-              <a:t>Risks, Failure Modes, and Guardrails</a:t>
+              <a:t>Public Health Example</a:t>
             </a:r>
             <a:endParaRPr lang="en-US" sz="2700" dirty="0"/>
           </a:p>
@@ -2931,32 +3208,164 @@
       </p:sp>
       <p:sp>
         <p:nvSpPr>
-          <p:cNvPr id="7" name="Text 5"/>
-          <p:cNvSpPr/>
-          <p:nvPr/>
-        </p:nvSpPr>
-        <p:spPr>
-          <a:xfrm>
-            <a:off x="822960" y="1325880"/>
-            <a:ext cx="10378440" cy="4800600"/>
-          </a:xfrm>
-          <a:prstGeom prst="rect">
-            <a:avLst/>
-          </a:prstGeom>
-          <a:noFill/>
-          <a:ln/>
-        </p:spPr>
-        <p:txBody>
-          <a:bodyPr wrap="square" lIns="1016" tIns="1016" rIns="1016" bIns="1016" rtlCol="0" anchor="t">
+          <p:cNvPr id="10" name="Text 8"/>
+          <p:cNvSpPr/>
+          <p:nvPr/>
+        </p:nvSpPr>
+        <p:spPr>
+          <a:xfrm>
+            <a:off x="868680" y="1417320"/>
+            <a:ext cx="6675120" cy="4434840"/>
+          </a:xfrm>
+          <a:prstGeom prst="rect">
+            <a:avLst/>
+          </a:prstGeom>
+          <a:noFill/>
+          <a:ln/>
+        </p:spPr>
+        <p:txBody>
+          <a:bodyPr wrap="square" lIns="635" tIns="635" rIns="635" bIns="635" rtlCol="0" anchor="t">
             <a:normAutofit/>
           </a:bodyPr>
           <a:lstStyle/>
           <a:p>
+            <a:r>
+              <a:rPr lang="en-US" sz="1700" dirty="0">
+                <a:solidFill>
+                  <a:srgbClr val="17364A"/>
+                </a:solidFill>
+                <a:latin typeface="Aptos" pitchFamily="34" charset="0"/>
+                <a:ea typeface="Aptos" pitchFamily="34" charset="-122"/>
+                <a:cs typeface="Aptos" pitchFamily="34" charset="-120"/>
+              </a:rPr>
+              <a:t>A health department may want synthetic eCR data to train disease investigators and test an AI case summary tool without.</a:t>
+            </a:r>
+            <a:endParaRPr lang="en-US" sz="1700" dirty="0"/>
+          </a:p>
+          <a:p>
+            <a:r>
+              <a:rPr lang="en-US" sz="1700" dirty="0">
+                <a:solidFill>
+                  <a:srgbClr val="17364A"/>
+                </a:solidFill>
+                <a:latin typeface="Aptos" pitchFamily="34" charset="0"/>
+                <a:ea typeface="Aptos" pitchFamily="34" charset="-122"/>
+                <a:cs typeface="Aptos" pitchFamily="34" charset="-120"/>
+              </a:rPr>
+              <a:t>The synthetic data should include realistic combinations of symptoms, lab results, demographics, dates, and missing fields,.</a:t>
+            </a:r>
+            <a:endParaRPr lang="en-US" sz="1700" dirty="0"/>
+          </a:p>
+          <a:p>
+            <a:r>
+              <a:rPr lang="en-US" sz="1700" dirty="0">
+                <a:solidFill>
+                  <a:srgbClr val="17364A"/>
+                </a:solidFill>
+                <a:latin typeface="Aptos" pitchFamily="34" charset="0"/>
+                <a:ea typeface="Aptos" pitchFamily="34" charset="-122"/>
+                <a:cs typeface="Aptos" pitchFamily="34" charset="-120"/>
+              </a:rPr>
+              <a:t>The agency should document that the data are intended for training and testing, not for estimating disease burden or.</a:t>
+            </a:r>
+            <a:endParaRPr lang="en-US" sz="1700" dirty="0"/>
+          </a:p>
+        </p:txBody>
+      </p:sp>
+      <p:sp>
+        <p:nvSpPr>
+          <p:cNvPr id="11" name="Shape 9"/>
+          <p:cNvSpPr/>
+          <p:nvPr/>
+        </p:nvSpPr>
+        <p:spPr>
+          <a:xfrm>
+            <a:off x="7909560" y="1417320"/>
+            <a:ext cx="3154680" cy="1828800"/>
+          </a:xfrm>
+          <a:prstGeom prst="roundRect">
+            <a:avLst>
+              <a:gd name="adj" fmla="val 6000"/>
+            </a:avLst>
+          </a:prstGeom>
+          <a:solidFill>
+            <a:srgbClr val="EEF8ED"/>
+          </a:solidFill>
+          <a:ln w="12700">
+            <a:solidFill>
+              <a:srgbClr val="B9D7E6"/>
+            </a:solidFill>
+            <a:prstDash val="solid"/>
+          </a:ln>
+        </p:spPr>
+      </p:sp>
+      <p:sp>
+        <p:nvSpPr>
+          <p:cNvPr id="12" name="Text 10"/>
+          <p:cNvSpPr/>
+          <p:nvPr/>
+        </p:nvSpPr>
+        <p:spPr>
+          <a:xfrm>
+            <a:off x="8074152" y="1563624"/>
+            <a:ext cx="2825496" cy="201168"/>
+          </a:xfrm>
+          <a:prstGeom prst="rect">
+            <a:avLst/>
+          </a:prstGeom>
+          <a:noFill/>
+          <a:ln/>
+        </p:spPr>
+        <p:txBody>
+          <a:bodyPr wrap="square" lIns="0" tIns="0" rIns="0" bIns="0" rtlCol="0" anchor="ctr"/>
+          <a:lstStyle/>
+          <a:p>
             <a:pPr indent="0" marL="0">
               <a:buNone/>
             </a:pPr>
             <a:r>
-              <a:rPr lang="en-US" sz="1420" dirty="0">
+              <a:rPr lang="en-US" sz="950" b="1" dirty="0">
+                <a:solidFill>
+                  <a:srgbClr val="0068B7"/>
+                </a:solidFill>
+                <a:latin typeface="Aptos" pitchFamily="34" charset="0"/>
+                <a:ea typeface="Aptos" pitchFamily="34" charset="-122"/>
+                <a:cs typeface="Aptos" pitchFamily="34" charset="-120"/>
+              </a:rPr>
+              <a:t>Key idea</a:t>
+            </a:r>
+            <a:endParaRPr lang="en-US" sz="950" dirty="0"/>
+          </a:p>
+        </p:txBody>
+      </p:sp>
+      <p:sp>
+        <p:nvSpPr>
+          <p:cNvPr id="13" name="Text 11"/>
+          <p:cNvSpPr/>
+          <p:nvPr/>
+        </p:nvSpPr>
+        <p:spPr>
+          <a:xfrm>
+            <a:off x="8074152" y="1856232"/>
+            <a:ext cx="2825496" cy="1261872"/>
+          </a:xfrm>
+          <a:prstGeom prst="rect">
+            <a:avLst/>
+          </a:prstGeom>
+          <a:noFill/>
+          <a:ln/>
+        </p:spPr>
+        <p:txBody>
+          <a:bodyPr wrap="square" lIns="0" tIns="0" rIns="0" bIns="0" rtlCol="0" anchor="t">
+            <a:normAutofit/>
+          </a:bodyPr>
+          <a:lstStyle/>
+          <a:p>
+            <a:pPr indent="0" marL="0">
+              <a:buNone/>
+            </a:pPr>
+            <a:r>
+              <a:rPr lang="en-US" sz="1250" dirty="0">
                 <a:solidFill>
                   <a:srgbClr val="17364A"/>
                 </a:solidFill>
@@ -2964,9 +3373,116 @@
                 <a:ea typeface="Aptos" pitchFamily="34" charset="-122"/>
                 <a:cs typeface="Aptos" pitchFamily="34" charset="-120"/>
               </a:rPr>
-              <a:t>A common failure mode is treating the topic as a technical detail rather than a public health control. When staff do not connect technical decisions to authority, workflow, equity, privacy, security, and accountability, the agency may adopt a tool that appears useful but cannot be sustained or defended. Another risk is relying on vendor claims without agency-defined evidence. Vendors may provide demonstrations, dashboards, or summary metrics that do not match the agency workflow or data environment. A guardrail is to require documentation, test results, acceptance criteria, and agency-controlled review. A third risk is failing to plan for change. Public health data, policies, systems, and emergencies change. Any technical approach must include monitoring, review, versioning, escalation, and retirement pathways so the agency can respond when assumptions no longer hold.</a:t>
-            </a:r>
-            <a:endParaRPr lang="en-US" sz="1420" dirty="0"/>
+              <a:t>A health department may want synthetic eCR data to train disease investigators and test an AI case summary tool without.</a:t>
+            </a:r>
+            <a:endParaRPr lang="en-US" sz="1250" dirty="0"/>
+          </a:p>
+        </p:txBody>
+      </p:sp>
+      <p:sp>
+        <p:nvSpPr>
+          <p:cNvPr id="14" name="Shape 12"/>
+          <p:cNvSpPr/>
+          <p:nvPr/>
+        </p:nvSpPr>
+        <p:spPr>
+          <a:xfrm>
+            <a:off x="7909560" y="3520440"/>
+            <a:ext cx="3154680" cy="1737360"/>
+          </a:xfrm>
+          <a:prstGeom prst="roundRect">
+            <a:avLst>
+              <a:gd name="adj" fmla="val 6316"/>
+            </a:avLst>
+          </a:prstGeom>
+          <a:solidFill>
+            <a:srgbClr val="EAF6F8"/>
+          </a:solidFill>
+          <a:ln w="12700">
+            <a:solidFill>
+              <a:srgbClr val="B9D7E6"/>
+            </a:solidFill>
+            <a:prstDash val="solid"/>
+          </a:ln>
+        </p:spPr>
+      </p:sp>
+      <p:sp>
+        <p:nvSpPr>
+          <p:cNvPr id="15" name="Text 13"/>
+          <p:cNvSpPr/>
+          <p:nvPr/>
+        </p:nvSpPr>
+        <p:spPr>
+          <a:xfrm>
+            <a:off x="8074152" y="3666744"/>
+            <a:ext cx="2825496" cy="201168"/>
+          </a:xfrm>
+          <a:prstGeom prst="rect">
+            <a:avLst/>
+          </a:prstGeom>
+          <a:noFill/>
+          <a:ln/>
+        </p:spPr>
+        <p:txBody>
+          <a:bodyPr wrap="square" lIns="0" tIns="0" rIns="0" bIns="0" rtlCol="0" anchor="ctr"/>
+          <a:lstStyle/>
+          <a:p>
+            <a:pPr indent="0" marL="0">
+              <a:buNone/>
+            </a:pPr>
+            <a:r>
+              <a:rPr lang="en-US" sz="950" b="1" dirty="0">
+                <a:solidFill>
+                  <a:srgbClr val="0068B7"/>
+                </a:solidFill>
+                <a:latin typeface="Aptos" pitchFamily="34" charset="0"/>
+                <a:ea typeface="Aptos" pitchFamily="34" charset="-122"/>
+                <a:cs typeface="Aptos" pitchFamily="34" charset="-120"/>
+              </a:rPr>
+              <a:t>Use this for</a:t>
+            </a:r>
+            <a:endParaRPr lang="en-US" sz="950" dirty="0"/>
+          </a:p>
+        </p:txBody>
+      </p:sp>
+      <p:sp>
+        <p:nvSpPr>
+          <p:cNvPr id="16" name="Text 14"/>
+          <p:cNvSpPr/>
+          <p:nvPr/>
+        </p:nvSpPr>
+        <p:spPr>
+          <a:xfrm>
+            <a:off x="8074152" y="3959352"/>
+            <a:ext cx="2825496" cy="1170432"/>
+          </a:xfrm>
+          <a:prstGeom prst="rect">
+            <a:avLst/>
+          </a:prstGeom>
+          <a:noFill/>
+          <a:ln/>
+        </p:spPr>
+        <p:txBody>
+          <a:bodyPr wrap="square" lIns="0" tIns="0" rIns="0" bIns="0" rtlCol="0" anchor="t">
+            <a:normAutofit/>
+          </a:bodyPr>
+          <a:lstStyle/>
+          <a:p>
+            <a:pPr indent="0" marL="0">
+              <a:buNone/>
+            </a:pPr>
+            <a:r>
+              <a:rPr lang="en-US" sz="1250" dirty="0">
+                <a:solidFill>
+                  <a:srgbClr val="17364A"/>
+                </a:solidFill>
+                <a:latin typeface="Aptos" pitchFamily="34" charset="0"/>
+                <a:ea typeface="Aptos" pitchFamily="34" charset="-122"/>
+                <a:cs typeface="Aptos" pitchFamily="34" charset="-120"/>
+              </a:rPr>
+              <a:t>Connect the concept to public health decisions, safeguards, documentation, or implementation work.</a:t>
+            </a:r>
+            <a:endParaRPr lang="en-US" sz="1250" dirty="0"/>
           </a:p>
         </p:txBody>
       </p:sp>
@@ -3029,7 +3545,32 @@
       </p:sp>
       <p:sp>
         <p:nvSpPr>
-          <p:cNvPr id="3" name="Text 1"/>
+          <p:cNvPr id="3" name="Shape 1"/>
+          <p:cNvSpPr/>
+          <p:nvPr/>
+        </p:nvSpPr>
+        <p:spPr>
+          <a:xfrm>
+            <a:off x="0" y="164592"/>
+            <a:ext cx="146304" cy="6693408"/>
+          </a:xfrm>
+          <a:prstGeom prst="rect">
+            <a:avLst/>
+          </a:prstGeom>
+          <a:solidFill>
+            <a:srgbClr val="2F8A28"/>
+          </a:solidFill>
+          <a:ln w="12700">
+            <a:solidFill>
+              <a:srgbClr val="2F8A28"/>
+            </a:solidFill>
+            <a:prstDash val="solid"/>
+          </a:ln>
+        </p:spPr>
+      </p:sp>
+      <p:sp>
+        <p:nvSpPr>
+          <p:cNvPr id="4" name="Text 2"/>
           <p:cNvSpPr/>
           <p:nvPr/>
         </p:nvSpPr>
@@ -3068,7 +3609,7 @@
       </p:sp>
       <p:sp>
         <p:nvSpPr>
-          <p:cNvPr id="4" name="Text 2"/>
+          <p:cNvPr id="5" name="Text 3"/>
           <p:cNvSpPr/>
           <p:nvPr/>
         </p:nvSpPr>
@@ -3107,7 +3648,7 @@
       </p:sp>
       <p:sp>
         <p:nvSpPr>
-          <p:cNvPr id="5" name="Text 3"/>
+          <p:cNvPr id="6" name="Text 4"/>
           <p:cNvSpPr/>
           <p:nvPr/>
         </p:nvSpPr>
@@ -3146,13 +3687,77 @@
       </p:sp>
       <p:sp>
         <p:nvSpPr>
-          <p:cNvPr id="6" name="Text 4"/>
+          <p:cNvPr id="7" name="Shape 5"/>
           <p:cNvSpPr/>
           <p:nvPr/>
         </p:nvSpPr>
         <p:spPr>
           <a:xfrm>
             <a:off x="640080" y="658368"/>
+            <a:ext cx="420624" cy="420624"/>
+          </a:xfrm>
+          <a:prstGeom prst="ellipse">
+            <a:avLst/>
+          </a:prstGeom>
+          <a:solidFill>
+            <a:srgbClr val="0068B7"/>
+          </a:solidFill>
+          <a:ln w="12700">
+            <a:solidFill>
+              <a:srgbClr val="0068B7"/>
+            </a:solidFill>
+            <a:prstDash val="solid"/>
+          </a:ln>
+        </p:spPr>
+      </p:sp>
+      <p:sp>
+        <p:nvSpPr>
+          <p:cNvPr id="8" name="Text 6"/>
+          <p:cNvSpPr/>
+          <p:nvPr/>
+        </p:nvSpPr>
+        <p:spPr>
+          <a:xfrm>
+            <a:off x="640080" y="731520"/>
+            <a:ext cx="420624" cy="164592"/>
+          </a:xfrm>
+          <a:prstGeom prst="rect">
+            <a:avLst/>
+          </a:prstGeom>
+          <a:noFill/>
+          <a:ln/>
+        </p:spPr>
+        <p:txBody>
+          <a:bodyPr wrap="square" lIns="0" tIns="0" rIns="0" bIns="0" rtlCol="0" anchor="ctr"/>
+          <a:lstStyle/>
+          <a:p>
+            <a:pPr algn="ctr" indent="0" marL="0">
+              <a:buNone/>
+            </a:pPr>
+            <a:r>
+              <a:rPr lang="en-US" sz="1100" b="1" dirty="0">
+                <a:solidFill>
+                  <a:srgbClr val="FFFFFF"/>
+                </a:solidFill>
+                <a:latin typeface="Aptos" pitchFamily="34" charset="0"/>
+                <a:ea typeface="Aptos" pitchFamily="34" charset="-122"/>
+                <a:cs typeface="Aptos" pitchFamily="34" charset="-120"/>
+              </a:rPr>
+              <a:t>6</a:t>
+            </a:r>
+            <a:endParaRPr lang="en-US" sz="1100" dirty="0"/>
+          </a:p>
+        </p:txBody>
+      </p:sp>
+      <p:sp>
+        <p:nvSpPr>
+          <p:cNvPr id="9" name="Text 7"/>
+          <p:cNvSpPr/>
+          <p:nvPr/>
+        </p:nvSpPr>
+        <p:spPr>
+          <a:xfrm>
+            <a:off x="640080" y="621792"/>
             <a:ext cx="10881360" cy="566928"/>
           </a:xfrm>
           <a:prstGeom prst="rect">
@@ -3179,7 +3784,7 @@
                 <a:ea typeface="Aptos Display" pitchFamily="34" charset="-122"/>
                 <a:cs typeface="Aptos Display" pitchFamily="34" charset="-120"/>
               </a:rPr>
-              <a:t>Application to AI-Supported Workflows</a:t>
+              <a:t>Technical Deep Dive</a:t>
             </a:r>
             <a:endParaRPr lang="en-US" sz="2700" dirty="0"/>
           </a:p>
@@ -3187,32 +3792,178 @@
       </p:sp>
       <p:sp>
         <p:nvSpPr>
-          <p:cNvPr id="7" name="Text 5"/>
-          <p:cNvSpPr/>
-          <p:nvPr/>
-        </p:nvSpPr>
-        <p:spPr>
-          <a:xfrm>
-            <a:off x="822960" y="1325880"/>
-            <a:ext cx="10378440" cy="4800600"/>
-          </a:xfrm>
-          <a:prstGeom prst="rect">
-            <a:avLst/>
-          </a:prstGeom>
-          <a:noFill/>
-          <a:ln/>
-        </p:spPr>
-        <p:txBody>
-          <a:bodyPr wrap="square" lIns="1016" tIns="1016" rIns="1016" bIns="1016" rtlCol="0" anchor="t">
+          <p:cNvPr id="10" name="Text 8"/>
+          <p:cNvSpPr/>
+          <p:nvPr/>
+        </p:nvSpPr>
+        <p:spPr>
+          <a:xfrm>
+            <a:off x="868680" y="1417320"/>
+            <a:ext cx="6675120" cy="4434840"/>
+          </a:xfrm>
+          <a:prstGeom prst="rect">
+            <a:avLst/>
+          </a:prstGeom>
+          <a:noFill/>
+          <a:ln/>
+        </p:spPr>
+        <p:txBody>
+          <a:bodyPr wrap="square" lIns="635" tIns="635" rIns="635" bIns="635" rtlCol="0" anchor="t">
             <a:normAutofit/>
           </a:bodyPr>
           <a:lstStyle/>
           <a:p>
+            <a:r>
+              <a:rPr lang="en-US" sz="1700" dirty="0">
+                <a:solidFill>
+                  <a:srgbClr val="17364A"/>
+                </a:solidFill>
+                <a:latin typeface="Aptos" pitchFamily="34" charset="0"/>
+                <a:ea typeface="Aptos" pitchFamily="34" charset="-122"/>
+                <a:cs typeface="Aptos" pitchFamily="34" charset="-120"/>
+              </a:rPr>
+              <a:t>Synthetic data development begins by defining the intended use.</a:t>
+            </a:r>
+            <a:endParaRPr lang="en-US" sz="1700" dirty="0"/>
+          </a:p>
+          <a:p>
+            <a:r>
+              <a:rPr lang="en-US" sz="1700" dirty="0">
+                <a:solidFill>
+                  <a:srgbClr val="17364A"/>
+                </a:solidFill>
+                <a:latin typeface="Aptos" pitchFamily="34" charset="0"/>
+                <a:ea typeface="Aptos" pitchFamily="34" charset="-122"/>
+                <a:cs typeface="Aptos" pitchFamily="34" charset="-120"/>
+              </a:rPr>
+              <a:t>Training data for staff exercises can be less statistically faithful than data used for system testing.</a:t>
+            </a:r>
+            <a:endParaRPr lang="en-US" sz="1700" dirty="0"/>
+          </a:p>
+          <a:p>
+            <a:r>
+              <a:rPr lang="en-US" sz="1700" dirty="0">
+                <a:solidFill>
+                  <a:srgbClr val="17364A"/>
+                </a:solidFill>
+                <a:latin typeface="Aptos" pitchFamily="34" charset="0"/>
+                <a:ea typeface="Aptos" pitchFamily="34" charset="-122"/>
+                <a:cs typeface="Aptos" pitchFamily="34" charset="-120"/>
+              </a:rPr>
+              <a:t>Model evaluation data require more rigorous review because the synthetic data must preserve patterns relevant to the model.</a:t>
+            </a:r>
+            <a:endParaRPr lang="en-US" sz="1700" dirty="0"/>
+          </a:p>
+          <a:p>
+            <a:r>
+              <a:rPr lang="en-US" sz="1700" dirty="0">
+                <a:solidFill>
+                  <a:srgbClr val="17364A"/>
+                </a:solidFill>
+                <a:latin typeface="Aptos" pitchFamily="34" charset="0"/>
+                <a:ea typeface="Aptos" pitchFamily="34" charset="-122"/>
+                <a:cs typeface="Aptos" pitchFamily="34" charset="-120"/>
+              </a:rPr>
+              <a:t>Public health teams should define whether synthetic data will be used for demonstration, software testing, integration.</a:t>
+            </a:r>
+            <a:endParaRPr lang="en-US" sz="1700" dirty="0"/>
+          </a:p>
+        </p:txBody>
+      </p:sp>
+      <p:sp>
+        <p:nvSpPr>
+          <p:cNvPr id="11" name="Shape 9"/>
+          <p:cNvSpPr/>
+          <p:nvPr/>
+        </p:nvSpPr>
+        <p:spPr>
+          <a:xfrm>
+            <a:off x="7909560" y="1417320"/>
+            <a:ext cx="3154680" cy="1828800"/>
+          </a:xfrm>
+          <a:prstGeom prst="roundRect">
+            <a:avLst>
+              <a:gd name="adj" fmla="val 6000"/>
+            </a:avLst>
+          </a:prstGeom>
+          <a:solidFill>
+            <a:srgbClr val="EEF8ED"/>
+          </a:solidFill>
+          <a:ln w="12700">
+            <a:solidFill>
+              <a:srgbClr val="B9D7E6"/>
+            </a:solidFill>
+            <a:prstDash val="solid"/>
+          </a:ln>
+        </p:spPr>
+      </p:sp>
+      <p:sp>
+        <p:nvSpPr>
+          <p:cNvPr id="12" name="Text 10"/>
+          <p:cNvSpPr/>
+          <p:nvPr/>
+        </p:nvSpPr>
+        <p:spPr>
+          <a:xfrm>
+            <a:off x="8074152" y="1563624"/>
+            <a:ext cx="2825496" cy="201168"/>
+          </a:xfrm>
+          <a:prstGeom prst="rect">
+            <a:avLst/>
+          </a:prstGeom>
+          <a:noFill/>
+          <a:ln/>
+        </p:spPr>
+        <p:txBody>
+          <a:bodyPr wrap="square" lIns="0" tIns="0" rIns="0" bIns="0" rtlCol="0" anchor="ctr"/>
+          <a:lstStyle/>
+          <a:p>
             <a:pPr indent="0" marL="0">
               <a:buNone/>
             </a:pPr>
             <a:r>
-              <a:rPr lang="en-US" sz="1420" dirty="0">
+              <a:rPr lang="en-US" sz="950" b="1" dirty="0">
+                <a:solidFill>
+                  <a:srgbClr val="0068B7"/>
+                </a:solidFill>
+                <a:latin typeface="Aptos" pitchFamily="34" charset="0"/>
+                <a:ea typeface="Aptos" pitchFamily="34" charset="-122"/>
+                <a:cs typeface="Aptos" pitchFamily="34" charset="-120"/>
+              </a:rPr>
+              <a:t>Key idea</a:t>
+            </a:r>
+            <a:endParaRPr lang="en-US" sz="950" dirty="0"/>
+          </a:p>
+        </p:txBody>
+      </p:sp>
+      <p:sp>
+        <p:nvSpPr>
+          <p:cNvPr id="13" name="Text 11"/>
+          <p:cNvSpPr/>
+          <p:nvPr/>
+        </p:nvSpPr>
+        <p:spPr>
+          <a:xfrm>
+            <a:off x="8074152" y="1856232"/>
+            <a:ext cx="2825496" cy="1261872"/>
+          </a:xfrm>
+          <a:prstGeom prst="rect">
+            <a:avLst/>
+          </a:prstGeom>
+          <a:noFill/>
+          <a:ln/>
+        </p:spPr>
+        <p:txBody>
+          <a:bodyPr wrap="square" lIns="0" tIns="0" rIns="0" bIns="0" rtlCol="0" anchor="t">
+            <a:normAutofit/>
+          </a:bodyPr>
+          <a:lstStyle/>
+          <a:p>
+            <a:pPr indent="0" marL="0">
+              <a:buNone/>
+            </a:pPr>
+            <a:r>
+              <a:rPr lang="en-US" sz="1250" dirty="0">
                 <a:solidFill>
                   <a:srgbClr val="17364A"/>
                 </a:solidFill>
@@ -3220,9 +3971,116 @@
                 <a:ea typeface="Aptos" pitchFamily="34" charset="-122"/>
                 <a:cs typeface="Aptos" pitchFamily="34" charset="-120"/>
               </a:rPr>
-              <a:t>Generative AI, predictive analytics, RAG, automation, and agentic workflows all depend on the controls described in this module. The controls should be scaled to the risk of the use case. A tool that drafts internal training text may require lighter review than a tool that updates case records, prioritizes outreach, or supports public communication during an emergency. The module should be applied during readiness assessment, procurement, implementation planning, pilot testing, and post-deployment monitoring. Learners should document how the topic affects data, systems, users, safeguards, and decision-making for the selected workflow.</a:t>
-            </a:r>
-            <a:endParaRPr lang="en-US" sz="1420" dirty="0"/>
+              <a:t>Synthetic data development begins by defining the intended use.</a:t>
+            </a:r>
+            <a:endParaRPr lang="en-US" sz="1250" dirty="0"/>
+          </a:p>
+        </p:txBody>
+      </p:sp>
+      <p:sp>
+        <p:nvSpPr>
+          <p:cNvPr id="14" name="Shape 12"/>
+          <p:cNvSpPr/>
+          <p:nvPr/>
+        </p:nvSpPr>
+        <p:spPr>
+          <a:xfrm>
+            <a:off x="7909560" y="3520440"/>
+            <a:ext cx="3154680" cy="1737360"/>
+          </a:xfrm>
+          <a:prstGeom prst="roundRect">
+            <a:avLst>
+              <a:gd name="adj" fmla="val 6316"/>
+            </a:avLst>
+          </a:prstGeom>
+          <a:solidFill>
+            <a:srgbClr val="EAF6F8"/>
+          </a:solidFill>
+          <a:ln w="12700">
+            <a:solidFill>
+              <a:srgbClr val="B9D7E6"/>
+            </a:solidFill>
+            <a:prstDash val="solid"/>
+          </a:ln>
+        </p:spPr>
+      </p:sp>
+      <p:sp>
+        <p:nvSpPr>
+          <p:cNvPr id="15" name="Text 13"/>
+          <p:cNvSpPr/>
+          <p:nvPr/>
+        </p:nvSpPr>
+        <p:spPr>
+          <a:xfrm>
+            <a:off x="8074152" y="3666744"/>
+            <a:ext cx="2825496" cy="201168"/>
+          </a:xfrm>
+          <a:prstGeom prst="rect">
+            <a:avLst/>
+          </a:prstGeom>
+          <a:noFill/>
+          <a:ln/>
+        </p:spPr>
+        <p:txBody>
+          <a:bodyPr wrap="square" lIns="0" tIns="0" rIns="0" bIns="0" rtlCol="0" anchor="ctr"/>
+          <a:lstStyle/>
+          <a:p>
+            <a:pPr indent="0" marL="0">
+              <a:buNone/>
+            </a:pPr>
+            <a:r>
+              <a:rPr lang="en-US" sz="950" b="1" dirty="0">
+                <a:solidFill>
+                  <a:srgbClr val="0068B7"/>
+                </a:solidFill>
+                <a:latin typeface="Aptos" pitchFamily="34" charset="0"/>
+                <a:ea typeface="Aptos" pitchFamily="34" charset="-122"/>
+                <a:cs typeface="Aptos" pitchFamily="34" charset="-120"/>
+              </a:rPr>
+              <a:t>Use this for</a:t>
+            </a:r>
+            <a:endParaRPr lang="en-US" sz="950" dirty="0"/>
+          </a:p>
+        </p:txBody>
+      </p:sp>
+      <p:sp>
+        <p:nvSpPr>
+          <p:cNvPr id="16" name="Text 14"/>
+          <p:cNvSpPr/>
+          <p:nvPr/>
+        </p:nvSpPr>
+        <p:spPr>
+          <a:xfrm>
+            <a:off x="8074152" y="3959352"/>
+            <a:ext cx="2825496" cy="1170432"/>
+          </a:xfrm>
+          <a:prstGeom prst="rect">
+            <a:avLst/>
+          </a:prstGeom>
+          <a:noFill/>
+          <a:ln/>
+        </p:spPr>
+        <p:txBody>
+          <a:bodyPr wrap="square" lIns="0" tIns="0" rIns="0" bIns="0" rtlCol="0" anchor="t">
+            <a:normAutofit/>
+          </a:bodyPr>
+          <a:lstStyle/>
+          <a:p>
+            <a:pPr indent="0" marL="0">
+              <a:buNone/>
+            </a:pPr>
+            <a:r>
+              <a:rPr lang="en-US" sz="1250" dirty="0">
+                <a:solidFill>
+                  <a:srgbClr val="17364A"/>
+                </a:solidFill>
+                <a:latin typeface="Aptos" pitchFamily="34" charset="0"/>
+                <a:ea typeface="Aptos" pitchFamily="34" charset="-122"/>
+                <a:cs typeface="Aptos" pitchFamily="34" charset="-120"/>
+              </a:rPr>
+              <a:t>Connect the concept to public health decisions, safeguards, documentation, or implementation work.</a:t>
+            </a:r>
+            <a:endParaRPr lang="en-US" sz="1250" dirty="0"/>
           </a:p>
         </p:txBody>
       </p:sp>
@@ -3285,7 +4143,32 @@
       </p:sp>
       <p:sp>
         <p:nvSpPr>
-          <p:cNvPr id="3" name="Text 1"/>
+          <p:cNvPr id="3" name="Shape 1"/>
+          <p:cNvSpPr/>
+          <p:nvPr/>
+        </p:nvSpPr>
+        <p:spPr>
+          <a:xfrm>
+            <a:off x="0" y="164592"/>
+            <a:ext cx="146304" cy="6693408"/>
+          </a:xfrm>
+          <a:prstGeom prst="rect">
+            <a:avLst/>
+          </a:prstGeom>
+          <a:solidFill>
+            <a:srgbClr val="2F8A28"/>
+          </a:solidFill>
+          <a:ln w="12700">
+            <a:solidFill>
+              <a:srgbClr val="2F8A28"/>
+            </a:solidFill>
+            <a:prstDash val="solid"/>
+          </a:ln>
+        </p:spPr>
+      </p:sp>
+      <p:sp>
+        <p:nvSpPr>
+          <p:cNvPr id="4" name="Text 2"/>
           <p:cNvSpPr/>
           <p:nvPr/>
         </p:nvSpPr>
@@ -3324,7 +4207,7 @@
       </p:sp>
       <p:sp>
         <p:nvSpPr>
-          <p:cNvPr id="4" name="Text 2"/>
+          <p:cNvPr id="5" name="Text 3"/>
           <p:cNvSpPr/>
           <p:nvPr/>
         </p:nvSpPr>
@@ -3363,7 +4246,7 @@
       </p:sp>
       <p:sp>
         <p:nvSpPr>
-          <p:cNvPr id="5" name="Text 3"/>
+          <p:cNvPr id="6" name="Text 4"/>
           <p:cNvSpPr/>
           <p:nvPr/>
         </p:nvSpPr>
@@ -3402,13 +4285,77 @@
       </p:sp>
       <p:sp>
         <p:nvSpPr>
-          <p:cNvPr id="6" name="Text 4"/>
+          <p:cNvPr id="7" name="Shape 5"/>
           <p:cNvSpPr/>
           <p:nvPr/>
         </p:nvSpPr>
         <p:spPr>
           <a:xfrm>
             <a:off x="640080" y="658368"/>
+            <a:ext cx="420624" cy="420624"/>
+          </a:xfrm>
+          <a:prstGeom prst="ellipse">
+            <a:avLst/>
+          </a:prstGeom>
+          <a:solidFill>
+            <a:srgbClr val="0068B7"/>
+          </a:solidFill>
+          <a:ln w="12700">
+            <a:solidFill>
+              <a:srgbClr val="0068B7"/>
+            </a:solidFill>
+            <a:prstDash val="solid"/>
+          </a:ln>
+        </p:spPr>
+      </p:sp>
+      <p:sp>
+        <p:nvSpPr>
+          <p:cNvPr id="8" name="Text 6"/>
+          <p:cNvSpPr/>
+          <p:nvPr/>
+        </p:nvSpPr>
+        <p:spPr>
+          <a:xfrm>
+            <a:off x="640080" y="731520"/>
+            <a:ext cx="420624" cy="164592"/>
+          </a:xfrm>
+          <a:prstGeom prst="rect">
+            <a:avLst/>
+          </a:prstGeom>
+          <a:noFill/>
+          <a:ln/>
+        </p:spPr>
+        <p:txBody>
+          <a:bodyPr wrap="square" lIns="0" tIns="0" rIns="0" bIns="0" rtlCol="0" anchor="ctr"/>
+          <a:lstStyle/>
+          <a:p>
+            <a:pPr algn="ctr" indent="0" marL="0">
+              <a:buNone/>
+            </a:pPr>
+            <a:r>
+              <a:rPr lang="en-US" sz="1100" b="1" dirty="0">
+                <a:solidFill>
+                  <a:srgbClr val="FFFFFF"/>
+                </a:solidFill>
+                <a:latin typeface="Aptos" pitchFamily="34" charset="0"/>
+                <a:ea typeface="Aptos" pitchFamily="34" charset="-122"/>
+                <a:cs typeface="Aptos" pitchFamily="34" charset="-120"/>
+              </a:rPr>
+              <a:t>7</a:t>
+            </a:r>
+            <a:endParaRPr lang="en-US" sz="1100" dirty="0"/>
+          </a:p>
+        </p:txBody>
+      </p:sp>
+      <p:sp>
+        <p:nvSpPr>
+          <p:cNvPr id="9" name="Text 7"/>
+          <p:cNvSpPr/>
+          <p:nvPr/>
+        </p:nvSpPr>
+        <p:spPr>
+          <a:xfrm>
+            <a:off x="640080" y="621792"/>
             <a:ext cx="10881360" cy="566928"/>
           </a:xfrm>
           <a:prstGeom prst="rect">
@@ -3435,7 +4382,7 @@
                 <a:ea typeface="Aptos Display" pitchFamily="34" charset="-122"/>
                 <a:cs typeface="Aptos Display" pitchFamily="34" charset="-120"/>
               </a:rPr>
-              <a:t>Reflection Questions</a:t>
+              <a:t>Risks, Failure Modes, and Guardrails</a:t>
             </a:r>
             <a:endParaRPr lang="en-US" sz="2700" dirty="0"/>
           </a:p>
@@ -3443,32 +4390,178 @@
       </p:sp>
       <p:sp>
         <p:nvSpPr>
-          <p:cNvPr id="7" name="Text 5"/>
-          <p:cNvSpPr/>
-          <p:nvPr/>
-        </p:nvSpPr>
-        <p:spPr>
-          <a:xfrm>
-            <a:off x="822960" y="1325880"/>
-            <a:ext cx="10378440" cy="4800600"/>
-          </a:xfrm>
-          <a:prstGeom prst="rect">
-            <a:avLst/>
-          </a:prstGeom>
-          <a:noFill/>
-          <a:ln/>
-        </p:spPr>
-        <p:txBody>
-          <a:bodyPr wrap="square" lIns="1016" tIns="1016" rIns="1016" bIns="1016" rtlCol="0" anchor="t">
+          <p:cNvPr id="10" name="Text 8"/>
+          <p:cNvSpPr/>
+          <p:nvPr/>
+        </p:nvSpPr>
+        <p:spPr>
+          <a:xfrm>
+            <a:off x="868680" y="1417320"/>
+            <a:ext cx="6675120" cy="4434840"/>
+          </a:xfrm>
+          <a:prstGeom prst="rect">
+            <a:avLst/>
+          </a:prstGeom>
+          <a:noFill/>
+          <a:ln/>
+        </p:spPr>
+        <p:txBody>
+          <a:bodyPr wrap="square" lIns="635" tIns="635" rIns="635" bIns="635" rtlCol="0" anchor="t">
             <a:normAutofit/>
           </a:bodyPr>
           <a:lstStyle/>
           <a:p>
+            <a:r>
+              <a:rPr lang="en-US" sz="1700" dirty="0">
+                <a:solidFill>
+                  <a:srgbClr val="17364A"/>
+                </a:solidFill>
+                <a:latin typeface="Aptos" pitchFamily="34" charset="0"/>
+                <a:ea typeface="Aptos" pitchFamily="34" charset="-122"/>
+                <a:cs typeface="Aptos" pitchFamily="34" charset="-120"/>
+              </a:rPr>
+              <a:t>A common failure mode is treating the topic as a technical detail rather than a public health control.</a:t>
+            </a:r>
+            <a:endParaRPr lang="en-US" sz="1700" dirty="0"/>
+          </a:p>
+          <a:p>
+            <a:r>
+              <a:rPr lang="en-US" sz="1700" dirty="0">
+                <a:solidFill>
+                  <a:srgbClr val="17364A"/>
+                </a:solidFill>
+                <a:latin typeface="Aptos" pitchFamily="34" charset="0"/>
+                <a:ea typeface="Aptos" pitchFamily="34" charset="-122"/>
+                <a:cs typeface="Aptos" pitchFamily="34" charset="-120"/>
+              </a:rPr>
+              <a:t>When staff do not connect technical decisions to authority, workflow, equity, privacy, security, and accountability, the.</a:t>
+            </a:r>
+            <a:endParaRPr lang="en-US" sz="1700" dirty="0"/>
+          </a:p>
+          <a:p>
+            <a:r>
+              <a:rPr lang="en-US" sz="1700" dirty="0">
+                <a:solidFill>
+                  <a:srgbClr val="17364A"/>
+                </a:solidFill>
+                <a:latin typeface="Aptos" pitchFamily="34" charset="0"/>
+                <a:ea typeface="Aptos" pitchFamily="34" charset="-122"/>
+                <a:cs typeface="Aptos" pitchFamily="34" charset="-120"/>
+              </a:rPr>
+              <a:t>Another risk is relying on vendor claims without agency-defined evidence.</a:t>
+            </a:r>
+            <a:endParaRPr lang="en-US" sz="1700" dirty="0"/>
+          </a:p>
+          <a:p>
+            <a:r>
+              <a:rPr lang="en-US" sz="1700" dirty="0">
+                <a:solidFill>
+                  <a:srgbClr val="17364A"/>
+                </a:solidFill>
+                <a:latin typeface="Aptos" pitchFamily="34" charset="0"/>
+                <a:ea typeface="Aptos" pitchFamily="34" charset="-122"/>
+                <a:cs typeface="Aptos" pitchFamily="34" charset="-120"/>
+              </a:rPr>
+              <a:t>Vendors may provide demonstrations, dashboards, or summary metrics that do not match the agency workflow or data environment.</a:t>
+            </a:r>
+            <a:endParaRPr lang="en-US" sz="1700" dirty="0"/>
+          </a:p>
+        </p:txBody>
+      </p:sp>
+      <p:sp>
+        <p:nvSpPr>
+          <p:cNvPr id="11" name="Shape 9"/>
+          <p:cNvSpPr/>
+          <p:nvPr/>
+        </p:nvSpPr>
+        <p:spPr>
+          <a:xfrm>
+            <a:off x="7909560" y="1417320"/>
+            <a:ext cx="3154680" cy="1828800"/>
+          </a:xfrm>
+          <a:prstGeom prst="roundRect">
+            <a:avLst>
+              <a:gd name="adj" fmla="val 6000"/>
+            </a:avLst>
+          </a:prstGeom>
+          <a:solidFill>
+            <a:srgbClr val="EEF8ED"/>
+          </a:solidFill>
+          <a:ln w="12700">
+            <a:solidFill>
+              <a:srgbClr val="B9D7E6"/>
+            </a:solidFill>
+            <a:prstDash val="solid"/>
+          </a:ln>
+        </p:spPr>
+      </p:sp>
+      <p:sp>
+        <p:nvSpPr>
+          <p:cNvPr id="12" name="Text 10"/>
+          <p:cNvSpPr/>
+          <p:nvPr/>
+        </p:nvSpPr>
+        <p:spPr>
+          <a:xfrm>
+            <a:off x="8074152" y="1563624"/>
+            <a:ext cx="2825496" cy="201168"/>
+          </a:xfrm>
+          <a:prstGeom prst="rect">
+            <a:avLst/>
+          </a:prstGeom>
+          <a:noFill/>
+          <a:ln/>
+        </p:spPr>
+        <p:txBody>
+          <a:bodyPr wrap="square" lIns="0" tIns="0" rIns="0" bIns="0" rtlCol="0" anchor="ctr"/>
+          <a:lstStyle/>
+          <a:p>
             <a:pPr indent="0" marL="0">
               <a:buNone/>
             </a:pPr>
             <a:r>
-              <a:rPr lang="en-US" sz="1420" dirty="0">
+              <a:rPr lang="en-US" sz="950" b="1" dirty="0">
+                <a:solidFill>
+                  <a:srgbClr val="0068B7"/>
+                </a:solidFill>
+                <a:latin typeface="Aptos" pitchFamily="34" charset="0"/>
+                <a:ea typeface="Aptos" pitchFamily="34" charset="-122"/>
+                <a:cs typeface="Aptos" pitchFamily="34" charset="-120"/>
+              </a:rPr>
+              <a:t>Key idea</a:t>
+            </a:r>
+            <a:endParaRPr lang="en-US" sz="950" dirty="0"/>
+          </a:p>
+        </p:txBody>
+      </p:sp>
+      <p:sp>
+        <p:nvSpPr>
+          <p:cNvPr id="13" name="Text 11"/>
+          <p:cNvSpPr/>
+          <p:nvPr/>
+        </p:nvSpPr>
+        <p:spPr>
+          <a:xfrm>
+            <a:off x="8074152" y="1856232"/>
+            <a:ext cx="2825496" cy="1261872"/>
+          </a:xfrm>
+          <a:prstGeom prst="rect">
+            <a:avLst/>
+          </a:prstGeom>
+          <a:noFill/>
+          <a:ln/>
+        </p:spPr>
+        <p:txBody>
+          <a:bodyPr wrap="square" lIns="0" tIns="0" rIns="0" bIns="0" rtlCol="0" anchor="t">
+            <a:normAutofit/>
+          </a:bodyPr>
+          <a:lstStyle/>
+          <a:p>
+            <a:pPr indent="0" marL="0">
+              <a:buNone/>
+            </a:pPr>
+            <a:r>
+              <a:rPr lang="en-US" sz="1250" dirty="0">
                 <a:solidFill>
                   <a:srgbClr val="17364A"/>
                 </a:solidFill>
@@ -3476,9 +4569,116 @@
                 <a:ea typeface="Aptos" pitchFamily="34" charset="-122"/>
                 <a:cs typeface="Aptos" pitchFamily="34" charset="-120"/>
               </a:rPr>
-              <a:t>Where does this topic appear in one current or proposed AI workflow in your agency? What decisions, data sources, users, or partners would be affected if this area is poorly designed? What evidence would governance reviewers need before approving the workflow?</a:t>
-            </a:r>
-            <a:endParaRPr lang="en-US" sz="1420" dirty="0"/>
+              <a:t>A common failure mode is treating the topic as a technical detail rather than a public health control.</a:t>
+            </a:r>
+            <a:endParaRPr lang="en-US" sz="1250" dirty="0"/>
+          </a:p>
+        </p:txBody>
+      </p:sp>
+      <p:sp>
+        <p:nvSpPr>
+          <p:cNvPr id="14" name="Shape 12"/>
+          <p:cNvSpPr/>
+          <p:nvPr/>
+        </p:nvSpPr>
+        <p:spPr>
+          <a:xfrm>
+            <a:off x="7909560" y="3520440"/>
+            <a:ext cx="3154680" cy="1737360"/>
+          </a:xfrm>
+          <a:prstGeom prst="roundRect">
+            <a:avLst>
+              <a:gd name="adj" fmla="val 6316"/>
+            </a:avLst>
+          </a:prstGeom>
+          <a:solidFill>
+            <a:srgbClr val="EAF6F8"/>
+          </a:solidFill>
+          <a:ln w="12700">
+            <a:solidFill>
+              <a:srgbClr val="B9D7E6"/>
+            </a:solidFill>
+            <a:prstDash val="solid"/>
+          </a:ln>
+        </p:spPr>
+      </p:sp>
+      <p:sp>
+        <p:nvSpPr>
+          <p:cNvPr id="15" name="Text 13"/>
+          <p:cNvSpPr/>
+          <p:nvPr/>
+        </p:nvSpPr>
+        <p:spPr>
+          <a:xfrm>
+            <a:off x="8074152" y="3666744"/>
+            <a:ext cx="2825496" cy="201168"/>
+          </a:xfrm>
+          <a:prstGeom prst="rect">
+            <a:avLst/>
+          </a:prstGeom>
+          <a:noFill/>
+          <a:ln/>
+        </p:spPr>
+        <p:txBody>
+          <a:bodyPr wrap="square" lIns="0" tIns="0" rIns="0" bIns="0" rtlCol="0" anchor="ctr"/>
+          <a:lstStyle/>
+          <a:p>
+            <a:pPr indent="0" marL="0">
+              <a:buNone/>
+            </a:pPr>
+            <a:r>
+              <a:rPr lang="en-US" sz="950" b="1" dirty="0">
+                <a:solidFill>
+                  <a:srgbClr val="0068B7"/>
+                </a:solidFill>
+                <a:latin typeface="Aptos" pitchFamily="34" charset="0"/>
+                <a:ea typeface="Aptos" pitchFamily="34" charset="-122"/>
+                <a:cs typeface="Aptos" pitchFamily="34" charset="-120"/>
+              </a:rPr>
+              <a:t>Use this for</a:t>
+            </a:r>
+            <a:endParaRPr lang="en-US" sz="950" dirty="0"/>
+          </a:p>
+        </p:txBody>
+      </p:sp>
+      <p:sp>
+        <p:nvSpPr>
+          <p:cNvPr id="16" name="Text 14"/>
+          <p:cNvSpPr/>
+          <p:nvPr/>
+        </p:nvSpPr>
+        <p:spPr>
+          <a:xfrm>
+            <a:off x="8074152" y="3959352"/>
+            <a:ext cx="2825496" cy="1170432"/>
+          </a:xfrm>
+          <a:prstGeom prst="rect">
+            <a:avLst/>
+          </a:prstGeom>
+          <a:noFill/>
+          <a:ln/>
+        </p:spPr>
+        <p:txBody>
+          <a:bodyPr wrap="square" lIns="0" tIns="0" rIns="0" bIns="0" rtlCol="0" anchor="t">
+            <a:normAutofit/>
+          </a:bodyPr>
+          <a:lstStyle/>
+          <a:p>
+            <a:pPr indent="0" marL="0">
+              <a:buNone/>
+            </a:pPr>
+            <a:r>
+              <a:rPr lang="en-US" sz="1250" dirty="0">
+                <a:solidFill>
+                  <a:srgbClr val="17364A"/>
+                </a:solidFill>
+                <a:latin typeface="Aptos" pitchFamily="34" charset="0"/>
+                <a:ea typeface="Aptos" pitchFamily="34" charset="-122"/>
+                <a:cs typeface="Aptos" pitchFamily="34" charset="-120"/>
+              </a:rPr>
+              <a:t>Connect the concept to public health decisions, safeguards, documentation, or implementation work.</a:t>
+            </a:r>
+            <a:endParaRPr lang="en-US" sz="1250" dirty="0"/>
           </a:p>
         </p:txBody>
       </p:sp>
@@ -3541,7 +4741,32 @@
       </p:sp>
       <p:sp>
         <p:nvSpPr>
-          <p:cNvPr id="3" name="Text 1"/>
+          <p:cNvPr id="3" name="Shape 1"/>
+          <p:cNvSpPr/>
+          <p:nvPr/>
+        </p:nvSpPr>
+        <p:spPr>
+          <a:xfrm>
+            <a:off x="0" y="164592"/>
+            <a:ext cx="146304" cy="6693408"/>
+          </a:xfrm>
+          <a:prstGeom prst="rect">
+            <a:avLst/>
+          </a:prstGeom>
+          <a:solidFill>
+            <a:srgbClr val="2F8A28"/>
+          </a:solidFill>
+          <a:ln w="12700">
+            <a:solidFill>
+              <a:srgbClr val="2F8A28"/>
+            </a:solidFill>
+            <a:prstDash val="solid"/>
+          </a:ln>
+        </p:spPr>
+      </p:sp>
+      <p:sp>
+        <p:nvSpPr>
+          <p:cNvPr id="4" name="Text 2"/>
           <p:cNvSpPr/>
           <p:nvPr/>
         </p:nvSpPr>
@@ -3580,7 +4805,7 @@
       </p:sp>
       <p:sp>
         <p:nvSpPr>
-          <p:cNvPr id="4" name="Text 2"/>
+          <p:cNvPr id="5" name="Text 3"/>
           <p:cNvSpPr/>
           <p:nvPr/>
         </p:nvSpPr>
@@ -3619,7 +4844,7 @@
       </p:sp>
       <p:sp>
         <p:nvSpPr>
-          <p:cNvPr id="5" name="Text 3"/>
+          <p:cNvPr id="6" name="Text 4"/>
           <p:cNvSpPr/>
           <p:nvPr/>
         </p:nvSpPr>
@@ -3658,13 +4883,77 @@
       </p:sp>
       <p:sp>
         <p:nvSpPr>
-          <p:cNvPr id="6" name="Text 4"/>
+          <p:cNvPr id="7" name="Shape 5"/>
           <p:cNvSpPr/>
           <p:nvPr/>
         </p:nvSpPr>
         <p:spPr>
           <a:xfrm>
             <a:off x="640080" y="658368"/>
+            <a:ext cx="420624" cy="420624"/>
+          </a:xfrm>
+          <a:prstGeom prst="ellipse">
+            <a:avLst/>
+          </a:prstGeom>
+          <a:solidFill>
+            <a:srgbClr val="0068B7"/>
+          </a:solidFill>
+          <a:ln w="12700">
+            <a:solidFill>
+              <a:srgbClr val="0068B7"/>
+            </a:solidFill>
+            <a:prstDash val="solid"/>
+          </a:ln>
+        </p:spPr>
+      </p:sp>
+      <p:sp>
+        <p:nvSpPr>
+          <p:cNvPr id="8" name="Text 6"/>
+          <p:cNvSpPr/>
+          <p:nvPr/>
+        </p:nvSpPr>
+        <p:spPr>
+          <a:xfrm>
+            <a:off x="640080" y="731520"/>
+            <a:ext cx="420624" cy="164592"/>
+          </a:xfrm>
+          <a:prstGeom prst="rect">
+            <a:avLst/>
+          </a:prstGeom>
+          <a:noFill/>
+          <a:ln/>
+        </p:spPr>
+        <p:txBody>
+          <a:bodyPr wrap="square" lIns="0" tIns="0" rIns="0" bIns="0" rtlCol="0" anchor="ctr"/>
+          <a:lstStyle/>
+          <a:p>
+            <a:pPr algn="ctr" indent="0" marL="0">
+              <a:buNone/>
+            </a:pPr>
+            <a:r>
+              <a:rPr lang="en-US" sz="1100" b="1" dirty="0">
+                <a:solidFill>
+                  <a:srgbClr val="FFFFFF"/>
+                </a:solidFill>
+                <a:latin typeface="Aptos" pitchFamily="34" charset="0"/>
+                <a:ea typeface="Aptos" pitchFamily="34" charset="-122"/>
+                <a:cs typeface="Aptos" pitchFamily="34" charset="-120"/>
+              </a:rPr>
+              <a:t>8</a:t>
+            </a:r>
+            <a:endParaRPr lang="en-US" sz="1100" dirty="0"/>
+          </a:p>
+        </p:txBody>
+      </p:sp>
+      <p:sp>
+        <p:nvSpPr>
+          <p:cNvPr id="9" name="Text 7"/>
+          <p:cNvSpPr/>
+          <p:nvPr/>
+        </p:nvSpPr>
+        <p:spPr>
+          <a:xfrm>
+            <a:off x="640080" y="621792"/>
             <a:ext cx="10881360" cy="566928"/>
           </a:xfrm>
           <a:prstGeom prst="rect">
@@ -3691,7 +4980,7 @@
                 <a:ea typeface="Aptos Display" pitchFamily="34" charset="-122"/>
                 <a:cs typeface="Aptos Display" pitchFamily="34" charset="-120"/>
               </a:rPr>
-              <a:t>Reflection Questions Continued</a:t>
+              <a:t>Application to AI-Supported Workflows</a:t>
             </a:r>
             <a:endParaRPr lang="en-US" sz="2700" dirty="0"/>
           </a:p>
@@ -3699,32 +4988,178 @@
       </p:sp>
       <p:sp>
         <p:nvSpPr>
-          <p:cNvPr id="7" name="Text 5"/>
-          <p:cNvSpPr/>
-          <p:nvPr/>
-        </p:nvSpPr>
-        <p:spPr>
-          <a:xfrm>
-            <a:off x="822960" y="1325880"/>
-            <a:ext cx="10378440" cy="4800600"/>
-          </a:xfrm>
-          <a:prstGeom prst="rect">
-            <a:avLst/>
-          </a:prstGeom>
-          <a:noFill/>
-          <a:ln/>
-        </p:spPr>
-        <p:txBody>
-          <a:bodyPr wrap="square" lIns="1016" tIns="1016" rIns="1016" bIns="1016" rtlCol="0" anchor="t">
+          <p:cNvPr id="10" name="Text 8"/>
+          <p:cNvSpPr/>
+          <p:nvPr/>
+        </p:nvSpPr>
+        <p:spPr>
+          <a:xfrm>
+            <a:off x="868680" y="1417320"/>
+            <a:ext cx="6675120" cy="4434840"/>
+          </a:xfrm>
+          <a:prstGeom prst="rect">
+            <a:avLst/>
+          </a:prstGeom>
+          <a:noFill/>
+          <a:ln/>
+        </p:spPr>
+        <p:txBody>
+          <a:bodyPr wrap="square" lIns="635" tIns="635" rIns="635" bIns="635" rtlCol="0" anchor="t">
             <a:normAutofit/>
           </a:bodyPr>
           <a:lstStyle/>
           <a:p>
+            <a:r>
+              <a:rPr lang="en-US" sz="1700" dirty="0">
+                <a:solidFill>
+                  <a:srgbClr val="17364A"/>
+                </a:solidFill>
+                <a:latin typeface="Aptos" pitchFamily="34" charset="0"/>
+                <a:ea typeface="Aptos" pitchFamily="34" charset="-122"/>
+                <a:cs typeface="Aptos" pitchFamily="34" charset="-120"/>
+              </a:rPr>
+              <a:t>Generative AI, predictive analytics, RAG, automation, and agentic workflows all depend on the controls described in this.</a:t>
+            </a:r>
+            <a:endParaRPr lang="en-US" sz="1700" dirty="0"/>
+          </a:p>
+          <a:p>
+            <a:r>
+              <a:rPr lang="en-US" sz="1700" dirty="0">
+                <a:solidFill>
+                  <a:srgbClr val="17364A"/>
+                </a:solidFill>
+                <a:latin typeface="Aptos" pitchFamily="34" charset="0"/>
+                <a:ea typeface="Aptos" pitchFamily="34" charset="-122"/>
+                <a:cs typeface="Aptos" pitchFamily="34" charset="-120"/>
+              </a:rPr>
+              <a:t>The controls should be scaled to the risk of the use case.</a:t>
+            </a:r>
+            <a:endParaRPr lang="en-US" sz="1700" dirty="0"/>
+          </a:p>
+          <a:p>
+            <a:r>
+              <a:rPr lang="en-US" sz="1700" dirty="0">
+                <a:solidFill>
+                  <a:srgbClr val="17364A"/>
+                </a:solidFill>
+                <a:latin typeface="Aptos" pitchFamily="34" charset="0"/>
+                <a:ea typeface="Aptos" pitchFamily="34" charset="-122"/>
+                <a:cs typeface="Aptos" pitchFamily="34" charset="-120"/>
+              </a:rPr>
+              <a:t>A tool that drafts internal training text may require lighter review than a tool that updates case records, prioritizes.</a:t>
+            </a:r>
+            <a:endParaRPr lang="en-US" sz="1700" dirty="0"/>
+          </a:p>
+          <a:p>
+            <a:r>
+              <a:rPr lang="en-US" sz="1700" dirty="0">
+                <a:solidFill>
+                  <a:srgbClr val="17364A"/>
+                </a:solidFill>
+                <a:latin typeface="Aptos" pitchFamily="34" charset="0"/>
+                <a:ea typeface="Aptos" pitchFamily="34" charset="-122"/>
+                <a:cs typeface="Aptos" pitchFamily="34" charset="-120"/>
+              </a:rPr>
+              <a:t>The module should be applied during readiness assessment, procurement, implementation planning, pilot testing, and.</a:t>
+            </a:r>
+            <a:endParaRPr lang="en-US" sz="1700" dirty="0"/>
+          </a:p>
+        </p:txBody>
+      </p:sp>
+      <p:sp>
+        <p:nvSpPr>
+          <p:cNvPr id="11" name="Shape 9"/>
+          <p:cNvSpPr/>
+          <p:nvPr/>
+        </p:nvSpPr>
+        <p:spPr>
+          <a:xfrm>
+            <a:off x="7909560" y="1417320"/>
+            <a:ext cx="3154680" cy="1828800"/>
+          </a:xfrm>
+          <a:prstGeom prst="roundRect">
+            <a:avLst>
+              <a:gd name="adj" fmla="val 6000"/>
+            </a:avLst>
+          </a:prstGeom>
+          <a:solidFill>
+            <a:srgbClr val="EEF8ED"/>
+          </a:solidFill>
+          <a:ln w="12700">
+            <a:solidFill>
+              <a:srgbClr val="B9D7E6"/>
+            </a:solidFill>
+            <a:prstDash val="solid"/>
+          </a:ln>
+        </p:spPr>
+      </p:sp>
+      <p:sp>
+        <p:nvSpPr>
+          <p:cNvPr id="12" name="Text 10"/>
+          <p:cNvSpPr/>
+          <p:nvPr/>
+        </p:nvSpPr>
+        <p:spPr>
+          <a:xfrm>
+            <a:off x="8074152" y="1563624"/>
+            <a:ext cx="2825496" cy="201168"/>
+          </a:xfrm>
+          <a:prstGeom prst="rect">
+            <a:avLst/>
+          </a:prstGeom>
+          <a:noFill/>
+          <a:ln/>
+        </p:spPr>
+        <p:txBody>
+          <a:bodyPr wrap="square" lIns="0" tIns="0" rIns="0" bIns="0" rtlCol="0" anchor="ctr"/>
+          <a:lstStyle/>
+          <a:p>
             <a:pPr indent="0" marL="0">
               <a:buNone/>
             </a:pPr>
             <a:r>
-              <a:rPr lang="en-US" sz="1420" dirty="0">
+              <a:rPr lang="en-US" sz="950" b="1" dirty="0">
+                <a:solidFill>
+                  <a:srgbClr val="0068B7"/>
+                </a:solidFill>
+                <a:latin typeface="Aptos" pitchFamily="34" charset="0"/>
+                <a:ea typeface="Aptos" pitchFamily="34" charset="-122"/>
+                <a:cs typeface="Aptos" pitchFamily="34" charset="-120"/>
+              </a:rPr>
+              <a:t>Key idea</a:t>
+            </a:r>
+            <a:endParaRPr lang="en-US" sz="950" dirty="0"/>
+          </a:p>
+        </p:txBody>
+      </p:sp>
+      <p:sp>
+        <p:nvSpPr>
+          <p:cNvPr id="13" name="Text 11"/>
+          <p:cNvSpPr/>
+          <p:nvPr/>
+        </p:nvSpPr>
+        <p:spPr>
+          <a:xfrm>
+            <a:off x="8074152" y="1856232"/>
+            <a:ext cx="2825496" cy="1261872"/>
+          </a:xfrm>
+          <a:prstGeom prst="rect">
+            <a:avLst/>
+          </a:prstGeom>
+          <a:noFill/>
+          <a:ln/>
+        </p:spPr>
+        <p:txBody>
+          <a:bodyPr wrap="square" lIns="0" tIns="0" rIns="0" bIns="0" rtlCol="0" anchor="t">
+            <a:normAutofit/>
+          </a:bodyPr>
+          <a:lstStyle/>
+          <a:p>
+            <a:pPr indent="0" marL="0">
+              <a:buNone/>
+            </a:pPr>
+            <a:r>
+              <a:rPr lang="en-US" sz="1250" dirty="0">
                 <a:solidFill>
                   <a:srgbClr val="17364A"/>
                 </a:solidFill>
@@ -3732,9 +5167,116 @@
                 <a:ea typeface="Aptos" pitchFamily="34" charset="-122"/>
                 <a:cs typeface="Aptos" pitchFamily="34" charset="-120"/>
               </a:rPr>
-              <a:t>Which safeguards should be required before pilot testing? Who owns ongoing monitoring and review?</a:t>
-            </a:r>
-            <a:endParaRPr lang="en-US" sz="1420" dirty="0"/>
+              <a:t>Generative AI, predictive analytics, RAG, automation, and agentic workflows all depend on the controls described in this.</a:t>
+            </a:r>
+            <a:endParaRPr lang="en-US" sz="1250" dirty="0"/>
+          </a:p>
+        </p:txBody>
+      </p:sp>
+      <p:sp>
+        <p:nvSpPr>
+          <p:cNvPr id="14" name="Shape 12"/>
+          <p:cNvSpPr/>
+          <p:nvPr/>
+        </p:nvSpPr>
+        <p:spPr>
+          <a:xfrm>
+            <a:off x="7909560" y="3520440"/>
+            <a:ext cx="3154680" cy="1737360"/>
+          </a:xfrm>
+          <a:prstGeom prst="roundRect">
+            <a:avLst>
+              <a:gd name="adj" fmla="val 6316"/>
+            </a:avLst>
+          </a:prstGeom>
+          <a:solidFill>
+            <a:srgbClr val="EAF6F8"/>
+          </a:solidFill>
+          <a:ln w="12700">
+            <a:solidFill>
+              <a:srgbClr val="B9D7E6"/>
+            </a:solidFill>
+            <a:prstDash val="solid"/>
+          </a:ln>
+        </p:spPr>
+      </p:sp>
+      <p:sp>
+        <p:nvSpPr>
+          <p:cNvPr id="15" name="Text 13"/>
+          <p:cNvSpPr/>
+          <p:nvPr/>
+        </p:nvSpPr>
+        <p:spPr>
+          <a:xfrm>
+            <a:off x="8074152" y="3666744"/>
+            <a:ext cx="2825496" cy="201168"/>
+          </a:xfrm>
+          <a:prstGeom prst="rect">
+            <a:avLst/>
+          </a:prstGeom>
+          <a:noFill/>
+          <a:ln/>
+        </p:spPr>
+        <p:txBody>
+          <a:bodyPr wrap="square" lIns="0" tIns="0" rIns="0" bIns="0" rtlCol="0" anchor="ctr"/>
+          <a:lstStyle/>
+          <a:p>
+            <a:pPr indent="0" marL="0">
+              <a:buNone/>
+            </a:pPr>
+            <a:r>
+              <a:rPr lang="en-US" sz="950" b="1" dirty="0">
+                <a:solidFill>
+                  <a:srgbClr val="0068B7"/>
+                </a:solidFill>
+                <a:latin typeface="Aptos" pitchFamily="34" charset="0"/>
+                <a:ea typeface="Aptos" pitchFamily="34" charset="-122"/>
+                <a:cs typeface="Aptos" pitchFamily="34" charset="-120"/>
+              </a:rPr>
+              <a:t>Use this for</a:t>
+            </a:r>
+            <a:endParaRPr lang="en-US" sz="950" dirty="0"/>
+          </a:p>
+        </p:txBody>
+      </p:sp>
+      <p:sp>
+        <p:nvSpPr>
+          <p:cNvPr id="16" name="Text 14"/>
+          <p:cNvSpPr/>
+          <p:nvPr/>
+        </p:nvSpPr>
+        <p:spPr>
+          <a:xfrm>
+            <a:off x="8074152" y="3959352"/>
+            <a:ext cx="2825496" cy="1170432"/>
+          </a:xfrm>
+          <a:prstGeom prst="rect">
+            <a:avLst/>
+          </a:prstGeom>
+          <a:noFill/>
+          <a:ln/>
+        </p:spPr>
+        <p:txBody>
+          <a:bodyPr wrap="square" lIns="0" tIns="0" rIns="0" bIns="0" rtlCol="0" anchor="t">
+            <a:normAutofit/>
+          </a:bodyPr>
+          <a:lstStyle/>
+          <a:p>
+            <a:pPr indent="0" marL="0">
+              <a:buNone/>
+            </a:pPr>
+            <a:r>
+              <a:rPr lang="en-US" sz="1250" dirty="0">
+                <a:solidFill>
+                  <a:srgbClr val="17364A"/>
+                </a:solidFill>
+                <a:latin typeface="Aptos" pitchFamily="34" charset="0"/>
+                <a:ea typeface="Aptos" pitchFamily="34" charset="-122"/>
+                <a:cs typeface="Aptos" pitchFamily="34" charset="-120"/>
+              </a:rPr>
+              <a:t>Connect the concept to public health decisions, safeguards, documentation, or implementation work.</a:t>
+            </a:r>
+            <a:endParaRPr lang="en-US" sz="1250" dirty="0"/>
           </a:p>
         </p:txBody>
       </p:sp>
@@ -3797,7 +5339,32 @@
       </p:sp>
       <p:sp>
         <p:nvSpPr>
-          <p:cNvPr id="3" name="Text 1"/>
+          <p:cNvPr id="3" name="Shape 1"/>
+          <p:cNvSpPr/>
+          <p:nvPr/>
+        </p:nvSpPr>
+        <p:spPr>
+          <a:xfrm>
+            <a:off x="0" y="164592"/>
+            <a:ext cx="146304" cy="6693408"/>
+          </a:xfrm>
+          <a:prstGeom prst="rect">
+            <a:avLst/>
+          </a:prstGeom>
+          <a:solidFill>
+            <a:srgbClr val="2F8A28"/>
+          </a:solidFill>
+          <a:ln w="12700">
+            <a:solidFill>
+              <a:srgbClr val="2F8A28"/>
+            </a:solidFill>
+            <a:prstDash val="solid"/>
+          </a:ln>
+        </p:spPr>
+      </p:sp>
+      <p:sp>
+        <p:nvSpPr>
+          <p:cNvPr id="4" name="Text 2"/>
           <p:cNvSpPr/>
           <p:nvPr/>
         </p:nvSpPr>
@@ -3836,7 +5403,7 @@
       </p:sp>
       <p:sp>
         <p:nvSpPr>
-          <p:cNvPr id="4" name="Text 2"/>
+          <p:cNvPr id="5" name="Text 3"/>
           <p:cNvSpPr/>
           <p:nvPr/>
         </p:nvSpPr>
@@ -3875,7 +5442,7 @@
       </p:sp>
       <p:sp>
         <p:nvSpPr>
-          <p:cNvPr id="5" name="Text 3"/>
+          <p:cNvPr id="6" name="Text 4"/>
           <p:cNvSpPr/>
           <p:nvPr/>
         </p:nvSpPr>
@@ -3914,13 +5481,77 @@
       </p:sp>
       <p:sp>
         <p:nvSpPr>
-          <p:cNvPr id="6" name="Text 4"/>
+          <p:cNvPr id="7" name="Shape 5"/>
           <p:cNvSpPr/>
           <p:nvPr/>
         </p:nvSpPr>
         <p:spPr>
           <a:xfrm>
             <a:off x="640080" y="658368"/>
+            <a:ext cx="420624" cy="420624"/>
+          </a:xfrm>
+          <a:prstGeom prst="ellipse">
+            <a:avLst/>
+          </a:prstGeom>
+          <a:solidFill>
+            <a:srgbClr val="0068B7"/>
+          </a:solidFill>
+          <a:ln w="12700">
+            <a:solidFill>
+              <a:srgbClr val="0068B7"/>
+            </a:solidFill>
+            <a:prstDash val="solid"/>
+          </a:ln>
+        </p:spPr>
+      </p:sp>
+      <p:sp>
+        <p:nvSpPr>
+          <p:cNvPr id="8" name="Text 6"/>
+          <p:cNvSpPr/>
+          <p:nvPr/>
+        </p:nvSpPr>
+        <p:spPr>
+          <a:xfrm>
+            <a:off x="640080" y="731520"/>
+            <a:ext cx="420624" cy="164592"/>
+          </a:xfrm>
+          <a:prstGeom prst="rect">
+            <a:avLst/>
+          </a:prstGeom>
+          <a:noFill/>
+          <a:ln/>
+        </p:spPr>
+        <p:txBody>
+          <a:bodyPr wrap="square" lIns="0" tIns="0" rIns="0" bIns="0" rtlCol="0" anchor="ctr"/>
+          <a:lstStyle/>
+          <a:p>
+            <a:pPr algn="ctr" indent="0" marL="0">
+              <a:buNone/>
+            </a:pPr>
+            <a:r>
+              <a:rPr lang="en-US" sz="1100" b="1" dirty="0">
+                <a:solidFill>
+                  <a:srgbClr val="FFFFFF"/>
+                </a:solidFill>
+                <a:latin typeface="Aptos" pitchFamily="34" charset="0"/>
+                <a:ea typeface="Aptos" pitchFamily="34" charset="-122"/>
+                <a:cs typeface="Aptos" pitchFamily="34" charset="-120"/>
+              </a:rPr>
+              <a:t>9</a:t>
+            </a:r>
+            <a:endParaRPr lang="en-US" sz="1100" dirty="0"/>
+          </a:p>
+        </p:txBody>
+      </p:sp>
+      <p:sp>
+        <p:nvSpPr>
+          <p:cNvPr id="9" name="Text 7"/>
+          <p:cNvSpPr/>
+          <p:nvPr/>
+        </p:nvSpPr>
+        <p:spPr>
+          <a:xfrm>
+            <a:off x="640080" y="621792"/>
             <a:ext cx="10881360" cy="566928"/>
           </a:xfrm>
           <a:prstGeom prst="rect">
@@ -3947,7 +5578,7 @@
                 <a:ea typeface="Aptos Display" pitchFamily="34" charset="-122"/>
                 <a:cs typeface="Aptos Display" pitchFamily="34" charset="-120"/>
               </a:rPr>
-              <a:t>Practical Exercise</a:t>
+              <a:t>Reflection Questions</a:t>
             </a:r>
             <a:endParaRPr lang="en-US" sz="2700" dirty="0"/>
           </a:p>
@@ -3955,32 +5586,164 @@
       </p:sp>
       <p:sp>
         <p:nvSpPr>
-          <p:cNvPr id="7" name="Text 5"/>
-          <p:cNvSpPr/>
-          <p:nvPr/>
-        </p:nvSpPr>
-        <p:spPr>
-          <a:xfrm>
-            <a:off x="822960" y="1325880"/>
-            <a:ext cx="10378440" cy="4800600"/>
-          </a:xfrm>
-          <a:prstGeom prst="rect">
-            <a:avLst/>
-          </a:prstGeom>
-          <a:noFill/>
-          <a:ln/>
-        </p:spPr>
-        <p:txBody>
-          <a:bodyPr wrap="square" lIns="1016" tIns="1016" rIns="1016" bIns="1016" rtlCol="0" anchor="t">
+          <p:cNvPr id="10" name="Text 8"/>
+          <p:cNvSpPr/>
+          <p:nvPr/>
+        </p:nvSpPr>
+        <p:spPr>
+          <a:xfrm>
+            <a:off x="868680" y="1417320"/>
+            <a:ext cx="6675120" cy="4434840"/>
+          </a:xfrm>
+          <a:prstGeom prst="rect">
+            <a:avLst/>
+          </a:prstGeom>
+          <a:noFill/>
+          <a:ln/>
+        </p:spPr>
+        <p:txBody>
+          <a:bodyPr wrap="square" lIns="635" tIns="635" rIns="635" bIns="635" rtlCol="0" anchor="t">
             <a:normAutofit/>
           </a:bodyPr>
           <a:lstStyle/>
           <a:p>
+            <a:r>
+              <a:rPr lang="en-US" sz="1700" dirty="0">
+                <a:solidFill>
+                  <a:srgbClr val="17364A"/>
+                </a:solidFill>
+                <a:latin typeface="Aptos" pitchFamily="34" charset="0"/>
+                <a:ea typeface="Aptos" pitchFamily="34" charset="-122"/>
+                <a:cs typeface="Aptos" pitchFamily="34" charset="-120"/>
+              </a:rPr>
+              <a:t>Where does this topic appear in one current or proposed AI workflow in your agency?</a:t>
+            </a:r>
+            <a:endParaRPr lang="en-US" sz="1700" dirty="0"/>
+          </a:p>
+          <a:p>
+            <a:r>
+              <a:rPr lang="en-US" sz="1700" dirty="0">
+                <a:solidFill>
+                  <a:srgbClr val="17364A"/>
+                </a:solidFill>
+                <a:latin typeface="Aptos" pitchFamily="34" charset="0"/>
+                <a:ea typeface="Aptos" pitchFamily="34" charset="-122"/>
+                <a:cs typeface="Aptos" pitchFamily="34" charset="-120"/>
+              </a:rPr>
+              <a:t>What decisions, data sources, users, or partners would be affected if this area is poorly designed?</a:t>
+            </a:r>
+            <a:endParaRPr lang="en-US" sz="1700" dirty="0"/>
+          </a:p>
+          <a:p>
+            <a:r>
+              <a:rPr lang="en-US" sz="1700" dirty="0">
+                <a:solidFill>
+                  <a:srgbClr val="17364A"/>
+                </a:solidFill>
+                <a:latin typeface="Aptos" pitchFamily="34" charset="0"/>
+                <a:ea typeface="Aptos" pitchFamily="34" charset="-122"/>
+                <a:cs typeface="Aptos" pitchFamily="34" charset="-120"/>
+              </a:rPr>
+              <a:t>What evidence would governance reviewers need before approving the workflow?</a:t>
+            </a:r>
+            <a:endParaRPr lang="en-US" sz="1700" dirty="0"/>
+          </a:p>
+        </p:txBody>
+      </p:sp>
+      <p:sp>
+        <p:nvSpPr>
+          <p:cNvPr id="11" name="Shape 9"/>
+          <p:cNvSpPr/>
+          <p:nvPr/>
+        </p:nvSpPr>
+        <p:spPr>
+          <a:xfrm>
+            <a:off x="7909560" y="1417320"/>
+            <a:ext cx="3154680" cy="1828800"/>
+          </a:xfrm>
+          <a:prstGeom prst="roundRect">
+            <a:avLst>
+              <a:gd name="adj" fmla="val 6000"/>
+            </a:avLst>
+          </a:prstGeom>
+          <a:solidFill>
+            <a:srgbClr val="EEF8ED"/>
+          </a:solidFill>
+          <a:ln w="12700">
+            <a:solidFill>
+              <a:srgbClr val="B9D7E6"/>
+            </a:solidFill>
+            <a:prstDash val="solid"/>
+          </a:ln>
+        </p:spPr>
+      </p:sp>
+      <p:sp>
+        <p:nvSpPr>
+          <p:cNvPr id="12" name="Text 10"/>
+          <p:cNvSpPr/>
+          <p:nvPr/>
+        </p:nvSpPr>
+        <p:spPr>
+          <a:xfrm>
+            <a:off x="8074152" y="1563624"/>
+            <a:ext cx="2825496" cy="201168"/>
+          </a:xfrm>
+          <a:prstGeom prst="rect">
+            <a:avLst/>
+          </a:prstGeom>
+          <a:noFill/>
+          <a:ln/>
+        </p:spPr>
+        <p:txBody>
+          <a:bodyPr wrap="square" lIns="0" tIns="0" rIns="0" bIns="0" rtlCol="0" anchor="ctr"/>
+          <a:lstStyle/>
+          <a:p>
             <a:pPr indent="0" marL="0">
               <a:buNone/>
             </a:pPr>
             <a:r>
-              <a:rPr lang="en-US" sz="1420" dirty="0">
+              <a:rPr lang="en-US" sz="950" b="1" dirty="0">
+                <a:solidFill>
+                  <a:srgbClr val="0068B7"/>
+                </a:solidFill>
+                <a:latin typeface="Aptos" pitchFamily="34" charset="0"/>
+                <a:ea typeface="Aptos" pitchFamily="34" charset="-122"/>
+                <a:cs typeface="Aptos" pitchFamily="34" charset="-120"/>
+              </a:rPr>
+              <a:t>Key idea</a:t>
+            </a:r>
+            <a:endParaRPr lang="en-US" sz="950" dirty="0"/>
+          </a:p>
+        </p:txBody>
+      </p:sp>
+      <p:sp>
+        <p:nvSpPr>
+          <p:cNvPr id="13" name="Text 11"/>
+          <p:cNvSpPr/>
+          <p:nvPr/>
+        </p:nvSpPr>
+        <p:spPr>
+          <a:xfrm>
+            <a:off x="8074152" y="1856232"/>
+            <a:ext cx="2825496" cy="1261872"/>
+          </a:xfrm>
+          <a:prstGeom prst="rect">
+            <a:avLst/>
+          </a:prstGeom>
+          <a:noFill/>
+          <a:ln/>
+        </p:spPr>
+        <p:txBody>
+          <a:bodyPr wrap="square" lIns="0" tIns="0" rIns="0" bIns="0" rtlCol="0" anchor="t">
+            <a:normAutofit/>
+          </a:bodyPr>
+          <a:lstStyle/>
+          <a:p>
+            <a:pPr indent="0" marL="0">
+              <a:buNone/>
+            </a:pPr>
+            <a:r>
+              <a:rPr lang="en-US" sz="1250" dirty="0">
                 <a:solidFill>
                   <a:srgbClr val="17364A"/>
                 </a:solidFill>
@@ -3988,9 +5751,116 @@
                 <a:ea typeface="Aptos" pitchFamily="34" charset="-122"/>
                 <a:cs typeface="Aptos" pitchFamily="34" charset="-120"/>
               </a:rPr>
-              <a:t>Create a synthetic dataset assessment for one real or realistic public health AI workflow. The artifact should describe the use case, affected users, data sources, system dependencies, risks, guardrails, review points, and unresolved questions. The exercise should produce a work product that could be used in a governance meeting, procurement review, implementation planning session, pilot evaluation, or monitoring review. Learners should document assumptions and identify which staff or partners need to be consulted.</a:t>
-            </a:r>
-            <a:endParaRPr lang="en-US" sz="1420" dirty="0"/>
+              <a:t>Where does this topic appear in one current or proposed AI workflow in your agency?</a:t>
+            </a:r>
+            <a:endParaRPr lang="en-US" sz="1250" dirty="0"/>
+          </a:p>
+        </p:txBody>
+      </p:sp>
+      <p:sp>
+        <p:nvSpPr>
+          <p:cNvPr id="14" name="Shape 12"/>
+          <p:cNvSpPr/>
+          <p:nvPr/>
+        </p:nvSpPr>
+        <p:spPr>
+          <a:xfrm>
+            <a:off x="7909560" y="3520440"/>
+            <a:ext cx="3154680" cy="1737360"/>
+          </a:xfrm>
+          <a:prstGeom prst="roundRect">
+            <a:avLst>
+              <a:gd name="adj" fmla="val 6316"/>
+            </a:avLst>
+          </a:prstGeom>
+          <a:solidFill>
+            <a:srgbClr val="EAF6F8"/>
+          </a:solidFill>
+          <a:ln w="12700">
+            <a:solidFill>
+              <a:srgbClr val="B9D7E6"/>
+            </a:solidFill>
+            <a:prstDash val="solid"/>
+          </a:ln>
+        </p:spPr>
+      </p:sp>
+      <p:sp>
+        <p:nvSpPr>
+          <p:cNvPr id="15" name="Text 13"/>
+          <p:cNvSpPr/>
+          <p:nvPr/>
+        </p:nvSpPr>
+        <p:spPr>
+          <a:xfrm>
+            <a:off x="8074152" y="3666744"/>
+            <a:ext cx="2825496" cy="201168"/>
+          </a:xfrm>
+          <a:prstGeom prst="rect">
+            <a:avLst/>
+          </a:prstGeom>
+          <a:noFill/>
+          <a:ln/>
+        </p:spPr>
+        <p:txBody>
+          <a:bodyPr wrap="square" lIns="0" tIns="0" rIns="0" bIns="0" rtlCol="0" anchor="ctr"/>
+          <a:lstStyle/>
+          <a:p>
+            <a:pPr indent="0" marL="0">
+              <a:buNone/>
+            </a:pPr>
+            <a:r>
+              <a:rPr lang="en-US" sz="950" b="1" dirty="0">
+                <a:solidFill>
+                  <a:srgbClr val="0068B7"/>
+                </a:solidFill>
+                <a:latin typeface="Aptos" pitchFamily="34" charset="0"/>
+                <a:ea typeface="Aptos" pitchFamily="34" charset="-122"/>
+                <a:cs typeface="Aptos" pitchFamily="34" charset="-120"/>
+              </a:rPr>
+              <a:t>Use this for</a:t>
+            </a:r>
+            <a:endParaRPr lang="en-US" sz="950" dirty="0"/>
+          </a:p>
+        </p:txBody>
+      </p:sp>
+      <p:sp>
+        <p:nvSpPr>
+          <p:cNvPr id="16" name="Text 14"/>
+          <p:cNvSpPr/>
+          <p:nvPr/>
+        </p:nvSpPr>
+        <p:spPr>
+          <a:xfrm>
+            <a:off x="8074152" y="3959352"/>
+            <a:ext cx="2825496" cy="1170432"/>
+          </a:xfrm>
+          <a:prstGeom prst="rect">
+            <a:avLst/>
+          </a:prstGeom>
+          <a:noFill/>
+          <a:ln/>
+        </p:spPr>
+        <p:txBody>
+          <a:bodyPr wrap="square" lIns="0" tIns="0" rIns="0" bIns="0" rtlCol="0" anchor="t">
+            <a:normAutofit/>
+          </a:bodyPr>
+          <a:lstStyle/>
+          <a:p>
+            <a:pPr indent="0" marL="0">
+              <a:buNone/>
+            </a:pPr>
+            <a:r>
+              <a:rPr lang="en-US" sz="1250" dirty="0">
+                <a:solidFill>
+                  <a:srgbClr val="17364A"/>
+                </a:solidFill>
+                <a:latin typeface="Aptos" pitchFamily="34" charset="0"/>
+                <a:ea typeface="Aptos" pitchFamily="34" charset="-122"/>
+                <a:cs typeface="Aptos" pitchFamily="34" charset="-120"/>
+              </a:rPr>
+              <a:t>Connect the concept to public health decisions, safeguards, documentation, or implementation work.</a:t>
+            </a:r>
+            <a:endParaRPr lang="en-US" sz="1250" dirty="0"/>
           </a:p>
         </p:txBody>
       </p:sp>
@@ -4053,7 +5923,32 @@
       </p:sp>
       <p:sp>
         <p:nvSpPr>
-          <p:cNvPr id="3" name="Text 1"/>
+          <p:cNvPr id="3" name="Shape 1"/>
+          <p:cNvSpPr/>
+          <p:nvPr/>
+        </p:nvSpPr>
+        <p:spPr>
+          <a:xfrm>
+            <a:off x="0" y="164592"/>
+            <a:ext cx="146304" cy="6693408"/>
+          </a:xfrm>
+          <a:prstGeom prst="rect">
+            <a:avLst/>
+          </a:prstGeom>
+          <a:solidFill>
+            <a:srgbClr val="2F8A28"/>
+          </a:solidFill>
+          <a:ln w="12700">
+            <a:solidFill>
+              <a:srgbClr val="2F8A28"/>
+            </a:solidFill>
+            <a:prstDash val="solid"/>
+          </a:ln>
+        </p:spPr>
+      </p:sp>
+      <p:sp>
+        <p:nvSpPr>
+          <p:cNvPr id="4" name="Text 2"/>
           <p:cNvSpPr/>
           <p:nvPr/>
         </p:nvSpPr>
@@ -4092,7 +5987,7 @@
       </p:sp>
       <p:sp>
         <p:nvSpPr>
-          <p:cNvPr id="4" name="Text 2"/>
+          <p:cNvPr id="5" name="Text 3"/>
           <p:cNvSpPr/>
           <p:nvPr/>
         </p:nvSpPr>
@@ -4131,7 +6026,7 @@
       </p:sp>
       <p:sp>
         <p:nvSpPr>
-          <p:cNvPr id="5" name="Text 3"/>
+          <p:cNvPr id="6" name="Text 4"/>
           <p:cNvSpPr/>
           <p:nvPr/>
         </p:nvSpPr>
@@ -4170,7 +6065,7 @@
       </p:sp>
       <p:sp>
         <p:nvSpPr>
-          <p:cNvPr id="6" name="Text 4"/>
+          <p:cNvPr id="7" name="Text 5"/>
           <p:cNvSpPr/>
           <p:nvPr/>
         </p:nvSpPr>
@@ -4203,7 +6098,7 @@
                 <a:ea typeface="Aptos Display" pitchFamily="34" charset="-122"/>
                 <a:cs typeface="Aptos Display" pitchFamily="34" charset="-120"/>
               </a:rPr>
-              <a:t>Expected Artifact or Evidence</a:t>
+              <a:t>Reflection Questions Continued</a:t>
             </a:r>
             <a:endParaRPr lang="en-US" sz="2700" dirty="0"/>
           </a:p>
@@ -4211,32 +6106,150 @@
       </p:sp>
       <p:sp>
         <p:nvSpPr>
-          <p:cNvPr id="7" name="Text 5"/>
-          <p:cNvSpPr/>
-          <p:nvPr/>
-        </p:nvSpPr>
-        <p:spPr>
-          <a:xfrm>
-            <a:off x="822960" y="1325880"/>
-            <a:ext cx="10378440" cy="4800600"/>
-          </a:xfrm>
-          <a:prstGeom prst="rect">
-            <a:avLst/>
-          </a:prstGeom>
-          <a:noFill/>
-          <a:ln/>
-        </p:spPr>
-        <p:txBody>
-          <a:bodyPr wrap="square" lIns="1016" tIns="1016" rIns="1016" bIns="1016" rtlCol="0" anchor="t">
+          <p:cNvPr id="8" name="Text 6"/>
+          <p:cNvSpPr/>
+          <p:nvPr/>
+        </p:nvSpPr>
+        <p:spPr>
+          <a:xfrm>
+            <a:off x="868680" y="1417320"/>
+            <a:ext cx="6675120" cy="4434840"/>
+          </a:xfrm>
+          <a:prstGeom prst="rect">
+            <a:avLst/>
+          </a:prstGeom>
+          <a:noFill/>
+          <a:ln/>
+        </p:spPr>
+        <p:txBody>
+          <a:bodyPr wrap="square" lIns="635" tIns="635" rIns="635" bIns="635" rtlCol="0" anchor="t">
             <a:normAutofit/>
           </a:bodyPr>
           <a:lstStyle/>
           <a:p>
+            <a:r>
+              <a:rPr lang="en-US" sz="1700" dirty="0">
+                <a:solidFill>
+                  <a:srgbClr val="17364A"/>
+                </a:solidFill>
+                <a:latin typeface="Aptos" pitchFamily="34" charset="0"/>
+                <a:ea typeface="Aptos" pitchFamily="34" charset="-122"/>
+                <a:cs typeface="Aptos" pitchFamily="34" charset="-120"/>
+              </a:rPr>
+              <a:t>Which safeguards should be required before pilot testing?</a:t>
+            </a:r>
+            <a:endParaRPr lang="en-US" sz="1700" dirty="0"/>
+          </a:p>
+          <a:p>
+            <a:r>
+              <a:rPr lang="en-US" sz="1700" dirty="0">
+                <a:solidFill>
+                  <a:srgbClr val="17364A"/>
+                </a:solidFill>
+                <a:latin typeface="Aptos" pitchFamily="34" charset="0"/>
+                <a:ea typeface="Aptos" pitchFamily="34" charset="-122"/>
+                <a:cs typeface="Aptos" pitchFamily="34" charset="-120"/>
+              </a:rPr>
+              <a:t>Who owns ongoing monitoring and review?</a:t>
+            </a:r>
+            <a:endParaRPr lang="en-US" sz="1700" dirty="0"/>
+          </a:p>
+        </p:txBody>
+      </p:sp>
+      <p:sp>
+        <p:nvSpPr>
+          <p:cNvPr id="9" name="Shape 7"/>
+          <p:cNvSpPr/>
+          <p:nvPr/>
+        </p:nvSpPr>
+        <p:spPr>
+          <a:xfrm>
+            <a:off x="7909560" y="1417320"/>
+            <a:ext cx="3154680" cy="1828800"/>
+          </a:xfrm>
+          <a:prstGeom prst="roundRect">
+            <a:avLst>
+              <a:gd name="adj" fmla="val 6000"/>
+            </a:avLst>
+          </a:prstGeom>
+          <a:solidFill>
+            <a:srgbClr val="EEF8ED"/>
+          </a:solidFill>
+          <a:ln w="12700">
+            <a:solidFill>
+              <a:srgbClr val="B9D7E6"/>
+            </a:solidFill>
+            <a:prstDash val="solid"/>
+          </a:ln>
+        </p:spPr>
+      </p:sp>
+      <p:sp>
+        <p:nvSpPr>
+          <p:cNvPr id="10" name="Text 8"/>
+          <p:cNvSpPr/>
+          <p:nvPr/>
+        </p:nvSpPr>
+        <p:spPr>
+          <a:xfrm>
+            <a:off x="8074152" y="1563624"/>
+            <a:ext cx="2825496" cy="201168"/>
+          </a:xfrm>
+          <a:prstGeom prst="rect">
+            <a:avLst/>
+          </a:prstGeom>
+          <a:noFill/>
+          <a:ln/>
+        </p:spPr>
+        <p:txBody>
+          <a:bodyPr wrap="square" lIns="0" tIns="0" rIns="0" bIns="0" rtlCol="0" anchor="ctr"/>
+          <a:lstStyle/>
+          <a:p>
             <a:pPr indent="0" marL="0">
               <a:buNone/>
             </a:pPr>
             <a:r>
-              <a:rPr lang="en-US" sz="1420" dirty="0">
+              <a:rPr lang="en-US" sz="950" b="1" dirty="0">
+                <a:solidFill>
+                  <a:srgbClr val="0068B7"/>
+                </a:solidFill>
+                <a:latin typeface="Aptos" pitchFamily="34" charset="0"/>
+                <a:ea typeface="Aptos" pitchFamily="34" charset="-122"/>
+                <a:cs typeface="Aptos" pitchFamily="34" charset="-120"/>
+              </a:rPr>
+              <a:t>Key idea</a:t>
+            </a:r>
+            <a:endParaRPr lang="en-US" sz="950" dirty="0"/>
+          </a:p>
+        </p:txBody>
+      </p:sp>
+      <p:sp>
+        <p:nvSpPr>
+          <p:cNvPr id="11" name="Text 9"/>
+          <p:cNvSpPr/>
+          <p:nvPr/>
+        </p:nvSpPr>
+        <p:spPr>
+          <a:xfrm>
+            <a:off x="8074152" y="1856232"/>
+            <a:ext cx="2825496" cy="1261872"/>
+          </a:xfrm>
+          <a:prstGeom prst="rect">
+            <a:avLst/>
+          </a:prstGeom>
+          <a:noFill/>
+          <a:ln/>
+        </p:spPr>
+        <p:txBody>
+          <a:bodyPr wrap="square" lIns="0" tIns="0" rIns="0" bIns="0" rtlCol="0" anchor="t">
+            <a:normAutofit/>
+          </a:bodyPr>
+          <a:lstStyle/>
+          <a:p>
+            <a:pPr indent="0" marL="0">
+              <a:buNone/>
+            </a:pPr>
+            <a:r>
+              <a:rPr lang="en-US" sz="1250" dirty="0">
                 <a:solidFill>
                   <a:srgbClr val="17364A"/>
                 </a:solidFill>
@@ -4244,9 +6257,116 @@
                 <a:ea typeface="Aptos" pitchFamily="34" charset="-122"/>
                 <a:cs typeface="Aptos" pitchFamily="34" charset="-120"/>
               </a:rPr>
-              <a:t>The expected artifact is a completed synthetic dataset assessment. It should be specific to a public health workflow and should include technical dependencies, governance questions, human review expectations, monitoring indicators, and unresolved risks.</a:t>
-            </a:r>
-            <a:endParaRPr lang="en-US" sz="1420" dirty="0"/>
+              <a:t>Which safeguards should be required before pilot testing?</a:t>
+            </a:r>
+            <a:endParaRPr lang="en-US" sz="1250" dirty="0"/>
+          </a:p>
+        </p:txBody>
+      </p:sp>
+      <p:sp>
+        <p:nvSpPr>
+          <p:cNvPr id="12" name="Shape 10"/>
+          <p:cNvSpPr/>
+          <p:nvPr/>
+        </p:nvSpPr>
+        <p:spPr>
+          <a:xfrm>
+            <a:off x="7909560" y="3520440"/>
+            <a:ext cx="3154680" cy="1737360"/>
+          </a:xfrm>
+          <a:prstGeom prst="roundRect">
+            <a:avLst>
+              <a:gd name="adj" fmla="val 6316"/>
+            </a:avLst>
+          </a:prstGeom>
+          <a:solidFill>
+            <a:srgbClr val="EAF6F8"/>
+          </a:solidFill>
+          <a:ln w="12700">
+            <a:solidFill>
+              <a:srgbClr val="B9D7E6"/>
+            </a:solidFill>
+            <a:prstDash val="solid"/>
+          </a:ln>
+        </p:spPr>
+      </p:sp>
+      <p:sp>
+        <p:nvSpPr>
+          <p:cNvPr id="13" name="Text 11"/>
+          <p:cNvSpPr/>
+          <p:nvPr/>
+        </p:nvSpPr>
+        <p:spPr>
+          <a:xfrm>
+            <a:off x="8074152" y="3666744"/>
+            <a:ext cx="2825496" cy="201168"/>
+          </a:xfrm>
+          <a:prstGeom prst="rect">
+            <a:avLst/>
+          </a:prstGeom>
+          <a:noFill/>
+          <a:ln/>
+        </p:spPr>
+        <p:txBody>
+          <a:bodyPr wrap="square" lIns="0" tIns="0" rIns="0" bIns="0" rtlCol="0" anchor="ctr"/>
+          <a:lstStyle/>
+          <a:p>
+            <a:pPr indent="0" marL="0">
+              <a:buNone/>
+            </a:pPr>
+            <a:r>
+              <a:rPr lang="en-US" sz="950" b="1" dirty="0">
+                <a:solidFill>
+                  <a:srgbClr val="0068B7"/>
+                </a:solidFill>
+                <a:latin typeface="Aptos" pitchFamily="34" charset="0"/>
+                <a:ea typeface="Aptos" pitchFamily="34" charset="-122"/>
+                <a:cs typeface="Aptos" pitchFamily="34" charset="-120"/>
+              </a:rPr>
+              <a:t>Use this for</a:t>
+            </a:r>
+            <a:endParaRPr lang="en-US" sz="950" dirty="0"/>
+          </a:p>
+        </p:txBody>
+      </p:sp>
+      <p:sp>
+        <p:nvSpPr>
+          <p:cNvPr id="14" name="Text 12"/>
+          <p:cNvSpPr/>
+          <p:nvPr/>
+        </p:nvSpPr>
+        <p:spPr>
+          <a:xfrm>
+            <a:off x="8074152" y="3959352"/>
+            <a:ext cx="2825496" cy="1170432"/>
+          </a:xfrm>
+          <a:prstGeom prst="rect">
+            <a:avLst/>
+          </a:prstGeom>
+          <a:noFill/>
+          <a:ln/>
+        </p:spPr>
+        <p:txBody>
+          <a:bodyPr wrap="square" lIns="0" tIns="0" rIns="0" bIns="0" rtlCol="0" anchor="t">
+            <a:normAutofit/>
+          </a:bodyPr>
+          <a:lstStyle/>
+          <a:p>
+            <a:pPr indent="0" marL="0">
+              <a:buNone/>
+            </a:pPr>
+            <a:r>
+              <a:rPr lang="en-US" sz="1250" dirty="0">
+                <a:solidFill>
+                  <a:srgbClr val="17364A"/>
+                </a:solidFill>
+                <a:latin typeface="Aptos" pitchFamily="34" charset="0"/>
+                <a:ea typeface="Aptos" pitchFamily="34" charset="-122"/>
+                <a:cs typeface="Aptos" pitchFamily="34" charset="-120"/>
+              </a:rPr>
+              <a:t>Connect the concept to public health decisions, safeguards, documentation, or implementation work.</a:t>
+            </a:r>
+            <a:endParaRPr lang="en-US" sz="1250" dirty="0"/>
           </a:p>
         </p:txBody>
       </p:sp>
@@ -4309,7 +6429,32 @@
       </p:sp>
       <p:sp>
         <p:nvSpPr>
-          <p:cNvPr id="3" name="Text 1"/>
+          <p:cNvPr id="3" name="Shape 1"/>
+          <p:cNvSpPr/>
+          <p:nvPr/>
+        </p:nvSpPr>
+        <p:spPr>
+          <a:xfrm>
+            <a:off x="0" y="164592"/>
+            <a:ext cx="146304" cy="6693408"/>
+          </a:xfrm>
+          <a:prstGeom prst="rect">
+            <a:avLst/>
+          </a:prstGeom>
+          <a:solidFill>
+            <a:srgbClr val="2F8A28"/>
+          </a:solidFill>
+          <a:ln w="12700">
+            <a:solidFill>
+              <a:srgbClr val="2F8A28"/>
+            </a:solidFill>
+            <a:prstDash val="solid"/>
+          </a:ln>
+        </p:spPr>
+      </p:sp>
+      <p:sp>
+        <p:nvSpPr>
+          <p:cNvPr id="4" name="Text 2"/>
           <p:cNvSpPr/>
           <p:nvPr/>
         </p:nvSpPr>
@@ -4348,7 +6493,7 @@
       </p:sp>
       <p:sp>
         <p:nvSpPr>
-          <p:cNvPr id="4" name="Text 2"/>
+          <p:cNvPr id="5" name="Text 3"/>
           <p:cNvSpPr/>
           <p:nvPr/>
         </p:nvSpPr>
@@ -4387,7 +6532,7 @@
       </p:sp>
       <p:sp>
         <p:nvSpPr>
-          <p:cNvPr id="5" name="Text 3"/>
+          <p:cNvPr id="6" name="Text 4"/>
           <p:cNvSpPr/>
           <p:nvPr/>
         </p:nvSpPr>
@@ -4426,13 +6571,77 @@
       </p:sp>
       <p:sp>
         <p:nvSpPr>
-          <p:cNvPr id="6" name="Text 4"/>
+          <p:cNvPr id="7" name="Shape 5"/>
           <p:cNvSpPr/>
           <p:nvPr/>
         </p:nvSpPr>
         <p:spPr>
           <a:xfrm>
             <a:off x="640080" y="658368"/>
+            <a:ext cx="420624" cy="420624"/>
+          </a:xfrm>
+          <a:prstGeom prst="ellipse">
+            <a:avLst/>
+          </a:prstGeom>
+          <a:solidFill>
+            <a:srgbClr val="0068B7"/>
+          </a:solidFill>
+          <a:ln w="12700">
+            <a:solidFill>
+              <a:srgbClr val="0068B7"/>
+            </a:solidFill>
+            <a:prstDash val="solid"/>
+          </a:ln>
+        </p:spPr>
+      </p:sp>
+      <p:sp>
+        <p:nvSpPr>
+          <p:cNvPr id="8" name="Text 6"/>
+          <p:cNvSpPr/>
+          <p:nvPr/>
+        </p:nvSpPr>
+        <p:spPr>
+          <a:xfrm>
+            <a:off x="640080" y="731520"/>
+            <a:ext cx="420624" cy="164592"/>
+          </a:xfrm>
+          <a:prstGeom prst="rect">
+            <a:avLst/>
+          </a:prstGeom>
+          <a:noFill/>
+          <a:ln/>
+        </p:spPr>
+        <p:txBody>
+          <a:bodyPr wrap="square" lIns="0" tIns="0" rIns="0" bIns="0" rtlCol="0" anchor="ctr"/>
+          <a:lstStyle/>
+          <a:p>
+            <a:pPr algn="ctr" indent="0" marL="0">
+              <a:buNone/>
+            </a:pPr>
+            <a:r>
+              <a:rPr lang="en-US" sz="1100" b="1" dirty="0">
+                <a:solidFill>
+                  <a:srgbClr val="FFFFFF"/>
+                </a:solidFill>
+                <a:latin typeface="Aptos" pitchFamily="34" charset="0"/>
+                <a:ea typeface="Aptos" pitchFamily="34" charset="-122"/>
+                <a:cs typeface="Aptos" pitchFamily="34" charset="-120"/>
+              </a:rPr>
+              <a:t>10</a:t>
+            </a:r>
+            <a:endParaRPr lang="en-US" sz="1100" dirty="0"/>
+          </a:p>
+        </p:txBody>
+      </p:sp>
+      <p:sp>
+        <p:nvSpPr>
+          <p:cNvPr id="9" name="Text 7"/>
+          <p:cNvSpPr/>
+          <p:nvPr/>
+        </p:nvSpPr>
+        <p:spPr>
+          <a:xfrm>
+            <a:off x="640080" y="621792"/>
             <a:ext cx="10881360" cy="566928"/>
           </a:xfrm>
           <a:prstGeom prst="rect">
@@ -4459,7 +6668,7 @@
                 <a:ea typeface="Aptos Display" pitchFamily="34" charset="-122"/>
                 <a:cs typeface="Aptos Display" pitchFamily="34" charset="-120"/>
               </a:rPr>
-              <a:t>Expected Assignment</a:t>
+              <a:t>Practical Exercise</a:t>
             </a:r>
             <a:endParaRPr lang="en-US" sz="2700" dirty="0"/>
           </a:p>
@@ -4467,14 +6676,14 @@
       </p:sp>
       <p:sp>
         <p:nvSpPr>
-          <p:cNvPr id="7" name="Text 5"/>
-          <p:cNvSpPr/>
-          <p:nvPr/>
-        </p:nvSpPr>
-        <p:spPr>
-          <a:xfrm>
-            <a:off x="822960" y="1325880"/>
-            <a:ext cx="10378440" cy="4800600"/>
+          <p:cNvPr id="10" name="Text 8"/>
+          <p:cNvSpPr/>
+          <p:nvPr/>
+        </p:nvSpPr>
+        <p:spPr>
+          <a:xfrm>
+            <a:off x="868680" y="1417320"/>
+            <a:ext cx="6675120" cy="4434840"/>
           </a:xfrm>
           <a:prstGeom prst="rect">
             <a:avLst/>
@@ -4489,7 +6698,7 @@
           <a:lstStyle/>
           <a:p>
             <a:r>
-              <a:rPr lang="en-US" sz="1450" dirty="0">
+              <a:rPr lang="en-US" sz="1700" dirty="0">
                 <a:solidFill>
                   <a:srgbClr val="17364A"/>
                 </a:solidFill>
@@ -4497,9 +6706,265 @@
                 <a:ea typeface="Aptos" pitchFamily="34" charset="-122"/>
                 <a:cs typeface="Aptos" pitchFamily="34" charset="-120"/>
               </a:rPr>
-              <a:t>The expected artifact is a completed synthetic dataset assessment. It should be specific to a public health workflow and should include technical dependencies, governance questions, human review expectations, monitoring indicators, and unresolved.</a:t>
-            </a:r>
-            <a:endParaRPr lang="en-US" sz="1450" dirty="0"/>
+              <a:t>Create a synthetic dataset assessment for one real or realistic public health AI workflow.</a:t>
+            </a:r>
+            <a:endParaRPr lang="en-US" sz="1700" dirty="0"/>
+          </a:p>
+          <a:p>
+            <a:r>
+              <a:rPr lang="en-US" sz="1700" dirty="0">
+                <a:solidFill>
+                  <a:srgbClr val="17364A"/>
+                </a:solidFill>
+                <a:latin typeface="Aptos" pitchFamily="34" charset="0"/>
+                <a:ea typeface="Aptos" pitchFamily="34" charset="-122"/>
+                <a:cs typeface="Aptos" pitchFamily="34" charset="-120"/>
+              </a:rPr>
+              <a:t>The artifact should describe the use case, affected users, data sources, system dependencies, risks, guardrails, review.</a:t>
+            </a:r>
+            <a:endParaRPr lang="en-US" sz="1700" dirty="0"/>
+          </a:p>
+          <a:p>
+            <a:r>
+              <a:rPr lang="en-US" sz="1700" dirty="0">
+                <a:solidFill>
+                  <a:srgbClr val="17364A"/>
+                </a:solidFill>
+                <a:latin typeface="Aptos" pitchFamily="34" charset="0"/>
+                <a:ea typeface="Aptos" pitchFamily="34" charset="-122"/>
+                <a:cs typeface="Aptos" pitchFamily="34" charset="-120"/>
+              </a:rPr>
+              <a:t>The exercise should produce a work product that could be used in a governance meeting, procurement review, implementation.</a:t>
+            </a:r>
+            <a:endParaRPr lang="en-US" sz="1700" dirty="0"/>
+          </a:p>
+          <a:p>
+            <a:r>
+              <a:rPr lang="en-US" sz="1700" dirty="0">
+                <a:solidFill>
+                  <a:srgbClr val="17364A"/>
+                </a:solidFill>
+                <a:latin typeface="Aptos" pitchFamily="34" charset="0"/>
+                <a:ea typeface="Aptos" pitchFamily="34" charset="-122"/>
+                <a:cs typeface="Aptos" pitchFamily="34" charset="-120"/>
+              </a:rPr>
+              <a:t>Learners should document assumptions and identify which staff or partners need to be consulted.</a:t>
+            </a:r>
+            <a:endParaRPr lang="en-US" sz="1700" dirty="0"/>
+          </a:p>
+        </p:txBody>
+      </p:sp>
+      <p:sp>
+        <p:nvSpPr>
+          <p:cNvPr id="11" name="Shape 9"/>
+          <p:cNvSpPr/>
+          <p:nvPr/>
+        </p:nvSpPr>
+        <p:spPr>
+          <a:xfrm>
+            <a:off x="7909560" y="1417320"/>
+            <a:ext cx="3154680" cy="1828800"/>
+          </a:xfrm>
+          <a:prstGeom prst="roundRect">
+            <a:avLst>
+              <a:gd name="adj" fmla="val 6000"/>
+            </a:avLst>
+          </a:prstGeom>
+          <a:solidFill>
+            <a:srgbClr val="EEF8ED"/>
+          </a:solidFill>
+          <a:ln w="12700">
+            <a:solidFill>
+              <a:srgbClr val="B9D7E6"/>
+            </a:solidFill>
+            <a:prstDash val="solid"/>
+          </a:ln>
+        </p:spPr>
+      </p:sp>
+      <p:sp>
+        <p:nvSpPr>
+          <p:cNvPr id="12" name="Text 10"/>
+          <p:cNvSpPr/>
+          <p:nvPr/>
+        </p:nvSpPr>
+        <p:spPr>
+          <a:xfrm>
+            <a:off x="8074152" y="1563624"/>
+            <a:ext cx="2825496" cy="201168"/>
+          </a:xfrm>
+          <a:prstGeom prst="rect">
+            <a:avLst/>
+          </a:prstGeom>
+          <a:noFill/>
+          <a:ln/>
+        </p:spPr>
+        <p:txBody>
+          <a:bodyPr wrap="square" lIns="0" tIns="0" rIns="0" bIns="0" rtlCol="0" anchor="ctr"/>
+          <a:lstStyle/>
+          <a:p>
+            <a:pPr indent="0" marL="0">
+              <a:buNone/>
+            </a:pPr>
+            <a:r>
+              <a:rPr lang="en-US" sz="950" b="1" dirty="0">
+                <a:solidFill>
+                  <a:srgbClr val="0068B7"/>
+                </a:solidFill>
+                <a:latin typeface="Aptos" pitchFamily="34" charset="0"/>
+                <a:ea typeface="Aptos" pitchFamily="34" charset="-122"/>
+                <a:cs typeface="Aptos" pitchFamily="34" charset="-120"/>
+              </a:rPr>
+              <a:t>Key idea</a:t>
+            </a:r>
+            <a:endParaRPr lang="en-US" sz="950" dirty="0"/>
+          </a:p>
+        </p:txBody>
+      </p:sp>
+      <p:sp>
+        <p:nvSpPr>
+          <p:cNvPr id="13" name="Text 11"/>
+          <p:cNvSpPr/>
+          <p:nvPr/>
+        </p:nvSpPr>
+        <p:spPr>
+          <a:xfrm>
+            <a:off x="8074152" y="1856232"/>
+            <a:ext cx="2825496" cy="1261872"/>
+          </a:xfrm>
+          <a:prstGeom prst="rect">
+            <a:avLst/>
+          </a:prstGeom>
+          <a:noFill/>
+          <a:ln/>
+        </p:spPr>
+        <p:txBody>
+          <a:bodyPr wrap="square" lIns="0" tIns="0" rIns="0" bIns="0" rtlCol="0" anchor="t">
+            <a:normAutofit/>
+          </a:bodyPr>
+          <a:lstStyle/>
+          <a:p>
+            <a:pPr indent="0" marL="0">
+              <a:buNone/>
+            </a:pPr>
+            <a:r>
+              <a:rPr lang="en-US" sz="1250" dirty="0">
+                <a:solidFill>
+                  <a:srgbClr val="17364A"/>
+                </a:solidFill>
+                <a:latin typeface="Aptos" pitchFamily="34" charset="0"/>
+                <a:ea typeface="Aptos" pitchFamily="34" charset="-122"/>
+                <a:cs typeface="Aptos" pitchFamily="34" charset="-120"/>
+              </a:rPr>
+              <a:t>Create a synthetic dataset assessment for one real or realistic public health AI workflow.</a:t>
+            </a:r>
+            <a:endParaRPr lang="en-US" sz="1250" dirty="0"/>
+          </a:p>
+        </p:txBody>
+      </p:sp>
+      <p:sp>
+        <p:nvSpPr>
+          <p:cNvPr id="14" name="Shape 12"/>
+          <p:cNvSpPr/>
+          <p:nvPr/>
+        </p:nvSpPr>
+        <p:spPr>
+          <a:xfrm>
+            <a:off x="7909560" y="3520440"/>
+            <a:ext cx="3154680" cy="1737360"/>
+          </a:xfrm>
+          <a:prstGeom prst="roundRect">
+            <a:avLst>
+              <a:gd name="adj" fmla="val 6316"/>
+            </a:avLst>
+          </a:prstGeom>
+          <a:solidFill>
+            <a:srgbClr val="EAF6F8"/>
+          </a:solidFill>
+          <a:ln w="12700">
+            <a:solidFill>
+              <a:srgbClr val="B9D7E6"/>
+            </a:solidFill>
+            <a:prstDash val="solid"/>
+          </a:ln>
+        </p:spPr>
+      </p:sp>
+      <p:sp>
+        <p:nvSpPr>
+          <p:cNvPr id="15" name="Text 13"/>
+          <p:cNvSpPr/>
+          <p:nvPr/>
+        </p:nvSpPr>
+        <p:spPr>
+          <a:xfrm>
+            <a:off x="8074152" y="3666744"/>
+            <a:ext cx="2825496" cy="201168"/>
+          </a:xfrm>
+          <a:prstGeom prst="rect">
+            <a:avLst/>
+          </a:prstGeom>
+          <a:noFill/>
+          <a:ln/>
+        </p:spPr>
+        <p:txBody>
+          <a:bodyPr wrap="square" lIns="0" tIns="0" rIns="0" bIns="0" rtlCol="0" anchor="ctr"/>
+          <a:lstStyle/>
+          <a:p>
+            <a:pPr indent="0" marL="0">
+              <a:buNone/>
+            </a:pPr>
+            <a:r>
+              <a:rPr lang="en-US" sz="950" b="1" dirty="0">
+                <a:solidFill>
+                  <a:srgbClr val="0068B7"/>
+                </a:solidFill>
+                <a:latin typeface="Aptos" pitchFamily="34" charset="0"/>
+                <a:ea typeface="Aptos" pitchFamily="34" charset="-122"/>
+                <a:cs typeface="Aptos" pitchFamily="34" charset="-120"/>
+              </a:rPr>
+              <a:t>Use this for</a:t>
+            </a:r>
+            <a:endParaRPr lang="en-US" sz="950" dirty="0"/>
+          </a:p>
+        </p:txBody>
+      </p:sp>
+      <p:sp>
+        <p:nvSpPr>
+          <p:cNvPr id="16" name="Text 14"/>
+          <p:cNvSpPr/>
+          <p:nvPr/>
+        </p:nvSpPr>
+        <p:spPr>
+          <a:xfrm>
+            <a:off x="8074152" y="3959352"/>
+            <a:ext cx="2825496" cy="1170432"/>
+          </a:xfrm>
+          <a:prstGeom prst="rect">
+            <a:avLst/>
+          </a:prstGeom>
+          <a:noFill/>
+          <a:ln/>
+        </p:spPr>
+        <p:txBody>
+          <a:bodyPr wrap="square" lIns="0" tIns="0" rIns="0" bIns="0" rtlCol="0" anchor="t">
+            <a:normAutofit/>
+          </a:bodyPr>
+          <a:lstStyle/>
+          <a:p>
+            <a:pPr indent="0" marL="0">
+              <a:buNone/>
+            </a:pPr>
+            <a:r>
+              <a:rPr lang="en-US" sz="1250" dirty="0">
+                <a:solidFill>
+                  <a:srgbClr val="17364A"/>
+                </a:solidFill>
+                <a:latin typeface="Aptos" pitchFamily="34" charset="0"/>
+                <a:ea typeface="Aptos" pitchFamily="34" charset="-122"/>
+                <a:cs typeface="Aptos" pitchFamily="34" charset="-120"/>
+              </a:rPr>
+              <a:t>Connect the concept to public health decisions, safeguards, documentation, or implementation work.</a:t>
+            </a:r>
+            <a:endParaRPr lang="en-US" sz="1250" dirty="0"/>
           </a:p>
         </p:txBody>
       </p:sp>
@@ -4562,7 +7027,32 @@
       </p:sp>
       <p:sp>
         <p:nvSpPr>
-          <p:cNvPr id="3" name="Text 1"/>
+          <p:cNvPr id="3" name="Shape 1"/>
+          <p:cNvSpPr/>
+          <p:nvPr/>
+        </p:nvSpPr>
+        <p:spPr>
+          <a:xfrm>
+            <a:off x="0" y="164592"/>
+            <a:ext cx="146304" cy="6693408"/>
+          </a:xfrm>
+          <a:prstGeom prst="rect">
+            <a:avLst/>
+          </a:prstGeom>
+          <a:solidFill>
+            <a:srgbClr val="2F8A28"/>
+          </a:solidFill>
+          <a:ln w="12700">
+            <a:solidFill>
+              <a:srgbClr val="2F8A28"/>
+            </a:solidFill>
+            <a:prstDash val="solid"/>
+          </a:ln>
+        </p:spPr>
+      </p:sp>
+      <p:sp>
+        <p:nvSpPr>
+          <p:cNvPr id="4" name="Text 2"/>
           <p:cNvSpPr/>
           <p:nvPr/>
         </p:nvSpPr>
@@ -4601,7 +7091,7 @@
       </p:sp>
       <p:sp>
         <p:nvSpPr>
-          <p:cNvPr id="4" name="Text 2"/>
+          <p:cNvPr id="5" name="Text 3"/>
           <p:cNvSpPr/>
           <p:nvPr/>
         </p:nvSpPr>
@@ -4640,7 +7130,7 @@
       </p:sp>
       <p:sp>
         <p:nvSpPr>
-          <p:cNvPr id="5" name="Text 3"/>
+          <p:cNvPr id="6" name="Text 4"/>
           <p:cNvSpPr/>
           <p:nvPr/>
         </p:nvSpPr>
@@ -4679,13 +7169,77 @@
       </p:sp>
       <p:sp>
         <p:nvSpPr>
-          <p:cNvPr id="6" name="Text 4"/>
+          <p:cNvPr id="7" name="Shape 5"/>
           <p:cNvSpPr/>
           <p:nvPr/>
         </p:nvSpPr>
         <p:spPr>
           <a:xfrm>
             <a:off x="640080" y="658368"/>
+            <a:ext cx="420624" cy="420624"/>
+          </a:xfrm>
+          <a:prstGeom prst="ellipse">
+            <a:avLst/>
+          </a:prstGeom>
+          <a:solidFill>
+            <a:srgbClr val="0068B7"/>
+          </a:solidFill>
+          <a:ln w="12700">
+            <a:solidFill>
+              <a:srgbClr val="0068B7"/>
+            </a:solidFill>
+            <a:prstDash val="solid"/>
+          </a:ln>
+        </p:spPr>
+      </p:sp>
+      <p:sp>
+        <p:nvSpPr>
+          <p:cNvPr id="8" name="Text 6"/>
+          <p:cNvSpPr/>
+          <p:nvPr/>
+        </p:nvSpPr>
+        <p:spPr>
+          <a:xfrm>
+            <a:off x="640080" y="731520"/>
+            <a:ext cx="420624" cy="164592"/>
+          </a:xfrm>
+          <a:prstGeom prst="rect">
+            <a:avLst/>
+          </a:prstGeom>
+          <a:noFill/>
+          <a:ln/>
+        </p:spPr>
+        <p:txBody>
+          <a:bodyPr wrap="square" lIns="0" tIns="0" rIns="0" bIns="0" rtlCol="0" anchor="ctr"/>
+          <a:lstStyle/>
+          <a:p>
+            <a:pPr algn="ctr" indent="0" marL="0">
+              <a:buNone/>
+            </a:pPr>
+            <a:r>
+              <a:rPr lang="en-US" sz="1100" b="1" dirty="0">
+                <a:solidFill>
+                  <a:srgbClr val="FFFFFF"/>
+                </a:solidFill>
+                <a:latin typeface="Aptos" pitchFamily="34" charset="0"/>
+                <a:ea typeface="Aptos" pitchFamily="34" charset="-122"/>
+                <a:cs typeface="Aptos" pitchFamily="34" charset="-120"/>
+              </a:rPr>
+              <a:t>11</a:t>
+            </a:r>
+            <a:endParaRPr lang="en-US" sz="1100" dirty="0"/>
+          </a:p>
+        </p:txBody>
+      </p:sp>
+      <p:sp>
+        <p:nvSpPr>
+          <p:cNvPr id="9" name="Text 7"/>
+          <p:cNvSpPr/>
+          <p:nvPr/>
+        </p:nvSpPr>
+        <p:spPr>
+          <a:xfrm>
+            <a:off x="640080" y="621792"/>
             <a:ext cx="10881360" cy="566928"/>
           </a:xfrm>
           <a:prstGeom prst="rect">
@@ -4712,7 +7266,7 @@
                 <a:ea typeface="Aptos Display" pitchFamily="34" charset="-122"/>
                 <a:cs typeface="Aptos Display" pitchFamily="34" charset="-120"/>
               </a:rPr>
-              <a:t>Knowledge Check</a:t>
+              <a:t>Expected Artifact or Evidence</a:t>
             </a:r>
             <a:endParaRPr lang="en-US" sz="2700" dirty="0"/>
           </a:p>
@@ -4720,14 +7274,14 @@
       </p:sp>
       <p:sp>
         <p:nvSpPr>
-          <p:cNvPr id="7" name="Text 5"/>
-          <p:cNvSpPr/>
-          <p:nvPr/>
-        </p:nvSpPr>
-        <p:spPr>
-          <a:xfrm>
-            <a:off x="822960" y="1325880"/>
-            <a:ext cx="10378440" cy="4800600"/>
+          <p:cNvPr id="10" name="Text 8"/>
+          <p:cNvSpPr/>
+          <p:nvPr/>
+        </p:nvSpPr>
+        <p:spPr>
+          <a:xfrm>
+            <a:off x="868680" y="1417320"/>
+            <a:ext cx="6675120" cy="4434840"/>
           </a:xfrm>
           <a:prstGeom prst="rect">
             <a:avLst/>
@@ -4742,7 +7296,7 @@
           <a:lstStyle/>
           <a:p>
             <a:r>
-              <a:rPr lang="en-US" sz="1450" dirty="0">
+              <a:rPr lang="en-US" sz="1700" dirty="0">
                 <a:solidFill>
                   <a:srgbClr val="17364A"/>
                 </a:solidFill>
@@ -4750,13 +7304,13 @@
                 <a:ea typeface="Aptos" pitchFamily="34" charset="-122"/>
                 <a:cs typeface="Aptos" pitchFamily="34" charset="-120"/>
               </a:rPr>
-              <a:t>1. What is the best reason to address synthetic data for public health ai before deployment?</a:t>
-            </a:r>
-            <a:endParaRPr lang="en-US" sz="1450" dirty="0"/>
-          </a:p>
-          <a:p>
-            <a:r>
-              <a:rPr lang="en-US" sz="1450" dirty="0">
+              <a:t>The expected artifact is a completed synthetic dataset assessment.</a:t>
+            </a:r>
+            <a:endParaRPr lang="en-US" sz="1700" dirty="0"/>
+          </a:p>
+          <a:p>
+            <a:r>
+              <a:rPr lang="en-US" sz="1700" dirty="0">
                 <a:solidFill>
                   <a:srgbClr val="17364A"/>
                 </a:solidFill>
@@ -4764,13 +7318,106 @@
                 <a:ea typeface="Aptos" pitchFamily="34" charset="-122"/>
                 <a:cs typeface="Aptos" pitchFamily="34" charset="-120"/>
               </a:rPr>
-              <a:t>2. Which practice best supports responsible implementation?</a:t>
-            </a:r>
-            <a:endParaRPr lang="en-US" sz="1450" dirty="0"/>
-          </a:p>
-          <a:p>
-            <a:r>
-              <a:rPr lang="en-US" sz="1450" dirty="0">
+              <a:t>It should be specific to a public health workflow and should include technical dependencies, governance questions, human.</a:t>
+            </a:r>
+            <a:endParaRPr lang="en-US" sz="1700" dirty="0"/>
+          </a:p>
+        </p:txBody>
+      </p:sp>
+      <p:sp>
+        <p:nvSpPr>
+          <p:cNvPr id="11" name="Shape 9"/>
+          <p:cNvSpPr/>
+          <p:nvPr/>
+        </p:nvSpPr>
+        <p:spPr>
+          <a:xfrm>
+            <a:off x="7909560" y="1417320"/>
+            <a:ext cx="3154680" cy="1828800"/>
+          </a:xfrm>
+          <a:prstGeom prst="roundRect">
+            <a:avLst>
+              <a:gd name="adj" fmla="val 6000"/>
+            </a:avLst>
+          </a:prstGeom>
+          <a:solidFill>
+            <a:srgbClr val="EEF8ED"/>
+          </a:solidFill>
+          <a:ln w="12700">
+            <a:solidFill>
+              <a:srgbClr val="B9D7E6"/>
+            </a:solidFill>
+            <a:prstDash val="solid"/>
+          </a:ln>
+        </p:spPr>
+      </p:sp>
+      <p:sp>
+        <p:nvSpPr>
+          <p:cNvPr id="12" name="Text 10"/>
+          <p:cNvSpPr/>
+          <p:nvPr/>
+        </p:nvSpPr>
+        <p:spPr>
+          <a:xfrm>
+            <a:off x="8074152" y="1563624"/>
+            <a:ext cx="2825496" cy="201168"/>
+          </a:xfrm>
+          <a:prstGeom prst="rect">
+            <a:avLst/>
+          </a:prstGeom>
+          <a:noFill/>
+          <a:ln/>
+        </p:spPr>
+        <p:txBody>
+          <a:bodyPr wrap="square" lIns="0" tIns="0" rIns="0" bIns="0" rtlCol="0" anchor="ctr"/>
+          <a:lstStyle/>
+          <a:p>
+            <a:pPr indent="0" marL="0">
+              <a:buNone/>
+            </a:pPr>
+            <a:r>
+              <a:rPr lang="en-US" sz="950" b="1" dirty="0">
+                <a:solidFill>
+                  <a:srgbClr val="0068B7"/>
+                </a:solidFill>
+                <a:latin typeface="Aptos" pitchFamily="34" charset="0"/>
+                <a:ea typeface="Aptos" pitchFamily="34" charset="-122"/>
+                <a:cs typeface="Aptos" pitchFamily="34" charset="-120"/>
+              </a:rPr>
+              <a:t>Key idea</a:t>
+            </a:r>
+            <a:endParaRPr lang="en-US" sz="950" dirty="0"/>
+          </a:p>
+        </p:txBody>
+      </p:sp>
+      <p:sp>
+        <p:nvSpPr>
+          <p:cNvPr id="13" name="Text 11"/>
+          <p:cNvSpPr/>
+          <p:nvPr/>
+        </p:nvSpPr>
+        <p:spPr>
+          <a:xfrm>
+            <a:off x="8074152" y="1856232"/>
+            <a:ext cx="2825496" cy="1261872"/>
+          </a:xfrm>
+          <a:prstGeom prst="rect">
+            <a:avLst/>
+          </a:prstGeom>
+          <a:noFill/>
+          <a:ln/>
+        </p:spPr>
+        <p:txBody>
+          <a:bodyPr wrap="square" lIns="0" tIns="0" rIns="0" bIns="0" rtlCol="0" anchor="t">
+            <a:normAutofit/>
+          </a:bodyPr>
+          <a:lstStyle/>
+          <a:p>
+            <a:pPr indent="0" marL="0">
+              <a:buNone/>
+            </a:pPr>
+            <a:r>
+              <a:rPr lang="en-US" sz="1250" dirty="0">
                 <a:solidFill>
                   <a:srgbClr val="17364A"/>
                 </a:solidFill>
@@ -4778,13 +7425,106 @@
                 <a:ea typeface="Aptos" pitchFamily="34" charset="-122"/>
                 <a:cs typeface="Aptos" pitchFamily="34" charset="-120"/>
               </a:rPr>
-              <a:t>3. Which statement best describes a common failure mode?</a:t>
-            </a:r>
-            <a:endParaRPr lang="en-US" sz="1450" dirty="0"/>
-          </a:p>
-          <a:p>
-            <a:r>
-              <a:rPr lang="en-US" sz="1450" dirty="0">
+              <a:t>The expected artifact is a completed synthetic dataset assessment.</a:t>
+            </a:r>
+            <a:endParaRPr lang="en-US" sz="1250" dirty="0"/>
+          </a:p>
+        </p:txBody>
+      </p:sp>
+      <p:sp>
+        <p:nvSpPr>
+          <p:cNvPr id="14" name="Shape 12"/>
+          <p:cNvSpPr/>
+          <p:nvPr/>
+        </p:nvSpPr>
+        <p:spPr>
+          <a:xfrm>
+            <a:off x="7909560" y="3520440"/>
+            <a:ext cx="3154680" cy="1737360"/>
+          </a:xfrm>
+          <a:prstGeom prst="roundRect">
+            <a:avLst>
+              <a:gd name="adj" fmla="val 6316"/>
+            </a:avLst>
+          </a:prstGeom>
+          <a:solidFill>
+            <a:srgbClr val="EAF6F8"/>
+          </a:solidFill>
+          <a:ln w="12700">
+            <a:solidFill>
+              <a:srgbClr val="B9D7E6"/>
+            </a:solidFill>
+            <a:prstDash val="solid"/>
+          </a:ln>
+        </p:spPr>
+      </p:sp>
+      <p:sp>
+        <p:nvSpPr>
+          <p:cNvPr id="15" name="Text 13"/>
+          <p:cNvSpPr/>
+          <p:nvPr/>
+        </p:nvSpPr>
+        <p:spPr>
+          <a:xfrm>
+            <a:off x="8074152" y="3666744"/>
+            <a:ext cx="2825496" cy="201168"/>
+          </a:xfrm>
+          <a:prstGeom prst="rect">
+            <a:avLst/>
+          </a:prstGeom>
+          <a:noFill/>
+          <a:ln/>
+        </p:spPr>
+        <p:txBody>
+          <a:bodyPr wrap="square" lIns="0" tIns="0" rIns="0" bIns="0" rtlCol="0" anchor="ctr"/>
+          <a:lstStyle/>
+          <a:p>
+            <a:pPr indent="0" marL="0">
+              <a:buNone/>
+            </a:pPr>
+            <a:r>
+              <a:rPr lang="en-US" sz="950" b="1" dirty="0">
+                <a:solidFill>
+                  <a:srgbClr val="0068B7"/>
+                </a:solidFill>
+                <a:latin typeface="Aptos" pitchFamily="34" charset="0"/>
+                <a:ea typeface="Aptos" pitchFamily="34" charset="-122"/>
+                <a:cs typeface="Aptos" pitchFamily="34" charset="-120"/>
+              </a:rPr>
+              <a:t>Use this for</a:t>
+            </a:r>
+            <a:endParaRPr lang="en-US" sz="950" dirty="0"/>
+          </a:p>
+        </p:txBody>
+      </p:sp>
+      <p:sp>
+        <p:nvSpPr>
+          <p:cNvPr id="16" name="Text 14"/>
+          <p:cNvSpPr/>
+          <p:nvPr/>
+        </p:nvSpPr>
+        <p:spPr>
+          <a:xfrm>
+            <a:off x="8074152" y="3959352"/>
+            <a:ext cx="2825496" cy="1170432"/>
+          </a:xfrm>
+          <a:prstGeom prst="rect">
+            <a:avLst/>
+          </a:prstGeom>
+          <a:noFill/>
+          <a:ln/>
+        </p:spPr>
+        <p:txBody>
+          <a:bodyPr wrap="square" lIns="0" tIns="0" rIns="0" bIns="0" rtlCol="0" anchor="t">
+            <a:normAutofit/>
+          </a:bodyPr>
+          <a:lstStyle/>
+          <a:p>
+            <a:pPr indent="0" marL="0">
+              <a:buNone/>
+            </a:pPr>
+            <a:r>
+              <a:rPr lang="en-US" sz="1250" dirty="0">
                 <a:solidFill>
                   <a:srgbClr val="17364A"/>
                 </a:solidFill>
@@ -4792,23 +7532,9 @@
                 <a:ea typeface="Aptos" pitchFamily="34" charset="-122"/>
                 <a:cs typeface="Aptos" pitchFamily="34" charset="-120"/>
               </a:rPr>
-              <a:t>4. What should be included in the practical artifact for this module?</a:t>
-            </a:r>
-            <a:endParaRPr lang="en-US" sz="1450" dirty="0"/>
-          </a:p>
-          <a:p>
-            <a:r>
-              <a:rPr lang="en-US" sz="1450" dirty="0">
-                <a:solidFill>
-                  <a:srgbClr val="17364A"/>
-                </a:solidFill>
-                <a:latin typeface="Aptos" pitchFamily="34" charset="0"/>
-                <a:ea typeface="Aptos" pitchFamily="34" charset="-122"/>
-                <a:cs typeface="Aptos" pitchFamily="34" charset="-120"/>
-              </a:rPr>
-              <a:t>5. When should the issue be escalated for governance or leadership review?</a:t>
-            </a:r>
-            <a:endParaRPr lang="en-US" sz="1450" dirty="0"/>
+              <a:t>Connect the concept to public health decisions, safeguards, documentation, or implementation work.</a:t>
+            </a:r>
+            <a:endParaRPr lang="en-US" sz="1250" dirty="0"/>
           </a:p>
         </p:txBody>
       </p:sp>
@@ -4871,7 +7597,32 @@
       </p:sp>
       <p:sp>
         <p:nvSpPr>
-          <p:cNvPr id="3" name="Text 1"/>
+          <p:cNvPr id="3" name="Shape 1"/>
+          <p:cNvSpPr/>
+          <p:nvPr/>
+        </p:nvSpPr>
+        <p:spPr>
+          <a:xfrm>
+            <a:off x="0" y="164592"/>
+            <a:ext cx="146304" cy="6693408"/>
+          </a:xfrm>
+          <a:prstGeom prst="rect">
+            <a:avLst/>
+          </a:prstGeom>
+          <a:solidFill>
+            <a:srgbClr val="2F8A28"/>
+          </a:solidFill>
+          <a:ln w="12700">
+            <a:solidFill>
+              <a:srgbClr val="2F8A28"/>
+            </a:solidFill>
+            <a:prstDash val="solid"/>
+          </a:ln>
+        </p:spPr>
+      </p:sp>
+      <p:sp>
+        <p:nvSpPr>
+          <p:cNvPr id="4" name="Text 2"/>
           <p:cNvSpPr/>
           <p:nvPr/>
         </p:nvSpPr>
@@ -4910,7 +7661,7 @@
       </p:sp>
       <p:sp>
         <p:nvSpPr>
-          <p:cNvPr id="4" name="Text 2"/>
+          <p:cNvPr id="5" name="Text 3"/>
           <p:cNvSpPr/>
           <p:nvPr/>
         </p:nvSpPr>
@@ -4949,7 +7700,7 @@
       </p:sp>
       <p:sp>
         <p:nvSpPr>
-          <p:cNvPr id="5" name="Text 3"/>
+          <p:cNvPr id="6" name="Text 4"/>
           <p:cNvSpPr/>
           <p:nvPr/>
         </p:nvSpPr>
@@ -4988,13 +7739,77 @@
       </p:sp>
       <p:sp>
         <p:nvSpPr>
-          <p:cNvPr id="6" name="Text 4"/>
+          <p:cNvPr id="7" name="Shape 5"/>
           <p:cNvSpPr/>
           <p:nvPr/>
         </p:nvSpPr>
         <p:spPr>
           <a:xfrm>
             <a:off x="640080" y="658368"/>
+            <a:ext cx="420624" cy="420624"/>
+          </a:xfrm>
+          <a:prstGeom prst="ellipse">
+            <a:avLst/>
+          </a:prstGeom>
+          <a:solidFill>
+            <a:srgbClr val="0068B7"/>
+          </a:solidFill>
+          <a:ln w="12700">
+            <a:solidFill>
+              <a:srgbClr val="0068B7"/>
+            </a:solidFill>
+            <a:prstDash val="solid"/>
+          </a:ln>
+        </p:spPr>
+      </p:sp>
+      <p:sp>
+        <p:nvSpPr>
+          <p:cNvPr id="8" name="Text 6"/>
+          <p:cNvSpPr/>
+          <p:nvPr/>
+        </p:nvSpPr>
+        <p:spPr>
+          <a:xfrm>
+            <a:off x="640080" y="731520"/>
+            <a:ext cx="420624" cy="164592"/>
+          </a:xfrm>
+          <a:prstGeom prst="rect">
+            <a:avLst/>
+          </a:prstGeom>
+          <a:noFill/>
+          <a:ln/>
+        </p:spPr>
+        <p:txBody>
+          <a:bodyPr wrap="square" lIns="0" tIns="0" rIns="0" bIns="0" rtlCol="0" anchor="ctr"/>
+          <a:lstStyle/>
+          <a:p>
+            <a:pPr algn="ctr" indent="0" marL="0">
+              <a:buNone/>
+            </a:pPr>
+            <a:r>
+              <a:rPr lang="en-US" sz="1100" b="1" dirty="0">
+                <a:solidFill>
+                  <a:srgbClr val="FFFFFF"/>
+                </a:solidFill>
+                <a:latin typeface="Aptos" pitchFamily="34" charset="0"/>
+                <a:ea typeface="Aptos" pitchFamily="34" charset="-122"/>
+                <a:cs typeface="Aptos" pitchFamily="34" charset="-120"/>
+              </a:rPr>
+              <a:t>12</a:t>
+            </a:r>
+            <a:endParaRPr lang="en-US" sz="1100" dirty="0"/>
+          </a:p>
+        </p:txBody>
+      </p:sp>
+      <p:sp>
+        <p:nvSpPr>
+          <p:cNvPr id="9" name="Text 7"/>
+          <p:cNvSpPr/>
+          <p:nvPr/>
+        </p:nvSpPr>
+        <p:spPr>
+          <a:xfrm>
+            <a:off x="640080" y="621792"/>
             <a:ext cx="10881360" cy="566928"/>
           </a:xfrm>
           <a:prstGeom prst="rect">
@@ -5021,7 +7836,7 @@
                 <a:ea typeface="Aptos Display" pitchFamily="34" charset="-122"/>
                 <a:cs typeface="Aptos Display" pitchFamily="34" charset="-120"/>
               </a:rPr>
-              <a:t>References and Resources</a:t>
+              <a:t>Expected Assignment</a:t>
             </a:r>
             <a:endParaRPr lang="en-US" sz="2700" dirty="0"/>
           </a:p>
@@ -5029,14 +7844,14 @@
       </p:sp>
       <p:sp>
         <p:nvSpPr>
-          <p:cNvPr id="7" name="Text 5"/>
-          <p:cNvSpPr/>
-          <p:nvPr/>
-        </p:nvSpPr>
-        <p:spPr>
-          <a:xfrm>
-            <a:off x="822960" y="1325880"/>
-            <a:ext cx="10378440" cy="4800600"/>
+          <p:cNvPr id="10" name="Text 8"/>
+          <p:cNvSpPr/>
+          <p:nvPr/>
+        </p:nvSpPr>
+        <p:spPr>
+          <a:xfrm>
+            <a:off x="868680" y="1417320"/>
+            <a:ext cx="6675120" cy="4434840"/>
           </a:xfrm>
           <a:prstGeom prst="rect">
             <a:avLst/>
@@ -5051,7 +7866,7 @@
           <a:lstStyle/>
           <a:p>
             <a:r>
-              <a:rPr lang="en-US" sz="1450" dirty="0">
+              <a:rPr lang="en-US" sz="1700" dirty="0">
                 <a:solidFill>
                   <a:srgbClr val="17364A"/>
                 </a:solidFill>
@@ -5059,13 +7874,106 @@
                 <a:ea typeface="Aptos" pitchFamily="34" charset="-122"/>
                 <a:cs typeface="Aptos" pitchFamily="34" charset="-120"/>
               </a:rPr>
-              <a:t>NIST AI Risk Management Framework: https://www.nist.gov/itl/ai-risk-management-framework</a:t>
-            </a:r>
-            <a:endParaRPr lang="en-US" sz="1450" dirty="0"/>
-          </a:p>
-          <a:p>
-            <a:r>
-              <a:rPr lang="en-US" sz="1450" dirty="0">
+              <a:t>The expected artifact is a completed synthetic dataset assessment. It should be specific to a public health workflow and.</a:t>
+            </a:r>
+            <a:endParaRPr lang="en-US" sz="1700" dirty="0"/>
+          </a:p>
+        </p:txBody>
+      </p:sp>
+      <p:sp>
+        <p:nvSpPr>
+          <p:cNvPr id="11" name="Shape 9"/>
+          <p:cNvSpPr/>
+          <p:nvPr/>
+        </p:nvSpPr>
+        <p:spPr>
+          <a:xfrm>
+            <a:off x="7909560" y="1417320"/>
+            <a:ext cx="3154680" cy="1828800"/>
+          </a:xfrm>
+          <a:prstGeom prst="roundRect">
+            <a:avLst>
+              <a:gd name="adj" fmla="val 6000"/>
+            </a:avLst>
+          </a:prstGeom>
+          <a:solidFill>
+            <a:srgbClr val="EEF8ED"/>
+          </a:solidFill>
+          <a:ln w="12700">
+            <a:solidFill>
+              <a:srgbClr val="B9D7E6"/>
+            </a:solidFill>
+            <a:prstDash val="solid"/>
+          </a:ln>
+        </p:spPr>
+      </p:sp>
+      <p:sp>
+        <p:nvSpPr>
+          <p:cNvPr id="12" name="Text 10"/>
+          <p:cNvSpPr/>
+          <p:nvPr/>
+        </p:nvSpPr>
+        <p:spPr>
+          <a:xfrm>
+            <a:off x="8074152" y="1563624"/>
+            <a:ext cx="2825496" cy="201168"/>
+          </a:xfrm>
+          <a:prstGeom prst="rect">
+            <a:avLst/>
+          </a:prstGeom>
+          <a:noFill/>
+          <a:ln/>
+        </p:spPr>
+        <p:txBody>
+          <a:bodyPr wrap="square" lIns="0" tIns="0" rIns="0" bIns="0" rtlCol="0" anchor="ctr"/>
+          <a:lstStyle/>
+          <a:p>
+            <a:pPr indent="0" marL="0">
+              <a:buNone/>
+            </a:pPr>
+            <a:r>
+              <a:rPr lang="en-US" sz="950" b="1" dirty="0">
+                <a:solidFill>
+                  <a:srgbClr val="0068B7"/>
+                </a:solidFill>
+                <a:latin typeface="Aptos" pitchFamily="34" charset="0"/>
+                <a:ea typeface="Aptos" pitchFamily="34" charset="-122"/>
+                <a:cs typeface="Aptos" pitchFamily="34" charset="-120"/>
+              </a:rPr>
+              <a:t>Key idea</a:t>
+            </a:r>
+            <a:endParaRPr lang="en-US" sz="950" dirty="0"/>
+          </a:p>
+        </p:txBody>
+      </p:sp>
+      <p:sp>
+        <p:nvSpPr>
+          <p:cNvPr id="13" name="Text 11"/>
+          <p:cNvSpPr/>
+          <p:nvPr/>
+        </p:nvSpPr>
+        <p:spPr>
+          <a:xfrm>
+            <a:off x="8074152" y="1856232"/>
+            <a:ext cx="2825496" cy="1261872"/>
+          </a:xfrm>
+          <a:prstGeom prst="rect">
+            <a:avLst/>
+          </a:prstGeom>
+          <a:noFill/>
+          <a:ln/>
+        </p:spPr>
+        <p:txBody>
+          <a:bodyPr wrap="square" lIns="0" tIns="0" rIns="0" bIns="0" rtlCol="0" anchor="t">
+            <a:normAutofit/>
+          </a:bodyPr>
+          <a:lstStyle/>
+          <a:p>
+            <a:pPr indent="0" marL="0">
+              <a:buNone/>
+            </a:pPr>
+            <a:r>
+              <a:rPr lang="en-US" sz="1250" dirty="0">
                 <a:solidFill>
                   <a:srgbClr val="17364A"/>
                 </a:solidFill>
@@ -5073,13 +7981,106 @@
                 <a:ea typeface="Aptos" pitchFamily="34" charset="-122"/>
                 <a:cs typeface="Aptos" pitchFamily="34" charset="-120"/>
               </a:rPr>
-              <a:t>NIST Privacy Framework and differential privacy resources</a:t>
-            </a:r>
-            <a:endParaRPr lang="en-US" sz="1450" dirty="0"/>
-          </a:p>
-          <a:p>
-            <a:r>
-              <a:rPr lang="en-US" sz="1450" dirty="0">
+              <a:t>The expected artifact is a completed synthetic dataset assessment. It should be specific to a public health workflow and.</a:t>
+            </a:r>
+            <a:endParaRPr lang="en-US" sz="1250" dirty="0"/>
+          </a:p>
+        </p:txBody>
+      </p:sp>
+      <p:sp>
+        <p:nvSpPr>
+          <p:cNvPr id="14" name="Shape 12"/>
+          <p:cNvSpPr/>
+          <p:nvPr/>
+        </p:nvSpPr>
+        <p:spPr>
+          <a:xfrm>
+            <a:off x="7909560" y="3520440"/>
+            <a:ext cx="3154680" cy="1737360"/>
+          </a:xfrm>
+          <a:prstGeom prst="roundRect">
+            <a:avLst>
+              <a:gd name="adj" fmla="val 6316"/>
+            </a:avLst>
+          </a:prstGeom>
+          <a:solidFill>
+            <a:srgbClr val="EAF6F8"/>
+          </a:solidFill>
+          <a:ln w="12700">
+            <a:solidFill>
+              <a:srgbClr val="B9D7E6"/>
+            </a:solidFill>
+            <a:prstDash val="solid"/>
+          </a:ln>
+        </p:spPr>
+      </p:sp>
+      <p:sp>
+        <p:nvSpPr>
+          <p:cNvPr id="15" name="Text 13"/>
+          <p:cNvSpPr/>
+          <p:nvPr/>
+        </p:nvSpPr>
+        <p:spPr>
+          <a:xfrm>
+            <a:off x="8074152" y="3666744"/>
+            <a:ext cx="2825496" cy="201168"/>
+          </a:xfrm>
+          <a:prstGeom prst="rect">
+            <a:avLst/>
+          </a:prstGeom>
+          <a:noFill/>
+          <a:ln/>
+        </p:spPr>
+        <p:txBody>
+          <a:bodyPr wrap="square" lIns="0" tIns="0" rIns="0" bIns="0" rtlCol="0" anchor="ctr"/>
+          <a:lstStyle/>
+          <a:p>
+            <a:pPr indent="0" marL="0">
+              <a:buNone/>
+            </a:pPr>
+            <a:r>
+              <a:rPr lang="en-US" sz="950" b="1" dirty="0">
+                <a:solidFill>
+                  <a:srgbClr val="0068B7"/>
+                </a:solidFill>
+                <a:latin typeface="Aptos" pitchFamily="34" charset="0"/>
+                <a:ea typeface="Aptos" pitchFamily="34" charset="-122"/>
+                <a:cs typeface="Aptos" pitchFamily="34" charset="-120"/>
+              </a:rPr>
+              <a:t>Use this for</a:t>
+            </a:r>
+            <a:endParaRPr lang="en-US" sz="950" dirty="0"/>
+          </a:p>
+        </p:txBody>
+      </p:sp>
+      <p:sp>
+        <p:nvSpPr>
+          <p:cNvPr id="16" name="Text 14"/>
+          <p:cNvSpPr/>
+          <p:nvPr/>
+        </p:nvSpPr>
+        <p:spPr>
+          <a:xfrm>
+            <a:off x="8074152" y="3959352"/>
+            <a:ext cx="2825496" cy="1170432"/>
+          </a:xfrm>
+          <a:prstGeom prst="rect">
+            <a:avLst/>
+          </a:prstGeom>
+          <a:noFill/>
+          <a:ln/>
+        </p:spPr>
+        <p:txBody>
+          <a:bodyPr wrap="square" lIns="0" tIns="0" rIns="0" bIns="0" rtlCol="0" anchor="t">
+            <a:normAutofit/>
+          </a:bodyPr>
+          <a:lstStyle/>
+          <a:p>
+            <a:pPr indent="0" marL="0">
+              <a:buNone/>
+            </a:pPr>
+            <a:r>
+              <a:rPr lang="en-US" sz="1250" dirty="0">
                 <a:solidFill>
                   <a:srgbClr val="17364A"/>
                 </a:solidFill>
@@ -5087,37 +8088,9 @@
                 <a:ea typeface="Aptos" pitchFamily="34" charset="-122"/>
                 <a:cs typeface="Aptos" pitchFamily="34" charset="-120"/>
               </a:rPr>
-              <a:t>NIST Generative AI Profile: https://www.nist.gov/publications/artificial-intelligence-risk-management-framework-generative-artificial-intelligence</a:t>
-            </a:r>
-            <a:endParaRPr lang="en-US" sz="1450" dirty="0"/>
-          </a:p>
-          <a:p>
-            <a:r>
-              <a:rPr lang="en-US" sz="1450" dirty="0">
-                <a:solidFill>
-                  <a:srgbClr val="17364A"/>
-                </a:solidFill>
-                <a:latin typeface="Aptos" pitchFamily="34" charset="0"/>
-                <a:ea typeface="Aptos" pitchFamily="34" charset="-122"/>
-                <a:cs typeface="Aptos" pitchFamily="34" charset="-120"/>
-              </a:rPr>
-              <a:t>CDC Public Health Data Strategy and Data Modernization resources: https://www.cdc.gov/public-health-data-strategy/php/about/index.html</a:t>
-            </a:r>
-            <a:endParaRPr lang="en-US" sz="1450" dirty="0"/>
-          </a:p>
-          <a:p>
-            <a:r>
-              <a:rPr lang="en-US" sz="1450" dirty="0">
-                <a:solidFill>
-                  <a:srgbClr val="17364A"/>
-                </a:solidFill>
-                <a:latin typeface="Aptos" pitchFamily="34" charset="0"/>
-                <a:ea typeface="Aptos" pitchFamily="34" charset="-122"/>
-                <a:cs typeface="Aptos" pitchFamily="34" charset="-120"/>
-              </a:rPr>
-              <a:t>OWASP Top 10 for LLM Applications, when security or AI integrations are relevant</a:t>
-            </a:r>
-            <a:endParaRPr lang="en-US" sz="1450" dirty="0"/>
+              <a:t>Connect the concept to public health decisions, safeguards, documentation, or implementation work.</a:t>
+            </a:r>
+            <a:endParaRPr lang="en-US" sz="1250" dirty="0"/>
           </a:p>
         </p:txBody>
       </p:sp>
@@ -5180,7 +8153,32 @@
       </p:sp>
       <p:sp>
         <p:nvSpPr>
-          <p:cNvPr id="3" name="Text 1"/>
+          <p:cNvPr id="3" name="Shape 1"/>
+          <p:cNvSpPr/>
+          <p:nvPr/>
+        </p:nvSpPr>
+        <p:spPr>
+          <a:xfrm>
+            <a:off x="0" y="164592"/>
+            <a:ext cx="146304" cy="6693408"/>
+          </a:xfrm>
+          <a:prstGeom prst="rect">
+            <a:avLst/>
+          </a:prstGeom>
+          <a:solidFill>
+            <a:srgbClr val="2F8A28"/>
+          </a:solidFill>
+          <a:ln w="12700">
+            <a:solidFill>
+              <a:srgbClr val="2F8A28"/>
+            </a:solidFill>
+            <a:prstDash val="solid"/>
+          </a:ln>
+        </p:spPr>
+      </p:sp>
+      <p:sp>
+        <p:nvSpPr>
+          <p:cNvPr id="4" name="Text 2"/>
           <p:cNvSpPr/>
           <p:nvPr/>
         </p:nvSpPr>
@@ -5219,7 +8217,7 @@
       </p:sp>
       <p:sp>
         <p:nvSpPr>
-          <p:cNvPr id="4" name="Text 2"/>
+          <p:cNvPr id="5" name="Text 3"/>
           <p:cNvSpPr/>
           <p:nvPr/>
         </p:nvSpPr>
@@ -5258,7 +8256,7 @@
       </p:sp>
       <p:sp>
         <p:nvSpPr>
-          <p:cNvPr id="5" name="Text 3"/>
+          <p:cNvPr id="6" name="Text 4"/>
           <p:cNvSpPr/>
           <p:nvPr/>
         </p:nvSpPr>
@@ -5297,13 +8295,77 @@
       </p:sp>
       <p:sp>
         <p:nvSpPr>
-          <p:cNvPr id="6" name="Text 4"/>
+          <p:cNvPr id="7" name="Shape 5"/>
           <p:cNvSpPr/>
           <p:nvPr/>
         </p:nvSpPr>
         <p:spPr>
           <a:xfrm>
             <a:off x="640080" y="658368"/>
+            <a:ext cx="420624" cy="420624"/>
+          </a:xfrm>
+          <a:prstGeom prst="ellipse">
+            <a:avLst/>
+          </a:prstGeom>
+          <a:solidFill>
+            <a:srgbClr val="0068B7"/>
+          </a:solidFill>
+          <a:ln w="12700">
+            <a:solidFill>
+              <a:srgbClr val="0068B7"/>
+            </a:solidFill>
+            <a:prstDash val="solid"/>
+          </a:ln>
+        </p:spPr>
+      </p:sp>
+      <p:sp>
+        <p:nvSpPr>
+          <p:cNvPr id="8" name="Text 6"/>
+          <p:cNvSpPr/>
+          <p:nvPr/>
+        </p:nvSpPr>
+        <p:spPr>
+          <a:xfrm>
+            <a:off x="640080" y="731520"/>
+            <a:ext cx="420624" cy="164592"/>
+          </a:xfrm>
+          <a:prstGeom prst="rect">
+            <a:avLst/>
+          </a:prstGeom>
+          <a:noFill/>
+          <a:ln/>
+        </p:spPr>
+        <p:txBody>
+          <a:bodyPr wrap="square" lIns="0" tIns="0" rIns="0" bIns="0" rtlCol="0" anchor="ctr"/>
+          <a:lstStyle/>
+          <a:p>
+            <a:pPr algn="ctr" indent="0" marL="0">
+              <a:buNone/>
+            </a:pPr>
+            <a:r>
+              <a:rPr lang="en-US" sz="1100" b="1" dirty="0">
+                <a:solidFill>
+                  <a:srgbClr val="FFFFFF"/>
+                </a:solidFill>
+                <a:latin typeface="Aptos" pitchFamily="34" charset="0"/>
+                <a:ea typeface="Aptos" pitchFamily="34" charset="-122"/>
+                <a:cs typeface="Aptos" pitchFamily="34" charset="-120"/>
+              </a:rPr>
+              <a:t>13</a:t>
+            </a:r>
+            <a:endParaRPr lang="en-US" sz="1100" dirty="0"/>
+          </a:p>
+        </p:txBody>
+      </p:sp>
+      <p:sp>
+        <p:nvSpPr>
+          <p:cNvPr id="9" name="Text 7"/>
+          <p:cNvSpPr/>
+          <p:nvPr/>
+        </p:nvSpPr>
+        <p:spPr>
+          <a:xfrm>
+            <a:off x="640080" y="621792"/>
             <a:ext cx="10881360" cy="566928"/>
           </a:xfrm>
           <a:prstGeom prst="rect">
@@ -5330,7 +8392,7 @@
                 <a:ea typeface="Aptos Display" pitchFamily="34" charset="-122"/>
                 <a:cs typeface="Aptos Display" pitchFamily="34" charset="-120"/>
               </a:rPr>
-              <a:t>References and Resources Continued</a:t>
+              <a:t>Knowledge Check</a:t>
             </a:r>
             <a:endParaRPr lang="en-US" sz="2700" dirty="0"/>
           </a:p>
@@ -5338,14 +8400,14 @@
       </p:sp>
       <p:sp>
         <p:nvSpPr>
-          <p:cNvPr id="7" name="Text 5"/>
-          <p:cNvSpPr/>
-          <p:nvPr/>
-        </p:nvSpPr>
-        <p:spPr>
-          <a:xfrm>
-            <a:off x="822960" y="1325880"/>
-            <a:ext cx="10378440" cy="4800600"/>
+          <p:cNvPr id="10" name="Text 8"/>
+          <p:cNvSpPr/>
+          <p:nvPr/>
+        </p:nvSpPr>
+        <p:spPr>
+          <a:xfrm>
+            <a:off x="868680" y="1417320"/>
+            <a:ext cx="6675120" cy="4434840"/>
           </a:xfrm>
           <a:prstGeom prst="rect">
             <a:avLst/>
@@ -5360,7 +8422,7 @@
           <a:lstStyle/>
           <a:p>
             <a:r>
-              <a:rPr lang="en-US" sz="1450" dirty="0">
+              <a:rPr lang="en-US" sz="1700" dirty="0">
                 <a:solidFill>
                   <a:srgbClr val="17364A"/>
                 </a:solidFill>
@@ -5368,9 +8430,265 @@
                 <a:ea typeface="Aptos" pitchFamily="34" charset="-122"/>
                 <a:cs typeface="Aptos" pitchFamily="34" charset="-120"/>
               </a:rPr>
-              <a:t>Agency privacy, cybersecurity, data governance, procurement, and records management policies</a:t>
-            </a:r>
-            <a:endParaRPr lang="en-US" sz="1450" dirty="0"/>
+              <a:t>1. What is the best reason to address synthetic data for public health ai before deployment?</a:t>
+            </a:r>
+            <a:endParaRPr lang="en-US" sz="1700" dirty="0"/>
+          </a:p>
+          <a:p>
+            <a:r>
+              <a:rPr lang="en-US" sz="1700" dirty="0">
+                <a:solidFill>
+                  <a:srgbClr val="17364A"/>
+                </a:solidFill>
+                <a:latin typeface="Aptos" pitchFamily="34" charset="0"/>
+                <a:ea typeface="Aptos" pitchFamily="34" charset="-122"/>
+                <a:cs typeface="Aptos" pitchFamily="34" charset="-120"/>
+              </a:rPr>
+              <a:t>2. Which practice best supports responsible implementation?</a:t>
+            </a:r>
+            <a:endParaRPr lang="en-US" sz="1700" dirty="0"/>
+          </a:p>
+          <a:p>
+            <a:r>
+              <a:rPr lang="en-US" sz="1700" dirty="0">
+                <a:solidFill>
+                  <a:srgbClr val="17364A"/>
+                </a:solidFill>
+                <a:latin typeface="Aptos" pitchFamily="34" charset="0"/>
+                <a:ea typeface="Aptos" pitchFamily="34" charset="-122"/>
+                <a:cs typeface="Aptos" pitchFamily="34" charset="-120"/>
+              </a:rPr>
+              <a:t>3. Which statement best describes a common failure mode?</a:t>
+            </a:r>
+            <a:endParaRPr lang="en-US" sz="1700" dirty="0"/>
+          </a:p>
+          <a:p>
+            <a:r>
+              <a:rPr lang="en-US" sz="1700" dirty="0">
+                <a:solidFill>
+                  <a:srgbClr val="17364A"/>
+                </a:solidFill>
+                <a:latin typeface="Aptos" pitchFamily="34" charset="0"/>
+                <a:ea typeface="Aptos" pitchFamily="34" charset="-122"/>
+                <a:cs typeface="Aptos" pitchFamily="34" charset="-120"/>
+              </a:rPr>
+              <a:t>4. What should be included in the practical artifact for this module?</a:t>
+            </a:r>
+            <a:endParaRPr lang="en-US" sz="1700" dirty="0"/>
+          </a:p>
+        </p:txBody>
+      </p:sp>
+      <p:sp>
+        <p:nvSpPr>
+          <p:cNvPr id="11" name="Shape 9"/>
+          <p:cNvSpPr/>
+          <p:nvPr/>
+        </p:nvSpPr>
+        <p:spPr>
+          <a:xfrm>
+            <a:off x="7909560" y="1417320"/>
+            <a:ext cx="3154680" cy="1828800"/>
+          </a:xfrm>
+          <a:prstGeom prst="roundRect">
+            <a:avLst>
+              <a:gd name="adj" fmla="val 6000"/>
+            </a:avLst>
+          </a:prstGeom>
+          <a:solidFill>
+            <a:srgbClr val="EEF8ED"/>
+          </a:solidFill>
+          <a:ln w="12700">
+            <a:solidFill>
+              <a:srgbClr val="B9D7E6"/>
+            </a:solidFill>
+            <a:prstDash val="solid"/>
+          </a:ln>
+        </p:spPr>
+      </p:sp>
+      <p:sp>
+        <p:nvSpPr>
+          <p:cNvPr id="12" name="Text 10"/>
+          <p:cNvSpPr/>
+          <p:nvPr/>
+        </p:nvSpPr>
+        <p:spPr>
+          <a:xfrm>
+            <a:off x="8074152" y="1563624"/>
+            <a:ext cx="2825496" cy="201168"/>
+          </a:xfrm>
+          <a:prstGeom prst="rect">
+            <a:avLst/>
+          </a:prstGeom>
+          <a:noFill/>
+          <a:ln/>
+        </p:spPr>
+        <p:txBody>
+          <a:bodyPr wrap="square" lIns="0" tIns="0" rIns="0" bIns="0" rtlCol="0" anchor="ctr"/>
+          <a:lstStyle/>
+          <a:p>
+            <a:pPr indent="0" marL="0">
+              <a:buNone/>
+            </a:pPr>
+            <a:r>
+              <a:rPr lang="en-US" sz="950" b="1" dirty="0">
+                <a:solidFill>
+                  <a:srgbClr val="0068B7"/>
+                </a:solidFill>
+                <a:latin typeface="Aptos" pitchFamily="34" charset="0"/>
+                <a:ea typeface="Aptos" pitchFamily="34" charset="-122"/>
+                <a:cs typeface="Aptos" pitchFamily="34" charset="-120"/>
+              </a:rPr>
+              <a:t>Key idea</a:t>
+            </a:r>
+            <a:endParaRPr lang="en-US" sz="950" dirty="0"/>
+          </a:p>
+        </p:txBody>
+      </p:sp>
+      <p:sp>
+        <p:nvSpPr>
+          <p:cNvPr id="13" name="Text 11"/>
+          <p:cNvSpPr/>
+          <p:nvPr/>
+        </p:nvSpPr>
+        <p:spPr>
+          <a:xfrm>
+            <a:off x="8074152" y="1856232"/>
+            <a:ext cx="2825496" cy="1261872"/>
+          </a:xfrm>
+          <a:prstGeom prst="rect">
+            <a:avLst/>
+          </a:prstGeom>
+          <a:noFill/>
+          <a:ln/>
+        </p:spPr>
+        <p:txBody>
+          <a:bodyPr wrap="square" lIns="0" tIns="0" rIns="0" bIns="0" rtlCol="0" anchor="t">
+            <a:normAutofit/>
+          </a:bodyPr>
+          <a:lstStyle/>
+          <a:p>
+            <a:pPr indent="0" marL="0">
+              <a:buNone/>
+            </a:pPr>
+            <a:r>
+              <a:rPr lang="en-US" sz="1250" dirty="0">
+                <a:solidFill>
+                  <a:srgbClr val="17364A"/>
+                </a:solidFill>
+                <a:latin typeface="Aptos" pitchFamily="34" charset="0"/>
+                <a:ea typeface="Aptos" pitchFamily="34" charset="-122"/>
+                <a:cs typeface="Aptos" pitchFamily="34" charset="-120"/>
+              </a:rPr>
+              <a:t>1. What is the best reason to address synthetic data for public health ai before deployment?</a:t>
+            </a:r>
+            <a:endParaRPr lang="en-US" sz="1250" dirty="0"/>
+          </a:p>
+        </p:txBody>
+      </p:sp>
+      <p:sp>
+        <p:nvSpPr>
+          <p:cNvPr id="14" name="Shape 12"/>
+          <p:cNvSpPr/>
+          <p:nvPr/>
+        </p:nvSpPr>
+        <p:spPr>
+          <a:xfrm>
+            <a:off x="7909560" y="3520440"/>
+            <a:ext cx="3154680" cy="1737360"/>
+          </a:xfrm>
+          <a:prstGeom prst="roundRect">
+            <a:avLst>
+              <a:gd name="adj" fmla="val 6316"/>
+            </a:avLst>
+          </a:prstGeom>
+          <a:solidFill>
+            <a:srgbClr val="EAF6F8"/>
+          </a:solidFill>
+          <a:ln w="12700">
+            <a:solidFill>
+              <a:srgbClr val="B9D7E6"/>
+            </a:solidFill>
+            <a:prstDash val="solid"/>
+          </a:ln>
+        </p:spPr>
+      </p:sp>
+      <p:sp>
+        <p:nvSpPr>
+          <p:cNvPr id="15" name="Text 13"/>
+          <p:cNvSpPr/>
+          <p:nvPr/>
+        </p:nvSpPr>
+        <p:spPr>
+          <a:xfrm>
+            <a:off x="8074152" y="3666744"/>
+            <a:ext cx="2825496" cy="201168"/>
+          </a:xfrm>
+          <a:prstGeom prst="rect">
+            <a:avLst/>
+          </a:prstGeom>
+          <a:noFill/>
+          <a:ln/>
+        </p:spPr>
+        <p:txBody>
+          <a:bodyPr wrap="square" lIns="0" tIns="0" rIns="0" bIns="0" rtlCol="0" anchor="ctr"/>
+          <a:lstStyle/>
+          <a:p>
+            <a:pPr indent="0" marL="0">
+              <a:buNone/>
+            </a:pPr>
+            <a:r>
+              <a:rPr lang="en-US" sz="950" b="1" dirty="0">
+                <a:solidFill>
+                  <a:srgbClr val="0068B7"/>
+                </a:solidFill>
+                <a:latin typeface="Aptos" pitchFamily="34" charset="0"/>
+                <a:ea typeface="Aptos" pitchFamily="34" charset="-122"/>
+                <a:cs typeface="Aptos" pitchFamily="34" charset="-120"/>
+              </a:rPr>
+              <a:t>Use this for</a:t>
+            </a:r>
+            <a:endParaRPr lang="en-US" sz="950" dirty="0"/>
+          </a:p>
+        </p:txBody>
+      </p:sp>
+      <p:sp>
+        <p:nvSpPr>
+          <p:cNvPr id="16" name="Text 14"/>
+          <p:cNvSpPr/>
+          <p:nvPr/>
+        </p:nvSpPr>
+        <p:spPr>
+          <a:xfrm>
+            <a:off x="8074152" y="3959352"/>
+            <a:ext cx="2825496" cy="1170432"/>
+          </a:xfrm>
+          <a:prstGeom prst="rect">
+            <a:avLst/>
+          </a:prstGeom>
+          <a:noFill/>
+          <a:ln/>
+        </p:spPr>
+        <p:txBody>
+          <a:bodyPr wrap="square" lIns="0" tIns="0" rIns="0" bIns="0" rtlCol="0" anchor="t">
+            <a:normAutofit/>
+          </a:bodyPr>
+          <a:lstStyle/>
+          <a:p>
+            <a:pPr indent="0" marL="0">
+              <a:buNone/>
+            </a:pPr>
+            <a:r>
+              <a:rPr lang="en-US" sz="1250" dirty="0">
+                <a:solidFill>
+                  <a:srgbClr val="17364A"/>
+                </a:solidFill>
+                <a:latin typeface="Aptos" pitchFamily="34" charset="0"/>
+                <a:ea typeface="Aptos" pitchFamily="34" charset="-122"/>
+                <a:cs typeface="Aptos" pitchFamily="34" charset="-120"/>
+              </a:rPr>
+              <a:t>Connect the concept to public health decisions, safeguards, documentation, or implementation work.</a:t>
+            </a:r>
+            <a:endParaRPr lang="en-US" sz="1250" dirty="0"/>
           </a:p>
         </p:txBody>
       </p:sp>
@@ -5433,7 +8751,32 @@
       </p:sp>
       <p:sp>
         <p:nvSpPr>
-          <p:cNvPr id="3" name="Text 1"/>
+          <p:cNvPr id="3" name="Shape 1"/>
+          <p:cNvSpPr/>
+          <p:nvPr/>
+        </p:nvSpPr>
+        <p:spPr>
+          <a:xfrm>
+            <a:off x="0" y="164592"/>
+            <a:ext cx="146304" cy="6693408"/>
+          </a:xfrm>
+          <a:prstGeom prst="rect">
+            <a:avLst/>
+          </a:prstGeom>
+          <a:solidFill>
+            <a:srgbClr val="2F8A28"/>
+          </a:solidFill>
+          <a:ln w="12700">
+            <a:solidFill>
+              <a:srgbClr val="2F8A28"/>
+            </a:solidFill>
+            <a:prstDash val="solid"/>
+          </a:ln>
+        </p:spPr>
+      </p:sp>
+      <p:sp>
+        <p:nvSpPr>
+          <p:cNvPr id="4" name="Text 2"/>
           <p:cNvSpPr/>
           <p:nvPr/>
         </p:nvSpPr>
@@ -5472,7 +8815,7 @@
       </p:sp>
       <p:sp>
         <p:nvSpPr>
-          <p:cNvPr id="4" name="Text 2"/>
+          <p:cNvPr id="5" name="Text 3"/>
           <p:cNvSpPr/>
           <p:nvPr/>
         </p:nvSpPr>
@@ -5511,7 +8854,7 @@
       </p:sp>
       <p:sp>
         <p:nvSpPr>
-          <p:cNvPr id="5" name="Text 3"/>
+          <p:cNvPr id="6" name="Text 4"/>
           <p:cNvSpPr/>
           <p:nvPr/>
         </p:nvSpPr>
@@ -5550,7 +8893,7 @@
       </p:sp>
       <p:sp>
         <p:nvSpPr>
-          <p:cNvPr id="6" name="Text 4"/>
+          <p:cNvPr id="7" name="Text 5"/>
           <p:cNvSpPr/>
           <p:nvPr/>
         </p:nvSpPr>
@@ -5583,7 +8926,7 @@
                 <a:ea typeface="Aptos Display" pitchFamily="34" charset="-122"/>
                 <a:cs typeface="Aptos Display" pitchFamily="34" charset="-120"/>
               </a:rPr>
-              <a:t>Module Context</a:t>
+              <a:t>What this module helps you do</a:t>
             </a:r>
             <a:endParaRPr lang="en-US" sz="2700" dirty="0"/>
           </a:p>
@@ -5591,14 +8934,14 @@
       </p:sp>
       <p:sp>
         <p:nvSpPr>
-          <p:cNvPr id="7" name="Text 5"/>
-          <p:cNvSpPr/>
-          <p:nvPr/>
-        </p:nvSpPr>
-        <p:spPr>
-          <a:xfrm>
-            <a:off x="822960" y="1325880"/>
-            <a:ext cx="10378440" cy="1371600"/>
+          <p:cNvPr id="8" name="Text 6"/>
+          <p:cNvSpPr/>
+          <p:nvPr/>
+        </p:nvSpPr>
+        <p:spPr>
+          <a:xfrm>
+            <a:off x="868680" y="1417320"/>
+            <a:ext cx="6675120" cy="3291840"/>
           </a:xfrm>
           <a:prstGeom prst="rect">
             <a:avLst/>
@@ -5613,7 +8956,7 @@
           <a:lstStyle/>
           <a:p>
             <a:r>
-              <a:rPr lang="en-US" sz="1600" dirty="0">
+              <a:rPr lang="en-US" sz="1700" dirty="0">
                 <a:solidFill>
                   <a:srgbClr val="17364A"/>
                 </a:solidFill>
@@ -5621,13 +8964,13 @@
                 <a:ea typeface="Aptos" pitchFamily="34" charset="-122"/>
                 <a:cs typeface="Aptos" pitchFamily="34" charset="-120"/>
               </a:rPr>
-              <a:t>Level: intermediate/practitioner</a:t>
-            </a:r>
-            <a:endParaRPr lang="en-US" sz="1600" dirty="0"/>
-          </a:p>
-          <a:p>
-            <a:r>
-              <a:rPr lang="en-US" sz="1600" dirty="0">
+              <a:t>Synthetic data are artificially generated data that are designed to resemble real data without directly copying every record from a real person.</a:t>
+            </a:r>
+            <a:endParaRPr lang="en-US" sz="1700" dirty="0"/>
+          </a:p>
+          <a:p>
+            <a:r>
+              <a:rPr lang="en-US" sz="1700" dirty="0">
                 <a:solidFill>
                   <a:srgbClr val="17364A"/>
                 </a:solidFill>
@@ -5635,13 +8978,13 @@
                 <a:ea typeface="Aptos" pitchFamily="34" charset="-122"/>
                 <a:cs typeface="Aptos" pitchFamily="34" charset="-120"/>
               </a:rPr>
-              <a:t>Primary track: Analytics and Modeling Track</a:t>
-            </a:r>
-            <a:endParaRPr lang="en-US" sz="1600" dirty="0"/>
-          </a:p>
-          <a:p>
-            <a:r>
-              <a:rPr lang="en-US" sz="1600" dirty="0">
+              <a:t>In public health, synthetic data can support training, software testing, demonstrations, model prototyping, and vendor evaluation when real data are.</a:t>
+            </a:r>
+            <a:endParaRPr lang="en-US" sz="1700" dirty="0"/>
+          </a:p>
+          <a:p>
+            <a:r>
+              <a:rPr lang="en-US" sz="1700" dirty="0">
                 <a:solidFill>
                   <a:srgbClr val="17364A"/>
                 </a:solidFill>
@@ -5649,31 +8992,97 @@
                 <a:ea typeface="Aptos" pitchFamily="34" charset="-122"/>
                 <a:cs typeface="Aptos" pitchFamily="34" charset="-120"/>
               </a:rPr>
-              <a:t>Appears in tracks: operations-data-quality</a:t>
-            </a:r>
-            <a:endParaRPr lang="en-US" sz="1600" dirty="0"/>
-          </a:p>
-        </p:txBody>
-      </p:sp>
-      <p:sp>
-        <p:nvSpPr>
-          <p:cNvPr id="8" name="Text 6"/>
-          <p:cNvSpPr/>
-          <p:nvPr/>
-        </p:nvSpPr>
-        <p:spPr>
-          <a:xfrm>
-            <a:off x="822960" y="2743200"/>
-            <a:ext cx="10378440" cy="2834640"/>
-          </a:xfrm>
-          <a:prstGeom prst="rect">
-            <a:avLst/>
-          </a:prstGeom>
-          <a:noFill/>
-          <a:ln/>
-        </p:spPr>
-        <p:txBody>
-          <a:bodyPr wrap="square" lIns="1016" tIns="1016" rIns="1016" bIns="1016" rtlCol="0" anchor="t">
+              <a:t>This module helps learners understand both the promise and limitations of synthetic data, including privacy risk, analytic utility,.</a:t>
+            </a:r>
+            <a:endParaRPr lang="en-US" sz="1700" dirty="0"/>
+          </a:p>
+        </p:txBody>
+      </p:sp>
+      <p:sp>
+        <p:nvSpPr>
+          <p:cNvPr id="9" name="Shape 7"/>
+          <p:cNvSpPr/>
+          <p:nvPr/>
+        </p:nvSpPr>
+        <p:spPr>
+          <a:xfrm>
+            <a:off x="7909560" y="1417320"/>
+            <a:ext cx="3154680" cy="1920240"/>
+          </a:xfrm>
+          <a:prstGeom prst="roundRect">
+            <a:avLst>
+              <a:gd name="adj" fmla="val 5714"/>
+            </a:avLst>
+          </a:prstGeom>
+          <a:solidFill>
+            <a:srgbClr val="EAF6F8"/>
+          </a:solidFill>
+          <a:ln w="12700">
+            <a:solidFill>
+              <a:srgbClr val="B9D7E6"/>
+            </a:solidFill>
+            <a:prstDash val="solid"/>
+          </a:ln>
+        </p:spPr>
+      </p:sp>
+      <p:sp>
+        <p:nvSpPr>
+          <p:cNvPr id="10" name="Text 8"/>
+          <p:cNvSpPr/>
+          <p:nvPr/>
+        </p:nvSpPr>
+        <p:spPr>
+          <a:xfrm>
+            <a:off x="8074152" y="1563624"/>
+            <a:ext cx="2825496" cy="201168"/>
+          </a:xfrm>
+          <a:prstGeom prst="rect">
+            <a:avLst/>
+          </a:prstGeom>
+          <a:noFill/>
+          <a:ln/>
+        </p:spPr>
+        <p:txBody>
+          <a:bodyPr wrap="square" lIns="0" tIns="0" rIns="0" bIns="0" rtlCol="0" anchor="ctr"/>
+          <a:lstStyle/>
+          <a:p>
+            <a:pPr indent="0" marL="0">
+              <a:buNone/>
+            </a:pPr>
+            <a:r>
+              <a:rPr lang="en-US" sz="950" b="1" dirty="0">
+                <a:solidFill>
+                  <a:srgbClr val="0068B7"/>
+                </a:solidFill>
+                <a:latin typeface="Aptos" pitchFamily="34" charset="0"/>
+                <a:ea typeface="Aptos" pitchFamily="34" charset="-122"/>
+                <a:cs typeface="Aptos" pitchFamily="34" charset="-120"/>
+              </a:rPr>
+              <a:t>Module details</a:t>
+            </a:r>
+            <a:endParaRPr lang="en-US" sz="950" dirty="0"/>
+          </a:p>
+        </p:txBody>
+      </p:sp>
+      <p:sp>
+        <p:nvSpPr>
+          <p:cNvPr id="11" name="Text 9"/>
+          <p:cNvSpPr/>
+          <p:nvPr/>
+        </p:nvSpPr>
+        <p:spPr>
+          <a:xfrm>
+            <a:off x="8074152" y="1856232"/>
+            <a:ext cx="2825496" cy="1353312"/>
+          </a:xfrm>
+          <a:prstGeom prst="rect">
+            <a:avLst/>
+          </a:prstGeom>
+          <a:noFill/>
+          <a:ln/>
+        </p:spPr>
+        <p:txBody>
+          <a:bodyPr wrap="square" lIns="0" tIns="0" rIns="0" bIns="0" rtlCol="0" anchor="t">
             <a:normAutofit/>
           </a:bodyPr>
           <a:lstStyle/>
@@ -5682,7 +9091,7 @@
               <a:buNone/>
             </a:pPr>
             <a:r>
-              <a:rPr lang="en-US" sz="1400" dirty="0">
+              <a:rPr lang="en-US" sz="1250" dirty="0">
                 <a:solidFill>
                   <a:srgbClr val="17364A"/>
                 </a:solidFill>
@@ -5690,9 +9099,1240 @@
                 <a:ea typeface="Aptos" pitchFamily="34" charset="-122"/>
                 <a:cs typeface="Aptos" pitchFamily="34" charset="-120"/>
               </a:rPr>
-              <a:t>Synthetic data are artificially generated data that are designed to resemble real data without directly copying every record from a real person. In public health, synthetic data can support training, software testing, demonstrations, model prototyping, and vendor evaluation when real data are too sensitive or difficult to share. This module helps learners understand both the promise and limitations of synthetic data, including privacy risk, analytic utility, representativeness, and validation.</a:t>
-            </a:r>
-            <a:endParaRPr lang="en-US" sz="1400" dirty="0"/>
+              <a:t>Level: intermediate/practitioner</a:t>
+            </a:r>
+            <a:endParaRPr lang="en-US" sz="1250" dirty="0"/>
+          </a:p>
+          <a:p>
+            <a:pPr indent="0" marL="0">
+              <a:buNone/>
+            </a:pPr>
+            <a:r>
+              <a:rPr lang="en-US" sz="1250" dirty="0">
+                <a:solidFill>
+                  <a:srgbClr val="17364A"/>
+                </a:solidFill>
+                <a:latin typeface="Aptos" pitchFamily="34" charset="0"/>
+                <a:ea typeface="Aptos" pitchFamily="34" charset="-122"/>
+                <a:cs typeface="Aptos" pitchFamily="34" charset="-120"/>
+              </a:rPr>
+              <a:t>Primary track: Analytics and Modeling Track</a:t>
+            </a:r>
+            <a:endParaRPr lang="en-US" sz="1250" dirty="0"/>
+          </a:p>
+          <a:p>
+            <a:pPr indent="0" marL="0">
+              <a:buNone/>
+            </a:pPr>
+            <a:r>
+              <a:rPr lang="en-US" sz="1250" dirty="0">
+                <a:solidFill>
+                  <a:srgbClr val="17364A"/>
+                </a:solidFill>
+                <a:latin typeface="Aptos" pitchFamily="34" charset="0"/>
+                <a:ea typeface="Aptos" pitchFamily="34" charset="-122"/>
+                <a:cs typeface="Aptos" pitchFamily="34" charset="-120"/>
+              </a:rPr>
+              <a:t>Appears in tracks: operations-data-quality</a:t>
+            </a:r>
+            <a:endParaRPr lang="en-US" sz="1250" dirty="0"/>
+          </a:p>
+        </p:txBody>
+      </p:sp>
+      <p:sp>
+        <p:nvSpPr>
+          <p:cNvPr id="12" name="Shape 10"/>
+          <p:cNvSpPr/>
+          <p:nvPr/>
+        </p:nvSpPr>
+        <p:spPr>
+          <a:xfrm>
+            <a:off x="7909560" y="3611880"/>
+            <a:ext cx="3154680" cy="1783080"/>
+          </a:xfrm>
+          <a:prstGeom prst="roundRect">
+            <a:avLst>
+              <a:gd name="adj" fmla="val 6154"/>
+            </a:avLst>
+          </a:prstGeom>
+          <a:solidFill>
+            <a:srgbClr val="EEF8ED"/>
+          </a:solidFill>
+          <a:ln w="12700">
+            <a:solidFill>
+              <a:srgbClr val="B9D7E6"/>
+            </a:solidFill>
+            <a:prstDash val="solid"/>
+          </a:ln>
+        </p:spPr>
+      </p:sp>
+      <p:sp>
+        <p:nvSpPr>
+          <p:cNvPr id="13" name="Text 11"/>
+          <p:cNvSpPr/>
+          <p:nvPr/>
+        </p:nvSpPr>
+        <p:spPr>
+          <a:xfrm>
+            <a:off x="8074152" y="3758184"/>
+            <a:ext cx="2825496" cy="201168"/>
+          </a:xfrm>
+          <a:prstGeom prst="rect">
+            <a:avLst/>
+          </a:prstGeom>
+          <a:noFill/>
+          <a:ln/>
+        </p:spPr>
+        <p:txBody>
+          <a:bodyPr wrap="square" lIns="0" tIns="0" rIns="0" bIns="0" rtlCol="0" anchor="ctr"/>
+          <a:lstStyle/>
+          <a:p>
+            <a:pPr indent="0" marL="0">
+              <a:buNone/>
+            </a:pPr>
+            <a:r>
+              <a:rPr lang="en-US" sz="950" b="1" dirty="0">
+                <a:solidFill>
+                  <a:srgbClr val="0068B7"/>
+                </a:solidFill>
+                <a:latin typeface="Aptos" pitchFamily="34" charset="0"/>
+                <a:ea typeface="Aptos" pitchFamily="34" charset="-122"/>
+                <a:cs typeface="Aptos" pitchFamily="34" charset="-120"/>
+              </a:rPr>
+              <a:t>Learning approach</a:t>
+            </a:r>
+            <a:endParaRPr lang="en-US" sz="950" dirty="0"/>
+          </a:p>
+        </p:txBody>
+      </p:sp>
+      <p:sp>
+        <p:nvSpPr>
+          <p:cNvPr id="14" name="Text 12"/>
+          <p:cNvSpPr/>
+          <p:nvPr/>
+        </p:nvSpPr>
+        <p:spPr>
+          <a:xfrm>
+            <a:off x="8074152" y="4050792"/>
+            <a:ext cx="2825496" cy="1216152"/>
+          </a:xfrm>
+          <a:prstGeom prst="rect">
+            <a:avLst/>
+          </a:prstGeom>
+          <a:noFill/>
+          <a:ln/>
+        </p:spPr>
+        <p:txBody>
+          <a:bodyPr wrap="square" lIns="0" tIns="0" rIns="0" bIns="0" rtlCol="0" anchor="t">
+            <a:normAutofit/>
+          </a:bodyPr>
+          <a:lstStyle/>
+          <a:p>
+            <a:pPr indent="0" marL="0">
+              <a:buNone/>
+            </a:pPr>
+            <a:r>
+              <a:rPr lang="en-US" sz="1250" dirty="0">
+                <a:solidFill>
+                  <a:srgbClr val="17364A"/>
+                </a:solidFill>
+                <a:latin typeface="Aptos" pitchFamily="34" charset="0"/>
+                <a:ea typeface="Aptos" pitchFamily="34" charset="-122"/>
+                <a:cs typeface="Aptos" pitchFamily="34" charset="-120"/>
+              </a:rPr>
+              <a:t>Review the core ideas, complete the practical exercise, check your understanding, and use the related plays and tools to apply the lesson.</a:t>
+            </a:r>
+            <a:endParaRPr lang="en-US" sz="1250" dirty="0"/>
+          </a:p>
+        </p:txBody>
+      </p:sp>
+    </p:spTree>
+  </p:cSld>
+  <p:clrMapOvr>
+    <a:masterClrMapping/>
+  </p:clrMapOvr>
+</p:sld>
+</file>
+
+<file path=ppt/slides/slide20.xml><?xml version="1.0" encoding="utf-8"?>
+<p:sld xmlns:a="http://schemas.openxmlformats.org/drawingml/2006/main" xmlns:r="http://schemas.openxmlformats.org/officeDocument/2006/relationships" xmlns:p="http://schemas.openxmlformats.org/presentationml/2006/main">
+  <p:cSld name="Slide 20">
+    <p:bg>
+      <p:bgPr>
+        <a:solidFill>
+          <a:srgbClr val="F7FBFD"/>
+        </a:solidFill>
+      </p:bgPr>
+    </p:bg>
+    <p:spTree>
+      <p:nvGrpSpPr>
+        <p:cNvPr id="1" name=""/>
+        <p:cNvGrpSpPr/>
+        <p:nvPr/>
+      </p:nvGrpSpPr>
+      <p:grpSpPr>
+        <a:xfrm>
+          <a:off x="0" y="0"/>
+          <a:ext cx="0" cy="0"/>
+          <a:chOff x="0" y="0"/>
+          <a:chExt cx="0" cy="0"/>
+        </a:xfrm>
+      </p:grpSpPr>
+      <p:sp>
+        <p:nvSpPr>
+          <p:cNvPr id="2" name="Shape 0"/>
+          <p:cNvSpPr/>
+          <p:nvPr/>
+        </p:nvSpPr>
+        <p:spPr>
+          <a:xfrm>
+            <a:off x="0" y="0"/>
+            <a:ext cx="12191695" cy="164592"/>
+          </a:xfrm>
+          <a:prstGeom prst="rect">
+            <a:avLst/>
+          </a:prstGeom>
+          <a:solidFill>
+            <a:srgbClr val="0068B7"/>
+          </a:solidFill>
+          <a:ln w="12700">
+            <a:solidFill>
+              <a:srgbClr val="0068B7"/>
+            </a:solidFill>
+            <a:prstDash val="solid"/>
+          </a:ln>
+        </p:spPr>
+      </p:sp>
+      <p:sp>
+        <p:nvSpPr>
+          <p:cNvPr id="3" name="Shape 1"/>
+          <p:cNvSpPr/>
+          <p:nvPr/>
+        </p:nvSpPr>
+        <p:spPr>
+          <a:xfrm>
+            <a:off x="0" y="164592"/>
+            <a:ext cx="146304" cy="6693408"/>
+          </a:xfrm>
+          <a:prstGeom prst="rect">
+            <a:avLst/>
+          </a:prstGeom>
+          <a:solidFill>
+            <a:srgbClr val="2F8A28"/>
+          </a:solidFill>
+          <a:ln w="12700">
+            <a:solidFill>
+              <a:srgbClr val="2F8A28"/>
+            </a:solidFill>
+            <a:prstDash val="solid"/>
+          </a:ln>
+        </p:spPr>
+      </p:sp>
+      <p:sp>
+        <p:nvSpPr>
+          <p:cNvPr id="4" name="Text 2"/>
+          <p:cNvSpPr/>
+          <p:nvPr/>
+        </p:nvSpPr>
+        <p:spPr>
+          <a:xfrm>
+            <a:off x="502920" y="292608"/>
+            <a:ext cx="10149840" cy="256032"/>
+          </a:xfrm>
+          <a:prstGeom prst="rect">
+            <a:avLst/>
+          </a:prstGeom>
+          <a:noFill/>
+          <a:ln/>
+        </p:spPr>
+        <p:txBody>
+          <a:bodyPr wrap="square" lIns="0" tIns="0" rIns="0" bIns="0" rtlCol="0" anchor="ctr"/>
+          <a:lstStyle/>
+          <a:p>
+            <a:pPr indent="0" marL="0">
+              <a:buNone/>
+            </a:pPr>
+            <a:r>
+              <a:rPr lang="en-US" sz="900" b="1" dirty="0">
+                <a:solidFill>
+                  <a:srgbClr val="5F7181"/>
+                </a:solidFill>
+                <a:latin typeface="Aptos" pitchFamily="34" charset="0"/>
+                <a:ea typeface="Aptos" pitchFamily="34" charset="-122"/>
+                <a:cs typeface="Aptos" pitchFamily="34" charset="-120"/>
+              </a:rPr>
+              <a:t>Synthetic Data for Public Health AI</a:t>
+            </a:r>
+            <a:endParaRPr lang="en-US" sz="900" dirty="0"/>
+          </a:p>
+        </p:txBody>
+      </p:sp>
+      <p:sp>
+        <p:nvSpPr>
+          <p:cNvPr id="5" name="Text 3"/>
+          <p:cNvSpPr/>
+          <p:nvPr/>
+        </p:nvSpPr>
+        <p:spPr>
+          <a:xfrm>
+            <a:off x="502920" y="6537960"/>
+            <a:ext cx="7772400" cy="201168"/>
+          </a:xfrm>
+          <a:prstGeom prst="rect">
+            <a:avLst/>
+          </a:prstGeom>
+          <a:noFill/>
+          <a:ln/>
+        </p:spPr>
+        <p:txBody>
+          <a:bodyPr wrap="square" lIns="0" tIns="0" rIns="0" bIns="0" rtlCol="0" anchor="ctr"/>
+          <a:lstStyle/>
+          <a:p>
+            <a:pPr indent="0" marL="0">
+              <a:buNone/>
+            </a:pPr>
+            <a:r>
+              <a:rPr lang="en-US" sz="800" dirty="0">
+                <a:solidFill>
+                  <a:srgbClr val="5F7181"/>
+                </a:solidFill>
+                <a:latin typeface="Aptos" pitchFamily="34" charset="0"/>
+                <a:ea typeface="Aptos" pitchFamily="34" charset="-122"/>
+                <a:cs typeface="Aptos" pitchFamily="34" charset="-120"/>
+              </a:rPr>
+              <a:t>AI Playbook and Toolkit for Public Health Departments</a:t>
+            </a:r>
+            <a:endParaRPr lang="en-US" sz="800" dirty="0"/>
+          </a:p>
+        </p:txBody>
+      </p:sp>
+      <p:sp>
+        <p:nvSpPr>
+          <p:cNvPr id="6" name="Text 4"/>
+          <p:cNvSpPr/>
+          <p:nvPr/>
+        </p:nvSpPr>
+        <p:spPr>
+          <a:xfrm>
+            <a:off x="9966960" y="6537960"/>
+            <a:ext cx="1645920" cy="201168"/>
+          </a:xfrm>
+          <a:prstGeom prst="rect">
+            <a:avLst/>
+          </a:prstGeom>
+          <a:noFill/>
+          <a:ln/>
+        </p:spPr>
+        <p:txBody>
+          <a:bodyPr wrap="square" lIns="0" tIns="0" rIns="0" bIns="0" rtlCol="0" anchor="ctr"/>
+          <a:lstStyle/>
+          <a:p>
+            <a:pPr algn="r" indent="0" marL="0">
+              <a:buNone/>
+            </a:pPr>
+            <a:r>
+              <a:rPr lang="en-US" sz="800" dirty="0">
+                <a:solidFill>
+                  <a:srgbClr val="5F7181"/>
+                </a:solidFill>
+                <a:latin typeface="Aptos" pitchFamily="34" charset="0"/>
+                <a:ea typeface="Aptos" pitchFamily="34" charset="-122"/>
+                <a:cs typeface="Aptos" pitchFamily="34" charset="-120"/>
+              </a:rPr>
+              <a:t>© Paula Soper</a:t>
+            </a:r>
+            <a:endParaRPr lang="en-US" sz="800" dirty="0"/>
+          </a:p>
+        </p:txBody>
+      </p:sp>
+      <p:sp>
+        <p:nvSpPr>
+          <p:cNvPr id="7" name="Shape 5"/>
+          <p:cNvSpPr/>
+          <p:nvPr/>
+        </p:nvSpPr>
+        <p:spPr>
+          <a:xfrm>
+            <a:off x="640080" y="658368"/>
+            <a:ext cx="420624" cy="420624"/>
+          </a:xfrm>
+          <a:prstGeom prst="ellipse">
+            <a:avLst/>
+          </a:prstGeom>
+          <a:solidFill>
+            <a:srgbClr val="0068B7"/>
+          </a:solidFill>
+          <a:ln w="12700">
+            <a:solidFill>
+              <a:srgbClr val="0068B7"/>
+            </a:solidFill>
+            <a:prstDash val="solid"/>
+          </a:ln>
+        </p:spPr>
+      </p:sp>
+      <p:sp>
+        <p:nvSpPr>
+          <p:cNvPr id="8" name="Text 6"/>
+          <p:cNvSpPr/>
+          <p:nvPr/>
+        </p:nvSpPr>
+        <p:spPr>
+          <a:xfrm>
+            <a:off x="640080" y="731520"/>
+            <a:ext cx="420624" cy="164592"/>
+          </a:xfrm>
+          <a:prstGeom prst="rect">
+            <a:avLst/>
+          </a:prstGeom>
+          <a:noFill/>
+          <a:ln/>
+        </p:spPr>
+        <p:txBody>
+          <a:bodyPr wrap="square" lIns="0" tIns="0" rIns="0" bIns="0" rtlCol="0" anchor="ctr"/>
+          <a:lstStyle/>
+          <a:p>
+            <a:pPr algn="ctr" indent="0" marL="0">
+              <a:buNone/>
+            </a:pPr>
+            <a:r>
+              <a:rPr lang="en-US" sz="1100" b="1" dirty="0">
+                <a:solidFill>
+                  <a:srgbClr val="FFFFFF"/>
+                </a:solidFill>
+                <a:latin typeface="Aptos" pitchFamily="34" charset="0"/>
+                <a:ea typeface="Aptos" pitchFamily="34" charset="-122"/>
+                <a:cs typeface="Aptos" pitchFamily="34" charset="-120"/>
+              </a:rPr>
+              <a:t>14</a:t>
+            </a:r>
+            <a:endParaRPr lang="en-US" sz="1100" dirty="0"/>
+          </a:p>
+        </p:txBody>
+      </p:sp>
+      <p:sp>
+        <p:nvSpPr>
+          <p:cNvPr id="9" name="Text 7"/>
+          <p:cNvSpPr/>
+          <p:nvPr/>
+        </p:nvSpPr>
+        <p:spPr>
+          <a:xfrm>
+            <a:off x="640080" y="621792"/>
+            <a:ext cx="10881360" cy="566928"/>
+          </a:xfrm>
+          <a:prstGeom prst="rect">
+            <a:avLst/>
+          </a:prstGeom>
+          <a:noFill/>
+          <a:ln/>
+        </p:spPr>
+        <p:txBody>
+          <a:bodyPr wrap="square" lIns="0" tIns="0" rIns="0" bIns="0" rtlCol="0" anchor="ctr">
+            <a:normAutofit/>
+          </a:bodyPr>
+          <a:lstStyle/>
+          <a:p>
+            <a:pPr indent="0" marL="0">
+              <a:buNone/>
+            </a:pPr>
+            <a:r>
+              <a:rPr lang="en-US" sz="2700" b="1" dirty="0">
+                <a:solidFill>
+                  <a:srgbClr val="003A63"/>
+                </a:solidFill>
+                <a:latin typeface="Aptos Display" pitchFamily="34" charset="0"/>
+                <a:ea typeface="Aptos Display" pitchFamily="34" charset="-122"/>
+                <a:cs typeface="Aptos Display" pitchFamily="34" charset="-120"/>
+              </a:rPr>
+              <a:t>References and Resources</a:t>
+            </a:r>
+            <a:endParaRPr lang="en-US" sz="2700" dirty="0"/>
+          </a:p>
+        </p:txBody>
+      </p:sp>
+      <p:sp>
+        <p:nvSpPr>
+          <p:cNvPr id="10" name="Text 8"/>
+          <p:cNvSpPr/>
+          <p:nvPr/>
+        </p:nvSpPr>
+        <p:spPr>
+          <a:xfrm>
+            <a:off x="868680" y="1417320"/>
+            <a:ext cx="6675120" cy="4434840"/>
+          </a:xfrm>
+          <a:prstGeom prst="rect">
+            <a:avLst/>
+          </a:prstGeom>
+          <a:noFill/>
+          <a:ln/>
+        </p:spPr>
+        <p:txBody>
+          <a:bodyPr wrap="square" lIns="635" tIns="635" rIns="635" bIns="635" rtlCol="0" anchor="t">
+            <a:normAutofit/>
+          </a:bodyPr>
+          <a:lstStyle/>
+          <a:p>
+            <a:r>
+              <a:rPr lang="en-US" sz="1700" dirty="0">
+                <a:solidFill>
+                  <a:srgbClr val="17364A"/>
+                </a:solidFill>
+                <a:latin typeface="Aptos" pitchFamily="34" charset="0"/>
+                <a:ea typeface="Aptos" pitchFamily="34" charset="-122"/>
+                <a:cs typeface="Aptos" pitchFamily="34" charset="-120"/>
+              </a:rPr>
+              <a:t>NIST AI Risk Management Framework: https://www.nist.gov/itl/ai-risk-management-framework</a:t>
+            </a:r>
+            <a:endParaRPr lang="en-US" sz="1700" dirty="0"/>
+          </a:p>
+          <a:p>
+            <a:r>
+              <a:rPr lang="en-US" sz="1700" dirty="0">
+                <a:solidFill>
+                  <a:srgbClr val="17364A"/>
+                </a:solidFill>
+                <a:latin typeface="Aptos" pitchFamily="34" charset="0"/>
+                <a:ea typeface="Aptos" pitchFamily="34" charset="-122"/>
+                <a:cs typeface="Aptos" pitchFamily="34" charset="-120"/>
+              </a:rPr>
+              <a:t>NIST Privacy Framework and differential privacy resources</a:t>
+            </a:r>
+            <a:endParaRPr lang="en-US" sz="1700" dirty="0"/>
+          </a:p>
+          <a:p>
+            <a:r>
+              <a:rPr lang="en-US" sz="1700" dirty="0">
+                <a:solidFill>
+                  <a:srgbClr val="17364A"/>
+                </a:solidFill>
+                <a:latin typeface="Aptos" pitchFamily="34" charset="0"/>
+                <a:ea typeface="Aptos" pitchFamily="34" charset="-122"/>
+                <a:cs typeface="Aptos" pitchFamily="34" charset="-120"/>
+              </a:rPr>
+              <a:t>NIST Generative AI Profile:.</a:t>
+            </a:r>
+            <a:endParaRPr lang="en-US" sz="1700" dirty="0"/>
+          </a:p>
+          <a:p>
+            <a:r>
+              <a:rPr lang="en-US" sz="1700" dirty="0">
+                <a:solidFill>
+                  <a:srgbClr val="17364A"/>
+                </a:solidFill>
+                <a:latin typeface="Aptos" pitchFamily="34" charset="0"/>
+                <a:ea typeface="Aptos" pitchFamily="34" charset="-122"/>
+                <a:cs typeface="Aptos" pitchFamily="34" charset="-120"/>
+              </a:rPr>
+              <a:t>CDC Public Health Data Strategy and Data Modernization resources:.</a:t>
+            </a:r>
+            <a:endParaRPr lang="en-US" sz="1700" dirty="0"/>
+          </a:p>
+        </p:txBody>
+      </p:sp>
+      <p:sp>
+        <p:nvSpPr>
+          <p:cNvPr id="11" name="Shape 9"/>
+          <p:cNvSpPr/>
+          <p:nvPr/>
+        </p:nvSpPr>
+        <p:spPr>
+          <a:xfrm>
+            <a:off x="7909560" y="1417320"/>
+            <a:ext cx="3154680" cy="1828800"/>
+          </a:xfrm>
+          <a:prstGeom prst="roundRect">
+            <a:avLst>
+              <a:gd name="adj" fmla="val 6000"/>
+            </a:avLst>
+          </a:prstGeom>
+          <a:solidFill>
+            <a:srgbClr val="EEF8ED"/>
+          </a:solidFill>
+          <a:ln w="12700">
+            <a:solidFill>
+              <a:srgbClr val="B9D7E6"/>
+            </a:solidFill>
+            <a:prstDash val="solid"/>
+          </a:ln>
+        </p:spPr>
+      </p:sp>
+      <p:sp>
+        <p:nvSpPr>
+          <p:cNvPr id="12" name="Text 10"/>
+          <p:cNvSpPr/>
+          <p:nvPr/>
+        </p:nvSpPr>
+        <p:spPr>
+          <a:xfrm>
+            <a:off x="8074152" y="1563624"/>
+            <a:ext cx="2825496" cy="201168"/>
+          </a:xfrm>
+          <a:prstGeom prst="rect">
+            <a:avLst/>
+          </a:prstGeom>
+          <a:noFill/>
+          <a:ln/>
+        </p:spPr>
+        <p:txBody>
+          <a:bodyPr wrap="square" lIns="0" tIns="0" rIns="0" bIns="0" rtlCol="0" anchor="ctr"/>
+          <a:lstStyle/>
+          <a:p>
+            <a:pPr indent="0" marL="0">
+              <a:buNone/>
+            </a:pPr>
+            <a:r>
+              <a:rPr lang="en-US" sz="950" b="1" dirty="0">
+                <a:solidFill>
+                  <a:srgbClr val="0068B7"/>
+                </a:solidFill>
+                <a:latin typeface="Aptos" pitchFamily="34" charset="0"/>
+                <a:ea typeface="Aptos" pitchFamily="34" charset="-122"/>
+                <a:cs typeface="Aptos" pitchFamily="34" charset="-120"/>
+              </a:rPr>
+              <a:t>Key idea</a:t>
+            </a:r>
+            <a:endParaRPr lang="en-US" sz="950" dirty="0"/>
+          </a:p>
+        </p:txBody>
+      </p:sp>
+      <p:sp>
+        <p:nvSpPr>
+          <p:cNvPr id="13" name="Text 11"/>
+          <p:cNvSpPr/>
+          <p:nvPr/>
+        </p:nvSpPr>
+        <p:spPr>
+          <a:xfrm>
+            <a:off x="8074152" y="1856232"/>
+            <a:ext cx="2825496" cy="1261872"/>
+          </a:xfrm>
+          <a:prstGeom prst="rect">
+            <a:avLst/>
+          </a:prstGeom>
+          <a:noFill/>
+          <a:ln/>
+        </p:spPr>
+        <p:txBody>
+          <a:bodyPr wrap="square" lIns="0" tIns="0" rIns="0" bIns="0" rtlCol="0" anchor="t">
+            <a:normAutofit/>
+          </a:bodyPr>
+          <a:lstStyle/>
+          <a:p>
+            <a:pPr indent="0" marL="0">
+              <a:buNone/>
+            </a:pPr>
+            <a:r>
+              <a:rPr lang="en-US" sz="1250" dirty="0">
+                <a:solidFill>
+                  <a:srgbClr val="17364A"/>
+                </a:solidFill>
+                <a:latin typeface="Aptos" pitchFamily="34" charset="0"/>
+                <a:ea typeface="Aptos" pitchFamily="34" charset="-122"/>
+                <a:cs typeface="Aptos" pitchFamily="34" charset="-120"/>
+              </a:rPr>
+              <a:t>NIST AI Risk Management Framework: https://www.nist.gov/itl/ai-risk-management-framework</a:t>
+            </a:r>
+            <a:endParaRPr lang="en-US" sz="1250" dirty="0"/>
+          </a:p>
+        </p:txBody>
+      </p:sp>
+      <p:sp>
+        <p:nvSpPr>
+          <p:cNvPr id="14" name="Shape 12"/>
+          <p:cNvSpPr/>
+          <p:nvPr/>
+        </p:nvSpPr>
+        <p:spPr>
+          <a:xfrm>
+            <a:off x="7909560" y="3520440"/>
+            <a:ext cx="3154680" cy="1737360"/>
+          </a:xfrm>
+          <a:prstGeom prst="roundRect">
+            <a:avLst>
+              <a:gd name="adj" fmla="val 6316"/>
+            </a:avLst>
+          </a:prstGeom>
+          <a:solidFill>
+            <a:srgbClr val="EAF6F8"/>
+          </a:solidFill>
+          <a:ln w="12700">
+            <a:solidFill>
+              <a:srgbClr val="B9D7E6"/>
+            </a:solidFill>
+            <a:prstDash val="solid"/>
+          </a:ln>
+        </p:spPr>
+      </p:sp>
+      <p:sp>
+        <p:nvSpPr>
+          <p:cNvPr id="15" name="Text 13"/>
+          <p:cNvSpPr/>
+          <p:nvPr/>
+        </p:nvSpPr>
+        <p:spPr>
+          <a:xfrm>
+            <a:off x="8074152" y="3666744"/>
+            <a:ext cx="2825496" cy="201168"/>
+          </a:xfrm>
+          <a:prstGeom prst="rect">
+            <a:avLst/>
+          </a:prstGeom>
+          <a:noFill/>
+          <a:ln/>
+        </p:spPr>
+        <p:txBody>
+          <a:bodyPr wrap="square" lIns="0" tIns="0" rIns="0" bIns="0" rtlCol="0" anchor="ctr"/>
+          <a:lstStyle/>
+          <a:p>
+            <a:pPr indent="0" marL="0">
+              <a:buNone/>
+            </a:pPr>
+            <a:r>
+              <a:rPr lang="en-US" sz="950" b="1" dirty="0">
+                <a:solidFill>
+                  <a:srgbClr val="0068B7"/>
+                </a:solidFill>
+                <a:latin typeface="Aptos" pitchFamily="34" charset="0"/>
+                <a:ea typeface="Aptos" pitchFamily="34" charset="-122"/>
+                <a:cs typeface="Aptos" pitchFamily="34" charset="-120"/>
+              </a:rPr>
+              <a:t>Use this for</a:t>
+            </a:r>
+            <a:endParaRPr lang="en-US" sz="950" dirty="0"/>
+          </a:p>
+        </p:txBody>
+      </p:sp>
+      <p:sp>
+        <p:nvSpPr>
+          <p:cNvPr id="16" name="Text 14"/>
+          <p:cNvSpPr/>
+          <p:nvPr/>
+        </p:nvSpPr>
+        <p:spPr>
+          <a:xfrm>
+            <a:off x="8074152" y="3959352"/>
+            <a:ext cx="2825496" cy="1170432"/>
+          </a:xfrm>
+          <a:prstGeom prst="rect">
+            <a:avLst/>
+          </a:prstGeom>
+          <a:noFill/>
+          <a:ln/>
+        </p:spPr>
+        <p:txBody>
+          <a:bodyPr wrap="square" lIns="0" tIns="0" rIns="0" bIns="0" rtlCol="0" anchor="t">
+            <a:normAutofit/>
+          </a:bodyPr>
+          <a:lstStyle/>
+          <a:p>
+            <a:pPr indent="0" marL="0">
+              <a:buNone/>
+            </a:pPr>
+            <a:r>
+              <a:rPr lang="en-US" sz="1250" dirty="0">
+                <a:solidFill>
+                  <a:srgbClr val="17364A"/>
+                </a:solidFill>
+                <a:latin typeface="Aptos" pitchFamily="34" charset="0"/>
+                <a:ea typeface="Aptos" pitchFamily="34" charset="-122"/>
+                <a:cs typeface="Aptos" pitchFamily="34" charset="-120"/>
+              </a:rPr>
+              <a:t>Connect the concept to public health decisions, safeguards, documentation, or implementation work.</a:t>
+            </a:r>
+            <a:endParaRPr lang="en-US" sz="1250" dirty="0"/>
+          </a:p>
+        </p:txBody>
+      </p:sp>
+    </p:spTree>
+  </p:cSld>
+  <p:clrMapOvr>
+    <a:masterClrMapping/>
+  </p:clrMapOvr>
+</p:sld>
+</file>
+
+<file path=ppt/slides/slide21.xml><?xml version="1.0" encoding="utf-8"?>
+<p:sld xmlns:a="http://schemas.openxmlformats.org/drawingml/2006/main" xmlns:r="http://schemas.openxmlformats.org/officeDocument/2006/relationships" xmlns:p="http://schemas.openxmlformats.org/presentationml/2006/main">
+  <p:cSld name="Slide 21">
+    <p:bg>
+      <p:bgPr>
+        <a:solidFill>
+          <a:srgbClr val="F7FBFD"/>
+        </a:solidFill>
+      </p:bgPr>
+    </p:bg>
+    <p:spTree>
+      <p:nvGrpSpPr>
+        <p:cNvPr id="1" name=""/>
+        <p:cNvGrpSpPr/>
+        <p:nvPr/>
+      </p:nvGrpSpPr>
+      <p:grpSpPr>
+        <a:xfrm>
+          <a:off x="0" y="0"/>
+          <a:ext cx="0" cy="0"/>
+          <a:chOff x="0" y="0"/>
+          <a:chExt cx="0" cy="0"/>
+        </a:xfrm>
+      </p:grpSpPr>
+      <p:sp>
+        <p:nvSpPr>
+          <p:cNvPr id="2" name="Shape 0"/>
+          <p:cNvSpPr/>
+          <p:nvPr/>
+        </p:nvSpPr>
+        <p:spPr>
+          <a:xfrm>
+            <a:off x="0" y="0"/>
+            <a:ext cx="12191695" cy="164592"/>
+          </a:xfrm>
+          <a:prstGeom prst="rect">
+            <a:avLst/>
+          </a:prstGeom>
+          <a:solidFill>
+            <a:srgbClr val="0068B7"/>
+          </a:solidFill>
+          <a:ln w="12700">
+            <a:solidFill>
+              <a:srgbClr val="0068B7"/>
+            </a:solidFill>
+            <a:prstDash val="solid"/>
+          </a:ln>
+        </p:spPr>
+      </p:sp>
+      <p:sp>
+        <p:nvSpPr>
+          <p:cNvPr id="3" name="Shape 1"/>
+          <p:cNvSpPr/>
+          <p:nvPr/>
+        </p:nvSpPr>
+        <p:spPr>
+          <a:xfrm>
+            <a:off x="0" y="164592"/>
+            <a:ext cx="146304" cy="6693408"/>
+          </a:xfrm>
+          <a:prstGeom prst="rect">
+            <a:avLst/>
+          </a:prstGeom>
+          <a:solidFill>
+            <a:srgbClr val="2F8A28"/>
+          </a:solidFill>
+          <a:ln w="12700">
+            <a:solidFill>
+              <a:srgbClr val="2F8A28"/>
+            </a:solidFill>
+            <a:prstDash val="solid"/>
+          </a:ln>
+        </p:spPr>
+      </p:sp>
+      <p:sp>
+        <p:nvSpPr>
+          <p:cNvPr id="4" name="Text 2"/>
+          <p:cNvSpPr/>
+          <p:nvPr/>
+        </p:nvSpPr>
+        <p:spPr>
+          <a:xfrm>
+            <a:off x="502920" y="292608"/>
+            <a:ext cx="10149840" cy="256032"/>
+          </a:xfrm>
+          <a:prstGeom prst="rect">
+            <a:avLst/>
+          </a:prstGeom>
+          <a:noFill/>
+          <a:ln/>
+        </p:spPr>
+        <p:txBody>
+          <a:bodyPr wrap="square" lIns="0" tIns="0" rIns="0" bIns="0" rtlCol="0" anchor="ctr"/>
+          <a:lstStyle/>
+          <a:p>
+            <a:pPr indent="0" marL="0">
+              <a:buNone/>
+            </a:pPr>
+            <a:r>
+              <a:rPr lang="en-US" sz="900" b="1" dirty="0">
+                <a:solidFill>
+                  <a:srgbClr val="5F7181"/>
+                </a:solidFill>
+                <a:latin typeface="Aptos" pitchFamily="34" charset="0"/>
+                <a:ea typeface="Aptos" pitchFamily="34" charset="-122"/>
+                <a:cs typeface="Aptos" pitchFamily="34" charset="-120"/>
+              </a:rPr>
+              <a:t>Synthetic Data for Public Health AI</a:t>
+            </a:r>
+            <a:endParaRPr lang="en-US" sz="900" dirty="0"/>
+          </a:p>
+        </p:txBody>
+      </p:sp>
+      <p:sp>
+        <p:nvSpPr>
+          <p:cNvPr id="5" name="Text 3"/>
+          <p:cNvSpPr/>
+          <p:nvPr/>
+        </p:nvSpPr>
+        <p:spPr>
+          <a:xfrm>
+            <a:off x="502920" y="6537960"/>
+            <a:ext cx="7772400" cy="201168"/>
+          </a:xfrm>
+          <a:prstGeom prst="rect">
+            <a:avLst/>
+          </a:prstGeom>
+          <a:noFill/>
+          <a:ln/>
+        </p:spPr>
+        <p:txBody>
+          <a:bodyPr wrap="square" lIns="0" tIns="0" rIns="0" bIns="0" rtlCol="0" anchor="ctr"/>
+          <a:lstStyle/>
+          <a:p>
+            <a:pPr indent="0" marL="0">
+              <a:buNone/>
+            </a:pPr>
+            <a:r>
+              <a:rPr lang="en-US" sz="800" dirty="0">
+                <a:solidFill>
+                  <a:srgbClr val="5F7181"/>
+                </a:solidFill>
+                <a:latin typeface="Aptos" pitchFamily="34" charset="0"/>
+                <a:ea typeface="Aptos" pitchFamily="34" charset="-122"/>
+                <a:cs typeface="Aptos" pitchFamily="34" charset="-120"/>
+              </a:rPr>
+              <a:t>AI Playbook and Toolkit for Public Health Departments</a:t>
+            </a:r>
+            <a:endParaRPr lang="en-US" sz="800" dirty="0"/>
+          </a:p>
+        </p:txBody>
+      </p:sp>
+      <p:sp>
+        <p:nvSpPr>
+          <p:cNvPr id="6" name="Text 4"/>
+          <p:cNvSpPr/>
+          <p:nvPr/>
+        </p:nvSpPr>
+        <p:spPr>
+          <a:xfrm>
+            <a:off x="9966960" y="6537960"/>
+            <a:ext cx="1645920" cy="201168"/>
+          </a:xfrm>
+          <a:prstGeom prst="rect">
+            <a:avLst/>
+          </a:prstGeom>
+          <a:noFill/>
+          <a:ln/>
+        </p:spPr>
+        <p:txBody>
+          <a:bodyPr wrap="square" lIns="0" tIns="0" rIns="0" bIns="0" rtlCol="0" anchor="ctr"/>
+          <a:lstStyle/>
+          <a:p>
+            <a:pPr algn="r" indent="0" marL="0">
+              <a:buNone/>
+            </a:pPr>
+            <a:r>
+              <a:rPr lang="en-US" sz="800" dirty="0">
+                <a:solidFill>
+                  <a:srgbClr val="5F7181"/>
+                </a:solidFill>
+                <a:latin typeface="Aptos" pitchFamily="34" charset="0"/>
+                <a:ea typeface="Aptos" pitchFamily="34" charset="-122"/>
+                <a:cs typeface="Aptos" pitchFamily="34" charset="-120"/>
+              </a:rPr>
+              <a:t>© Paula Soper</a:t>
+            </a:r>
+            <a:endParaRPr lang="en-US" sz="800" dirty="0"/>
+          </a:p>
+        </p:txBody>
+      </p:sp>
+      <p:sp>
+        <p:nvSpPr>
+          <p:cNvPr id="7" name="Text 5"/>
+          <p:cNvSpPr/>
+          <p:nvPr/>
+        </p:nvSpPr>
+        <p:spPr>
+          <a:xfrm>
+            <a:off x="640080" y="658368"/>
+            <a:ext cx="10881360" cy="566928"/>
+          </a:xfrm>
+          <a:prstGeom prst="rect">
+            <a:avLst/>
+          </a:prstGeom>
+          <a:noFill/>
+          <a:ln/>
+        </p:spPr>
+        <p:txBody>
+          <a:bodyPr wrap="square" lIns="0" tIns="0" rIns="0" bIns="0" rtlCol="0" anchor="ctr">
+            <a:normAutofit/>
+          </a:bodyPr>
+          <a:lstStyle/>
+          <a:p>
+            <a:pPr indent="0" marL="0">
+              <a:buNone/>
+            </a:pPr>
+            <a:r>
+              <a:rPr lang="en-US" sz="2700" b="1" dirty="0">
+                <a:solidFill>
+                  <a:srgbClr val="003A63"/>
+                </a:solidFill>
+                <a:latin typeface="Aptos Display" pitchFamily="34" charset="0"/>
+                <a:ea typeface="Aptos Display" pitchFamily="34" charset="-122"/>
+                <a:cs typeface="Aptos Display" pitchFamily="34" charset="-120"/>
+              </a:rPr>
+              <a:t>References and Resources Continued</a:t>
+            </a:r>
+            <a:endParaRPr lang="en-US" sz="2700" dirty="0"/>
+          </a:p>
+        </p:txBody>
+      </p:sp>
+      <p:sp>
+        <p:nvSpPr>
+          <p:cNvPr id="8" name="Text 6"/>
+          <p:cNvSpPr/>
+          <p:nvPr/>
+        </p:nvSpPr>
+        <p:spPr>
+          <a:xfrm>
+            <a:off x="868680" y="1417320"/>
+            <a:ext cx="6675120" cy="4434840"/>
+          </a:xfrm>
+          <a:prstGeom prst="rect">
+            <a:avLst/>
+          </a:prstGeom>
+          <a:noFill/>
+          <a:ln/>
+        </p:spPr>
+        <p:txBody>
+          <a:bodyPr wrap="square" lIns="635" tIns="635" rIns="635" bIns="635" rtlCol="0" anchor="t">
+            <a:normAutofit/>
+          </a:bodyPr>
+          <a:lstStyle/>
+          <a:p>
+            <a:r>
+              <a:rPr lang="en-US" sz="1700" dirty="0">
+                <a:solidFill>
+                  <a:srgbClr val="17364A"/>
+                </a:solidFill>
+                <a:latin typeface="Aptos" pitchFamily="34" charset="0"/>
+                <a:ea typeface="Aptos" pitchFamily="34" charset="-122"/>
+                <a:cs typeface="Aptos" pitchFamily="34" charset="-120"/>
+              </a:rPr>
+              <a:t>Agency privacy, cybersecurity, data governance, procurement, and records management policies</a:t>
+            </a:r>
+            <a:endParaRPr lang="en-US" sz="1700" dirty="0"/>
+          </a:p>
+        </p:txBody>
+      </p:sp>
+      <p:sp>
+        <p:nvSpPr>
+          <p:cNvPr id="9" name="Shape 7"/>
+          <p:cNvSpPr/>
+          <p:nvPr/>
+        </p:nvSpPr>
+        <p:spPr>
+          <a:xfrm>
+            <a:off x="7909560" y="1417320"/>
+            <a:ext cx="3154680" cy="1828800"/>
+          </a:xfrm>
+          <a:prstGeom prst="roundRect">
+            <a:avLst>
+              <a:gd name="adj" fmla="val 6000"/>
+            </a:avLst>
+          </a:prstGeom>
+          <a:solidFill>
+            <a:srgbClr val="EEF8ED"/>
+          </a:solidFill>
+          <a:ln w="12700">
+            <a:solidFill>
+              <a:srgbClr val="B9D7E6"/>
+            </a:solidFill>
+            <a:prstDash val="solid"/>
+          </a:ln>
+        </p:spPr>
+      </p:sp>
+      <p:sp>
+        <p:nvSpPr>
+          <p:cNvPr id="10" name="Text 8"/>
+          <p:cNvSpPr/>
+          <p:nvPr/>
+        </p:nvSpPr>
+        <p:spPr>
+          <a:xfrm>
+            <a:off x="8074152" y="1563624"/>
+            <a:ext cx="2825496" cy="201168"/>
+          </a:xfrm>
+          <a:prstGeom prst="rect">
+            <a:avLst/>
+          </a:prstGeom>
+          <a:noFill/>
+          <a:ln/>
+        </p:spPr>
+        <p:txBody>
+          <a:bodyPr wrap="square" lIns="0" tIns="0" rIns="0" bIns="0" rtlCol="0" anchor="ctr"/>
+          <a:lstStyle/>
+          <a:p>
+            <a:pPr indent="0" marL="0">
+              <a:buNone/>
+            </a:pPr>
+            <a:r>
+              <a:rPr lang="en-US" sz="950" b="1" dirty="0">
+                <a:solidFill>
+                  <a:srgbClr val="0068B7"/>
+                </a:solidFill>
+                <a:latin typeface="Aptos" pitchFamily="34" charset="0"/>
+                <a:ea typeface="Aptos" pitchFamily="34" charset="-122"/>
+                <a:cs typeface="Aptos" pitchFamily="34" charset="-120"/>
+              </a:rPr>
+              <a:t>Key idea</a:t>
+            </a:r>
+            <a:endParaRPr lang="en-US" sz="950" dirty="0"/>
+          </a:p>
+        </p:txBody>
+      </p:sp>
+      <p:sp>
+        <p:nvSpPr>
+          <p:cNvPr id="11" name="Text 9"/>
+          <p:cNvSpPr/>
+          <p:nvPr/>
+        </p:nvSpPr>
+        <p:spPr>
+          <a:xfrm>
+            <a:off x="8074152" y="1856232"/>
+            <a:ext cx="2825496" cy="1261872"/>
+          </a:xfrm>
+          <a:prstGeom prst="rect">
+            <a:avLst/>
+          </a:prstGeom>
+          <a:noFill/>
+          <a:ln/>
+        </p:spPr>
+        <p:txBody>
+          <a:bodyPr wrap="square" lIns="0" tIns="0" rIns="0" bIns="0" rtlCol="0" anchor="t">
+            <a:normAutofit/>
+          </a:bodyPr>
+          <a:lstStyle/>
+          <a:p>
+            <a:pPr indent="0" marL="0">
+              <a:buNone/>
+            </a:pPr>
+            <a:r>
+              <a:rPr lang="en-US" sz="1250" dirty="0">
+                <a:solidFill>
+                  <a:srgbClr val="17364A"/>
+                </a:solidFill>
+                <a:latin typeface="Aptos" pitchFamily="34" charset="0"/>
+                <a:ea typeface="Aptos" pitchFamily="34" charset="-122"/>
+                <a:cs typeface="Aptos" pitchFamily="34" charset="-120"/>
+              </a:rPr>
+              <a:t>Agency privacy, cybersecurity, data governance, procurement, and records management policies</a:t>
+            </a:r>
+            <a:endParaRPr lang="en-US" sz="1250" dirty="0"/>
+          </a:p>
+        </p:txBody>
+      </p:sp>
+      <p:sp>
+        <p:nvSpPr>
+          <p:cNvPr id="12" name="Shape 10"/>
+          <p:cNvSpPr/>
+          <p:nvPr/>
+        </p:nvSpPr>
+        <p:spPr>
+          <a:xfrm>
+            <a:off x="7909560" y="3520440"/>
+            <a:ext cx="3154680" cy="1737360"/>
+          </a:xfrm>
+          <a:prstGeom prst="roundRect">
+            <a:avLst>
+              <a:gd name="adj" fmla="val 6316"/>
+            </a:avLst>
+          </a:prstGeom>
+          <a:solidFill>
+            <a:srgbClr val="EAF6F8"/>
+          </a:solidFill>
+          <a:ln w="12700">
+            <a:solidFill>
+              <a:srgbClr val="B9D7E6"/>
+            </a:solidFill>
+            <a:prstDash val="solid"/>
+          </a:ln>
+        </p:spPr>
+      </p:sp>
+      <p:sp>
+        <p:nvSpPr>
+          <p:cNvPr id="13" name="Text 11"/>
+          <p:cNvSpPr/>
+          <p:nvPr/>
+        </p:nvSpPr>
+        <p:spPr>
+          <a:xfrm>
+            <a:off x="8074152" y="3666744"/>
+            <a:ext cx="2825496" cy="201168"/>
+          </a:xfrm>
+          <a:prstGeom prst="rect">
+            <a:avLst/>
+          </a:prstGeom>
+          <a:noFill/>
+          <a:ln/>
+        </p:spPr>
+        <p:txBody>
+          <a:bodyPr wrap="square" lIns="0" tIns="0" rIns="0" bIns="0" rtlCol="0" anchor="ctr"/>
+          <a:lstStyle/>
+          <a:p>
+            <a:pPr indent="0" marL="0">
+              <a:buNone/>
+            </a:pPr>
+            <a:r>
+              <a:rPr lang="en-US" sz="950" b="1" dirty="0">
+                <a:solidFill>
+                  <a:srgbClr val="0068B7"/>
+                </a:solidFill>
+                <a:latin typeface="Aptos" pitchFamily="34" charset="0"/>
+                <a:ea typeface="Aptos" pitchFamily="34" charset="-122"/>
+                <a:cs typeface="Aptos" pitchFamily="34" charset="-120"/>
+              </a:rPr>
+              <a:t>Use this for</a:t>
+            </a:r>
+            <a:endParaRPr lang="en-US" sz="950" dirty="0"/>
+          </a:p>
+        </p:txBody>
+      </p:sp>
+      <p:sp>
+        <p:nvSpPr>
+          <p:cNvPr id="14" name="Text 12"/>
+          <p:cNvSpPr/>
+          <p:nvPr/>
+        </p:nvSpPr>
+        <p:spPr>
+          <a:xfrm>
+            <a:off x="8074152" y="3959352"/>
+            <a:ext cx="2825496" cy="1170432"/>
+          </a:xfrm>
+          <a:prstGeom prst="rect">
+            <a:avLst/>
+          </a:prstGeom>
+          <a:noFill/>
+          <a:ln/>
+        </p:spPr>
+        <p:txBody>
+          <a:bodyPr wrap="square" lIns="0" tIns="0" rIns="0" bIns="0" rtlCol="0" anchor="t">
+            <a:normAutofit/>
+          </a:bodyPr>
+          <a:lstStyle/>
+          <a:p>
+            <a:pPr indent="0" marL="0">
+              <a:buNone/>
+            </a:pPr>
+            <a:r>
+              <a:rPr lang="en-US" sz="1250" dirty="0">
+                <a:solidFill>
+                  <a:srgbClr val="17364A"/>
+                </a:solidFill>
+                <a:latin typeface="Aptos" pitchFamily="34" charset="0"/>
+                <a:ea typeface="Aptos" pitchFamily="34" charset="-122"/>
+                <a:cs typeface="Aptos" pitchFamily="34" charset="-120"/>
+              </a:rPr>
+              <a:t>Connect the concept to public health decisions, safeguards, documentation, or implementation work.</a:t>
+            </a:r>
+            <a:endParaRPr lang="en-US" sz="1250" dirty="0"/>
           </a:p>
         </p:txBody>
       </p:sp>
@@ -5755,7 +10395,32 @@
       </p:sp>
       <p:sp>
         <p:nvSpPr>
-          <p:cNvPr id="3" name="Text 1"/>
+          <p:cNvPr id="3" name="Shape 1"/>
+          <p:cNvSpPr/>
+          <p:nvPr/>
+        </p:nvSpPr>
+        <p:spPr>
+          <a:xfrm>
+            <a:off x="0" y="164592"/>
+            <a:ext cx="146304" cy="6693408"/>
+          </a:xfrm>
+          <a:prstGeom prst="rect">
+            <a:avLst/>
+          </a:prstGeom>
+          <a:solidFill>
+            <a:srgbClr val="2F8A28"/>
+          </a:solidFill>
+          <a:ln w="12700">
+            <a:solidFill>
+              <a:srgbClr val="2F8A28"/>
+            </a:solidFill>
+            <a:prstDash val="solid"/>
+          </a:ln>
+        </p:spPr>
+      </p:sp>
+      <p:sp>
+        <p:nvSpPr>
+          <p:cNvPr id="4" name="Text 2"/>
           <p:cNvSpPr/>
           <p:nvPr/>
         </p:nvSpPr>
@@ -5794,7 +10459,7 @@
       </p:sp>
       <p:sp>
         <p:nvSpPr>
-          <p:cNvPr id="4" name="Text 2"/>
+          <p:cNvPr id="5" name="Text 3"/>
           <p:cNvSpPr/>
           <p:nvPr/>
         </p:nvSpPr>
@@ -5833,7 +10498,7 @@
       </p:sp>
       <p:sp>
         <p:nvSpPr>
-          <p:cNvPr id="5" name="Text 3"/>
+          <p:cNvPr id="6" name="Text 4"/>
           <p:cNvSpPr/>
           <p:nvPr/>
         </p:nvSpPr>
@@ -5872,7 +10537,7 @@
       </p:sp>
       <p:sp>
         <p:nvSpPr>
-          <p:cNvPr id="6" name="Text 4"/>
+          <p:cNvPr id="7" name="Text 5"/>
           <p:cNvSpPr/>
           <p:nvPr/>
         </p:nvSpPr>
@@ -5905,7 +10570,7 @@
                 <a:ea typeface="Aptos Display" pitchFamily="34" charset="-122"/>
                 <a:cs typeface="Aptos Display" pitchFamily="34" charset="-120"/>
               </a:rPr>
-              <a:t>Learning Objectives</a:t>
+              <a:t>How this module connects to the playbook</a:t>
             </a:r>
             <a:endParaRPr lang="en-US" sz="2700" dirty="0"/>
           </a:p>
@@ -5913,14 +10578,14 @@
       </p:sp>
       <p:sp>
         <p:nvSpPr>
-          <p:cNvPr id="7" name="Text 5"/>
-          <p:cNvSpPr/>
-          <p:nvPr/>
-        </p:nvSpPr>
-        <p:spPr>
-          <a:xfrm>
-            <a:off x="822960" y="1325880"/>
-            <a:ext cx="10378440" cy="4800600"/>
+          <p:cNvPr id="8" name="Text 6"/>
+          <p:cNvSpPr/>
+          <p:nvPr/>
+        </p:nvSpPr>
+        <p:spPr>
+          <a:xfrm>
+            <a:off x="868680" y="1417320"/>
+            <a:ext cx="6903720" cy="4480560"/>
           </a:xfrm>
           <a:prstGeom prst="rect">
             <a:avLst/>
@@ -5935,7 +10600,7 @@
           <a:lstStyle/>
           <a:p>
             <a:r>
-              <a:rPr lang="en-US" sz="1450" dirty="0">
+              <a:rPr lang="en-US" sz="1540" dirty="0">
                 <a:solidFill>
                   <a:srgbClr val="17364A"/>
                 </a:solidFill>
@@ -5943,13 +10608,13 @@
                 <a:ea typeface="Aptos" pitchFamily="34" charset="-122"/>
                 <a:cs typeface="Aptos" pitchFamily="34" charset="-120"/>
               </a:rPr>
-              <a:t>Explain the purpose of synthetic data for public health ai in public health AI work.</a:t>
-            </a:r>
-            <a:endParaRPr lang="en-US" sz="1450" dirty="0"/>
-          </a:p>
-          <a:p>
-            <a:r>
-              <a:rPr lang="en-US" sz="1450" dirty="0">
+              <a:t>Play 11: Build and Deploy AI Solutions - This lesson informs Play 11 by helping learners connect the lesson topic to build and deploy.</a:t>
+            </a:r>
+            <a:endParaRPr lang="en-US" sz="1540" dirty="0"/>
+          </a:p>
+          <a:p>
+            <a:r>
+              <a:rPr lang="en-US" sz="1540" dirty="0">
                 <a:solidFill>
                   <a:srgbClr val="17364A"/>
                 </a:solidFill>
@@ -5957,13 +10622,13 @@
                 <a:ea typeface="Aptos" pitchFamily="34" charset="-122"/>
                 <a:cs typeface="Aptos" pitchFamily="34" charset="-120"/>
               </a:rPr>
-              <a:t>Identify the technical, operational, privacy, security, equity, and governance issues associated with the topic.</a:t>
-            </a:r>
-            <a:endParaRPr lang="en-US" sz="1450" dirty="0"/>
-          </a:p>
-          <a:p>
-            <a:r>
-              <a:rPr lang="en-US" sz="1450" dirty="0">
+              <a:t>Play 2: Readiness Assessment - This lesson informs Play 2 by helping learners connect the lesson topic to readiness assessment work.</a:t>
+            </a:r>
+            <a:endParaRPr lang="en-US" sz="1540" dirty="0"/>
+          </a:p>
+          <a:p>
+            <a:r>
+              <a:rPr lang="en-US" sz="1540" dirty="0">
                 <a:solidFill>
                   <a:srgbClr val="17364A"/>
                 </a:solidFill>
@@ -5971,13 +10636,13 @@
                 <a:ea typeface="Aptos" pitchFamily="34" charset="-122"/>
                 <a:cs typeface="Aptos" pitchFamily="34" charset="-120"/>
               </a:rPr>
-              <a:t>Apply the topic to a real or realistic public health workflow, system, or implementation scenario.</a:t>
-            </a:r>
-            <a:endParaRPr lang="en-US" sz="1450" dirty="0"/>
-          </a:p>
-          <a:p>
-            <a:r>
-              <a:rPr lang="en-US" sz="1450" dirty="0">
+              <a:t>Play 1: Vision &amp; Guardrails - This lesson informs Play 1 by helping learners connect the lesson topic to vision &amp; guardrails work in.</a:t>
+            </a:r>
+            <a:endParaRPr lang="en-US" sz="1540" dirty="0"/>
+          </a:p>
+          <a:p>
+            <a:r>
+              <a:rPr lang="en-US" sz="1540" dirty="0">
                 <a:solidFill>
                   <a:srgbClr val="17364A"/>
                 </a:solidFill>
@@ -5985,13 +10650,106 @@
                 <a:ea typeface="Aptos" pitchFamily="34" charset="-122"/>
                 <a:cs typeface="Aptos" pitchFamily="34" charset="-120"/>
               </a:rPr>
-              <a:t>Recognize common failure modes that can affect safety, accuracy, trust, workflow fit, or sustainability.</a:t>
-            </a:r>
-            <a:endParaRPr lang="en-US" sz="1450" dirty="0"/>
-          </a:p>
-          <a:p>
-            <a:r>
-              <a:rPr lang="en-US" sz="1450" dirty="0">
+              <a:t>Play 7: Prioritize Use Cases - This lesson informs Play 7 by helping learners connect the lesson topic to prioritize use cases work.</a:t>
+            </a:r>
+            <a:endParaRPr lang="en-US" sz="1540" dirty="0"/>
+          </a:p>
+        </p:txBody>
+      </p:sp>
+      <p:sp>
+        <p:nvSpPr>
+          <p:cNvPr id="9" name="Shape 7"/>
+          <p:cNvSpPr/>
+          <p:nvPr/>
+        </p:nvSpPr>
+        <p:spPr>
+          <a:xfrm>
+            <a:off x="8046720" y="1417320"/>
+            <a:ext cx="3063240" cy="2103120"/>
+          </a:xfrm>
+          <a:prstGeom prst="roundRect">
+            <a:avLst>
+              <a:gd name="adj" fmla="val 5217"/>
+            </a:avLst>
+          </a:prstGeom>
+          <a:solidFill>
+            <a:srgbClr val="EEF8ED"/>
+          </a:solidFill>
+          <a:ln w="12700">
+            <a:solidFill>
+              <a:srgbClr val="B9D7E6"/>
+            </a:solidFill>
+            <a:prstDash val="solid"/>
+          </a:ln>
+        </p:spPr>
+      </p:sp>
+      <p:sp>
+        <p:nvSpPr>
+          <p:cNvPr id="10" name="Text 8"/>
+          <p:cNvSpPr/>
+          <p:nvPr/>
+        </p:nvSpPr>
+        <p:spPr>
+          <a:xfrm>
+            <a:off x="8211312" y="1563624"/>
+            <a:ext cx="2734056" cy="201168"/>
+          </a:xfrm>
+          <a:prstGeom prst="rect">
+            <a:avLst/>
+          </a:prstGeom>
+          <a:noFill/>
+          <a:ln/>
+        </p:spPr>
+        <p:txBody>
+          <a:bodyPr wrap="square" lIns="0" tIns="0" rIns="0" bIns="0" rtlCol="0" anchor="ctr"/>
+          <a:lstStyle/>
+          <a:p>
+            <a:pPr indent="0" marL="0">
+              <a:buNone/>
+            </a:pPr>
+            <a:r>
+              <a:rPr lang="en-US" sz="950" b="1" dirty="0">
+                <a:solidFill>
+                  <a:srgbClr val="0068B7"/>
+                </a:solidFill>
+                <a:latin typeface="Aptos" pitchFamily="34" charset="0"/>
+                <a:ea typeface="Aptos" pitchFamily="34" charset="-122"/>
+                <a:cs typeface="Aptos" pitchFamily="34" charset="-120"/>
+              </a:rPr>
+              <a:t>Apply the lesson</a:t>
+            </a:r>
+            <a:endParaRPr lang="en-US" sz="950" dirty="0"/>
+          </a:p>
+        </p:txBody>
+      </p:sp>
+      <p:sp>
+        <p:nvSpPr>
+          <p:cNvPr id="11" name="Text 9"/>
+          <p:cNvSpPr/>
+          <p:nvPr/>
+        </p:nvSpPr>
+        <p:spPr>
+          <a:xfrm>
+            <a:off x="8211312" y="1856232"/>
+            <a:ext cx="2734056" cy="1536192"/>
+          </a:xfrm>
+          <a:prstGeom prst="rect">
+            <a:avLst/>
+          </a:prstGeom>
+          <a:noFill/>
+          <a:ln/>
+        </p:spPr>
+        <p:txBody>
+          <a:bodyPr wrap="square" lIns="0" tIns="0" rIns="0" bIns="0" rtlCol="0" anchor="t">
+            <a:normAutofit/>
+          </a:bodyPr>
+          <a:lstStyle/>
+          <a:p>
+            <a:pPr indent="0" marL="0">
+              <a:buNone/>
+            </a:pPr>
+            <a:r>
+              <a:rPr lang="en-US" sz="1250" dirty="0">
                 <a:solidFill>
                   <a:srgbClr val="17364A"/>
                 </a:solidFill>
@@ -5999,9 +10757,116 @@
                 <a:ea typeface="Aptos" pitchFamily="34" charset="-122"/>
                 <a:cs typeface="Aptos" pitchFamily="34" charset="-120"/>
               </a:rPr>
-              <a:t>Identify practical guardrails that should be documented before implementation.</a:t>
-            </a:r>
-            <a:endParaRPr lang="en-US" sz="1450" dirty="0"/>
+              <a:t>Use the related plays to identify decisions, participants, timing, approvals, and documentation needed for responsible implementation.</a:t>
+            </a:r>
+            <a:endParaRPr lang="en-US" sz="1250" dirty="0"/>
+          </a:p>
+        </p:txBody>
+      </p:sp>
+      <p:sp>
+        <p:nvSpPr>
+          <p:cNvPr id="12" name="Shape 10"/>
+          <p:cNvSpPr/>
+          <p:nvPr/>
+        </p:nvSpPr>
+        <p:spPr>
+          <a:xfrm>
+            <a:off x="8046720" y="3794760"/>
+            <a:ext cx="3063240" cy="1508760"/>
+          </a:xfrm>
+          <a:prstGeom prst="roundRect">
+            <a:avLst>
+              <a:gd name="adj" fmla="val 7273"/>
+            </a:avLst>
+          </a:prstGeom>
+          <a:solidFill>
+            <a:srgbClr val="FFF4D9"/>
+          </a:solidFill>
+          <a:ln w="12700">
+            <a:solidFill>
+              <a:srgbClr val="B9D7E6"/>
+            </a:solidFill>
+            <a:prstDash val="solid"/>
+          </a:ln>
+        </p:spPr>
+      </p:sp>
+      <p:sp>
+        <p:nvSpPr>
+          <p:cNvPr id="13" name="Text 11"/>
+          <p:cNvSpPr/>
+          <p:nvPr/>
+        </p:nvSpPr>
+        <p:spPr>
+          <a:xfrm>
+            <a:off x="8211312" y="3941064"/>
+            <a:ext cx="2734056" cy="201168"/>
+          </a:xfrm>
+          <a:prstGeom prst="rect">
+            <a:avLst/>
+          </a:prstGeom>
+          <a:noFill/>
+          <a:ln/>
+        </p:spPr>
+        <p:txBody>
+          <a:bodyPr wrap="square" lIns="0" tIns="0" rIns="0" bIns="0" rtlCol="0" anchor="ctr"/>
+          <a:lstStyle/>
+          <a:p>
+            <a:pPr indent="0" marL="0">
+              <a:buNone/>
+            </a:pPr>
+            <a:r>
+              <a:rPr lang="en-US" sz="950" b="1" dirty="0">
+                <a:solidFill>
+                  <a:srgbClr val="0068B7"/>
+                </a:solidFill>
+                <a:latin typeface="Aptos" pitchFamily="34" charset="0"/>
+                <a:ea typeface="Aptos" pitchFamily="34" charset="-122"/>
+                <a:cs typeface="Aptos" pitchFamily="34" charset="-120"/>
+              </a:rPr>
+              <a:t>Keep in mind</a:t>
+            </a:r>
+            <a:endParaRPr lang="en-US" sz="950" dirty="0"/>
+          </a:p>
+        </p:txBody>
+      </p:sp>
+      <p:sp>
+        <p:nvSpPr>
+          <p:cNvPr id="14" name="Text 12"/>
+          <p:cNvSpPr/>
+          <p:nvPr/>
+        </p:nvSpPr>
+        <p:spPr>
+          <a:xfrm>
+            <a:off x="8211312" y="4233672"/>
+            <a:ext cx="2734056" cy="941832"/>
+          </a:xfrm>
+          <a:prstGeom prst="rect">
+            <a:avLst/>
+          </a:prstGeom>
+          <a:noFill/>
+          <a:ln/>
+        </p:spPr>
+        <p:txBody>
+          <a:bodyPr wrap="square" lIns="0" tIns="0" rIns="0" bIns="0" rtlCol="0" anchor="t">
+            <a:normAutofit/>
+          </a:bodyPr>
+          <a:lstStyle/>
+          <a:p>
+            <a:pPr indent="0" marL="0">
+              <a:buNone/>
+            </a:pPr>
+            <a:r>
+              <a:rPr lang="en-US" sz="1250" dirty="0">
+                <a:solidFill>
+                  <a:srgbClr val="17364A"/>
+                </a:solidFill>
+                <a:latin typeface="Aptos" pitchFamily="34" charset="0"/>
+                <a:ea typeface="Aptos" pitchFamily="34" charset="-122"/>
+                <a:cs typeface="Aptos" pitchFamily="34" charset="-120"/>
+              </a:rPr>
+              <a:t>The playbook connection helps turn training into agency work, not just individual knowledge.</a:t>
+            </a:r>
+            <a:endParaRPr lang="en-US" sz="1250" dirty="0"/>
           </a:p>
         </p:txBody>
       </p:sp>
@@ -6064,7 +10929,32 @@
       </p:sp>
       <p:sp>
         <p:nvSpPr>
-          <p:cNvPr id="3" name="Text 1"/>
+          <p:cNvPr id="3" name="Shape 1"/>
+          <p:cNvSpPr/>
+          <p:nvPr/>
+        </p:nvSpPr>
+        <p:spPr>
+          <a:xfrm>
+            <a:off x="0" y="164592"/>
+            <a:ext cx="146304" cy="6693408"/>
+          </a:xfrm>
+          <a:prstGeom prst="rect">
+            <a:avLst/>
+          </a:prstGeom>
+          <a:solidFill>
+            <a:srgbClr val="2F8A28"/>
+          </a:solidFill>
+          <a:ln w="12700">
+            <a:solidFill>
+              <a:srgbClr val="2F8A28"/>
+            </a:solidFill>
+            <a:prstDash val="solid"/>
+          </a:ln>
+        </p:spPr>
+      </p:sp>
+      <p:sp>
+        <p:nvSpPr>
+          <p:cNvPr id="4" name="Text 2"/>
           <p:cNvSpPr/>
           <p:nvPr/>
         </p:nvSpPr>
@@ -6103,7 +10993,7 @@
       </p:sp>
       <p:sp>
         <p:nvSpPr>
-          <p:cNvPr id="4" name="Text 2"/>
+          <p:cNvPr id="5" name="Text 3"/>
           <p:cNvSpPr/>
           <p:nvPr/>
         </p:nvSpPr>
@@ -6142,7 +11032,7 @@
       </p:sp>
       <p:sp>
         <p:nvSpPr>
-          <p:cNvPr id="5" name="Text 3"/>
+          <p:cNvPr id="6" name="Text 4"/>
           <p:cNvSpPr/>
           <p:nvPr/>
         </p:nvSpPr>
@@ -6181,7 +11071,7 @@
       </p:sp>
       <p:sp>
         <p:nvSpPr>
-          <p:cNvPr id="6" name="Text 4"/>
+          <p:cNvPr id="7" name="Text 5"/>
           <p:cNvSpPr/>
           <p:nvPr/>
         </p:nvSpPr>
@@ -6214,7 +11104,7 @@
                 <a:ea typeface="Aptos Display" pitchFamily="34" charset="-122"/>
                 <a:cs typeface="Aptos Display" pitchFamily="34" charset="-120"/>
               </a:rPr>
-              <a:t>Learning Objectives Continued</a:t>
+              <a:t>Related toolkit resources</a:t>
             </a:r>
             <a:endParaRPr lang="en-US" sz="2700" dirty="0"/>
           </a:p>
@@ -6222,14 +11112,14 @@
       </p:sp>
       <p:sp>
         <p:nvSpPr>
-          <p:cNvPr id="7" name="Text 5"/>
-          <p:cNvSpPr/>
-          <p:nvPr/>
-        </p:nvSpPr>
-        <p:spPr>
-          <a:xfrm>
-            <a:off x="822960" y="1325880"/>
-            <a:ext cx="10378440" cy="4800600"/>
+          <p:cNvPr id="8" name="Text 6"/>
+          <p:cNvSpPr/>
+          <p:nvPr/>
+        </p:nvSpPr>
+        <p:spPr>
+          <a:xfrm>
+            <a:off x="868680" y="1417320"/>
+            <a:ext cx="6903720" cy="4480560"/>
           </a:xfrm>
           <a:prstGeom prst="rect">
             <a:avLst/>
@@ -6244,7 +11134,7 @@
           <a:lstStyle/>
           <a:p>
             <a:r>
-              <a:rPr lang="en-US" sz="1450" dirty="0">
+              <a:rPr lang="en-US" sz="1460" dirty="0">
                 <a:solidFill>
                   <a:srgbClr val="17364A"/>
                 </a:solidFill>
@@ -6252,9 +11142,279 @@
                 <a:ea typeface="Aptos" pitchFamily="34" charset="-122"/>
                 <a:cs typeface="Aptos" pitchFamily="34" charset="-120"/>
               </a:rPr>
-              <a:t>Produce a synthetic dataset assessment that can support readiness assessment, governance review, procurement, implementation, or monitoring.</a:t>
-            </a:r>
-            <a:endParaRPr lang="en-US" sz="1450" dirty="0"/>
+              <a:t>Tool 4: AI Policy Landscape Scan (Worksheet) - Use AI Policy Landscape Scan to translate this lesson into a documented public health.</a:t>
+            </a:r>
+            <a:endParaRPr lang="en-US" sz="1460" dirty="0"/>
+          </a:p>
+          <a:p>
+            <a:r>
+              <a:rPr lang="en-US" sz="1460" dirty="0">
+                <a:solidFill>
+                  <a:srgbClr val="17364A"/>
+                </a:solidFill>
+                <a:latin typeface="Aptos" pitchFamily="34" charset="0"/>
+                <a:ea typeface="Aptos" pitchFamily="34" charset="-122"/>
+                <a:cs typeface="Aptos" pitchFamily="34" charset="-120"/>
+              </a:rPr>
+              <a:t>Tool 5: AI Environmental and Resource Impact Review (Checklist) - Use this tool to complete or strengthen the practical exercise for.</a:t>
+            </a:r>
+            <a:endParaRPr lang="en-US" sz="1460" dirty="0"/>
+          </a:p>
+          <a:p>
+            <a:r>
+              <a:rPr lang="en-US" sz="1460" dirty="0">
+                <a:solidFill>
+                  <a:srgbClr val="17364A"/>
+                </a:solidFill>
+                <a:latin typeface="Aptos" pitchFamily="34" charset="0"/>
+                <a:ea typeface="Aptos" pitchFamily="34" charset="-122"/>
+                <a:cs typeface="Aptos" pitchFamily="34" charset="-120"/>
+              </a:rPr>
+              <a:t>Tool 6: Human-Centered AI Decision Rule Checklist (Checklist) - Use Human-Centered AI Decision Rule Checklist to translate this.</a:t>
+            </a:r>
+            <a:endParaRPr lang="en-US" sz="1460" dirty="0"/>
+          </a:p>
+          <a:p>
+            <a:r>
+              <a:rPr lang="en-US" sz="1460" dirty="0">
+                <a:solidFill>
+                  <a:srgbClr val="17364A"/>
+                </a:solidFill>
+                <a:latin typeface="Aptos" pitchFamily="34" charset="0"/>
+                <a:ea typeface="Aptos" pitchFamily="34" charset="-122"/>
+                <a:cs typeface="Aptos" pitchFamily="34" charset="-120"/>
+              </a:rPr>
+              <a:t>Tool 8: AI Project Charter (Planning) - Use AI Project Charter to translate this lesson into a documented public health AI planning,.</a:t>
+            </a:r>
+            <a:endParaRPr lang="en-US" sz="1460" dirty="0"/>
+          </a:p>
+          <a:p>
+            <a:r>
+              <a:rPr lang="en-US" sz="1460" dirty="0">
+                <a:solidFill>
+                  <a:srgbClr val="17364A"/>
+                </a:solidFill>
+                <a:latin typeface="Aptos" pitchFamily="34" charset="0"/>
+                <a:ea typeface="Aptos" pitchFamily="34" charset="-122"/>
+                <a:cs typeface="Aptos" pitchFamily="34" charset="-120"/>
+              </a:rPr>
+              <a:t>Tool 9: Data Quality Assessment Checklist (Checklist) - Use this tool to complete or strengthen the practical exercise for the module.</a:t>
+            </a:r>
+            <a:endParaRPr lang="en-US" sz="1460" dirty="0"/>
+          </a:p>
+        </p:txBody>
+      </p:sp>
+      <p:sp>
+        <p:nvSpPr>
+          <p:cNvPr id="9" name="Shape 7"/>
+          <p:cNvSpPr/>
+          <p:nvPr/>
+        </p:nvSpPr>
+        <p:spPr>
+          <a:xfrm>
+            <a:off x="8046720" y="1417320"/>
+            <a:ext cx="3063240" cy="2103120"/>
+          </a:xfrm>
+          <a:prstGeom prst="roundRect">
+            <a:avLst>
+              <a:gd name="adj" fmla="val 5217"/>
+            </a:avLst>
+          </a:prstGeom>
+          <a:solidFill>
+            <a:srgbClr val="EAF6F8"/>
+          </a:solidFill>
+          <a:ln w="12700">
+            <a:solidFill>
+              <a:srgbClr val="B9D7E6"/>
+            </a:solidFill>
+            <a:prstDash val="solid"/>
+          </a:ln>
+        </p:spPr>
+      </p:sp>
+      <p:sp>
+        <p:nvSpPr>
+          <p:cNvPr id="10" name="Text 8"/>
+          <p:cNvSpPr/>
+          <p:nvPr/>
+        </p:nvSpPr>
+        <p:spPr>
+          <a:xfrm>
+            <a:off x="8211312" y="1563624"/>
+            <a:ext cx="2734056" cy="201168"/>
+          </a:xfrm>
+          <a:prstGeom prst="rect">
+            <a:avLst/>
+          </a:prstGeom>
+          <a:noFill/>
+          <a:ln/>
+        </p:spPr>
+        <p:txBody>
+          <a:bodyPr wrap="square" lIns="0" tIns="0" rIns="0" bIns="0" rtlCol="0" anchor="ctr"/>
+          <a:lstStyle/>
+          <a:p>
+            <a:pPr indent="0" marL="0">
+              <a:buNone/>
+            </a:pPr>
+            <a:r>
+              <a:rPr lang="en-US" sz="950" b="1" dirty="0">
+                <a:solidFill>
+                  <a:srgbClr val="0068B7"/>
+                </a:solidFill>
+                <a:latin typeface="Aptos" pitchFamily="34" charset="0"/>
+                <a:ea typeface="Aptos" pitchFamily="34" charset="-122"/>
+                <a:cs typeface="Aptos" pitchFamily="34" charset="-120"/>
+              </a:rPr>
+              <a:t>Use the tools</a:t>
+            </a:r>
+            <a:endParaRPr lang="en-US" sz="950" dirty="0"/>
+          </a:p>
+        </p:txBody>
+      </p:sp>
+      <p:sp>
+        <p:nvSpPr>
+          <p:cNvPr id="11" name="Text 9"/>
+          <p:cNvSpPr/>
+          <p:nvPr/>
+        </p:nvSpPr>
+        <p:spPr>
+          <a:xfrm>
+            <a:off x="8211312" y="1856232"/>
+            <a:ext cx="2734056" cy="1536192"/>
+          </a:xfrm>
+          <a:prstGeom prst="rect">
+            <a:avLst/>
+          </a:prstGeom>
+          <a:noFill/>
+          <a:ln/>
+        </p:spPr>
+        <p:txBody>
+          <a:bodyPr wrap="square" lIns="0" tIns="0" rIns="0" bIns="0" rtlCol="0" anchor="t">
+            <a:normAutofit/>
+          </a:bodyPr>
+          <a:lstStyle/>
+          <a:p>
+            <a:pPr indent="0" marL="0">
+              <a:buNone/>
+            </a:pPr>
+            <a:r>
+              <a:rPr lang="en-US" sz="1250" dirty="0">
+                <a:solidFill>
+                  <a:srgbClr val="17364A"/>
+                </a:solidFill>
+                <a:latin typeface="Aptos" pitchFamily="34" charset="0"/>
+                <a:ea typeface="Aptos" pitchFamily="34" charset="-122"/>
+                <a:cs typeface="Aptos" pitchFamily="34" charset="-120"/>
+              </a:rPr>
+              <a:t>Use linked tools when your department needs a structured worksheet, template, checklist, review process, or documentation artifact.</a:t>
+            </a:r>
+            <a:endParaRPr lang="en-US" sz="1250" dirty="0"/>
+          </a:p>
+        </p:txBody>
+      </p:sp>
+      <p:sp>
+        <p:nvSpPr>
+          <p:cNvPr id="12" name="Shape 10"/>
+          <p:cNvSpPr/>
+          <p:nvPr/>
+        </p:nvSpPr>
+        <p:spPr>
+          <a:xfrm>
+            <a:off x="8046720" y="3794760"/>
+            <a:ext cx="3063240" cy="1508760"/>
+          </a:xfrm>
+          <a:prstGeom prst="roundRect">
+            <a:avLst>
+              <a:gd name="adj" fmla="val 7273"/>
+            </a:avLst>
+          </a:prstGeom>
+          <a:solidFill>
+            <a:srgbClr val="EEF8ED"/>
+          </a:solidFill>
+          <a:ln w="12700">
+            <a:solidFill>
+              <a:srgbClr val="B9D7E6"/>
+            </a:solidFill>
+            <a:prstDash val="solid"/>
+          </a:ln>
+        </p:spPr>
+      </p:sp>
+      <p:sp>
+        <p:nvSpPr>
+          <p:cNvPr id="13" name="Text 11"/>
+          <p:cNvSpPr/>
+          <p:nvPr/>
+        </p:nvSpPr>
+        <p:spPr>
+          <a:xfrm>
+            <a:off x="8211312" y="3941064"/>
+            <a:ext cx="2734056" cy="201168"/>
+          </a:xfrm>
+          <a:prstGeom prst="rect">
+            <a:avLst/>
+          </a:prstGeom>
+          <a:noFill/>
+          <a:ln/>
+        </p:spPr>
+        <p:txBody>
+          <a:bodyPr wrap="square" lIns="0" tIns="0" rIns="0" bIns="0" rtlCol="0" anchor="ctr"/>
+          <a:lstStyle/>
+          <a:p>
+            <a:pPr indent="0" marL="0">
+              <a:buNone/>
+            </a:pPr>
+            <a:r>
+              <a:rPr lang="en-US" sz="950" b="1" dirty="0">
+                <a:solidFill>
+                  <a:srgbClr val="0068B7"/>
+                </a:solidFill>
+                <a:latin typeface="Aptos" pitchFamily="34" charset="0"/>
+                <a:ea typeface="Aptos" pitchFamily="34" charset="-122"/>
+                <a:cs typeface="Aptos" pitchFamily="34" charset="-120"/>
+              </a:rPr>
+              <a:t>Avoid duplication</a:t>
+            </a:r>
+            <a:endParaRPr lang="en-US" sz="950" dirty="0"/>
+          </a:p>
+        </p:txBody>
+      </p:sp>
+      <p:sp>
+        <p:nvSpPr>
+          <p:cNvPr id="14" name="Text 12"/>
+          <p:cNvSpPr/>
+          <p:nvPr/>
+        </p:nvSpPr>
+        <p:spPr>
+          <a:xfrm>
+            <a:off x="8211312" y="4233672"/>
+            <a:ext cx="2734056" cy="941832"/>
+          </a:xfrm>
+          <a:prstGeom prst="rect">
+            <a:avLst/>
+          </a:prstGeom>
+          <a:noFill/>
+          <a:ln/>
+        </p:spPr>
+        <p:txBody>
+          <a:bodyPr wrap="square" lIns="0" tIns="0" rIns="0" bIns="0" rtlCol="0" anchor="t">
+            <a:normAutofit/>
+          </a:bodyPr>
+          <a:lstStyle/>
+          <a:p>
+            <a:pPr indent="0" marL="0">
+              <a:buNone/>
+            </a:pPr>
+            <a:r>
+              <a:rPr lang="en-US" sz="1250" dirty="0">
+                <a:solidFill>
+                  <a:srgbClr val="17364A"/>
+                </a:solidFill>
+                <a:latin typeface="Aptos" pitchFamily="34" charset="0"/>
+                <a:ea typeface="Aptos" pitchFamily="34" charset="-122"/>
+                <a:cs typeface="Aptos" pitchFamily="34" charset="-120"/>
+              </a:rPr>
+              <a:t>If your department already has a strong equivalent tool, adapt or use the existing process instead of recreating it.</a:t>
+            </a:r>
+            <a:endParaRPr lang="en-US" sz="1250" dirty="0"/>
           </a:p>
         </p:txBody>
       </p:sp>
@@ -6317,7 +11477,32 @@
       </p:sp>
       <p:sp>
         <p:nvSpPr>
-          <p:cNvPr id="3" name="Text 1"/>
+          <p:cNvPr id="3" name="Shape 1"/>
+          <p:cNvSpPr/>
+          <p:nvPr/>
+        </p:nvSpPr>
+        <p:spPr>
+          <a:xfrm>
+            <a:off x="0" y="164592"/>
+            <a:ext cx="146304" cy="6693408"/>
+          </a:xfrm>
+          <a:prstGeom prst="rect">
+            <a:avLst/>
+          </a:prstGeom>
+          <a:solidFill>
+            <a:srgbClr val="2F8A28"/>
+          </a:solidFill>
+          <a:ln w="12700">
+            <a:solidFill>
+              <a:srgbClr val="2F8A28"/>
+            </a:solidFill>
+            <a:prstDash val="solid"/>
+          </a:ln>
+        </p:spPr>
+      </p:sp>
+      <p:sp>
+        <p:nvSpPr>
+          <p:cNvPr id="4" name="Text 2"/>
           <p:cNvSpPr/>
           <p:nvPr/>
         </p:nvSpPr>
@@ -6356,7 +11541,7 @@
       </p:sp>
       <p:sp>
         <p:nvSpPr>
-          <p:cNvPr id="4" name="Text 2"/>
+          <p:cNvPr id="5" name="Text 3"/>
           <p:cNvSpPr/>
           <p:nvPr/>
         </p:nvSpPr>
@@ -6395,7 +11580,7 @@
       </p:sp>
       <p:sp>
         <p:nvSpPr>
-          <p:cNvPr id="5" name="Text 3"/>
+          <p:cNvPr id="6" name="Text 4"/>
           <p:cNvSpPr/>
           <p:nvPr/>
         </p:nvSpPr>
@@ -6434,13 +11619,77 @@
       </p:sp>
       <p:sp>
         <p:nvSpPr>
-          <p:cNvPr id="6" name="Text 4"/>
+          <p:cNvPr id="7" name="Shape 5"/>
           <p:cNvSpPr/>
           <p:nvPr/>
         </p:nvSpPr>
         <p:spPr>
           <a:xfrm>
             <a:off x="640080" y="658368"/>
+            <a:ext cx="420624" cy="420624"/>
+          </a:xfrm>
+          <a:prstGeom prst="ellipse">
+            <a:avLst/>
+          </a:prstGeom>
+          <a:solidFill>
+            <a:srgbClr val="0068B7"/>
+          </a:solidFill>
+          <a:ln w="12700">
+            <a:solidFill>
+              <a:srgbClr val="0068B7"/>
+            </a:solidFill>
+            <a:prstDash val="solid"/>
+          </a:ln>
+        </p:spPr>
+      </p:sp>
+      <p:sp>
+        <p:nvSpPr>
+          <p:cNvPr id="8" name="Text 6"/>
+          <p:cNvSpPr/>
+          <p:nvPr/>
+        </p:nvSpPr>
+        <p:spPr>
+          <a:xfrm>
+            <a:off x="640080" y="731520"/>
+            <a:ext cx="420624" cy="164592"/>
+          </a:xfrm>
+          <a:prstGeom prst="rect">
+            <a:avLst/>
+          </a:prstGeom>
+          <a:noFill/>
+          <a:ln/>
+        </p:spPr>
+        <p:txBody>
+          <a:bodyPr wrap="square" lIns="0" tIns="0" rIns="0" bIns="0" rtlCol="0" anchor="ctr"/>
+          <a:lstStyle/>
+          <a:p>
+            <a:pPr algn="ctr" indent="0" marL="0">
+              <a:buNone/>
+            </a:pPr>
+            <a:r>
+              <a:rPr lang="en-US" sz="1100" b="1" dirty="0">
+                <a:solidFill>
+                  <a:srgbClr val="FFFFFF"/>
+                </a:solidFill>
+                <a:latin typeface="Aptos" pitchFamily="34" charset="0"/>
+                <a:ea typeface="Aptos" pitchFamily="34" charset="-122"/>
+                <a:cs typeface="Aptos" pitchFamily="34" charset="-120"/>
+              </a:rPr>
+              <a:t>1</a:t>
+            </a:r>
+            <a:endParaRPr lang="en-US" sz="1100" dirty="0"/>
+          </a:p>
+        </p:txBody>
+      </p:sp>
+      <p:sp>
+        <p:nvSpPr>
+          <p:cNvPr id="9" name="Text 7"/>
+          <p:cNvSpPr/>
+          <p:nvPr/>
+        </p:nvSpPr>
+        <p:spPr>
+          <a:xfrm>
+            <a:off x="640080" y="621792"/>
             <a:ext cx="10881360" cy="566928"/>
           </a:xfrm>
           <a:prstGeom prst="rect">
@@ -6467,7 +11716,7 @@
                 <a:ea typeface="Aptos Display" pitchFamily="34" charset="-122"/>
                 <a:cs typeface="Aptos Display" pitchFamily="34" charset="-120"/>
               </a:rPr>
-              <a:t>Module Overview</a:t>
+              <a:t>Learning Objectives</a:t>
             </a:r>
             <a:endParaRPr lang="en-US" sz="2700" dirty="0"/>
           </a:p>
@@ -6475,32 +11724,178 @@
       </p:sp>
       <p:sp>
         <p:nvSpPr>
-          <p:cNvPr id="7" name="Text 5"/>
-          <p:cNvSpPr/>
-          <p:nvPr/>
-        </p:nvSpPr>
-        <p:spPr>
-          <a:xfrm>
-            <a:off x="822960" y="1325880"/>
-            <a:ext cx="10378440" cy="4800600"/>
-          </a:xfrm>
-          <a:prstGeom prst="rect">
-            <a:avLst/>
-          </a:prstGeom>
-          <a:noFill/>
-          <a:ln/>
-        </p:spPr>
-        <p:txBody>
-          <a:bodyPr wrap="square" lIns="1016" tIns="1016" rIns="1016" bIns="1016" rtlCol="0" anchor="t">
+          <p:cNvPr id="10" name="Text 8"/>
+          <p:cNvSpPr/>
+          <p:nvPr/>
+        </p:nvSpPr>
+        <p:spPr>
+          <a:xfrm>
+            <a:off x="868680" y="1417320"/>
+            <a:ext cx="6675120" cy="4434840"/>
+          </a:xfrm>
+          <a:prstGeom prst="rect">
+            <a:avLst/>
+          </a:prstGeom>
+          <a:noFill/>
+          <a:ln/>
+        </p:spPr>
+        <p:txBody>
+          <a:bodyPr wrap="square" lIns="635" tIns="635" rIns="635" bIns="635" rtlCol="0" anchor="t">
             <a:normAutofit/>
           </a:bodyPr>
           <a:lstStyle/>
           <a:p>
+            <a:r>
+              <a:rPr lang="en-US" sz="1700" dirty="0">
+                <a:solidFill>
+                  <a:srgbClr val="17364A"/>
+                </a:solidFill>
+                <a:latin typeface="Aptos" pitchFamily="34" charset="0"/>
+                <a:ea typeface="Aptos" pitchFamily="34" charset="-122"/>
+                <a:cs typeface="Aptos" pitchFamily="34" charset="-120"/>
+              </a:rPr>
+              <a:t>Explain the purpose of synthetic data for public health ai in public health AI work.</a:t>
+            </a:r>
+            <a:endParaRPr lang="en-US" sz="1700" dirty="0"/>
+          </a:p>
+          <a:p>
+            <a:r>
+              <a:rPr lang="en-US" sz="1700" dirty="0">
+                <a:solidFill>
+                  <a:srgbClr val="17364A"/>
+                </a:solidFill>
+                <a:latin typeface="Aptos" pitchFamily="34" charset="0"/>
+                <a:ea typeface="Aptos" pitchFamily="34" charset="-122"/>
+                <a:cs typeface="Aptos" pitchFamily="34" charset="-120"/>
+              </a:rPr>
+              <a:t>Identify the technical, operational, privacy, security, equity, and governance issues associated with the topic.</a:t>
+            </a:r>
+            <a:endParaRPr lang="en-US" sz="1700" dirty="0"/>
+          </a:p>
+          <a:p>
+            <a:r>
+              <a:rPr lang="en-US" sz="1700" dirty="0">
+                <a:solidFill>
+                  <a:srgbClr val="17364A"/>
+                </a:solidFill>
+                <a:latin typeface="Aptos" pitchFamily="34" charset="0"/>
+                <a:ea typeface="Aptos" pitchFamily="34" charset="-122"/>
+                <a:cs typeface="Aptos" pitchFamily="34" charset="-120"/>
+              </a:rPr>
+              <a:t>Apply the topic to a real or realistic public health workflow, system, or implementation scenario.</a:t>
+            </a:r>
+            <a:endParaRPr lang="en-US" sz="1700" dirty="0"/>
+          </a:p>
+          <a:p>
+            <a:r>
+              <a:rPr lang="en-US" sz="1700" dirty="0">
+                <a:solidFill>
+                  <a:srgbClr val="17364A"/>
+                </a:solidFill>
+                <a:latin typeface="Aptos" pitchFamily="34" charset="0"/>
+                <a:ea typeface="Aptos" pitchFamily="34" charset="-122"/>
+                <a:cs typeface="Aptos" pitchFamily="34" charset="-120"/>
+              </a:rPr>
+              <a:t>Recognize common failure modes that can affect safety, accuracy, trust, workflow fit, or sustainability.</a:t>
+            </a:r>
+            <a:endParaRPr lang="en-US" sz="1700" dirty="0"/>
+          </a:p>
+        </p:txBody>
+      </p:sp>
+      <p:sp>
+        <p:nvSpPr>
+          <p:cNvPr id="11" name="Shape 9"/>
+          <p:cNvSpPr/>
+          <p:nvPr/>
+        </p:nvSpPr>
+        <p:spPr>
+          <a:xfrm>
+            <a:off x="7909560" y="1417320"/>
+            <a:ext cx="3154680" cy="1828800"/>
+          </a:xfrm>
+          <a:prstGeom prst="roundRect">
+            <a:avLst>
+              <a:gd name="adj" fmla="val 6000"/>
+            </a:avLst>
+          </a:prstGeom>
+          <a:solidFill>
+            <a:srgbClr val="EEF8ED"/>
+          </a:solidFill>
+          <a:ln w="12700">
+            <a:solidFill>
+              <a:srgbClr val="B9D7E6"/>
+            </a:solidFill>
+            <a:prstDash val="solid"/>
+          </a:ln>
+        </p:spPr>
+      </p:sp>
+      <p:sp>
+        <p:nvSpPr>
+          <p:cNvPr id="12" name="Text 10"/>
+          <p:cNvSpPr/>
+          <p:nvPr/>
+        </p:nvSpPr>
+        <p:spPr>
+          <a:xfrm>
+            <a:off x="8074152" y="1563624"/>
+            <a:ext cx="2825496" cy="201168"/>
+          </a:xfrm>
+          <a:prstGeom prst="rect">
+            <a:avLst/>
+          </a:prstGeom>
+          <a:noFill/>
+          <a:ln/>
+        </p:spPr>
+        <p:txBody>
+          <a:bodyPr wrap="square" lIns="0" tIns="0" rIns="0" bIns="0" rtlCol="0" anchor="ctr"/>
+          <a:lstStyle/>
+          <a:p>
             <a:pPr indent="0" marL="0">
               <a:buNone/>
             </a:pPr>
             <a:r>
-              <a:rPr lang="en-US" sz="1420" dirty="0">
+              <a:rPr lang="en-US" sz="950" b="1" dirty="0">
+                <a:solidFill>
+                  <a:srgbClr val="0068B7"/>
+                </a:solidFill>
+                <a:latin typeface="Aptos" pitchFamily="34" charset="0"/>
+                <a:ea typeface="Aptos" pitchFamily="34" charset="-122"/>
+                <a:cs typeface="Aptos" pitchFamily="34" charset="-120"/>
+              </a:rPr>
+              <a:t>Key idea</a:t>
+            </a:r>
+            <a:endParaRPr lang="en-US" sz="950" dirty="0"/>
+          </a:p>
+        </p:txBody>
+      </p:sp>
+      <p:sp>
+        <p:nvSpPr>
+          <p:cNvPr id="13" name="Text 11"/>
+          <p:cNvSpPr/>
+          <p:nvPr/>
+        </p:nvSpPr>
+        <p:spPr>
+          <a:xfrm>
+            <a:off x="8074152" y="1856232"/>
+            <a:ext cx="2825496" cy="1261872"/>
+          </a:xfrm>
+          <a:prstGeom prst="rect">
+            <a:avLst/>
+          </a:prstGeom>
+          <a:noFill/>
+          <a:ln/>
+        </p:spPr>
+        <p:txBody>
+          <a:bodyPr wrap="square" lIns="0" tIns="0" rIns="0" bIns="0" rtlCol="0" anchor="t">
+            <a:normAutofit/>
+          </a:bodyPr>
+          <a:lstStyle/>
+          <a:p>
+            <a:pPr indent="0" marL="0">
+              <a:buNone/>
+            </a:pPr>
+            <a:r>
+              <a:rPr lang="en-US" sz="1250" dirty="0">
                 <a:solidFill>
                   <a:srgbClr val="17364A"/>
                 </a:solidFill>
@@ -6508,9 +11903,116 @@
                 <a:ea typeface="Aptos" pitchFamily="34" charset="-122"/>
                 <a:cs typeface="Aptos" pitchFamily="34" charset="-120"/>
               </a:rPr>
-              <a:t>Synthetic data are artificially generated data that are designed to resemble real data without directly copying every record from a real person. In public health, synthetic data can support training, software testing, demonstrations, model prototyping, and vendor evaluation when real data are too sensitive or difficult to share. This module helps learners understand both the promise and limitations of synthetic data, including privacy risk, analytic utility, representativeness, and validation.</a:t>
-            </a:r>
-            <a:endParaRPr lang="en-US" sz="1420" dirty="0"/>
+              <a:t>Explain the purpose of synthetic data for public health ai in public health AI work.</a:t>
+            </a:r>
+            <a:endParaRPr lang="en-US" sz="1250" dirty="0"/>
+          </a:p>
+        </p:txBody>
+      </p:sp>
+      <p:sp>
+        <p:nvSpPr>
+          <p:cNvPr id="14" name="Shape 12"/>
+          <p:cNvSpPr/>
+          <p:nvPr/>
+        </p:nvSpPr>
+        <p:spPr>
+          <a:xfrm>
+            <a:off x="7909560" y="3520440"/>
+            <a:ext cx="3154680" cy="1737360"/>
+          </a:xfrm>
+          <a:prstGeom prst="roundRect">
+            <a:avLst>
+              <a:gd name="adj" fmla="val 6316"/>
+            </a:avLst>
+          </a:prstGeom>
+          <a:solidFill>
+            <a:srgbClr val="EAF6F8"/>
+          </a:solidFill>
+          <a:ln w="12700">
+            <a:solidFill>
+              <a:srgbClr val="B9D7E6"/>
+            </a:solidFill>
+            <a:prstDash val="solid"/>
+          </a:ln>
+        </p:spPr>
+      </p:sp>
+      <p:sp>
+        <p:nvSpPr>
+          <p:cNvPr id="15" name="Text 13"/>
+          <p:cNvSpPr/>
+          <p:nvPr/>
+        </p:nvSpPr>
+        <p:spPr>
+          <a:xfrm>
+            <a:off x="8074152" y="3666744"/>
+            <a:ext cx="2825496" cy="201168"/>
+          </a:xfrm>
+          <a:prstGeom prst="rect">
+            <a:avLst/>
+          </a:prstGeom>
+          <a:noFill/>
+          <a:ln/>
+        </p:spPr>
+        <p:txBody>
+          <a:bodyPr wrap="square" lIns="0" tIns="0" rIns="0" bIns="0" rtlCol="0" anchor="ctr"/>
+          <a:lstStyle/>
+          <a:p>
+            <a:pPr indent="0" marL="0">
+              <a:buNone/>
+            </a:pPr>
+            <a:r>
+              <a:rPr lang="en-US" sz="950" b="1" dirty="0">
+                <a:solidFill>
+                  <a:srgbClr val="0068B7"/>
+                </a:solidFill>
+                <a:latin typeface="Aptos" pitchFamily="34" charset="0"/>
+                <a:ea typeface="Aptos" pitchFamily="34" charset="-122"/>
+                <a:cs typeface="Aptos" pitchFamily="34" charset="-120"/>
+              </a:rPr>
+              <a:t>Use this for</a:t>
+            </a:r>
+            <a:endParaRPr lang="en-US" sz="950" dirty="0"/>
+          </a:p>
+        </p:txBody>
+      </p:sp>
+      <p:sp>
+        <p:nvSpPr>
+          <p:cNvPr id="16" name="Text 14"/>
+          <p:cNvSpPr/>
+          <p:nvPr/>
+        </p:nvSpPr>
+        <p:spPr>
+          <a:xfrm>
+            <a:off x="8074152" y="3959352"/>
+            <a:ext cx="2825496" cy="1170432"/>
+          </a:xfrm>
+          <a:prstGeom prst="rect">
+            <a:avLst/>
+          </a:prstGeom>
+          <a:noFill/>
+          <a:ln/>
+        </p:spPr>
+        <p:txBody>
+          <a:bodyPr wrap="square" lIns="0" tIns="0" rIns="0" bIns="0" rtlCol="0" anchor="t">
+            <a:normAutofit/>
+          </a:bodyPr>
+          <a:lstStyle/>
+          <a:p>
+            <a:pPr indent="0" marL="0">
+              <a:buNone/>
+            </a:pPr>
+            <a:r>
+              <a:rPr lang="en-US" sz="1250" dirty="0">
+                <a:solidFill>
+                  <a:srgbClr val="17364A"/>
+                </a:solidFill>
+                <a:latin typeface="Aptos" pitchFamily="34" charset="0"/>
+                <a:ea typeface="Aptos" pitchFamily="34" charset="-122"/>
+                <a:cs typeface="Aptos" pitchFamily="34" charset="-120"/>
+              </a:rPr>
+              <a:t>Connect the concept to public health decisions, safeguards, documentation, or implementation work.</a:t>
+            </a:r>
+            <a:endParaRPr lang="en-US" sz="1250" dirty="0"/>
           </a:p>
         </p:txBody>
       </p:sp>
@@ -6573,7 +12075,32 @@
       </p:sp>
       <p:sp>
         <p:nvSpPr>
-          <p:cNvPr id="3" name="Text 1"/>
+          <p:cNvPr id="3" name="Shape 1"/>
+          <p:cNvSpPr/>
+          <p:nvPr/>
+        </p:nvSpPr>
+        <p:spPr>
+          <a:xfrm>
+            <a:off x="0" y="164592"/>
+            <a:ext cx="146304" cy="6693408"/>
+          </a:xfrm>
+          <a:prstGeom prst="rect">
+            <a:avLst/>
+          </a:prstGeom>
+          <a:solidFill>
+            <a:srgbClr val="2F8A28"/>
+          </a:solidFill>
+          <a:ln w="12700">
+            <a:solidFill>
+              <a:srgbClr val="2F8A28"/>
+            </a:solidFill>
+            <a:prstDash val="solid"/>
+          </a:ln>
+        </p:spPr>
+      </p:sp>
+      <p:sp>
+        <p:nvSpPr>
+          <p:cNvPr id="4" name="Text 2"/>
           <p:cNvSpPr/>
           <p:nvPr/>
         </p:nvSpPr>
@@ -6612,7 +12139,7 @@
       </p:sp>
       <p:sp>
         <p:nvSpPr>
-          <p:cNvPr id="4" name="Text 2"/>
+          <p:cNvPr id="5" name="Text 3"/>
           <p:cNvSpPr/>
           <p:nvPr/>
         </p:nvSpPr>
@@ -6651,7 +12178,7 @@
       </p:sp>
       <p:sp>
         <p:nvSpPr>
-          <p:cNvPr id="5" name="Text 3"/>
+          <p:cNvPr id="6" name="Text 4"/>
           <p:cNvSpPr/>
           <p:nvPr/>
         </p:nvSpPr>
@@ -6690,7 +12217,7 @@
       </p:sp>
       <p:sp>
         <p:nvSpPr>
-          <p:cNvPr id="6" name="Text 4"/>
+          <p:cNvPr id="7" name="Text 5"/>
           <p:cNvSpPr/>
           <p:nvPr/>
         </p:nvSpPr>
@@ -6723,7 +12250,7 @@
                 <a:ea typeface="Aptos Display" pitchFamily="34" charset="-122"/>
                 <a:cs typeface="Aptos Display" pitchFamily="34" charset="-120"/>
               </a:rPr>
-              <a:t>Why This Topic Matters for Public Health AI</a:t>
+              <a:t>Learning Objectives Continued</a:t>
             </a:r>
             <a:endParaRPr lang="en-US" sz="2700" dirty="0"/>
           </a:p>
@@ -6731,32 +12258,136 @@
       </p:sp>
       <p:sp>
         <p:nvSpPr>
-          <p:cNvPr id="7" name="Text 5"/>
-          <p:cNvSpPr/>
-          <p:nvPr/>
-        </p:nvSpPr>
-        <p:spPr>
-          <a:xfrm>
-            <a:off x="822960" y="1325880"/>
-            <a:ext cx="10378440" cy="4800600"/>
-          </a:xfrm>
-          <a:prstGeom prst="rect">
-            <a:avLst/>
-          </a:prstGeom>
-          <a:noFill/>
-          <a:ln/>
-        </p:spPr>
-        <p:txBody>
-          <a:bodyPr wrap="square" lIns="1016" tIns="1016" rIns="1016" bIns="1016" rtlCol="0" anchor="t">
+          <p:cNvPr id="8" name="Text 6"/>
+          <p:cNvSpPr/>
+          <p:nvPr/>
+        </p:nvSpPr>
+        <p:spPr>
+          <a:xfrm>
+            <a:off x="868680" y="1417320"/>
+            <a:ext cx="6675120" cy="4434840"/>
+          </a:xfrm>
+          <a:prstGeom prst="rect">
+            <a:avLst/>
+          </a:prstGeom>
+          <a:noFill/>
+          <a:ln/>
+        </p:spPr>
+        <p:txBody>
+          <a:bodyPr wrap="square" lIns="635" tIns="635" rIns="635" bIns="635" rtlCol="0" anchor="t">
             <a:normAutofit/>
           </a:bodyPr>
           <a:lstStyle/>
           <a:p>
+            <a:r>
+              <a:rPr lang="en-US" sz="1700" dirty="0">
+                <a:solidFill>
+                  <a:srgbClr val="17364A"/>
+                </a:solidFill>
+                <a:latin typeface="Aptos" pitchFamily="34" charset="0"/>
+                <a:ea typeface="Aptos" pitchFamily="34" charset="-122"/>
+                <a:cs typeface="Aptos" pitchFamily="34" charset="-120"/>
+              </a:rPr>
+              <a:t>Produce a synthetic dataset assessment that can support readiness assessment, governance review, procurement, implementation,.</a:t>
+            </a:r>
+            <a:endParaRPr lang="en-US" sz="1700" dirty="0"/>
+          </a:p>
+        </p:txBody>
+      </p:sp>
+      <p:sp>
+        <p:nvSpPr>
+          <p:cNvPr id="9" name="Shape 7"/>
+          <p:cNvSpPr/>
+          <p:nvPr/>
+        </p:nvSpPr>
+        <p:spPr>
+          <a:xfrm>
+            <a:off x="7909560" y="1417320"/>
+            <a:ext cx="3154680" cy="1828800"/>
+          </a:xfrm>
+          <a:prstGeom prst="roundRect">
+            <a:avLst>
+              <a:gd name="adj" fmla="val 6000"/>
+            </a:avLst>
+          </a:prstGeom>
+          <a:solidFill>
+            <a:srgbClr val="EEF8ED"/>
+          </a:solidFill>
+          <a:ln w="12700">
+            <a:solidFill>
+              <a:srgbClr val="B9D7E6"/>
+            </a:solidFill>
+            <a:prstDash val="solid"/>
+          </a:ln>
+        </p:spPr>
+      </p:sp>
+      <p:sp>
+        <p:nvSpPr>
+          <p:cNvPr id="10" name="Text 8"/>
+          <p:cNvSpPr/>
+          <p:nvPr/>
+        </p:nvSpPr>
+        <p:spPr>
+          <a:xfrm>
+            <a:off x="8074152" y="1563624"/>
+            <a:ext cx="2825496" cy="201168"/>
+          </a:xfrm>
+          <a:prstGeom prst="rect">
+            <a:avLst/>
+          </a:prstGeom>
+          <a:noFill/>
+          <a:ln/>
+        </p:spPr>
+        <p:txBody>
+          <a:bodyPr wrap="square" lIns="0" tIns="0" rIns="0" bIns="0" rtlCol="0" anchor="ctr"/>
+          <a:lstStyle/>
+          <a:p>
             <a:pPr indent="0" marL="0">
               <a:buNone/>
             </a:pPr>
             <a:r>
-              <a:rPr lang="en-US" sz="1420" dirty="0">
+              <a:rPr lang="en-US" sz="950" b="1" dirty="0">
+                <a:solidFill>
+                  <a:srgbClr val="0068B7"/>
+                </a:solidFill>
+                <a:latin typeface="Aptos" pitchFamily="34" charset="0"/>
+                <a:ea typeface="Aptos" pitchFamily="34" charset="-122"/>
+                <a:cs typeface="Aptos" pitchFamily="34" charset="-120"/>
+              </a:rPr>
+              <a:t>Key idea</a:t>
+            </a:r>
+            <a:endParaRPr lang="en-US" sz="950" dirty="0"/>
+          </a:p>
+        </p:txBody>
+      </p:sp>
+      <p:sp>
+        <p:nvSpPr>
+          <p:cNvPr id="11" name="Text 9"/>
+          <p:cNvSpPr/>
+          <p:nvPr/>
+        </p:nvSpPr>
+        <p:spPr>
+          <a:xfrm>
+            <a:off x="8074152" y="1856232"/>
+            <a:ext cx="2825496" cy="1261872"/>
+          </a:xfrm>
+          <a:prstGeom prst="rect">
+            <a:avLst/>
+          </a:prstGeom>
+          <a:noFill/>
+          <a:ln/>
+        </p:spPr>
+        <p:txBody>
+          <a:bodyPr wrap="square" lIns="0" tIns="0" rIns="0" bIns="0" rtlCol="0" anchor="t">
+            <a:normAutofit/>
+          </a:bodyPr>
+          <a:lstStyle/>
+          <a:p>
+            <a:pPr indent="0" marL="0">
+              <a:buNone/>
+            </a:pPr>
+            <a:r>
+              <a:rPr lang="en-US" sz="1250" dirty="0">
                 <a:solidFill>
                   <a:srgbClr val="17364A"/>
                 </a:solidFill>
@@ -6764,9 +12395,116 @@
                 <a:ea typeface="Aptos" pitchFamily="34" charset="-122"/>
                 <a:cs typeface="Aptos" pitchFamily="34" charset="-120"/>
               </a:rPr>
-              <a:t>Synthetic Data for Public Health AI matters because AI systems are embedded in public health programs, data systems, and decision processes rather than operating in isolation. The topic affects whether AI outputs are accurate, explainable, safe, equitable, secure, and sustainable. Agencies that ignore this area may create tools that work in a demonstration but fail in actual practice. The topic also affects accountability. Public health agencies must be able to explain how data are used, why a tool was approved, what evidence supports the workflow, who reviews outputs, and what happens when the system fails. These responsibilities become more important as AI tools move from experimentation into operational use.</a:t>
-            </a:r>
-            <a:endParaRPr lang="en-US" sz="1420" dirty="0"/>
+              <a:t>Produce a synthetic dataset assessment that can support readiness assessment, governance review, procurement, implementation,.</a:t>
+            </a:r>
+            <a:endParaRPr lang="en-US" sz="1250" dirty="0"/>
+          </a:p>
+        </p:txBody>
+      </p:sp>
+      <p:sp>
+        <p:nvSpPr>
+          <p:cNvPr id="12" name="Shape 10"/>
+          <p:cNvSpPr/>
+          <p:nvPr/>
+        </p:nvSpPr>
+        <p:spPr>
+          <a:xfrm>
+            <a:off x="7909560" y="3520440"/>
+            <a:ext cx="3154680" cy="1737360"/>
+          </a:xfrm>
+          <a:prstGeom prst="roundRect">
+            <a:avLst>
+              <a:gd name="adj" fmla="val 6316"/>
+            </a:avLst>
+          </a:prstGeom>
+          <a:solidFill>
+            <a:srgbClr val="EAF6F8"/>
+          </a:solidFill>
+          <a:ln w="12700">
+            <a:solidFill>
+              <a:srgbClr val="B9D7E6"/>
+            </a:solidFill>
+            <a:prstDash val="solid"/>
+          </a:ln>
+        </p:spPr>
+      </p:sp>
+      <p:sp>
+        <p:nvSpPr>
+          <p:cNvPr id="13" name="Text 11"/>
+          <p:cNvSpPr/>
+          <p:nvPr/>
+        </p:nvSpPr>
+        <p:spPr>
+          <a:xfrm>
+            <a:off x="8074152" y="3666744"/>
+            <a:ext cx="2825496" cy="201168"/>
+          </a:xfrm>
+          <a:prstGeom prst="rect">
+            <a:avLst/>
+          </a:prstGeom>
+          <a:noFill/>
+          <a:ln/>
+        </p:spPr>
+        <p:txBody>
+          <a:bodyPr wrap="square" lIns="0" tIns="0" rIns="0" bIns="0" rtlCol="0" anchor="ctr"/>
+          <a:lstStyle/>
+          <a:p>
+            <a:pPr indent="0" marL="0">
+              <a:buNone/>
+            </a:pPr>
+            <a:r>
+              <a:rPr lang="en-US" sz="950" b="1" dirty="0">
+                <a:solidFill>
+                  <a:srgbClr val="0068B7"/>
+                </a:solidFill>
+                <a:latin typeface="Aptos" pitchFamily="34" charset="0"/>
+                <a:ea typeface="Aptos" pitchFamily="34" charset="-122"/>
+                <a:cs typeface="Aptos" pitchFamily="34" charset="-120"/>
+              </a:rPr>
+              <a:t>Use this for</a:t>
+            </a:r>
+            <a:endParaRPr lang="en-US" sz="950" dirty="0"/>
+          </a:p>
+        </p:txBody>
+      </p:sp>
+      <p:sp>
+        <p:nvSpPr>
+          <p:cNvPr id="14" name="Text 12"/>
+          <p:cNvSpPr/>
+          <p:nvPr/>
+        </p:nvSpPr>
+        <p:spPr>
+          <a:xfrm>
+            <a:off x="8074152" y="3959352"/>
+            <a:ext cx="2825496" cy="1170432"/>
+          </a:xfrm>
+          <a:prstGeom prst="rect">
+            <a:avLst/>
+          </a:prstGeom>
+          <a:noFill/>
+          <a:ln/>
+        </p:spPr>
+        <p:txBody>
+          <a:bodyPr wrap="square" lIns="0" tIns="0" rIns="0" bIns="0" rtlCol="0" anchor="t">
+            <a:normAutofit/>
+          </a:bodyPr>
+          <a:lstStyle/>
+          <a:p>
+            <a:pPr indent="0" marL="0">
+              <a:buNone/>
+            </a:pPr>
+            <a:r>
+              <a:rPr lang="en-US" sz="1250" dirty="0">
+                <a:solidFill>
+                  <a:srgbClr val="17364A"/>
+                </a:solidFill>
+                <a:latin typeface="Aptos" pitchFamily="34" charset="0"/>
+                <a:ea typeface="Aptos" pitchFamily="34" charset="-122"/>
+                <a:cs typeface="Aptos" pitchFamily="34" charset="-120"/>
+              </a:rPr>
+              <a:t>Connect the concept to public health decisions, safeguards, documentation, or implementation work.</a:t>
+            </a:r>
+            <a:endParaRPr lang="en-US" sz="1250" dirty="0"/>
           </a:p>
         </p:txBody>
       </p:sp>
@@ -6829,7 +12567,32 @@
       </p:sp>
       <p:sp>
         <p:nvSpPr>
-          <p:cNvPr id="3" name="Text 1"/>
+          <p:cNvPr id="3" name="Shape 1"/>
+          <p:cNvSpPr/>
+          <p:nvPr/>
+        </p:nvSpPr>
+        <p:spPr>
+          <a:xfrm>
+            <a:off x="0" y="164592"/>
+            <a:ext cx="146304" cy="6693408"/>
+          </a:xfrm>
+          <a:prstGeom prst="rect">
+            <a:avLst/>
+          </a:prstGeom>
+          <a:solidFill>
+            <a:srgbClr val="2F8A28"/>
+          </a:solidFill>
+          <a:ln w="12700">
+            <a:solidFill>
+              <a:srgbClr val="2F8A28"/>
+            </a:solidFill>
+            <a:prstDash val="solid"/>
+          </a:ln>
+        </p:spPr>
+      </p:sp>
+      <p:sp>
+        <p:nvSpPr>
+          <p:cNvPr id="4" name="Text 2"/>
           <p:cNvSpPr/>
           <p:nvPr/>
         </p:nvSpPr>
@@ -6868,7 +12631,7 @@
       </p:sp>
       <p:sp>
         <p:nvSpPr>
-          <p:cNvPr id="4" name="Text 2"/>
+          <p:cNvPr id="5" name="Text 3"/>
           <p:cNvSpPr/>
           <p:nvPr/>
         </p:nvSpPr>
@@ -6907,7 +12670,7 @@
       </p:sp>
       <p:sp>
         <p:nvSpPr>
-          <p:cNvPr id="5" name="Text 3"/>
+          <p:cNvPr id="6" name="Text 4"/>
           <p:cNvSpPr/>
           <p:nvPr/>
         </p:nvSpPr>
@@ -6946,13 +12709,77 @@
       </p:sp>
       <p:sp>
         <p:nvSpPr>
-          <p:cNvPr id="6" name="Text 4"/>
+          <p:cNvPr id="7" name="Shape 5"/>
           <p:cNvSpPr/>
           <p:nvPr/>
         </p:nvSpPr>
         <p:spPr>
           <a:xfrm>
             <a:off x="640080" y="658368"/>
+            <a:ext cx="420624" cy="420624"/>
+          </a:xfrm>
+          <a:prstGeom prst="ellipse">
+            <a:avLst/>
+          </a:prstGeom>
+          <a:solidFill>
+            <a:srgbClr val="0068B7"/>
+          </a:solidFill>
+          <a:ln w="12700">
+            <a:solidFill>
+              <a:srgbClr val="0068B7"/>
+            </a:solidFill>
+            <a:prstDash val="solid"/>
+          </a:ln>
+        </p:spPr>
+      </p:sp>
+      <p:sp>
+        <p:nvSpPr>
+          <p:cNvPr id="8" name="Text 6"/>
+          <p:cNvSpPr/>
+          <p:nvPr/>
+        </p:nvSpPr>
+        <p:spPr>
+          <a:xfrm>
+            <a:off x="640080" y="731520"/>
+            <a:ext cx="420624" cy="164592"/>
+          </a:xfrm>
+          <a:prstGeom prst="rect">
+            <a:avLst/>
+          </a:prstGeom>
+          <a:noFill/>
+          <a:ln/>
+        </p:spPr>
+        <p:txBody>
+          <a:bodyPr wrap="square" lIns="0" tIns="0" rIns="0" bIns="0" rtlCol="0" anchor="ctr"/>
+          <a:lstStyle/>
+          <a:p>
+            <a:pPr algn="ctr" indent="0" marL="0">
+              <a:buNone/>
+            </a:pPr>
+            <a:r>
+              <a:rPr lang="en-US" sz="1100" b="1" dirty="0">
+                <a:solidFill>
+                  <a:srgbClr val="FFFFFF"/>
+                </a:solidFill>
+                <a:latin typeface="Aptos" pitchFamily="34" charset="0"/>
+                <a:ea typeface="Aptos" pitchFamily="34" charset="-122"/>
+                <a:cs typeface="Aptos" pitchFamily="34" charset="-120"/>
+              </a:rPr>
+              <a:t>2</a:t>
+            </a:r>
+            <a:endParaRPr lang="en-US" sz="1100" dirty="0"/>
+          </a:p>
+        </p:txBody>
+      </p:sp>
+      <p:sp>
+        <p:nvSpPr>
+          <p:cNvPr id="9" name="Text 7"/>
+          <p:cNvSpPr/>
+          <p:nvPr/>
+        </p:nvSpPr>
+        <p:spPr>
+          <a:xfrm>
+            <a:off x="640080" y="621792"/>
             <a:ext cx="10881360" cy="566928"/>
           </a:xfrm>
           <a:prstGeom prst="rect">
@@ -6979,7 +12806,7 @@
                 <a:ea typeface="Aptos Display" pitchFamily="34" charset="-122"/>
                 <a:cs typeface="Aptos Display" pitchFamily="34" charset="-120"/>
               </a:rPr>
-              <a:t>Core Concepts</a:t>
+              <a:t>Module Overview</a:t>
             </a:r>
             <a:endParaRPr lang="en-US" sz="2700" dirty="0"/>
           </a:p>
@@ -6987,32 +12814,164 @@
       </p:sp>
       <p:sp>
         <p:nvSpPr>
-          <p:cNvPr id="7" name="Text 5"/>
-          <p:cNvSpPr/>
-          <p:nvPr/>
-        </p:nvSpPr>
-        <p:spPr>
-          <a:xfrm>
-            <a:off x="822960" y="1325880"/>
-            <a:ext cx="10378440" cy="4800600"/>
-          </a:xfrm>
-          <a:prstGeom prst="rect">
-            <a:avLst/>
-          </a:prstGeom>
-          <a:noFill/>
-          <a:ln/>
-        </p:spPr>
-        <p:txBody>
-          <a:bodyPr wrap="square" lIns="1016" tIns="1016" rIns="1016" bIns="1016" rtlCol="0" anchor="t">
+          <p:cNvPr id="10" name="Text 8"/>
+          <p:cNvSpPr/>
+          <p:nvPr/>
+        </p:nvSpPr>
+        <p:spPr>
+          <a:xfrm>
+            <a:off x="868680" y="1417320"/>
+            <a:ext cx="6675120" cy="4434840"/>
+          </a:xfrm>
+          <a:prstGeom prst="rect">
+            <a:avLst/>
+          </a:prstGeom>
+          <a:noFill/>
+          <a:ln/>
+        </p:spPr>
+        <p:txBody>
+          <a:bodyPr wrap="square" lIns="635" tIns="635" rIns="635" bIns="635" rtlCol="0" anchor="t">
             <a:normAutofit/>
           </a:bodyPr>
           <a:lstStyle/>
           <a:p>
+            <a:r>
+              <a:rPr lang="en-US" sz="1700" dirty="0">
+                <a:solidFill>
+                  <a:srgbClr val="17364A"/>
+                </a:solidFill>
+                <a:latin typeface="Aptos" pitchFamily="34" charset="0"/>
+                <a:ea typeface="Aptos" pitchFamily="34" charset="-122"/>
+                <a:cs typeface="Aptos" pitchFamily="34" charset="-120"/>
+              </a:rPr>
+              <a:t>Synthetic data are artificially generated data that are designed to resemble real data without directly copying every.</a:t>
+            </a:r>
+            <a:endParaRPr lang="en-US" sz="1700" dirty="0"/>
+          </a:p>
+          <a:p>
+            <a:r>
+              <a:rPr lang="en-US" sz="1700" dirty="0">
+                <a:solidFill>
+                  <a:srgbClr val="17364A"/>
+                </a:solidFill>
+                <a:latin typeface="Aptos" pitchFamily="34" charset="0"/>
+                <a:ea typeface="Aptos" pitchFamily="34" charset="-122"/>
+                <a:cs typeface="Aptos" pitchFamily="34" charset="-120"/>
+              </a:rPr>
+              <a:t>In public health, synthetic data can support training, software testing, demonstrations, model prototyping, and vendor.</a:t>
+            </a:r>
+            <a:endParaRPr lang="en-US" sz="1700" dirty="0"/>
+          </a:p>
+          <a:p>
+            <a:r>
+              <a:rPr lang="en-US" sz="1700" dirty="0">
+                <a:solidFill>
+                  <a:srgbClr val="17364A"/>
+                </a:solidFill>
+                <a:latin typeface="Aptos" pitchFamily="34" charset="0"/>
+                <a:ea typeface="Aptos" pitchFamily="34" charset="-122"/>
+                <a:cs typeface="Aptos" pitchFamily="34" charset="-120"/>
+              </a:rPr>
+              <a:t>This module helps learners understand both the promise and limitations of synthetic data, including privacy risk, analytic.</a:t>
+            </a:r>
+            <a:endParaRPr lang="en-US" sz="1700" dirty="0"/>
+          </a:p>
+        </p:txBody>
+      </p:sp>
+      <p:sp>
+        <p:nvSpPr>
+          <p:cNvPr id="11" name="Shape 9"/>
+          <p:cNvSpPr/>
+          <p:nvPr/>
+        </p:nvSpPr>
+        <p:spPr>
+          <a:xfrm>
+            <a:off x="7909560" y="1417320"/>
+            <a:ext cx="3154680" cy="1828800"/>
+          </a:xfrm>
+          <a:prstGeom prst="roundRect">
+            <a:avLst>
+              <a:gd name="adj" fmla="val 6000"/>
+            </a:avLst>
+          </a:prstGeom>
+          <a:solidFill>
+            <a:srgbClr val="EEF8ED"/>
+          </a:solidFill>
+          <a:ln w="12700">
+            <a:solidFill>
+              <a:srgbClr val="B9D7E6"/>
+            </a:solidFill>
+            <a:prstDash val="solid"/>
+          </a:ln>
+        </p:spPr>
+      </p:sp>
+      <p:sp>
+        <p:nvSpPr>
+          <p:cNvPr id="12" name="Text 10"/>
+          <p:cNvSpPr/>
+          <p:nvPr/>
+        </p:nvSpPr>
+        <p:spPr>
+          <a:xfrm>
+            <a:off x="8074152" y="1563624"/>
+            <a:ext cx="2825496" cy="201168"/>
+          </a:xfrm>
+          <a:prstGeom prst="rect">
+            <a:avLst/>
+          </a:prstGeom>
+          <a:noFill/>
+          <a:ln/>
+        </p:spPr>
+        <p:txBody>
+          <a:bodyPr wrap="square" lIns="0" tIns="0" rIns="0" bIns="0" rtlCol="0" anchor="ctr"/>
+          <a:lstStyle/>
+          <a:p>
             <a:pPr indent="0" marL="0">
               <a:buNone/>
             </a:pPr>
             <a:r>
-              <a:rPr lang="en-US" sz="1420" dirty="0">
+              <a:rPr lang="en-US" sz="950" b="1" dirty="0">
+                <a:solidFill>
+                  <a:srgbClr val="0068B7"/>
+                </a:solidFill>
+                <a:latin typeface="Aptos" pitchFamily="34" charset="0"/>
+                <a:ea typeface="Aptos" pitchFamily="34" charset="-122"/>
+                <a:cs typeface="Aptos" pitchFamily="34" charset="-120"/>
+              </a:rPr>
+              <a:t>Key idea</a:t>
+            </a:r>
+            <a:endParaRPr lang="en-US" sz="950" dirty="0"/>
+          </a:p>
+        </p:txBody>
+      </p:sp>
+      <p:sp>
+        <p:nvSpPr>
+          <p:cNvPr id="13" name="Text 11"/>
+          <p:cNvSpPr/>
+          <p:nvPr/>
+        </p:nvSpPr>
+        <p:spPr>
+          <a:xfrm>
+            <a:off x="8074152" y="1856232"/>
+            <a:ext cx="2825496" cy="1261872"/>
+          </a:xfrm>
+          <a:prstGeom prst="rect">
+            <a:avLst/>
+          </a:prstGeom>
+          <a:noFill/>
+          <a:ln/>
+        </p:spPr>
+        <p:txBody>
+          <a:bodyPr wrap="square" lIns="0" tIns="0" rIns="0" bIns="0" rtlCol="0" anchor="t">
+            <a:normAutofit/>
+          </a:bodyPr>
+          <a:lstStyle/>
+          <a:p>
+            <a:pPr indent="0" marL="0">
+              <a:buNone/>
+            </a:pPr>
+            <a:r>
+              <a:rPr lang="en-US" sz="1250" dirty="0">
                 <a:solidFill>
                   <a:srgbClr val="17364A"/>
                 </a:solidFill>
@@ -7020,9 +12979,116 @@
                 <a:ea typeface="Aptos" pitchFamily="34" charset="-122"/>
                 <a:cs typeface="Aptos" pitchFamily="34" charset="-120"/>
               </a:rPr>
-              <a:t>Synthetic data are generated data designed to preserve selected patterns of a source dataset while reducing reliance on real individual-level records. The value of synthetic data depends on the purpose. A dataset that is useful for training staff on a dashboard may not be valid for evaluating a predictive model or testing equity performance. Privacy risk does not disappear simply because data are synthetic. If synthetic data are too close to the source data, they may leak information about real individuals or rare cases. If they are too different from the source data, they may be safe but not useful. Public health agencies must evaluate both privacy protection and data utility. Data utility means the synthetic data are useful for the intended purpose. Utility may involve preserving distributions, relationships between fields, missingness patterns, geographic variation, or time trends. The intended use should be documented before the synthetic data are created or accepted from a vendor.</a:t>
-            </a:r>
-            <a:endParaRPr lang="en-US" sz="1420" dirty="0"/>
+              <a:t>Synthetic data are artificially generated data that are designed to resemble real data without directly copying every.</a:t>
+            </a:r>
+            <a:endParaRPr lang="en-US" sz="1250" dirty="0"/>
+          </a:p>
+        </p:txBody>
+      </p:sp>
+      <p:sp>
+        <p:nvSpPr>
+          <p:cNvPr id="14" name="Shape 12"/>
+          <p:cNvSpPr/>
+          <p:nvPr/>
+        </p:nvSpPr>
+        <p:spPr>
+          <a:xfrm>
+            <a:off x="7909560" y="3520440"/>
+            <a:ext cx="3154680" cy="1737360"/>
+          </a:xfrm>
+          <a:prstGeom prst="roundRect">
+            <a:avLst>
+              <a:gd name="adj" fmla="val 6316"/>
+            </a:avLst>
+          </a:prstGeom>
+          <a:solidFill>
+            <a:srgbClr val="EAF6F8"/>
+          </a:solidFill>
+          <a:ln w="12700">
+            <a:solidFill>
+              <a:srgbClr val="B9D7E6"/>
+            </a:solidFill>
+            <a:prstDash val="solid"/>
+          </a:ln>
+        </p:spPr>
+      </p:sp>
+      <p:sp>
+        <p:nvSpPr>
+          <p:cNvPr id="15" name="Text 13"/>
+          <p:cNvSpPr/>
+          <p:nvPr/>
+        </p:nvSpPr>
+        <p:spPr>
+          <a:xfrm>
+            <a:off x="8074152" y="3666744"/>
+            <a:ext cx="2825496" cy="201168"/>
+          </a:xfrm>
+          <a:prstGeom prst="rect">
+            <a:avLst/>
+          </a:prstGeom>
+          <a:noFill/>
+          <a:ln/>
+        </p:spPr>
+        <p:txBody>
+          <a:bodyPr wrap="square" lIns="0" tIns="0" rIns="0" bIns="0" rtlCol="0" anchor="ctr"/>
+          <a:lstStyle/>
+          <a:p>
+            <a:pPr indent="0" marL="0">
+              <a:buNone/>
+            </a:pPr>
+            <a:r>
+              <a:rPr lang="en-US" sz="950" b="1" dirty="0">
+                <a:solidFill>
+                  <a:srgbClr val="0068B7"/>
+                </a:solidFill>
+                <a:latin typeface="Aptos" pitchFamily="34" charset="0"/>
+                <a:ea typeface="Aptos" pitchFamily="34" charset="-122"/>
+                <a:cs typeface="Aptos" pitchFamily="34" charset="-120"/>
+              </a:rPr>
+              <a:t>Use this for</a:t>
+            </a:r>
+            <a:endParaRPr lang="en-US" sz="950" dirty="0"/>
+          </a:p>
+        </p:txBody>
+      </p:sp>
+      <p:sp>
+        <p:nvSpPr>
+          <p:cNvPr id="16" name="Text 14"/>
+          <p:cNvSpPr/>
+          <p:nvPr/>
+        </p:nvSpPr>
+        <p:spPr>
+          <a:xfrm>
+            <a:off x="8074152" y="3959352"/>
+            <a:ext cx="2825496" cy="1170432"/>
+          </a:xfrm>
+          <a:prstGeom prst="rect">
+            <a:avLst/>
+          </a:prstGeom>
+          <a:noFill/>
+          <a:ln/>
+        </p:spPr>
+        <p:txBody>
+          <a:bodyPr wrap="square" lIns="0" tIns="0" rIns="0" bIns="0" rtlCol="0" anchor="t">
+            <a:normAutofit/>
+          </a:bodyPr>
+          <a:lstStyle/>
+          <a:p>
+            <a:pPr indent="0" marL="0">
+              <a:buNone/>
+            </a:pPr>
+            <a:r>
+              <a:rPr lang="en-US" sz="1250" dirty="0">
+                <a:solidFill>
+                  <a:srgbClr val="17364A"/>
+                </a:solidFill>
+                <a:latin typeface="Aptos" pitchFamily="34" charset="0"/>
+                <a:ea typeface="Aptos" pitchFamily="34" charset="-122"/>
+                <a:cs typeface="Aptos" pitchFamily="34" charset="-120"/>
+              </a:rPr>
+              <a:t>Connect the concept to public health decisions, safeguards, documentation, or implementation work.</a:t>
+            </a:r>
+            <a:endParaRPr lang="en-US" sz="1250" dirty="0"/>
           </a:p>
         </p:txBody>
       </p:sp>
@@ -7085,7 +13151,32 @@
       </p:sp>
       <p:sp>
         <p:nvSpPr>
-          <p:cNvPr id="3" name="Text 1"/>
+          <p:cNvPr id="3" name="Shape 1"/>
+          <p:cNvSpPr/>
+          <p:nvPr/>
+        </p:nvSpPr>
+        <p:spPr>
+          <a:xfrm>
+            <a:off x="0" y="164592"/>
+            <a:ext cx="146304" cy="6693408"/>
+          </a:xfrm>
+          <a:prstGeom prst="rect">
+            <a:avLst/>
+          </a:prstGeom>
+          <a:solidFill>
+            <a:srgbClr val="2F8A28"/>
+          </a:solidFill>
+          <a:ln w="12700">
+            <a:solidFill>
+              <a:srgbClr val="2F8A28"/>
+            </a:solidFill>
+            <a:prstDash val="solid"/>
+          </a:ln>
+        </p:spPr>
+      </p:sp>
+      <p:sp>
+        <p:nvSpPr>
+          <p:cNvPr id="4" name="Text 2"/>
           <p:cNvSpPr/>
           <p:nvPr/>
         </p:nvSpPr>
@@ -7124,7 +13215,7 @@
       </p:sp>
       <p:sp>
         <p:nvSpPr>
-          <p:cNvPr id="4" name="Text 2"/>
+          <p:cNvPr id="5" name="Text 3"/>
           <p:cNvSpPr/>
           <p:nvPr/>
         </p:nvSpPr>
@@ -7163,7 +13254,7 @@
       </p:sp>
       <p:sp>
         <p:nvSpPr>
-          <p:cNvPr id="5" name="Text 3"/>
+          <p:cNvPr id="6" name="Text 4"/>
           <p:cNvSpPr/>
           <p:nvPr/>
         </p:nvSpPr>
@@ -7202,13 +13293,77 @@
       </p:sp>
       <p:sp>
         <p:nvSpPr>
-          <p:cNvPr id="6" name="Text 4"/>
+          <p:cNvPr id="7" name="Shape 5"/>
           <p:cNvSpPr/>
           <p:nvPr/>
         </p:nvSpPr>
         <p:spPr>
           <a:xfrm>
             <a:off x="640080" y="658368"/>
+            <a:ext cx="420624" cy="420624"/>
+          </a:xfrm>
+          <a:prstGeom prst="ellipse">
+            <a:avLst/>
+          </a:prstGeom>
+          <a:solidFill>
+            <a:srgbClr val="0068B7"/>
+          </a:solidFill>
+          <a:ln w="12700">
+            <a:solidFill>
+              <a:srgbClr val="0068B7"/>
+            </a:solidFill>
+            <a:prstDash val="solid"/>
+          </a:ln>
+        </p:spPr>
+      </p:sp>
+      <p:sp>
+        <p:nvSpPr>
+          <p:cNvPr id="8" name="Text 6"/>
+          <p:cNvSpPr/>
+          <p:nvPr/>
+        </p:nvSpPr>
+        <p:spPr>
+          <a:xfrm>
+            <a:off x="640080" y="731520"/>
+            <a:ext cx="420624" cy="164592"/>
+          </a:xfrm>
+          <a:prstGeom prst="rect">
+            <a:avLst/>
+          </a:prstGeom>
+          <a:noFill/>
+          <a:ln/>
+        </p:spPr>
+        <p:txBody>
+          <a:bodyPr wrap="square" lIns="0" tIns="0" rIns="0" bIns="0" rtlCol="0" anchor="ctr"/>
+          <a:lstStyle/>
+          <a:p>
+            <a:pPr algn="ctr" indent="0" marL="0">
+              <a:buNone/>
+            </a:pPr>
+            <a:r>
+              <a:rPr lang="en-US" sz="1100" b="1" dirty="0">
+                <a:solidFill>
+                  <a:srgbClr val="FFFFFF"/>
+                </a:solidFill>
+                <a:latin typeface="Aptos" pitchFamily="34" charset="0"/>
+                <a:ea typeface="Aptos" pitchFamily="34" charset="-122"/>
+                <a:cs typeface="Aptos" pitchFamily="34" charset="-120"/>
+              </a:rPr>
+              <a:t>3</a:t>
+            </a:r>
+            <a:endParaRPr lang="en-US" sz="1100" dirty="0"/>
+          </a:p>
+        </p:txBody>
+      </p:sp>
+      <p:sp>
+        <p:nvSpPr>
+          <p:cNvPr id="9" name="Text 7"/>
+          <p:cNvSpPr/>
+          <p:nvPr/>
+        </p:nvSpPr>
+        <p:spPr>
+          <a:xfrm>
+            <a:off x="640080" y="621792"/>
             <a:ext cx="10881360" cy="566928"/>
           </a:xfrm>
           <a:prstGeom prst="rect">
@@ -7235,7 +13390,7 @@
                 <a:ea typeface="Aptos Display" pitchFamily="34" charset="-122"/>
                 <a:cs typeface="Aptos Display" pitchFamily="34" charset="-120"/>
               </a:rPr>
-              <a:t>Public Health Example</a:t>
+              <a:t>Why This Topic Matters for Public Health AI</a:t>
             </a:r>
             <a:endParaRPr lang="en-US" sz="2700" dirty="0"/>
           </a:p>
@@ -7243,32 +13398,178 @@
       </p:sp>
       <p:sp>
         <p:nvSpPr>
-          <p:cNvPr id="7" name="Text 5"/>
-          <p:cNvSpPr/>
-          <p:nvPr/>
-        </p:nvSpPr>
-        <p:spPr>
-          <a:xfrm>
-            <a:off x="822960" y="1325880"/>
-            <a:ext cx="10378440" cy="4800600"/>
-          </a:xfrm>
-          <a:prstGeom prst="rect">
-            <a:avLst/>
-          </a:prstGeom>
-          <a:noFill/>
-          <a:ln/>
-        </p:spPr>
-        <p:txBody>
-          <a:bodyPr wrap="square" lIns="1016" tIns="1016" rIns="1016" bIns="1016" rtlCol="0" anchor="t">
+          <p:cNvPr id="10" name="Text 8"/>
+          <p:cNvSpPr/>
+          <p:nvPr/>
+        </p:nvSpPr>
+        <p:spPr>
+          <a:xfrm>
+            <a:off x="868680" y="1417320"/>
+            <a:ext cx="6675120" cy="4434840"/>
+          </a:xfrm>
+          <a:prstGeom prst="rect">
+            <a:avLst/>
+          </a:prstGeom>
+          <a:noFill/>
+          <a:ln/>
+        </p:spPr>
+        <p:txBody>
+          <a:bodyPr wrap="square" lIns="635" tIns="635" rIns="635" bIns="635" rtlCol="0" anchor="t">
             <a:normAutofit/>
           </a:bodyPr>
           <a:lstStyle/>
           <a:p>
+            <a:r>
+              <a:rPr lang="en-US" sz="1700" dirty="0">
+                <a:solidFill>
+                  <a:srgbClr val="17364A"/>
+                </a:solidFill>
+                <a:latin typeface="Aptos" pitchFamily="34" charset="0"/>
+                <a:ea typeface="Aptos" pitchFamily="34" charset="-122"/>
+                <a:cs typeface="Aptos" pitchFamily="34" charset="-120"/>
+              </a:rPr>
+              <a:t>Synthetic Data for Public Health AI matters because AI systems are embedded in public health programs, data systems, and.</a:t>
+            </a:r>
+            <a:endParaRPr lang="en-US" sz="1700" dirty="0"/>
+          </a:p>
+          <a:p>
+            <a:r>
+              <a:rPr lang="en-US" sz="1700" dirty="0">
+                <a:solidFill>
+                  <a:srgbClr val="17364A"/>
+                </a:solidFill>
+                <a:latin typeface="Aptos" pitchFamily="34" charset="0"/>
+                <a:ea typeface="Aptos" pitchFamily="34" charset="-122"/>
+                <a:cs typeface="Aptos" pitchFamily="34" charset="-120"/>
+              </a:rPr>
+              <a:t>The topic affects whether AI outputs are accurate, explainable, safe, equitable, secure, and sustainable.</a:t>
+            </a:r>
+            <a:endParaRPr lang="en-US" sz="1700" dirty="0"/>
+          </a:p>
+          <a:p>
+            <a:r>
+              <a:rPr lang="en-US" sz="1700" dirty="0">
+                <a:solidFill>
+                  <a:srgbClr val="17364A"/>
+                </a:solidFill>
+                <a:latin typeface="Aptos" pitchFamily="34" charset="0"/>
+                <a:ea typeface="Aptos" pitchFamily="34" charset="-122"/>
+                <a:cs typeface="Aptos" pitchFamily="34" charset="-120"/>
+              </a:rPr>
+              <a:t>Agencies that ignore this area may create tools that work in a demonstration but fail in actual practice.</a:t>
+            </a:r>
+            <a:endParaRPr lang="en-US" sz="1700" dirty="0"/>
+          </a:p>
+          <a:p>
+            <a:r>
+              <a:rPr lang="en-US" sz="1700" dirty="0">
+                <a:solidFill>
+                  <a:srgbClr val="17364A"/>
+                </a:solidFill>
+                <a:latin typeface="Aptos" pitchFamily="34" charset="0"/>
+                <a:ea typeface="Aptos" pitchFamily="34" charset="-122"/>
+                <a:cs typeface="Aptos" pitchFamily="34" charset="-120"/>
+              </a:rPr>
+              <a:t>The topic also affects accountability.</a:t>
+            </a:r>
+            <a:endParaRPr lang="en-US" sz="1700" dirty="0"/>
+          </a:p>
+        </p:txBody>
+      </p:sp>
+      <p:sp>
+        <p:nvSpPr>
+          <p:cNvPr id="11" name="Shape 9"/>
+          <p:cNvSpPr/>
+          <p:nvPr/>
+        </p:nvSpPr>
+        <p:spPr>
+          <a:xfrm>
+            <a:off x="7909560" y="1417320"/>
+            <a:ext cx="3154680" cy="1828800"/>
+          </a:xfrm>
+          <a:prstGeom prst="roundRect">
+            <a:avLst>
+              <a:gd name="adj" fmla="val 6000"/>
+            </a:avLst>
+          </a:prstGeom>
+          <a:solidFill>
+            <a:srgbClr val="EEF8ED"/>
+          </a:solidFill>
+          <a:ln w="12700">
+            <a:solidFill>
+              <a:srgbClr val="B9D7E6"/>
+            </a:solidFill>
+            <a:prstDash val="solid"/>
+          </a:ln>
+        </p:spPr>
+      </p:sp>
+      <p:sp>
+        <p:nvSpPr>
+          <p:cNvPr id="12" name="Text 10"/>
+          <p:cNvSpPr/>
+          <p:nvPr/>
+        </p:nvSpPr>
+        <p:spPr>
+          <a:xfrm>
+            <a:off x="8074152" y="1563624"/>
+            <a:ext cx="2825496" cy="201168"/>
+          </a:xfrm>
+          <a:prstGeom prst="rect">
+            <a:avLst/>
+          </a:prstGeom>
+          <a:noFill/>
+          <a:ln/>
+        </p:spPr>
+        <p:txBody>
+          <a:bodyPr wrap="square" lIns="0" tIns="0" rIns="0" bIns="0" rtlCol="0" anchor="ctr"/>
+          <a:lstStyle/>
+          <a:p>
             <a:pPr indent="0" marL="0">
               <a:buNone/>
             </a:pPr>
             <a:r>
-              <a:rPr lang="en-US" sz="1420" dirty="0">
+              <a:rPr lang="en-US" sz="950" b="1" dirty="0">
+                <a:solidFill>
+                  <a:srgbClr val="0068B7"/>
+                </a:solidFill>
+                <a:latin typeface="Aptos" pitchFamily="34" charset="0"/>
+                <a:ea typeface="Aptos" pitchFamily="34" charset="-122"/>
+                <a:cs typeface="Aptos" pitchFamily="34" charset="-120"/>
+              </a:rPr>
+              <a:t>Key idea</a:t>
+            </a:r>
+            <a:endParaRPr lang="en-US" sz="950" dirty="0"/>
+          </a:p>
+        </p:txBody>
+      </p:sp>
+      <p:sp>
+        <p:nvSpPr>
+          <p:cNvPr id="13" name="Text 11"/>
+          <p:cNvSpPr/>
+          <p:nvPr/>
+        </p:nvSpPr>
+        <p:spPr>
+          <a:xfrm>
+            <a:off x="8074152" y="1856232"/>
+            <a:ext cx="2825496" cy="1261872"/>
+          </a:xfrm>
+          <a:prstGeom prst="rect">
+            <a:avLst/>
+          </a:prstGeom>
+          <a:noFill/>
+          <a:ln/>
+        </p:spPr>
+        <p:txBody>
+          <a:bodyPr wrap="square" lIns="0" tIns="0" rIns="0" bIns="0" rtlCol="0" anchor="t">
+            <a:normAutofit/>
+          </a:bodyPr>
+          <a:lstStyle/>
+          <a:p>
+            <a:pPr indent="0" marL="0">
+              <a:buNone/>
+            </a:pPr>
+            <a:r>
+              <a:rPr lang="en-US" sz="1250" dirty="0">
                 <a:solidFill>
                   <a:srgbClr val="17364A"/>
                 </a:solidFill>
@@ -7276,9 +13577,116 @@
                 <a:ea typeface="Aptos" pitchFamily="34" charset="-122"/>
                 <a:cs typeface="Aptos" pitchFamily="34" charset="-120"/>
               </a:rPr>
-              <a:t>A health department may want synthetic eCR data to train disease investigators and test an AI case summary tool without exposing real case narratives. The synthetic data should include realistic combinations of symptoms, lab results, demographics, dates, and missing fields, but should not reproduce unusual cases in ways that could identify real people. The agency should document that the data are intended for training and testing, not for estimating disease burden or measuring model performance in production.</a:t>
-            </a:r>
-            <a:endParaRPr lang="en-US" sz="1420" dirty="0"/>
+              <a:t>Synthetic Data for Public Health AI matters because AI systems are embedded in public health programs, data systems, and.</a:t>
+            </a:r>
+            <a:endParaRPr lang="en-US" sz="1250" dirty="0"/>
+          </a:p>
+        </p:txBody>
+      </p:sp>
+      <p:sp>
+        <p:nvSpPr>
+          <p:cNvPr id="14" name="Shape 12"/>
+          <p:cNvSpPr/>
+          <p:nvPr/>
+        </p:nvSpPr>
+        <p:spPr>
+          <a:xfrm>
+            <a:off x="7909560" y="3520440"/>
+            <a:ext cx="3154680" cy="1737360"/>
+          </a:xfrm>
+          <a:prstGeom prst="roundRect">
+            <a:avLst>
+              <a:gd name="adj" fmla="val 6316"/>
+            </a:avLst>
+          </a:prstGeom>
+          <a:solidFill>
+            <a:srgbClr val="EAF6F8"/>
+          </a:solidFill>
+          <a:ln w="12700">
+            <a:solidFill>
+              <a:srgbClr val="B9D7E6"/>
+            </a:solidFill>
+            <a:prstDash val="solid"/>
+          </a:ln>
+        </p:spPr>
+      </p:sp>
+      <p:sp>
+        <p:nvSpPr>
+          <p:cNvPr id="15" name="Text 13"/>
+          <p:cNvSpPr/>
+          <p:nvPr/>
+        </p:nvSpPr>
+        <p:spPr>
+          <a:xfrm>
+            <a:off x="8074152" y="3666744"/>
+            <a:ext cx="2825496" cy="201168"/>
+          </a:xfrm>
+          <a:prstGeom prst="rect">
+            <a:avLst/>
+          </a:prstGeom>
+          <a:noFill/>
+          <a:ln/>
+        </p:spPr>
+        <p:txBody>
+          <a:bodyPr wrap="square" lIns="0" tIns="0" rIns="0" bIns="0" rtlCol="0" anchor="ctr"/>
+          <a:lstStyle/>
+          <a:p>
+            <a:pPr indent="0" marL="0">
+              <a:buNone/>
+            </a:pPr>
+            <a:r>
+              <a:rPr lang="en-US" sz="950" b="1" dirty="0">
+                <a:solidFill>
+                  <a:srgbClr val="0068B7"/>
+                </a:solidFill>
+                <a:latin typeface="Aptos" pitchFamily="34" charset="0"/>
+                <a:ea typeface="Aptos" pitchFamily="34" charset="-122"/>
+                <a:cs typeface="Aptos" pitchFamily="34" charset="-120"/>
+              </a:rPr>
+              <a:t>Use this for</a:t>
+            </a:r>
+            <a:endParaRPr lang="en-US" sz="950" dirty="0"/>
+          </a:p>
+        </p:txBody>
+      </p:sp>
+      <p:sp>
+        <p:nvSpPr>
+          <p:cNvPr id="16" name="Text 14"/>
+          <p:cNvSpPr/>
+          <p:nvPr/>
+        </p:nvSpPr>
+        <p:spPr>
+          <a:xfrm>
+            <a:off x="8074152" y="3959352"/>
+            <a:ext cx="2825496" cy="1170432"/>
+          </a:xfrm>
+          <a:prstGeom prst="rect">
+            <a:avLst/>
+          </a:prstGeom>
+          <a:noFill/>
+          <a:ln/>
+        </p:spPr>
+        <p:txBody>
+          <a:bodyPr wrap="square" lIns="0" tIns="0" rIns="0" bIns="0" rtlCol="0" anchor="t">
+            <a:normAutofit/>
+          </a:bodyPr>
+          <a:lstStyle/>
+          <a:p>
+            <a:pPr indent="0" marL="0">
+              <a:buNone/>
+            </a:pPr>
+            <a:r>
+              <a:rPr lang="en-US" sz="1250" dirty="0">
+                <a:solidFill>
+                  <a:srgbClr val="17364A"/>
+                </a:solidFill>
+                <a:latin typeface="Aptos" pitchFamily="34" charset="0"/>
+                <a:ea typeface="Aptos" pitchFamily="34" charset="-122"/>
+                <a:cs typeface="Aptos" pitchFamily="34" charset="-120"/>
+              </a:rPr>
+              <a:t>Connect the concept to public health decisions, safeguards, documentation, or implementation work.</a:t>
+            </a:r>
+            <a:endParaRPr lang="en-US" sz="1250" dirty="0"/>
           </a:p>
         </p:txBody>
       </p:sp>
@@ -7341,7 +13749,32 @@
       </p:sp>
       <p:sp>
         <p:nvSpPr>
-          <p:cNvPr id="3" name="Text 1"/>
+          <p:cNvPr id="3" name="Shape 1"/>
+          <p:cNvSpPr/>
+          <p:nvPr/>
+        </p:nvSpPr>
+        <p:spPr>
+          <a:xfrm>
+            <a:off x="0" y="164592"/>
+            <a:ext cx="146304" cy="6693408"/>
+          </a:xfrm>
+          <a:prstGeom prst="rect">
+            <a:avLst/>
+          </a:prstGeom>
+          <a:solidFill>
+            <a:srgbClr val="2F8A28"/>
+          </a:solidFill>
+          <a:ln w="12700">
+            <a:solidFill>
+              <a:srgbClr val="2F8A28"/>
+            </a:solidFill>
+            <a:prstDash val="solid"/>
+          </a:ln>
+        </p:spPr>
+      </p:sp>
+      <p:sp>
+        <p:nvSpPr>
+          <p:cNvPr id="4" name="Text 2"/>
           <p:cNvSpPr/>
           <p:nvPr/>
         </p:nvSpPr>
@@ -7380,7 +13813,7 @@
       </p:sp>
       <p:sp>
         <p:nvSpPr>
-          <p:cNvPr id="4" name="Text 2"/>
+          <p:cNvPr id="5" name="Text 3"/>
           <p:cNvSpPr/>
           <p:nvPr/>
         </p:nvSpPr>
@@ -7419,7 +13852,7 @@
       </p:sp>
       <p:sp>
         <p:nvSpPr>
-          <p:cNvPr id="5" name="Text 3"/>
+          <p:cNvPr id="6" name="Text 4"/>
           <p:cNvSpPr/>
           <p:nvPr/>
         </p:nvSpPr>
@@ -7458,13 +13891,77 @@
       </p:sp>
       <p:sp>
         <p:nvSpPr>
-          <p:cNvPr id="6" name="Text 4"/>
+          <p:cNvPr id="7" name="Shape 5"/>
           <p:cNvSpPr/>
           <p:nvPr/>
         </p:nvSpPr>
         <p:spPr>
           <a:xfrm>
             <a:off x="640080" y="658368"/>
+            <a:ext cx="420624" cy="420624"/>
+          </a:xfrm>
+          <a:prstGeom prst="ellipse">
+            <a:avLst/>
+          </a:prstGeom>
+          <a:solidFill>
+            <a:srgbClr val="0068B7"/>
+          </a:solidFill>
+          <a:ln w="12700">
+            <a:solidFill>
+              <a:srgbClr val="0068B7"/>
+            </a:solidFill>
+            <a:prstDash val="solid"/>
+          </a:ln>
+        </p:spPr>
+      </p:sp>
+      <p:sp>
+        <p:nvSpPr>
+          <p:cNvPr id="8" name="Text 6"/>
+          <p:cNvSpPr/>
+          <p:nvPr/>
+        </p:nvSpPr>
+        <p:spPr>
+          <a:xfrm>
+            <a:off x="640080" y="731520"/>
+            <a:ext cx="420624" cy="164592"/>
+          </a:xfrm>
+          <a:prstGeom prst="rect">
+            <a:avLst/>
+          </a:prstGeom>
+          <a:noFill/>
+          <a:ln/>
+        </p:spPr>
+        <p:txBody>
+          <a:bodyPr wrap="square" lIns="0" tIns="0" rIns="0" bIns="0" rtlCol="0" anchor="ctr"/>
+          <a:lstStyle/>
+          <a:p>
+            <a:pPr algn="ctr" indent="0" marL="0">
+              <a:buNone/>
+            </a:pPr>
+            <a:r>
+              <a:rPr lang="en-US" sz="1100" b="1" dirty="0">
+                <a:solidFill>
+                  <a:srgbClr val="FFFFFF"/>
+                </a:solidFill>
+                <a:latin typeface="Aptos" pitchFamily="34" charset="0"/>
+                <a:ea typeface="Aptos" pitchFamily="34" charset="-122"/>
+                <a:cs typeface="Aptos" pitchFamily="34" charset="-120"/>
+              </a:rPr>
+              <a:t>4</a:t>
+            </a:r>
+            <a:endParaRPr lang="en-US" sz="1100" dirty="0"/>
+          </a:p>
+        </p:txBody>
+      </p:sp>
+      <p:sp>
+        <p:nvSpPr>
+          <p:cNvPr id="9" name="Text 7"/>
+          <p:cNvSpPr/>
+          <p:nvPr/>
+        </p:nvSpPr>
+        <p:spPr>
+          <a:xfrm>
+            <a:off x="640080" y="621792"/>
             <a:ext cx="10881360" cy="566928"/>
           </a:xfrm>
           <a:prstGeom prst="rect">
@@ -7491,7 +13988,7 @@
                 <a:ea typeface="Aptos Display" pitchFamily="34" charset="-122"/>
                 <a:cs typeface="Aptos Display" pitchFamily="34" charset="-120"/>
               </a:rPr>
-              <a:t>Technical Deep Dive</a:t>
+              <a:t>Core Concepts</a:t>
             </a:r>
             <a:endParaRPr lang="en-US" sz="2700" dirty="0"/>
           </a:p>
@@ -7499,32 +13996,178 @@
       </p:sp>
       <p:sp>
         <p:nvSpPr>
-          <p:cNvPr id="7" name="Text 5"/>
-          <p:cNvSpPr/>
-          <p:nvPr/>
-        </p:nvSpPr>
-        <p:spPr>
-          <a:xfrm>
-            <a:off x="822960" y="1325880"/>
-            <a:ext cx="10378440" cy="4800600"/>
-          </a:xfrm>
-          <a:prstGeom prst="rect">
-            <a:avLst/>
-          </a:prstGeom>
-          <a:noFill/>
-          <a:ln/>
-        </p:spPr>
-        <p:txBody>
-          <a:bodyPr wrap="square" lIns="1016" tIns="1016" rIns="1016" bIns="1016" rtlCol="0" anchor="t">
+          <p:cNvPr id="10" name="Text 8"/>
+          <p:cNvSpPr/>
+          <p:nvPr/>
+        </p:nvSpPr>
+        <p:spPr>
+          <a:xfrm>
+            <a:off x="868680" y="1417320"/>
+            <a:ext cx="6675120" cy="4434840"/>
+          </a:xfrm>
+          <a:prstGeom prst="rect">
+            <a:avLst/>
+          </a:prstGeom>
+          <a:noFill/>
+          <a:ln/>
+        </p:spPr>
+        <p:txBody>
+          <a:bodyPr wrap="square" lIns="635" tIns="635" rIns="635" bIns="635" rtlCol="0" anchor="t">
             <a:normAutofit/>
           </a:bodyPr>
           <a:lstStyle/>
           <a:p>
+            <a:r>
+              <a:rPr lang="en-US" sz="1700" dirty="0">
+                <a:solidFill>
+                  <a:srgbClr val="17364A"/>
+                </a:solidFill>
+                <a:latin typeface="Aptos" pitchFamily="34" charset="0"/>
+                <a:ea typeface="Aptos" pitchFamily="34" charset="-122"/>
+                <a:cs typeface="Aptos" pitchFamily="34" charset="-120"/>
+              </a:rPr>
+              <a:t>Synthetic data are generated data designed to preserve selected patterns of a source dataset while reducing reliance on.</a:t>
+            </a:r>
+            <a:endParaRPr lang="en-US" sz="1700" dirty="0"/>
+          </a:p>
+          <a:p>
+            <a:r>
+              <a:rPr lang="en-US" sz="1700" dirty="0">
+                <a:solidFill>
+                  <a:srgbClr val="17364A"/>
+                </a:solidFill>
+                <a:latin typeface="Aptos" pitchFamily="34" charset="0"/>
+                <a:ea typeface="Aptos" pitchFamily="34" charset="-122"/>
+                <a:cs typeface="Aptos" pitchFamily="34" charset="-120"/>
+              </a:rPr>
+              <a:t>The value of synthetic data depends on the purpose.</a:t>
+            </a:r>
+            <a:endParaRPr lang="en-US" sz="1700" dirty="0"/>
+          </a:p>
+          <a:p>
+            <a:r>
+              <a:rPr lang="en-US" sz="1700" dirty="0">
+                <a:solidFill>
+                  <a:srgbClr val="17364A"/>
+                </a:solidFill>
+                <a:latin typeface="Aptos" pitchFamily="34" charset="0"/>
+                <a:ea typeface="Aptos" pitchFamily="34" charset="-122"/>
+                <a:cs typeface="Aptos" pitchFamily="34" charset="-120"/>
+              </a:rPr>
+              <a:t>A dataset that is useful for training staff on a dashboard may not be valid for evaluating a predictive model or testing.</a:t>
+            </a:r>
+            <a:endParaRPr lang="en-US" sz="1700" dirty="0"/>
+          </a:p>
+          <a:p>
+            <a:r>
+              <a:rPr lang="en-US" sz="1700" dirty="0">
+                <a:solidFill>
+                  <a:srgbClr val="17364A"/>
+                </a:solidFill>
+                <a:latin typeface="Aptos" pitchFamily="34" charset="0"/>
+                <a:ea typeface="Aptos" pitchFamily="34" charset="-122"/>
+                <a:cs typeface="Aptos" pitchFamily="34" charset="-120"/>
+              </a:rPr>
+              <a:t>Privacy risk does not disappear simply because data are synthetic.</a:t>
+            </a:r>
+            <a:endParaRPr lang="en-US" sz="1700" dirty="0"/>
+          </a:p>
+        </p:txBody>
+      </p:sp>
+      <p:sp>
+        <p:nvSpPr>
+          <p:cNvPr id="11" name="Shape 9"/>
+          <p:cNvSpPr/>
+          <p:nvPr/>
+        </p:nvSpPr>
+        <p:spPr>
+          <a:xfrm>
+            <a:off x="7909560" y="1417320"/>
+            <a:ext cx="3154680" cy="1828800"/>
+          </a:xfrm>
+          <a:prstGeom prst="roundRect">
+            <a:avLst>
+              <a:gd name="adj" fmla="val 6000"/>
+            </a:avLst>
+          </a:prstGeom>
+          <a:solidFill>
+            <a:srgbClr val="EEF8ED"/>
+          </a:solidFill>
+          <a:ln w="12700">
+            <a:solidFill>
+              <a:srgbClr val="B9D7E6"/>
+            </a:solidFill>
+            <a:prstDash val="solid"/>
+          </a:ln>
+        </p:spPr>
+      </p:sp>
+      <p:sp>
+        <p:nvSpPr>
+          <p:cNvPr id="12" name="Text 10"/>
+          <p:cNvSpPr/>
+          <p:nvPr/>
+        </p:nvSpPr>
+        <p:spPr>
+          <a:xfrm>
+            <a:off x="8074152" y="1563624"/>
+            <a:ext cx="2825496" cy="201168"/>
+          </a:xfrm>
+          <a:prstGeom prst="rect">
+            <a:avLst/>
+          </a:prstGeom>
+          <a:noFill/>
+          <a:ln/>
+        </p:spPr>
+        <p:txBody>
+          <a:bodyPr wrap="square" lIns="0" tIns="0" rIns="0" bIns="0" rtlCol="0" anchor="ctr"/>
+          <a:lstStyle/>
+          <a:p>
             <a:pPr indent="0" marL="0">
               <a:buNone/>
             </a:pPr>
             <a:r>
-              <a:rPr lang="en-US" sz="1420" dirty="0">
+              <a:rPr lang="en-US" sz="950" b="1" dirty="0">
+                <a:solidFill>
+                  <a:srgbClr val="0068B7"/>
+                </a:solidFill>
+                <a:latin typeface="Aptos" pitchFamily="34" charset="0"/>
+                <a:ea typeface="Aptos" pitchFamily="34" charset="-122"/>
+                <a:cs typeface="Aptos" pitchFamily="34" charset="-120"/>
+              </a:rPr>
+              <a:t>Key idea</a:t>
+            </a:r>
+            <a:endParaRPr lang="en-US" sz="950" dirty="0"/>
+          </a:p>
+        </p:txBody>
+      </p:sp>
+      <p:sp>
+        <p:nvSpPr>
+          <p:cNvPr id="13" name="Text 11"/>
+          <p:cNvSpPr/>
+          <p:nvPr/>
+        </p:nvSpPr>
+        <p:spPr>
+          <a:xfrm>
+            <a:off x="8074152" y="1856232"/>
+            <a:ext cx="2825496" cy="1261872"/>
+          </a:xfrm>
+          <a:prstGeom prst="rect">
+            <a:avLst/>
+          </a:prstGeom>
+          <a:noFill/>
+          <a:ln/>
+        </p:spPr>
+        <p:txBody>
+          <a:bodyPr wrap="square" lIns="0" tIns="0" rIns="0" bIns="0" rtlCol="0" anchor="t">
+            <a:normAutofit/>
+          </a:bodyPr>
+          <a:lstStyle/>
+          <a:p>
+            <a:pPr indent="0" marL="0">
+              <a:buNone/>
+            </a:pPr>
+            <a:r>
+              <a:rPr lang="en-US" sz="1250" dirty="0">
                 <a:solidFill>
                   <a:srgbClr val="17364A"/>
                 </a:solidFill>
@@ -7532,9 +14175,116 @@
                 <a:ea typeface="Aptos" pitchFamily="34" charset="-122"/>
                 <a:cs typeface="Aptos" pitchFamily="34" charset="-120"/>
               </a:rPr>
-              <a:t>Synthetic data development begins by defining the intended use. Training data for staff exercises can be less statistically faithful than data used for system testing. Model evaluation data require more rigorous review because the synthetic data must preserve patterns relevant to the model task. Public health teams should define whether synthetic data will be used for demonstration, software testing, integration testing, training, simulation, or model development. Agencies should evaluate synthetic data for privacy and utility. Privacy review may examine whether rare combinations, dates, locations, or narratives are too similar to real records. Utility review may compare distributions, relationships, missingness, and edge cases against expected patterns. Both reviews should be documented because a dataset can be safe but not useful, or useful but not safe enough for sharing. Synthetic data are also helpful for vendor evaluation. Agencies can provide vendors with realistic data structures without sharing protected data during early discovery. However, vendors should not use synthetic data performance as proof that a model will work on real public health data. Production readiness still requires validation against appropriate real-world data under approved governance controls.</a:t>
-            </a:r>
-            <a:endParaRPr lang="en-US" sz="1420" dirty="0"/>
+              <a:t>Synthetic data are generated data designed to preserve selected patterns of a source dataset while reducing reliance on.</a:t>
+            </a:r>
+            <a:endParaRPr lang="en-US" sz="1250" dirty="0"/>
+          </a:p>
+        </p:txBody>
+      </p:sp>
+      <p:sp>
+        <p:nvSpPr>
+          <p:cNvPr id="14" name="Shape 12"/>
+          <p:cNvSpPr/>
+          <p:nvPr/>
+        </p:nvSpPr>
+        <p:spPr>
+          <a:xfrm>
+            <a:off x="7909560" y="3520440"/>
+            <a:ext cx="3154680" cy="1737360"/>
+          </a:xfrm>
+          <a:prstGeom prst="roundRect">
+            <a:avLst>
+              <a:gd name="adj" fmla="val 6316"/>
+            </a:avLst>
+          </a:prstGeom>
+          <a:solidFill>
+            <a:srgbClr val="EAF6F8"/>
+          </a:solidFill>
+          <a:ln w="12700">
+            <a:solidFill>
+              <a:srgbClr val="B9D7E6"/>
+            </a:solidFill>
+            <a:prstDash val="solid"/>
+          </a:ln>
+        </p:spPr>
+      </p:sp>
+      <p:sp>
+        <p:nvSpPr>
+          <p:cNvPr id="15" name="Text 13"/>
+          <p:cNvSpPr/>
+          <p:nvPr/>
+        </p:nvSpPr>
+        <p:spPr>
+          <a:xfrm>
+            <a:off x="8074152" y="3666744"/>
+            <a:ext cx="2825496" cy="201168"/>
+          </a:xfrm>
+          <a:prstGeom prst="rect">
+            <a:avLst/>
+          </a:prstGeom>
+          <a:noFill/>
+          <a:ln/>
+        </p:spPr>
+        <p:txBody>
+          <a:bodyPr wrap="square" lIns="0" tIns="0" rIns="0" bIns="0" rtlCol="0" anchor="ctr"/>
+          <a:lstStyle/>
+          <a:p>
+            <a:pPr indent="0" marL="0">
+              <a:buNone/>
+            </a:pPr>
+            <a:r>
+              <a:rPr lang="en-US" sz="950" b="1" dirty="0">
+                <a:solidFill>
+                  <a:srgbClr val="0068B7"/>
+                </a:solidFill>
+                <a:latin typeface="Aptos" pitchFamily="34" charset="0"/>
+                <a:ea typeface="Aptos" pitchFamily="34" charset="-122"/>
+                <a:cs typeface="Aptos" pitchFamily="34" charset="-120"/>
+              </a:rPr>
+              <a:t>Use this for</a:t>
+            </a:r>
+            <a:endParaRPr lang="en-US" sz="950" dirty="0"/>
+          </a:p>
+        </p:txBody>
+      </p:sp>
+      <p:sp>
+        <p:nvSpPr>
+          <p:cNvPr id="16" name="Text 14"/>
+          <p:cNvSpPr/>
+          <p:nvPr/>
+        </p:nvSpPr>
+        <p:spPr>
+          <a:xfrm>
+            <a:off x="8074152" y="3959352"/>
+            <a:ext cx="2825496" cy="1170432"/>
+          </a:xfrm>
+          <a:prstGeom prst="rect">
+            <a:avLst/>
+          </a:prstGeom>
+          <a:noFill/>
+          <a:ln/>
+        </p:spPr>
+        <p:txBody>
+          <a:bodyPr wrap="square" lIns="0" tIns="0" rIns="0" bIns="0" rtlCol="0" anchor="t">
+            <a:normAutofit/>
+          </a:bodyPr>
+          <a:lstStyle/>
+          <a:p>
+            <a:pPr indent="0" marL="0">
+              <a:buNone/>
+            </a:pPr>
+            <a:r>
+              <a:rPr lang="en-US" sz="1250" dirty="0">
+                <a:solidFill>
+                  <a:srgbClr val="17364A"/>
+                </a:solidFill>
+                <a:latin typeface="Aptos" pitchFamily="34" charset="0"/>
+                <a:ea typeface="Aptos" pitchFamily="34" charset="-122"/>
+                <a:cs typeface="Aptos" pitchFamily="34" charset="-120"/>
+              </a:rPr>
+              <a:t>Connect the concept to public health decisions, safeguards, documentation, or implementation work.</a:t>
+            </a:r>
+            <a:endParaRPr lang="en-US" sz="1250" dirty="0"/>
           </a:p>
         </p:txBody>
       </p:sp>

--- a/downloads/presentations/modules/lesson-09-synthetic-data-for-public-health-ai.pptx
+++ b/downloads/presentations/modules/lesson-09-synthetic-data-for-public-health-ai.pptx
@@ -2902,6 +2902,45 @@
           </a:p>
         </p:txBody>
       </p:sp>
+      <p:sp>
+        <p:nvSpPr>
+          <p:cNvPr id="8" name="Text 5"/>
+          <p:cNvSpPr/>
+          <p:nvPr/>
+        </p:nvSpPr>
+        <p:spPr>
+          <a:xfrm>
+            <a:off x="11137392" y="6510528"/>
+            <a:ext cx="411480" cy="201168"/>
+          </a:xfrm>
+          <a:prstGeom prst="rect">
+            <a:avLst/>
+          </a:prstGeom>
+          <a:noFill/>
+          <a:ln/>
+        </p:spPr>
+        <p:txBody>
+          <a:bodyPr wrap="square" lIns="0" tIns="0" rIns="0" bIns="0" rtlCol="0" anchor="ctr"/>
+          <a:lstStyle/>
+          <a:p>
+            <a:pPr algn="r" indent="0" marL="0">
+              <a:buNone/>
+            </a:pPr>
+            <a:r>
+              <a:rPr lang="en-US" sz="900" dirty="0">
+                <a:solidFill>
+                  <a:srgbClr val="5F7181"/>
+                </a:solidFill>
+                <a:latin typeface="Aptos" pitchFamily="34" charset="0"/>
+                <a:ea typeface="Aptos" pitchFamily="34" charset="-122"/>
+                <a:cs typeface="Aptos" pitchFamily="34" charset="-120"/>
+              </a:rPr>
+              <a:t>1</a:t>
+            </a:r>
+            <a:endParaRPr lang="en-US" sz="900" dirty="0"/>
+          </a:p>
+        </p:txBody>
+      </p:sp>
     </p:spTree>
   </p:cSld>
   <p:clrMapOvr>
@@ -3095,7 +3134,7 @@
                 <a:ea typeface="Aptos" pitchFamily="34" charset="-122"/>
                 <a:cs typeface="Aptos" pitchFamily="34" charset="-120"/>
               </a:rPr>
-              <a:t>© Paula Soper</a:t>
+              <a:t>Â© Paula Soper</a:t>
             </a:r>
             <a:endParaRPr lang="en-US" sz="800" dirty="0"/>
           </a:p>
@@ -3103,7 +3142,46 @@
       </p:sp>
       <p:sp>
         <p:nvSpPr>
-          <p:cNvPr id="7" name="Shape 5"/>
+          <p:cNvPr id="7" name="Text 5"/>
+          <p:cNvSpPr/>
+          <p:nvPr/>
+        </p:nvSpPr>
+        <p:spPr>
+          <a:xfrm>
+            <a:off x="11137392" y="6510528"/>
+            <a:ext cx="411480" cy="201168"/>
+          </a:xfrm>
+          <a:prstGeom prst="rect">
+            <a:avLst/>
+          </a:prstGeom>
+          <a:noFill/>
+          <a:ln/>
+        </p:spPr>
+        <p:txBody>
+          <a:bodyPr wrap="square" lIns="0" tIns="0" rIns="0" bIns="0" rtlCol="0" anchor="ctr"/>
+          <a:lstStyle/>
+          <a:p>
+            <a:pPr algn="r" indent="0" marL="0">
+              <a:buNone/>
+            </a:pPr>
+            <a:r>
+              <a:rPr lang="en-US" sz="900" dirty="0">
+                <a:solidFill>
+                  <a:srgbClr val="5F7181"/>
+                </a:solidFill>
+                <a:latin typeface="Aptos" pitchFamily="34" charset="0"/>
+                <a:ea typeface="Aptos" pitchFamily="34" charset="-122"/>
+                <a:cs typeface="Aptos" pitchFamily="34" charset="-120"/>
+              </a:rPr>
+              <a:t>10</a:t>
+            </a:r>
+            <a:endParaRPr lang="en-US" sz="900" dirty="0"/>
+          </a:p>
+        </p:txBody>
+      </p:sp>
+      <p:sp>
+        <p:nvSpPr>
+          <p:cNvPr id="8" name="Shape 6"/>
           <p:cNvSpPr/>
           <p:nvPr/>
         </p:nvSpPr>
@@ -3128,7 +3206,7 @@
       </p:sp>
       <p:sp>
         <p:nvSpPr>
-          <p:cNvPr id="8" name="Text 6"/>
+          <p:cNvPr id="9" name="Text 7"/>
           <p:cNvSpPr/>
           <p:nvPr/>
         </p:nvSpPr>
@@ -3167,14 +3245,14 @@
       </p:sp>
       <p:sp>
         <p:nvSpPr>
-          <p:cNvPr id="9" name="Text 7"/>
+          <p:cNvPr id="10" name="Text 8"/>
           <p:cNvSpPr/>
           <p:nvPr/>
         </p:nvSpPr>
         <p:spPr>
           <a:xfrm>
             <a:off x="640080" y="621792"/>
-            <a:ext cx="10881360" cy="566928"/>
+            <a:ext cx="10881360" cy="713232"/>
           </a:xfrm>
           <a:prstGeom prst="rect">
             <a:avLst/>
@@ -3192,7 +3270,7 @@
               <a:buNone/>
             </a:pPr>
             <a:r>
-              <a:rPr lang="en-US" sz="2700" b="1" dirty="0">
+              <a:rPr lang="en-US" sz="3400" b="1" dirty="0">
                 <a:solidFill>
                   <a:srgbClr val="003A63"/>
                 </a:solidFill>
@@ -3202,20 +3280,20 @@
               </a:rPr>
               <a:t>Public Health Example</a:t>
             </a:r>
-            <a:endParaRPr lang="en-US" sz="2700" dirty="0"/>
-          </a:p>
-        </p:txBody>
-      </p:sp>
-      <p:sp>
-        <p:nvSpPr>
-          <p:cNvPr id="10" name="Text 8"/>
-          <p:cNvSpPr/>
-          <p:nvPr/>
-        </p:nvSpPr>
-        <p:spPr>
-          <a:xfrm>
-            <a:off x="868680" y="1417320"/>
-            <a:ext cx="6675120" cy="4434840"/>
+            <a:endParaRPr lang="en-US" sz="3400" dirty="0"/>
+          </a:p>
+        </p:txBody>
+      </p:sp>
+      <p:sp>
+        <p:nvSpPr>
+          <p:cNvPr id="11" name="Text 9"/>
+          <p:cNvSpPr/>
+          <p:nvPr/>
+        </p:nvSpPr>
+        <p:spPr>
+          <a:xfrm>
+            <a:off x="868680" y="1508760"/>
+            <a:ext cx="6537960" cy="4160520"/>
           </a:xfrm>
           <a:prstGeom prst="rect">
             <a:avLst/>
@@ -3230,7 +3308,7 @@
           <a:lstStyle/>
           <a:p>
             <a:r>
-              <a:rPr lang="en-US" sz="1700" dirty="0">
+              <a:rPr lang="en-US" sz="2100" dirty="0">
                 <a:solidFill>
                   <a:srgbClr val="17364A"/>
                 </a:solidFill>
@@ -3238,13 +3316,13 @@
                 <a:ea typeface="Aptos" pitchFamily="34" charset="-122"/>
                 <a:cs typeface="Aptos" pitchFamily="34" charset="-120"/>
               </a:rPr>
-              <a:t>A health department may want synthetic eCR data to train disease investigators and test an AI case summary tool without.</a:t>
-            </a:r>
-            <a:endParaRPr lang="en-US" sz="1700" dirty="0"/>
-          </a:p>
-          <a:p>
-            <a:r>
-              <a:rPr lang="en-US" sz="1700" dirty="0">
+              <a:t>A health department may want synthetic eCR data to train disease investigators and test an AI case.</a:t>
+            </a:r>
+            <a:endParaRPr lang="en-US" sz="2100" dirty="0"/>
+          </a:p>
+          <a:p>
+            <a:r>
+              <a:rPr lang="en-US" sz="2100" dirty="0">
                 <a:solidFill>
                   <a:srgbClr val="17364A"/>
                 </a:solidFill>
@@ -3252,13 +3330,13 @@
                 <a:ea typeface="Aptos" pitchFamily="34" charset="-122"/>
                 <a:cs typeface="Aptos" pitchFamily="34" charset="-120"/>
               </a:rPr>
-              <a:t>The synthetic data should include realistic combinations of symptoms, lab results, demographics, dates, and missing fields,.</a:t>
-            </a:r>
-            <a:endParaRPr lang="en-US" sz="1700" dirty="0"/>
-          </a:p>
-          <a:p>
-            <a:r>
-              <a:rPr lang="en-US" sz="1700" dirty="0">
+              <a:t>The synthetic data should include realistic combinations of symptoms, lab results, demographics, dates,.</a:t>
+            </a:r>
+            <a:endParaRPr lang="en-US" sz="2100" dirty="0"/>
+          </a:p>
+          <a:p>
+            <a:r>
+              <a:rPr lang="en-US" sz="2100" dirty="0">
                 <a:solidFill>
                   <a:srgbClr val="17364A"/>
                 </a:solidFill>
@@ -3266,15 +3344,15 @@
                 <a:ea typeface="Aptos" pitchFamily="34" charset="-122"/>
                 <a:cs typeface="Aptos" pitchFamily="34" charset="-120"/>
               </a:rPr>
-              <a:t>The agency should document that the data are intended for training and testing, not for estimating disease burden or.</a:t>
-            </a:r>
-            <a:endParaRPr lang="en-US" sz="1700" dirty="0"/>
-          </a:p>
-        </p:txBody>
-      </p:sp>
-      <p:sp>
-        <p:nvSpPr>
-          <p:cNvPr id="11" name="Shape 9"/>
+              <a:t>The agency should document that the data are intended for training and testing, not for estimating.</a:t>
+            </a:r>
+            <a:endParaRPr lang="en-US" sz="2100" dirty="0"/>
+          </a:p>
+        </p:txBody>
+      </p:sp>
+      <p:sp>
+        <p:nvSpPr>
+          <p:cNvPr id="12" name="Shape 10"/>
           <p:cNvSpPr/>
           <p:nvPr/>
         </p:nvSpPr>
@@ -3301,14 +3379,14 @@
       </p:sp>
       <p:sp>
         <p:nvSpPr>
-          <p:cNvPr id="12" name="Text 10"/>
+          <p:cNvPr id="13" name="Text 11"/>
           <p:cNvSpPr/>
           <p:nvPr/>
         </p:nvSpPr>
         <p:spPr>
           <a:xfrm>
             <a:off x="8074152" y="1563624"/>
-            <a:ext cx="2825496" cy="201168"/>
+            <a:ext cx="2825496" cy="256032"/>
           </a:xfrm>
           <a:prstGeom prst="rect">
             <a:avLst/>
@@ -3324,7 +3402,7 @@
               <a:buNone/>
             </a:pPr>
             <a:r>
-              <a:rPr lang="en-US" sz="950" b="1" dirty="0">
+              <a:rPr lang="en-US" sz="1300" b="1" dirty="0">
                 <a:solidFill>
                   <a:srgbClr val="0068B7"/>
                 </a:solidFill>
@@ -3334,20 +3412,20 @@
               </a:rPr>
               <a:t>Key idea</a:t>
             </a:r>
-            <a:endParaRPr lang="en-US" sz="950" dirty="0"/>
-          </a:p>
-        </p:txBody>
-      </p:sp>
-      <p:sp>
-        <p:nvSpPr>
-          <p:cNvPr id="13" name="Text 11"/>
-          <p:cNvSpPr/>
-          <p:nvPr/>
-        </p:nvSpPr>
-        <p:spPr>
-          <a:xfrm>
-            <a:off x="8074152" y="1856232"/>
-            <a:ext cx="2825496" cy="1261872"/>
+            <a:endParaRPr lang="en-US" sz="1300" dirty="0"/>
+          </a:p>
+        </p:txBody>
+      </p:sp>
+      <p:sp>
+        <p:nvSpPr>
+          <p:cNvPr id="14" name="Text 12"/>
+          <p:cNvSpPr/>
+          <p:nvPr/>
+        </p:nvSpPr>
+        <p:spPr>
+          <a:xfrm>
+            <a:off x="8074152" y="1920240"/>
+            <a:ext cx="2825496" cy="1188720"/>
           </a:xfrm>
           <a:prstGeom prst="rect">
             <a:avLst/>
@@ -3365,7 +3443,7 @@
               <a:buNone/>
             </a:pPr>
             <a:r>
-              <a:rPr lang="en-US" sz="1250" dirty="0">
+              <a:rPr lang="en-US" sz="1550" dirty="0">
                 <a:solidFill>
                   <a:srgbClr val="17364A"/>
                 </a:solidFill>
@@ -3373,15 +3451,15 @@
                 <a:ea typeface="Aptos" pitchFamily="34" charset="-122"/>
                 <a:cs typeface="Aptos" pitchFamily="34" charset="-120"/>
               </a:rPr>
-              <a:t>A health department may want synthetic eCR data to train disease investigators and test an AI case summary tool without.</a:t>
-            </a:r>
-            <a:endParaRPr lang="en-US" sz="1250" dirty="0"/>
-          </a:p>
-        </p:txBody>
-      </p:sp>
-      <p:sp>
-        <p:nvSpPr>
-          <p:cNvPr id="14" name="Shape 12"/>
+              <a:t>A health department may want synthetic eCR data to train disease investigators and test an AI case.</a:t>
+            </a:r>
+            <a:endParaRPr lang="en-US" sz="1550" dirty="0"/>
+          </a:p>
+        </p:txBody>
+      </p:sp>
+      <p:sp>
+        <p:nvSpPr>
+          <p:cNvPr id="15" name="Shape 13"/>
           <p:cNvSpPr/>
           <p:nvPr/>
         </p:nvSpPr>
@@ -3408,14 +3486,14 @@
       </p:sp>
       <p:sp>
         <p:nvSpPr>
-          <p:cNvPr id="15" name="Text 13"/>
+          <p:cNvPr id="16" name="Text 14"/>
           <p:cNvSpPr/>
           <p:nvPr/>
         </p:nvSpPr>
         <p:spPr>
           <a:xfrm>
             <a:off x="8074152" y="3666744"/>
-            <a:ext cx="2825496" cy="201168"/>
+            <a:ext cx="2825496" cy="256032"/>
           </a:xfrm>
           <a:prstGeom prst="rect">
             <a:avLst/>
@@ -3431,7 +3509,7 @@
               <a:buNone/>
             </a:pPr>
             <a:r>
-              <a:rPr lang="en-US" sz="950" b="1" dirty="0">
+              <a:rPr lang="en-US" sz="1300" b="1" dirty="0">
                 <a:solidFill>
                   <a:srgbClr val="0068B7"/>
                 </a:solidFill>
@@ -3441,20 +3519,20 @@
               </a:rPr>
               <a:t>Use this for</a:t>
             </a:r>
-            <a:endParaRPr lang="en-US" sz="950" dirty="0"/>
-          </a:p>
-        </p:txBody>
-      </p:sp>
-      <p:sp>
-        <p:nvSpPr>
-          <p:cNvPr id="16" name="Text 14"/>
-          <p:cNvSpPr/>
-          <p:nvPr/>
-        </p:nvSpPr>
-        <p:spPr>
-          <a:xfrm>
-            <a:off x="8074152" y="3959352"/>
-            <a:ext cx="2825496" cy="1170432"/>
+            <a:endParaRPr lang="en-US" sz="1300" dirty="0"/>
+          </a:p>
+        </p:txBody>
+      </p:sp>
+      <p:sp>
+        <p:nvSpPr>
+          <p:cNvPr id="17" name="Text 15"/>
+          <p:cNvSpPr/>
+          <p:nvPr/>
+        </p:nvSpPr>
+        <p:spPr>
+          <a:xfrm>
+            <a:off x="8074152" y="4023360"/>
+            <a:ext cx="2825496" cy="1097280"/>
           </a:xfrm>
           <a:prstGeom prst="rect">
             <a:avLst/>
@@ -3472,7 +3550,7 @@
               <a:buNone/>
             </a:pPr>
             <a:r>
-              <a:rPr lang="en-US" sz="1250" dirty="0">
+              <a:rPr lang="en-US" sz="1550" dirty="0">
                 <a:solidFill>
                   <a:srgbClr val="17364A"/>
                 </a:solidFill>
@@ -3482,7 +3560,7 @@
               </a:rPr>
               <a:t>Connect the concept to public health decisions, safeguards, documentation, or implementation work.</a:t>
             </a:r>
-            <a:endParaRPr lang="en-US" sz="1250" dirty="0"/>
+            <a:endParaRPr lang="en-US" sz="1550" dirty="0"/>
           </a:p>
         </p:txBody>
       </p:sp>
@@ -3679,7 +3757,7 @@
                 <a:ea typeface="Aptos" pitchFamily="34" charset="-122"/>
                 <a:cs typeface="Aptos" pitchFamily="34" charset="-120"/>
               </a:rPr>
-              <a:t>© Paula Soper</a:t>
+              <a:t>Â© Paula Soper</a:t>
             </a:r>
             <a:endParaRPr lang="en-US" sz="800" dirty="0"/>
           </a:p>
@@ -3687,7 +3765,46 @@
       </p:sp>
       <p:sp>
         <p:nvSpPr>
-          <p:cNvPr id="7" name="Shape 5"/>
+          <p:cNvPr id="7" name="Text 5"/>
+          <p:cNvSpPr/>
+          <p:nvPr/>
+        </p:nvSpPr>
+        <p:spPr>
+          <a:xfrm>
+            <a:off x="11137392" y="6510528"/>
+            <a:ext cx="411480" cy="201168"/>
+          </a:xfrm>
+          <a:prstGeom prst="rect">
+            <a:avLst/>
+          </a:prstGeom>
+          <a:noFill/>
+          <a:ln/>
+        </p:spPr>
+        <p:txBody>
+          <a:bodyPr wrap="square" lIns="0" tIns="0" rIns="0" bIns="0" rtlCol="0" anchor="ctr"/>
+          <a:lstStyle/>
+          <a:p>
+            <a:pPr algn="r" indent="0" marL="0">
+              <a:buNone/>
+            </a:pPr>
+            <a:r>
+              <a:rPr lang="en-US" sz="900" dirty="0">
+                <a:solidFill>
+                  <a:srgbClr val="5F7181"/>
+                </a:solidFill>
+                <a:latin typeface="Aptos" pitchFamily="34" charset="0"/>
+                <a:ea typeface="Aptos" pitchFamily="34" charset="-122"/>
+                <a:cs typeface="Aptos" pitchFamily="34" charset="-120"/>
+              </a:rPr>
+              <a:t>11</a:t>
+            </a:r>
+            <a:endParaRPr lang="en-US" sz="900" dirty="0"/>
+          </a:p>
+        </p:txBody>
+      </p:sp>
+      <p:sp>
+        <p:nvSpPr>
+          <p:cNvPr id="8" name="Shape 6"/>
           <p:cNvSpPr/>
           <p:nvPr/>
         </p:nvSpPr>
@@ -3712,7 +3829,7 @@
       </p:sp>
       <p:sp>
         <p:nvSpPr>
-          <p:cNvPr id="8" name="Text 6"/>
+          <p:cNvPr id="9" name="Text 7"/>
           <p:cNvSpPr/>
           <p:nvPr/>
         </p:nvSpPr>
@@ -3751,14 +3868,14 @@
       </p:sp>
       <p:sp>
         <p:nvSpPr>
-          <p:cNvPr id="9" name="Text 7"/>
+          <p:cNvPr id="10" name="Text 8"/>
           <p:cNvSpPr/>
           <p:nvPr/>
         </p:nvSpPr>
         <p:spPr>
           <a:xfrm>
             <a:off x="640080" y="621792"/>
-            <a:ext cx="10881360" cy="566928"/>
+            <a:ext cx="10881360" cy="713232"/>
           </a:xfrm>
           <a:prstGeom prst="rect">
             <a:avLst/>
@@ -3776,7 +3893,7 @@
               <a:buNone/>
             </a:pPr>
             <a:r>
-              <a:rPr lang="en-US" sz="2700" b="1" dirty="0">
+              <a:rPr lang="en-US" sz="3400" b="1" dirty="0">
                 <a:solidFill>
                   <a:srgbClr val="003A63"/>
                 </a:solidFill>
@@ -3786,20 +3903,20 @@
               </a:rPr>
               <a:t>Technical Deep Dive</a:t>
             </a:r>
-            <a:endParaRPr lang="en-US" sz="2700" dirty="0"/>
-          </a:p>
-        </p:txBody>
-      </p:sp>
-      <p:sp>
-        <p:nvSpPr>
-          <p:cNvPr id="10" name="Text 8"/>
-          <p:cNvSpPr/>
-          <p:nvPr/>
-        </p:nvSpPr>
-        <p:spPr>
-          <a:xfrm>
-            <a:off x="868680" y="1417320"/>
-            <a:ext cx="6675120" cy="4434840"/>
+            <a:endParaRPr lang="en-US" sz="3400" dirty="0"/>
+          </a:p>
+        </p:txBody>
+      </p:sp>
+      <p:sp>
+        <p:nvSpPr>
+          <p:cNvPr id="11" name="Text 9"/>
+          <p:cNvSpPr/>
+          <p:nvPr/>
+        </p:nvSpPr>
+        <p:spPr>
+          <a:xfrm>
+            <a:off x="868680" y="1508760"/>
+            <a:ext cx="6537960" cy="4160520"/>
           </a:xfrm>
           <a:prstGeom prst="rect">
             <a:avLst/>
@@ -3814,7 +3931,7 @@
           <a:lstStyle/>
           <a:p>
             <a:r>
-              <a:rPr lang="en-US" sz="1700" dirty="0">
+              <a:rPr lang="en-US" sz="2100" dirty="0">
                 <a:solidFill>
                   <a:srgbClr val="17364A"/>
                 </a:solidFill>
@@ -3824,11 +3941,11 @@
               </a:rPr>
               <a:t>Synthetic data development begins by defining the intended use.</a:t>
             </a:r>
-            <a:endParaRPr lang="en-US" sz="1700" dirty="0"/>
-          </a:p>
-          <a:p>
-            <a:r>
-              <a:rPr lang="en-US" sz="1700" dirty="0">
+            <a:endParaRPr lang="en-US" sz="2100" dirty="0"/>
+          </a:p>
+          <a:p>
+            <a:r>
+              <a:rPr lang="en-US" sz="2100" dirty="0">
                 <a:solidFill>
                   <a:srgbClr val="17364A"/>
                 </a:solidFill>
@@ -3838,11 +3955,11 @@
               </a:rPr>
               <a:t>Training data for staff exercises can be less statistically faithful than data used for system testing.</a:t>
             </a:r>
-            <a:endParaRPr lang="en-US" sz="1700" dirty="0"/>
-          </a:p>
-          <a:p>
-            <a:r>
-              <a:rPr lang="en-US" sz="1700" dirty="0">
+            <a:endParaRPr lang="en-US" sz="2100" dirty="0"/>
+          </a:p>
+          <a:p>
+            <a:r>
+              <a:rPr lang="en-US" sz="2100" dirty="0">
                 <a:solidFill>
                   <a:srgbClr val="17364A"/>
                 </a:solidFill>
@@ -3850,29 +3967,15 @@
                 <a:ea typeface="Aptos" pitchFamily="34" charset="-122"/>
                 <a:cs typeface="Aptos" pitchFamily="34" charset="-120"/>
               </a:rPr>
-              <a:t>Model evaluation data require more rigorous review because the synthetic data must preserve patterns relevant to the model.</a:t>
-            </a:r>
-            <a:endParaRPr lang="en-US" sz="1700" dirty="0"/>
-          </a:p>
-          <a:p>
-            <a:r>
-              <a:rPr lang="en-US" sz="1700" dirty="0">
-                <a:solidFill>
-                  <a:srgbClr val="17364A"/>
-                </a:solidFill>
-                <a:latin typeface="Aptos" pitchFamily="34" charset="0"/>
-                <a:ea typeface="Aptos" pitchFamily="34" charset="-122"/>
-                <a:cs typeface="Aptos" pitchFamily="34" charset="-120"/>
-              </a:rPr>
-              <a:t>Public health teams should define whether synthetic data will be used for demonstration, software testing, integration.</a:t>
-            </a:r>
-            <a:endParaRPr lang="en-US" sz="1700" dirty="0"/>
-          </a:p>
-        </p:txBody>
-      </p:sp>
-      <p:sp>
-        <p:nvSpPr>
-          <p:cNvPr id="11" name="Shape 9"/>
+              <a:t>Model evaluation data require more rigorous review because the synthetic data must preserve patterns.</a:t>
+            </a:r>
+            <a:endParaRPr lang="en-US" sz="2100" dirty="0"/>
+          </a:p>
+        </p:txBody>
+      </p:sp>
+      <p:sp>
+        <p:nvSpPr>
+          <p:cNvPr id="12" name="Shape 10"/>
           <p:cNvSpPr/>
           <p:nvPr/>
         </p:nvSpPr>
@@ -3899,14 +4002,14 @@
       </p:sp>
       <p:sp>
         <p:nvSpPr>
-          <p:cNvPr id="12" name="Text 10"/>
+          <p:cNvPr id="13" name="Text 11"/>
           <p:cNvSpPr/>
           <p:nvPr/>
         </p:nvSpPr>
         <p:spPr>
           <a:xfrm>
             <a:off x="8074152" y="1563624"/>
-            <a:ext cx="2825496" cy="201168"/>
+            <a:ext cx="2825496" cy="256032"/>
           </a:xfrm>
           <a:prstGeom prst="rect">
             <a:avLst/>
@@ -3922,7 +4025,7 @@
               <a:buNone/>
             </a:pPr>
             <a:r>
-              <a:rPr lang="en-US" sz="950" b="1" dirty="0">
+              <a:rPr lang="en-US" sz="1300" b="1" dirty="0">
                 <a:solidFill>
                   <a:srgbClr val="0068B7"/>
                 </a:solidFill>
@@ -3932,20 +4035,20 @@
               </a:rPr>
               <a:t>Key idea</a:t>
             </a:r>
-            <a:endParaRPr lang="en-US" sz="950" dirty="0"/>
-          </a:p>
-        </p:txBody>
-      </p:sp>
-      <p:sp>
-        <p:nvSpPr>
-          <p:cNvPr id="13" name="Text 11"/>
-          <p:cNvSpPr/>
-          <p:nvPr/>
-        </p:nvSpPr>
-        <p:spPr>
-          <a:xfrm>
-            <a:off x="8074152" y="1856232"/>
-            <a:ext cx="2825496" cy="1261872"/>
+            <a:endParaRPr lang="en-US" sz="1300" dirty="0"/>
+          </a:p>
+        </p:txBody>
+      </p:sp>
+      <p:sp>
+        <p:nvSpPr>
+          <p:cNvPr id="14" name="Text 12"/>
+          <p:cNvSpPr/>
+          <p:nvPr/>
+        </p:nvSpPr>
+        <p:spPr>
+          <a:xfrm>
+            <a:off x="8074152" y="1920240"/>
+            <a:ext cx="2825496" cy="1188720"/>
           </a:xfrm>
           <a:prstGeom prst="rect">
             <a:avLst/>
@@ -3963,7 +4066,7 @@
               <a:buNone/>
             </a:pPr>
             <a:r>
-              <a:rPr lang="en-US" sz="1250" dirty="0">
+              <a:rPr lang="en-US" sz="1550" dirty="0">
                 <a:solidFill>
                   <a:srgbClr val="17364A"/>
                 </a:solidFill>
@@ -3973,13 +4076,13 @@
               </a:rPr>
               <a:t>Synthetic data development begins by defining the intended use.</a:t>
             </a:r>
-            <a:endParaRPr lang="en-US" sz="1250" dirty="0"/>
-          </a:p>
-        </p:txBody>
-      </p:sp>
-      <p:sp>
-        <p:nvSpPr>
-          <p:cNvPr id="14" name="Shape 12"/>
+            <a:endParaRPr lang="en-US" sz="1550" dirty="0"/>
+          </a:p>
+        </p:txBody>
+      </p:sp>
+      <p:sp>
+        <p:nvSpPr>
+          <p:cNvPr id="15" name="Shape 13"/>
           <p:cNvSpPr/>
           <p:nvPr/>
         </p:nvSpPr>
@@ -4006,14 +4109,14 @@
       </p:sp>
       <p:sp>
         <p:nvSpPr>
-          <p:cNvPr id="15" name="Text 13"/>
+          <p:cNvPr id="16" name="Text 14"/>
           <p:cNvSpPr/>
           <p:nvPr/>
         </p:nvSpPr>
         <p:spPr>
           <a:xfrm>
             <a:off x="8074152" y="3666744"/>
-            <a:ext cx="2825496" cy="201168"/>
+            <a:ext cx="2825496" cy="256032"/>
           </a:xfrm>
           <a:prstGeom prst="rect">
             <a:avLst/>
@@ -4029,7 +4132,7 @@
               <a:buNone/>
             </a:pPr>
             <a:r>
-              <a:rPr lang="en-US" sz="950" b="1" dirty="0">
+              <a:rPr lang="en-US" sz="1300" b="1" dirty="0">
                 <a:solidFill>
                   <a:srgbClr val="0068B7"/>
                 </a:solidFill>
@@ -4039,20 +4142,20 @@
               </a:rPr>
               <a:t>Use this for</a:t>
             </a:r>
-            <a:endParaRPr lang="en-US" sz="950" dirty="0"/>
-          </a:p>
-        </p:txBody>
-      </p:sp>
-      <p:sp>
-        <p:nvSpPr>
-          <p:cNvPr id="16" name="Text 14"/>
-          <p:cNvSpPr/>
-          <p:nvPr/>
-        </p:nvSpPr>
-        <p:spPr>
-          <a:xfrm>
-            <a:off x="8074152" y="3959352"/>
-            <a:ext cx="2825496" cy="1170432"/>
+            <a:endParaRPr lang="en-US" sz="1300" dirty="0"/>
+          </a:p>
+        </p:txBody>
+      </p:sp>
+      <p:sp>
+        <p:nvSpPr>
+          <p:cNvPr id="17" name="Text 15"/>
+          <p:cNvSpPr/>
+          <p:nvPr/>
+        </p:nvSpPr>
+        <p:spPr>
+          <a:xfrm>
+            <a:off x="8074152" y="4023360"/>
+            <a:ext cx="2825496" cy="1097280"/>
           </a:xfrm>
           <a:prstGeom prst="rect">
             <a:avLst/>
@@ -4070,7 +4173,7 @@
               <a:buNone/>
             </a:pPr>
             <a:r>
-              <a:rPr lang="en-US" sz="1250" dirty="0">
+              <a:rPr lang="en-US" sz="1550" dirty="0">
                 <a:solidFill>
                   <a:srgbClr val="17364A"/>
                 </a:solidFill>
@@ -4080,7 +4183,7 @@
               </a:rPr>
               <a:t>Connect the concept to public health decisions, safeguards, documentation, or implementation work.</a:t>
             </a:r>
-            <a:endParaRPr lang="en-US" sz="1250" dirty="0"/>
+            <a:endParaRPr lang="en-US" sz="1550" dirty="0"/>
           </a:p>
         </p:txBody>
       </p:sp>
@@ -4277,7 +4380,7 @@
                 <a:ea typeface="Aptos" pitchFamily="34" charset="-122"/>
                 <a:cs typeface="Aptos" pitchFamily="34" charset="-120"/>
               </a:rPr>
-              <a:t>© Paula Soper</a:t>
+              <a:t>Â© Paula Soper</a:t>
             </a:r>
             <a:endParaRPr lang="en-US" sz="800" dirty="0"/>
           </a:p>
@@ -4285,7 +4388,46 @@
       </p:sp>
       <p:sp>
         <p:nvSpPr>
-          <p:cNvPr id="7" name="Shape 5"/>
+          <p:cNvPr id="7" name="Text 5"/>
+          <p:cNvSpPr/>
+          <p:nvPr/>
+        </p:nvSpPr>
+        <p:spPr>
+          <a:xfrm>
+            <a:off x="11137392" y="6510528"/>
+            <a:ext cx="411480" cy="201168"/>
+          </a:xfrm>
+          <a:prstGeom prst="rect">
+            <a:avLst/>
+          </a:prstGeom>
+          <a:noFill/>
+          <a:ln/>
+        </p:spPr>
+        <p:txBody>
+          <a:bodyPr wrap="square" lIns="0" tIns="0" rIns="0" bIns="0" rtlCol="0" anchor="ctr"/>
+          <a:lstStyle/>
+          <a:p>
+            <a:pPr algn="r" indent="0" marL="0">
+              <a:buNone/>
+            </a:pPr>
+            <a:r>
+              <a:rPr lang="en-US" sz="900" dirty="0">
+                <a:solidFill>
+                  <a:srgbClr val="5F7181"/>
+                </a:solidFill>
+                <a:latin typeface="Aptos" pitchFamily="34" charset="0"/>
+                <a:ea typeface="Aptos" pitchFamily="34" charset="-122"/>
+                <a:cs typeface="Aptos" pitchFamily="34" charset="-120"/>
+              </a:rPr>
+              <a:t>12</a:t>
+            </a:r>
+            <a:endParaRPr lang="en-US" sz="900" dirty="0"/>
+          </a:p>
+        </p:txBody>
+      </p:sp>
+      <p:sp>
+        <p:nvSpPr>
+          <p:cNvPr id="8" name="Shape 6"/>
           <p:cNvSpPr/>
           <p:nvPr/>
         </p:nvSpPr>
@@ -4310,7 +4452,7 @@
       </p:sp>
       <p:sp>
         <p:nvSpPr>
-          <p:cNvPr id="8" name="Text 6"/>
+          <p:cNvPr id="9" name="Text 7"/>
           <p:cNvSpPr/>
           <p:nvPr/>
         </p:nvSpPr>
@@ -4349,14 +4491,14 @@
       </p:sp>
       <p:sp>
         <p:nvSpPr>
-          <p:cNvPr id="9" name="Text 7"/>
+          <p:cNvPr id="10" name="Text 8"/>
           <p:cNvSpPr/>
           <p:nvPr/>
         </p:nvSpPr>
         <p:spPr>
           <a:xfrm>
             <a:off x="640080" y="621792"/>
-            <a:ext cx="10881360" cy="566928"/>
+            <a:ext cx="10881360" cy="713232"/>
           </a:xfrm>
           <a:prstGeom prst="rect">
             <a:avLst/>
@@ -4374,7 +4516,7 @@
               <a:buNone/>
             </a:pPr>
             <a:r>
-              <a:rPr lang="en-US" sz="2700" b="1" dirty="0">
+              <a:rPr lang="en-US" sz="3400" b="1" dirty="0">
                 <a:solidFill>
                   <a:srgbClr val="003A63"/>
                 </a:solidFill>
@@ -4384,20 +4526,20 @@
               </a:rPr>
               <a:t>Risks, Failure Modes, and Guardrails</a:t>
             </a:r>
-            <a:endParaRPr lang="en-US" sz="2700" dirty="0"/>
-          </a:p>
-        </p:txBody>
-      </p:sp>
-      <p:sp>
-        <p:nvSpPr>
-          <p:cNvPr id="10" name="Text 8"/>
-          <p:cNvSpPr/>
-          <p:nvPr/>
-        </p:nvSpPr>
-        <p:spPr>
-          <a:xfrm>
-            <a:off x="868680" y="1417320"/>
-            <a:ext cx="6675120" cy="4434840"/>
+            <a:endParaRPr lang="en-US" sz="3400" dirty="0"/>
+          </a:p>
+        </p:txBody>
+      </p:sp>
+      <p:sp>
+        <p:nvSpPr>
+          <p:cNvPr id="11" name="Text 9"/>
+          <p:cNvSpPr/>
+          <p:nvPr/>
+        </p:nvSpPr>
+        <p:spPr>
+          <a:xfrm>
+            <a:off x="868680" y="1508760"/>
+            <a:ext cx="6537960" cy="4160520"/>
           </a:xfrm>
           <a:prstGeom prst="rect">
             <a:avLst/>
@@ -4412,7 +4554,7 @@
           <a:lstStyle/>
           <a:p>
             <a:r>
-              <a:rPr lang="en-US" sz="1700" dirty="0">
+              <a:rPr lang="en-US" sz="2100" dirty="0">
                 <a:solidFill>
                   <a:srgbClr val="17364A"/>
                 </a:solidFill>
@@ -4422,11 +4564,11 @@
               </a:rPr>
               <a:t>A common failure mode is treating the topic as a technical detail rather than a public health control.</a:t>
             </a:r>
-            <a:endParaRPr lang="en-US" sz="1700" dirty="0"/>
-          </a:p>
-          <a:p>
-            <a:r>
-              <a:rPr lang="en-US" sz="1700" dirty="0">
+            <a:endParaRPr lang="en-US" sz="2100" dirty="0"/>
+          </a:p>
+          <a:p>
+            <a:r>
+              <a:rPr lang="en-US" sz="2100" dirty="0">
                 <a:solidFill>
                   <a:srgbClr val="17364A"/>
                 </a:solidFill>
@@ -4434,13 +4576,13 @@
                 <a:ea typeface="Aptos" pitchFamily="34" charset="-122"/>
                 <a:cs typeface="Aptos" pitchFamily="34" charset="-120"/>
               </a:rPr>
-              <a:t>When staff do not connect technical decisions to authority, workflow, equity, privacy, security, and accountability, the.</a:t>
-            </a:r>
-            <a:endParaRPr lang="en-US" sz="1700" dirty="0"/>
-          </a:p>
-          <a:p>
-            <a:r>
-              <a:rPr lang="en-US" sz="1700" dirty="0">
+              <a:t>When staff do not connect technical decisions to authority, workflow, equity, privacy, security, and.</a:t>
+            </a:r>
+            <a:endParaRPr lang="en-US" sz="2100" dirty="0"/>
+          </a:p>
+          <a:p>
+            <a:r>
+              <a:rPr lang="en-US" sz="2100" dirty="0">
                 <a:solidFill>
                   <a:srgbClr val="17364A"/>
                 </a:solidFill>
@@ -4450,27 +4592,13 @@
               </a:rPr>
               <a:t>Another risk is relying on vendor claims without agency-defined evidence.</a:t>
             </a:r>
-            <a:endParaRPr lang="en-US" sz="1700" dirty="0"/>
-          </a:p>
-          <a:p>
-            <a:r>
-              <a:rPr lang="en-US" sz="1700" dirty="0">
-                <a:solidFill>
-                  <a:srgbClr val="17364A"/>
-                </a:solidFill>
-                <a:latin typeface="Aptos" pitchFamily="34" charset="0"/>
-                <a:ea typeface="Aptos" pitchFamily="34" charset="-122"/>
-                <a:cs typeface="Aptos" pitchFamily="34" charset="-120"/>
-              </a:rPr>
-              <a:t>Vendors may provide demonstrations, dashboards, or summary metrics that do not match the agency workflow or data environment.</a:t>
-            </a:r>
-            <a:endParaRPr lang="en-US" sz="1700" dirty="0"/>
-          </a:p>
-        </p:txBody>
-      </p:sp>
-      <p:sp>
-        <p:nvSpPr>
-          <p:cNvPr id="11" name="Shape 9"/>
+            <a:endParaRPr lang="en-US" sz="2100" dirty="0"/>
+          </a:p>
+        </p:txBody>
+      </p:sp>
+      <p:sp>
+        <p:nvSpPr>
+          <p:cNvPr id="12" name="Shape 10"/>
           <p:cNvSpPr/>
           <p:nvPr/>
         </p:nvSpPr>
@@ -4497,14 +4625,14 @@
       </p:sp>
       <p:sp>
         <p:nvSpPr>
-          <p:cNvPr id="12" name="Text 10"/>
+          <p:cNvPr id="13" name="Text 11"/>
           <p:cNvSpPr/>
           <p:nvPr/>
         </p:nvSpPr>
         <p:spPr>
           <a:xfrm>
             <a:off x="8074152" y="1563624"/>
-            <a:ext cx="2825496" cy="201168"/>
+            <a:ext cx="2825496" cy="256032"/>
           </a:xfrm>
           <a:prstGeom prst="rect">
             <a:avLst/>
@@ -4520,7 +4648,7 @@
               <a:buNone/>
             </a:pPr>
             <a:r>
-              <a:rPr lang="en-US" sz="950" b="1" dirty="0">
+              <a:rPr lang="en-US" sz="1300" b="1" dirty="0">
                 <a:solidFill>
                   <a:srgbClr val="0068B7"/>
                 </a:solidFill>
@@ -4530,20 +4658,20 @@
               </a:rPr>
               <a:t>Key idea</a:t>
             </a:r>
-            <a:endParaRPr lang="en-US" sz="950" dirty="0"/>
-          </a:p>
-        </p:txBody>
-      </p:sp>
-      <p:sp>
-        <p:nvSpPr>
-          <p:cNvPr id="13" name="Text 11"/>
-          <p:cNvSpPr/>
-          <p:nvPr/>
-        </p:nvSpPr>
-        <p:spPr>
-          <a:xfrm>
-            <a:off x="8074152" y="1856232"/>
-            <a:ext cx="2825496" cy="1261872"/>
+            <a:endParaRPr lang="en-US" sz="1300" dirty="0"/>
+          </a:p>
+        </p:txBody>
+      </p:sp>
+      <p:sp>
+        <p:nvSpPr>
+          <p:cNvPr id="14" name="Text 12"/>
+          <p:cNvSpPr/>
+          <p:nvPr/>
+        </p:nvSpPr>
+        <p:spPr>
+          <a:xfrm>
+            <a:off x="8074152" y="1920240"/>
+            <a:ext cx="2825496" cy="1188720"/>
           </a:xfrm>
           <a:prstGeom prst="rect">
             <a:avLst/>
@@ -4561,7 +4689,7 @@
               <a:buNone/>
             </a:pPr>
             <a:r>
-              <a:rPr lang="en-US" sz="1250" dirty="0">
+              <a:rPr lang="en-US" sz="1550" dirty="0">
                 <a:solidFill>
                   <a:srgbClr val="17364A"/>
                 </a:solidFill>
@@ -4571,13 +4699,13 @@
               </a:rPr>
               <a:t>A common failure mode is treating the topic as a technical detail rather than a public health control.</a:t>
             </a:r>
-            <a:endParaRPr lang="en-US" sz="1250" dirty="0"/>
-          </a:p>
-        </p:txBody>
-      </p:sp>
-      <p:sp>
-        <p:nvSpPr>
-          <p:cNvPr id="14" name="Shape 12"/>
+            <a:endParaRPr lang="en-US" sz="1550" dirty="0"/>
+          </a:p>
+        </p:txBody>
+      </p:sp>
+      <p:sp>
+        <p:nvSpPr>
+          <p:cNvPr id="15" name="Shape 13"/>
           <p:cNvSpPr/>
           <p:nvPr/>
         </p:nvSpPr>
@@ -4604,14 +4732,14 @@
       </p:sp>
       <p:sp>
         <p:nvSpPr>
-          <p:cNvPr id="15" name="Text 13"/>
+          <p:cNvPr id="16" name="Text 14"/>
           <p:cNvSpPr/>
           <p:nvPr/>
         </p:nvSpPr>
         <p:spPr>
           <a:xfrm>
             <a:off x="8074152" y="3666744"/>
-            <a:ext cx="2825496" cy="201168"/>
+            <a:ext cx="2825496" cy="256032"/>
           </a:xfrm>
           <a:prstGeom prst="rect">
             <a:avLst/>
@@ -4627,7 +4755,7 @@
               <a:buNone/>
             </a:pPr>
             <a:r>
-              <a:rPr lang="en-US" sz="950" b="1" dirty="0">
+              <a:rPr lang="en-US" sz="1300" b="1" dirty="0">
                 <a:solidFill>
                   <a:srgbClr val="0068B7"/>
                 </a:solidFill>
@@ -4637,20 +4765,20 @@
               </a:rPr>
               <a:t>Use this for</a:t>
             </a:r>
-            <a:endParaRPr lang="en-US" sz="950" dirty="0"/>
-          </a:p>
-        </p:txBody>
-      </p:sp>
-      <p:sp>
-        <p:nvSpPr>
-          <p:cNvPr id="16" name="Text 14"/>
-          <p:cNvSpPr/>
-          <p:nvPr/>
-        </p:nvSpPr>
-        <p:spPr>
-          <a:xfrm>
-            <a:off x="8074152" y="3959352"/>
-            <a:ext cx="2825496" cy="1170432"/>
+            <a:endParaRPr lang="en-US" sz="1300" dirty="0"/>
+          </a:p>
+        </p:txBody>
+      </p:sp>
+      <p:sp>
+        <p:nvSpPr>
+          <p:cNvPr id="17" name="Text 15"/>
+          <p:cNvSpPr/>
+          <p:nvPr/>
+        </p:nvSpPr>
+        <p:spPr>
+          <a:xfrm>
+            <a:off x="8074152" y="4023360"/>
+            <a:ext cx="2825496" cy="1097280"/>
           </a:xfrm>
           <a:prstGeom prst="rect">
             <a:avLst/>
@@ -4668,7 +4796,7 @@
               <a:buNone/>
             </a:pPr>
             <a:r>
-              <a:rPr lang="en-US" sz="1250" dirty="0">
+              <a:rPr lang="en-US" sz="1550" dirty="0">
                 <a:solidFill>
                   <a:srgbClr val="17364A"/>
                 </a:solidFill>
@@ -4678,7 +4806,7 @@
               </a:rPr>
               <a:t>Connect the concept to public health decisions, safeguards, documentation, or implementation work.</a:t>
             </a:r>
-            <a:endParaRPr lang="en-US" sz="1250" dirty="0"/>
+            <a:endParaRPr lang="en-US" sz="1550" dirty="0"/>
           </a:p>
         </p:txBody>
       </p:sp>
@@ -4875,7 +5003,7 @@
                 <a:ea typeface="Aptos" pitchFamily="34" charset="-122"/>
                 <a:cs typeface="Aptos" pitchFamily="34" charset="-120"/>
               </a:rPr>
-              <a:t>© Paula Soper</a:t>
+              <a:t>Â© Paula Soper</a:t>
             </a:r>
             <a:endParaRPr lang="en-US" sz="800" dirty="0"/>
           </a:p>
@@ -4883,7 +5011,46 @@
       </p:sp>
       <p:sp>
         <p:nvSpPr>
-          <p:cNvPr id="7" name="Shape 5"/>
+          <p:cNvPr id="7" name="Text 5"/>
+          <p:cNvSpPr/>
+          <p:nvPr/>
+        </p:nvSpPr>
+        <p:spPr>
+          <a:xfrm>
+            <a:off x="11137392" y="6510528"/>
+            <a:ext cx="411480" cy="201168"/>
+          </a:xfrm>
+          <a:prstGeom prst="rect">
+            <a:avLst/>
+          </a:prstGeom>
+          <a:noFill/>
+          <a:ln/>
+        </p:spPr>
+        <p:txBody>
+          <a:bodyPr wrap="square" lIns="0" tIns="0" rIns="0" bIns="0" rtlCol="0" anchor="ctr"/>
+          <a:lstStyle/>
+          <a:p>
+            <a:pPr algn="r" indent="0" marL="0">
+              <a:buNone/>
+            </a:pPr>
+            <a:r>
+              <a:rPr lang="en-US" sz="900" dirty="0">
+                <a:solidFill>
+                  <a:srgbClr val="5F7181"/>
+                </a:solidFill>
+                <a:latin typeface="Aptos" pitchFamily="34" charset="0"/>
+                <a:ea typeface="Aptos" pitchFamily="34" charset="-122"/>
+                <a:cs typeface="Aptos" pitchFamily="34" charset="-120"/>
+              </a:rPr>
+              <a:t>13</a:t>
+            </a:r>
+            <a:endParaRPr lang="en-US" sz="900" dirty="0"/>
+          </a:p>
+        </p:txBody>
+      </p:sp>
+      <p:sp>
+        <p:nvSpPr>
+          <p:cNvPr id="8" name="Shape 6"/>
           <p:cNvSpPr/>
           <p:nvPr/>
         </p:nvSpPr>
@@ -4908,7 +5075,7 @@
       </p:sp>
       <p:sp>
         <p:nvSpPr>
-          <p:cNvPr id="8" name="Text 6"/>
+          <p:cNvPr id="9" name="Text 7"/>
           <p:cNvSpPr/>
           <p:nvPr/>
         </p:nvSpPr>
@@ -4947,14 +5114,14 @@
       </p:sp>
       <p:sp>
         <p:nvSpPr>
-          <p:cNvPr id="9" name="Text 7"/>
+          <p:cNvPr id="10" name="Text 8"/>
           <p:cNvSpPr/>
           <p:nvPr/>
         </p:nvSpPr>
         <p:spPr>
           <a:xfrm>
             <a:off x="640080" y="621792"/>
-            <a:ext cx="10881360" cy="566928"/>
+            <a:ext cx="10881360" cy="713232"/>
           </a:xfrm>
           <a:prstGeom prst="rect">
             <a:avLst/>
@@ -4972,7 +5139,7 @@
               <a:buNone/>
             </a:pPr>
             <a:r>
-              <a:rPr lang="en-US" sz="2700" b="1" dirty="0">
+              <a:rPr lang="en-US" sz="3400" b="1" dirty="0">
                 <a:solidFill>
                   <a:srgbClr val="003A63"/>
                 </a:solidFill>
@@ -4982,20 +5149,20 @@
               </a:rPr>
               <a:t>Application to AI-Supported Workflows</a:t>
             </a:r>
-            <a:endParaRPr lang="en-US" sz="2700" dirty="0"/>
-          </a:p>
-        </p:txBody>
-      </p:sp>
-      <p:sp>
-        <p:nvSpPr>
-          <p:cNvPr id="10" name="Text 8"/>
-          <p:cNvSpPr/>
-          <p:nvPr/>
-        </p:nvSpPr>
-        <p:spPr>
-          <a:xfrm>
-            <a:off x="868680" y="1417320"/>
-            <a:ext cx="6675120" cy="4434840"/>
+            <a:endParaRPr lang="en-US" sz="3400" dirty="0"/>
+          </a:p>
+        </p:txBody>
+      </p:sp>
+      <p:sp>
+        <p:nvSpPr>
+          <p:cNvPr id="11" name="Text 9"/>
+          <p:cNvSpPr/>
+          <p:nvPr/>
+        </p:nvSpPr>
+        <p:spPr>
+          <a:xfrm>
+            <a:off x="868680" y="1508760"/>
+            <a:ext cx="6537960" cy="4160520"/>
           </a:xfrm>
           <a:prstGeom prst="rect">
             <a:avLst/>
@@ -5010,7 +5177,7 @@
           <a:lstStyle/>
           <a:p>
             <a:r>
-              <a:rPr lang="en-US" sz="1700" dirty="0">
+              <a:rPr lang="en-US" sz="2100" dirty="0">
                 <a:solidFill>
                   <a:srgbClr val="17364A"/>
                 </a:solidFill>
@@ -5018,13 +5185,13 @@
                 <a:ea typeface="Aptos" pitchFamily="34" charset="-122"/>
                 <a:cs typeface="Aptos" pitchFamily="34" charset="-120"/>
               </a:rPr>
-              <a:t>Generative AI, predictive analytics, RAG, automation, and agentic workflows all depend on the controls described in this.</a:t>
-            </a:r>
-            <a:endParaRPr lang="en-US" sz="1700" dirty="0"/>
-          </a:p>
-          <a:p>
-            <a:r>
-              <a:rPr lang="en-US" sz="1700" dirty="0">
+              <a:t>Generative AI, predictive analytics, RAG, automation, and agentic workflows all depend on the controls.</a:t>
+            </a:r>
+            <a:endParaRPr lang="en-US" sz="2100" dirty="0"/>
+          </a:p>
+          <a:p>
+            <a:r>
+              <a:rPr lang="en-US" sz="2100" dirty="0">
                 <a:solidFill>
                   <a:srgbClr val="17364A"/>
                 </a:solidFill>
@@ -5034,11 +5201,11 @@
               </a:rPr>
               <a:t>The controls should be scaled to the risk of the use case.</a:t>
             </a:r>
-            <a:endParaRPr lang="en-US" sz="1700" dirty="0"/>
-          </a:p>
-          <a:p>
-            <a:r>
-              <a:rPr lang="en-US" sz="1700" dirty="0">
+            <a:endParaRPr lang="en-US" sz="2100" dirty="0"/>
+          </a:p>
+          <a:p>
+            <a:r>
+              <a:rPr lang="en-US" sz="2100" dirty="0">
                 <a:solidFill>
                   <a:srgbClr val="17364A"/>
                 </a:solidFill>
@@ -5046,29 +5213,15 @@
                 <a:ea typeface="Aptos" pitchFamily="34" charset="-122"/>
                 <a:cs typeface="Aptos" pitchFamily="34" charset="-120"/>
               </a:rPr>
-              <a:t>A tool that drafts internal training text may require lighter review than a tool that updates case records, prioritizes.</a:t>
-            </a:r>
-            <a:endParaRPr lang="en-US" sz="1700" dirty="0"/>
-          </a:p>
-          <a:p>
-            <a:r>
-              <a:rPr lang="en-US" sz="1700" dirty="0">
-                <a:solidFill>
-                  <a:srgbClr val="17364A"/>
-                </a:solidFill>
-                <a:latin typeface="Aptos" pitchFamily="34" charset="0"/>
-                <a:ea typeface="Aptos" pitchFamily="34" charset="-122"/>
-                <a:cs typeface="Aptos" pitchFamily="34" charset="-120"/>
-              </a:rPr>
-              <a:t>The module should be applied during readiness assessment, procurement, implementation planning, pilot testing, and.</a:t>
-            </a:r>
-            <a:endParaRPr lang="en-US" sz="1700" dirty="0"/>
-          </a:p>
-        </p:txBody>
-      </p:sp>
-      <p:sp>
-        <p:nvSpPr>
-          <p:cNvPr id="11" name="Shape 9"/>
+              <a:t>A tool that drafts internal training text may require lighter review than a tool that updates case.</a:t>
+            </a:r>
+            <a:endParaRPr lang="en-US" sz="2100" dirty="0"/>
+          </a:p>
+        </p:txBody>
+      </p:sp>
+      <p:sp>
+        <p:nvSpPr>
+          <p:cNvPr id="12" name="Shape 10"/>
           <p:cNvSpPr/>
           <p:nvPr/>
         </p:nvSpPr>
@@ -5095,14 +5248,14 @@
       </p:sp>
       <p:sp>
         <p:nvSpPr>
-          <p:cNvPr id="12" name="Text 10"/>
+          <p:cNvPr id="13" name="Text 11"/>
           <p:cNvSpPr/>
           <p:nvPr/>
         </p:nvSpPr>
         <p:spPr>
           <a:xfrm>
             <a:off x="8074152" y="1563624"/>
-            <a:ext cx="2825496" cy="201168"/>
+            <a:ext cx="2825496" cy="256032"/>
           </a:xfrm>
           <a:prstGeom prst="rect">
             <a:avLst/>
@@ -5118,7 +5271,7 @@
               <a:buNone/>
             </a:pPr>
             <a:r>
-              <a:rPr lang="en-US" sz="950" b="1" dirty="0">
+              <a:rPr lang="en-US" sz="1300" b="1" dirty="0">
                 <a:solidFill>
                   <a:srgbClr val="0068B7"/>
                 </a:solidFill>
@@ -5128,20 +5281,20 @@
               </a:rPr>
               <a:t>Key idea</a:t>
             </a:r>
-            <a:endParaRPr lang="en-US" sz="950" dirty="0"/>
-          </a:p>
-        </p:txBody>
-      </p:sp>
-      <p:sp>
-        <p:nvSpPr>
-          <p:cNvPr id="13" name="Text 11"/>
-          <p:cNvSpPr/>
-          <p:nvPr/>
-        </p:nvSpPr>
-        <p:spPr>
-          <a:xfrm>
-            <a:off x="8074152" y="1856232"/>
-            <a:ext cx="2825496" cy="1261872"/>
+            <a:endParaRPr lang="en-US" sz="1300" dirty="0"/>
+          </a:p>
+        </p:txBody>
+      </p:sp>
+      <p:sp>
+        <p:nvSpPr>
+          <p:cNvPr id="14" name="Text 12"/>
+          <p:cNvSpPr/>
+          <p:nvPr/>
+        </p:nvSpPr>
+        <p:spPr>
+          <a:xfrm>
+            <a:off x="8074152" y="1920240"/>
+            <a:ext cx="2825496" cy="1188720"/>
           </a:xfrm>
           <a:prstGeom prst="rect">
             <a:avLst/>
@@ -5159,7 +5312,7 @@
               <a:buNone/>
             </a:pPr>
             <a:r>
-              <a:rPr lang="en-US" sz="1250" dirty="0">
+              <a:rPr lang="en-US" sz="1550" dirty="0">
                 <a:solidFill>
                   <a:srgbClr val="17364A"/>
                 </a:solidFill>
@@ -5167,15 +5320,15 @@
                 <a:ea typeface="Aptos" pitchFamily="34" charset="-122"/>
                 <a:cs typeface="Aptos" pitchFamily="34" charset="-120"/>
               </a:rPr>
-              <a:t>Generative AI, predictive analytics, RAG, automation, and agentic workflows all depend on the controls described in this.</a:t>
-            </a:r>
-            <a:endParaRPr lang="en-US" sz="1250" dirty="0"/>
-          </a:p>
-        </p:txBody>
-      </p:sp>
-      <p:sp>
-        <p:nvSpPr>
-          <p:cNvPr id="14" name="Shape 12"/>
+              <a:t>Generative AI, predictive analytics, RAG, automation, and agentic workflows all depend on the controls.</a:t>
+            </a:r>
+            <a:endParaRPr lang="en-US" sz="1550" dirty="0"/>
+          </a:p>
+        </p:txBody>
+      </p:sp>
+      <p:sp>
+        <p:nvSpPr>
+          <p:cNvPr id="15" name="Shape 13"/>
           <p:cNvSpPr/>
           <p:nvPr/>
         </p:nvSpPr>
@@ -5202,14 +5355,14 @@
       </p:sp>
       <p:sp>
         <p:nvSpPr>
-          <p:cNvPr id="15" name="Text 13"/>
+          <p:cNvPr id="16" name="Text 14"/>
           <p:cNvSpPr/>
           <p:nvPr/>
         </p:nvSpPr>
         <p:spPr>
           <a:xfrm>
             <a:off x="8074152" y="3666744"/>
-            <a:ext cx="2825496" cy="201168"/>
+            <a:ext cx="2825496" cy="256032"/>
           </a:xfrm>
           <a:prstGeom prst="rect">
             <a:avLst/>
@@ -5225,7 +5378,7 @@
               <a:buNone/>
             </a:pPr>
             <a:r>
-              <a:rPr lang="en-US" sz="950" b="1" dirty="0">
+              <a:rPr lang="en-US" sz="1300" b="1" dirty="0">
                 <a:solidFill>
                   <a:srgbClr val="0068B7"/>
                 </a:solidFill>
@@ -5235,20 +5388,20 @@
               </a:rPr>
               <a:t>Use this for</a:t>
             </a:r>
-            <a:endParaRPr lang="en-US" sz="950" dirty="0"/>
-          </a:p>
-        </p:txBody>
-      </p:sp>
-      <p:sp>
-        <p:nvSpPr>
-          <p:cNvPr id="16" name="Text 14"/>
-          <p:cNvSpPr/>
-          <p:nvPr/>
-        </p:nvSpPr>
-        <p:spPr>
-          <a:xfrm>
-            <a:off x="8074152" y="3959352"/>
-            <a:ext cx="2825496" cy="1170432"/>
+            <a:endParaRPr lang="en-US" sz="1300" dirty="0"/>
+          </a:p>
+        </p:txBody>
+      </p:sp>
+      <p:sp>
+        <p:nvSpPr>
+          <p:cNvPr id="17" name="Text 15"/>
+          <p:cNvSpPr/>
+          <p:nvPr/>
+        </p:nvSpPr>
+        <p:spPr>
+          <a:xfrm>
+            <a:off x="8074152" y="4023360"/>
+            <a:ext cx="2825496" cy="1097280"/>
           </a:xfrm>
           <a:prstGeom prst="rect">
             <a:avLst/>
@@ -5266,7 +5419,7 @@
               <a:buNone/>
             </a:pPr>
             <a:r>
-              <a:rPr lang="en-US" sz="1250" dirty="0">
+              <a:rPr lang="en-US" sz="1550" dirty="0">
                 <a:solidFill>
                   <a:srgbClr val="17364A"/>
                 </a:solidFill>
@@ -5276,7 +5429,7 @@
               </a:rPr>
               <a:t>Connect the concept to public health decisions, safeguards, documentation, or implementation work.</a:t>
             </a:r>
-            <a:endParaRPr lang="en-US" sz="1250" dirty="0"/>
+            <a:endParaRPr lang="en-US" sz="1550" dirty="0"/>
           </a:p>
         </p:txBody>
       </p:sp>
@@ -5473,7 +5626,7 @@
                 <a:ea typeface="Aptos" pitchFamily="34" charset="-122"/>
                 <a:cs typeface="Aptos" pitchFamily="34" charset="-120"/>
               </a:rPr>
-              <a:t>© Paula Soper</a:t>
+              <a:t>Â© Paula Soper</a:t>
             </a:r>
             <a:endParaRPr lang="en-US" sz="800" dirty="0"/>
           </a:p>
@@ -5481,7 +5634,46 @@
       </p:sp>
       <p:sp>
         <p:nvSpPr>
-          <p:cNvPr id="7" name="Shape 5"/>
+          <p:cNvPr id="7" name="Text 5"/>
+          <p:cNvSpPr/>
+          <p:nvPr/>
+        </p:nvSpPr>
+        <p:spPr>
+          <a:xfrm>
+            <a:off x="11137392" y="6510528"/>
+            <a:ext cx="411480" cy="201168"/>
+          </a:xfrm>
+          <a:prstGeom prst="rect">
+            <a:avLst/>
+          </a:prstGeom>
+          <a:noFill/>
+          <a:ln/>
+        </p:spPr>
+        <p:txBody>
+          <a:bodyPr wrap="square" lIns="0" tIns="0" rIns="0" bIns="0" rtlCol="0" anchor="ctr"/>
+          <a:lstStyle/>
+          <a:p>
+            <a:pPr algn="r" indent="0" marL="0">
+              <a:buNone/>
+            </a:pPr>
+            <a:r>
+              <a:rPr lang="en-US" sz="900" dirty="0">
+                <a:solidFill>
+                  <a:srgbClr val="5F7181"/>
+                </a:solidFill>
+                <a:latin typeface="Aptos" pitchFamily="34" charset="0"/>
+                <a:ea typeface="Aptos" pitchFamily="34" charset="-122"/>
+                <a:cs typeface="Aptos" pitchFamily="34" charset="-120"/>
+              </a:rPr>
+              <a:t>14</a:t>
+            </a:r>
+            <a:endParaRPr lang="en-US" sz="900" dirty="0"/>
+          </a:p>
+        </p:txBody>
+      </p:sp>
+      <p:sp>
+        <p:nvSpPr>
+          <p:cNvPr id="8" name="Shape 6"/>
           <p:cNvSpPr/>
           <p:nvPr/>
         </p:nvSpPr>
@@ -5506,7 +5698,7 @@
       </p:sp>
       <p:sp>
         <p:nvSpPr>
-          <p:cNvPr id="8" name="Text 6"/>
+          <p:cNvPr id="9" name="Text 7"/>
           <p:cNvSpPr/>
           <p:nvPr/>
         </p:nvSpPr>
@@ -5545,14 +5737,14 @@
       </p:sp>
       <p:sp>
         <p:nvSpPr>
-          <p:cNvPr id="9" name="Text 7"/>
+          <p:cNvPr id="10" name="Text 8"/>
           <p:cNvSpPr/>
           <p:nvPr/>
         </p:nvSpPr>
         <p:spPr>
           <a:xfrm>
             <a:off x="640080" y="621792"/>
-            <a:ext cx="10881360" cy="566928"/>
+            <a:ext cx="10881360" cy="713232"/>
           </a:xfrm>
           <a:prstGeom prst="rect">
             <a:avLst/>
@@ -5570,7 +5762,7 @@
               <a:buNone/>
             </a:pPr>
             <a:r>
-              <a:rPr lang="en-US" sz="2700" b="1" dirty="0">
+              <a:rPr lang="en-US" sz="3400" b="1" dirty="0">
                 <a:solidFill>
                   <a:srgbClr val="003A63"/>
                 </a:solidFill>
@@ -5580,20 +5772,20 @@
               </a:rPr>
               <a:t>Reflection Questions</a:t>
             </a:r>
-            <a:endParaRPr lang="en-US" sz="2700" dirty="0"/>
-          </a:p>
-        </p:txBody>
-      </p:sp>
-      <p:sp>
-        <p:nvSpPr>
-          <p:cNvPr id="10" name="Text 8"/>
-          <p:cNvSpPr/>
-          <p:nvPr/>
-        </p:nvSpPr>
-        <p:spPr>
-          <a:xfrm>
-            <a:off x="868680" y="1417320"/>
-            <a:ext cx="6675120" cy="4434840"/>
+            <a:endParaRPr lang="en-US" sz="3400" dirty="0"/>
+          </a:p>
+        </p:txBody>
+      </p:sp>
+      <p:sp>
+        <p:nvSpPr>
+          <p:cNvPr id="11" name="Text 9"/>
+          <p:cNvSpPr/>
+          <p:nvPr/>
+        </p:nvSpPr>
+        <p:spPr>
+          <a:xfrm>
+            <a:off x="868680" y="1508760"/>
+            <a:ext cx="6537960" cy="4160520"/>
           </a:xfrm>
           <a:prstGeom prst="rect">
             <a:avLst/>
@@ -5608,7 +5800,7 @@
           <a:lstStyle/>
           <a:p>
             <a:r>
-              <a:rPr lang="en-US" sz="1700" dirty="0">
+              <a:rPr lang="en-US" sz="2100" dirty="0">
                 <a:solidFill>
                   <a:srgbClr val="17364A"/>
                 </a:solidFill>
@@ -5618,11 +5810,11 @@
               </a:rPr>
               <a:t>Where does this topic appear in one current or proposed AI workflow in your agency?</a:t>
             </a:r>
-            <a:endParaRPr lang="en-US" sz="1700" dirty="0"/>
-          </a:p>
-          <a:p>
-            <a:r>
-              <a:rPr lang="en-US" sz="1700" dirty="0">
+            <a:endParaRPr lang="en-US" sz="2100" dirty="0"/>
+          </a:p>
+          <a:p>
+            <a:r>
+              <a:rPr lang="en-US" sz="2100" dirty="0">
                 <a:solidFill>
                   <a:srgbClr val="17364A"/>
                 </a:solidFill>
@@ -5632,11 +5824,11 @@
               </a:rPr>
               <a:t>What decisions, data sources, users, or partners would be affected if this area is poorly designed?</a:t>
             </a:r>
-            <a:endParaRPr lang="en-US" sz="1700" dirty="0"/>
-          </a:p>
-          <a:p>
-            <a:r>
-              <a:rPr lang="en-US" sz="1700" dirty="0">
+            <a:endParaRPr lang="en-US" sz="2100" dirty="0"/>
+          </a:p>
+          <a:p>
+            <a:r>
+              <a:rPr lang="en-US" sz="2100" dirty="0">
                 <a:solidFill>
                   <a:srgbClr val="17364A"/>
                 </a:solidFill>
@@ -5646,13 +5838,13 @@
               </a:rPr>
               <a:t>What evidence would governance reviewers need before approving the workflow?</a:t>
             </a:r>
-            <a:endParaRPr lang="en-US" sz="1700" dirty="0"/>
-          </a:p>
-        </p:txBody>
-      </p:sp>
-      <p:sp>
-        <p:nvSpPr>
-          <p:cNvPr id="11" name="Shape 9"/>
+            <a:endParaRPr lang="en-US" sz="2100" dirty="0"/>
+          </a:p>
+        </p:txBody>
+      </p:sp>
+      <p:sp>
+        <p:nvSpPr>
+          <p:cNvPr id="12" name="Shape 10"/>
           <p:cNvSpPr/>
           <p:nvPr/>
         </p:nvSpPr>
@@ -5679,14 +5871,14 @@
       </p:sp>
       <p:sp>
         <p:nvSpPr>
-          <p:cNvPr id="12" name="Text 10"/>
+          <p:cNvPr id="13" name="Text 11"/>
           <p:cNvSpPr/>
           <p:nvPr/>
         </p:nvSpPr>
         <p:spPr>
           <a:xfrm>
             <a:off x="8074152" y="1563624"/>
-            <a:ext cx="2825496" cy="201168"/>
+            <a:ext cx="2825496" cy="256032"/>
           </a:xfrm>
           <a:prstGeom prst="rect">
             <a:avLst/>
@@ -5702,7 +5894,7 @@
               <a:buNone/>
             </a:pPr>
             <a:r>
-              <a:rPr lang="en-US" sz="950" b="1" dirty="0">
+              <a:rPr lang="en-US" sz="1300" b="1" dirty="0">
                 <a:solidFill>
                   <a:srgbClr val="0068B7"/>
                 </a:solidFill>
@@ -5712,20 +5904,20 @@
               </a:rPr>
               <a:t>Key idea</a:t>
             </a:r>
-            <a:endParaRPr lang="en-US" sz="950" dirty="0"/>
-          </a:p>
-        </p:txBody>
-      </p:sp>
-      <p:sp>
-        <p:nvSpPr>
-          <p:cNvPr id="13" name="Text 11"/>
-          <p:cNvSpPr/>
-          <p:nvPr/>
-        </p:nvSpPr>
-        <p:spPr>
-          <a:xfrm>
-            <a:off x="8074152" y="1856232"/>
-            <a:ext cx="2825496" cy="1261872"/>
+            <a:endParaRPr lang="en-US" sz="1300" dirty="0"/>
+          </a:p>
+        </p:txBody>
+      </p:sp>
+      <p:sp>
+        <p:nvSpPr>
+          <p:cNvPr id="14" name="Text 12"/>
+          <p:cNvSpPr/>
+          <p:nvPr/>
+        </p:nvSpPr>
+        <p:spPr>
+          <a:xfrm>
+            <a:off x="8074152" y="1920240"/>
+            <a:ext cx="2825496" cy="1188720"/>
           </a:xfrm>
           <a:prstGeom prst="rect">
             <a:avLst/>
@@ -5743,7 +5935,7 @@
               <a:buNone/>
             </a:pPr>
             <a:r>
-              <a:rPr lang="en-US" sz="1250" dirty="0">
+              <a:rPr lang="en-US" sz="1550" dirty="0">
                 <a:solidFill>
                   <a:srgbClr val="17364A"/>
                 </a:solidFill>
@@ -5753,13 +5945,13 @@
               </a:rPr>
               <a:t>Where does this topic appear in one current or proposed AI workflow in your agency?</a:t>
             </a:r>
-            <a:endParaRPr lang="en-US" sz="1250" dirty="0"/>
-          </a:p>
-        </p:txBody>
-      </p:sp>
-      <p:sp>
-        <p:nvSpPr>
-          <p:cNvPr id="14" name="Shape 12"/>
+            <a:endParaRPr lang="en-US" sz="1550" dirty="0"/>
+          </a:p>
+        </p:txBody>
+      </p:sp>
+      <p:sp>
+        <p:nvSpPr>
+          <p:cNvPr id="15" name="Shape 13"/>
           <p:cNvSpPr/>
           <p:nvPr/>
         </p:nvSpPr>
@@ -5786,14 +5978,14 @@
       </p:sp>
       <p:sp>
         <p:nvSpPr>
-          <p:cNvPr id="15" name="Text 13"/>
+          <p:cNvPr id="16" name="Text 14"/>
           <p:cNvSpPr/>
           <p:nvPr/>
         </p:nvSpPr>
         <p:spPr>
           <a:xfrm>
             <a:off x="8074152" y="3666744"/>
-            <a:ext cx="2825496" cy="201168"/>
+            <a:ext cx="2825496" cy="256032"/>
           </a:xfrm>
           <a:prstGeom prst="rect">
             <a:avLst/>
@@ -5809,7 +6001,7 @@
               <a:buNone/>
             </a:pPr>
             <a:r>
-              <a:rPr lang="en-US" sz="950" b="1" dirty="0">
+              <a:rPr lang="en-US" sz="1300" b="1" dirty="0">
                 <a:solidFill>
                   <a:srgbClr val="0068B7"/>
                 </a:solidFill>
@@ -5819,20 +6011,20 @@
               </a:rPr>
               <a:t>Use this for</a:t>
             </a:r>
-            <a:endParaRPr lang="en-US" sz="950" dirty="0"/>
-          </a:p>
-        </p:txBody>
-      </p:sp>
-      <p:sp>
-        <p:nvSpPr>
-          <p:cNvPr id="16" name="Text 14"/>
-          <p:cNvSpPr/>
-          <p:nvPr/>
-        </p:nvSpPr>
-        <p:spPr>
-          <a:xfrm>
-            <a:off x="8074152" y="3959352"/>
-            <a:ext cx="2825496" cy="1170432"/>
+            <a:endParaRPr lang="en-US" sz="1300" dirty="0"/>
+          </a:p>
+        </p:txBody>
+      </p:sp>
+      <p:sp>
+        <p:nvSpPr>
+          <p:cNvPr id="17" name="Text 15"/>
+          <p:cNvSpPr/>
+          <p:nvPr/>
+        </p:nvSpPr>
+        <p:spPr>
+          <a:xfrm>
+            <a:off x="8074152" y="4023360"/>
+            <a:ext cx="2825496" cy="1097280"/>
           </a:xfrm>
           <a:prstGeom prst="rect">
             <a:avLst/>
@@ -5850,7 +6042,7 @@
               <a:buNone/>
             </a:pPr>
             <a:r>
-              <a:rPr lang="en-US" sz="1250" dirty="0">
+              <a:rPr lang="en-US" sz="1550" dirty="0">
                 <a:solidFill>
                   <a:srgbClr val="17364A"/>
                 </a:solidFill>
@@ -5860,7 +6052,7 @@
               </a:rPr>
               <a:t>Connect the concept to public health decisions, safeguards, documentation, or implementation work.</a:t>
             </a:r>
-            <a:endParaRPr lang="en-US" sz="1250" dirty="0"/>
+            <a:endParaRPr lang="en-US" sz="1550" dirty="0"/>
           </a:p>
         </p:txBody>
       </p:sp>
@@ -6057,7 +6249,7 @@
                 <a:ea typeface="Aptos" pitchFamily="34" charset="-122"/>
                 <a:cs typeface="Aptos" pitchFamily="34" charset="-120"/>
               </a:rPr>
-              <a:t>© Paula Soper</a:t>
+              <a:t>Â© Paula Soper</a:t>
             </a:r>
             <a:endParaRPr lang="en-US" sz="800" dirty="0"/>
           </a:p>
@@ -6071,8 +6263,47 @@
         </p:nvSpPr>
         <p:spPr>
           <a:xfrm>
+            <a:off x="11137392" y="6510528"/>
+            <a:ext cx="411480" cy="201168"/>
+          </a:xfrm>
+          <a:prstGeom prst="rect">
+            <a:avLst/>
+          </a:prstGeom>
+          <a:noFill/>
+          <a:ln/>
+        </p:spPr>
+        <p:txBody>
+          <a:bodyPr wrap="square" lIns="0" tIns="0" rIns="0" bIns="0" rtlCol="0" anchor="ctr"/>
+          <a:lstStyle/>
+          <a:p>
+            <a:pPr algn="r" indent="0" marL="0">
+              <a:buNone/>
+            </a:pPr>
+            <a:r>
+              <a:rPr lang="en-US" sz="900" dirty="0">
+                <a:solidFill>
+                  <a:srgbClr val="5F7181"/>
+                </a:solidFill>
+                <a:latin typeface="Aptos" pitchFamily="34" charset="0"/>
+                <a:ea typeface="Aptos" pitchFamily="34" charset="-122"/>
+                <a:cs typeface="Aptos" pitchFamily="34" charset="-120"/>
+              </a:rPr>
+              <a:t>15</a:t>
+            </a:r>
+            <a:endParaRPr lang="en-US" sz="900" dirty="0"/>
+          </a:p>
+        </p:txBody>
+      </p:sp>
+      <p:sp>
+        <p:nvSpPr>
+          <p:cNvPr id="8" name="Text 6"/>
+          <p:cNvSpPr/>
+          <p:nvPr/>
+        </p:nvSpPr>
+        <p:spPr>
+          <a:xfrm>
             <a:off x="640080" y="658368"/>
-            <a:ext cx="10881360" cy="566928"/>
+            <a:ext cx="10881360" cy="713232"/>
           </a:xfrm>
           <a:prstGeom prst="rect">
             <a:avLst/>
@@ -6090,7 +6321,7 @@
               <a:buNone/>
             </a:pPr>
             <a:r>
-              <a:rPr lang="en-US" sz="2700" b="1" dirty="0">
+              <a:rPr lang="en-US" sz="3400" b="1" dirty="0">
                 <a:solidFill>
                   <a:srgbClr val="003A63"/>
                 </a:solidFill>
@@ -6100,20 +6331,20 @@
               </a:rPr>
               <a:t>Reflection Questions Continued</a:t>
             </a:r>
-            <a:endParaRPr lang="en-US" sz="2700" dirty="0"/>
-          </a:p>
-        </p:txBody>
-      </p:sp>
-      <p:sp>
-        <p:nvSpPr>
-          <p:cNvPr id="8" name="Text 6"/>
-          <p:cNvSpPr/>
-          <p:nvPr/>
-        </p:nvSpPr>
-        <p:spPr>
-          <a:xfrm>
-            <a:off x="868680" y="1417320"/>
-            <a:ext cx="6675120" cy="4434840"/>
+            <a:endParaRPr lang="en-US" sz="3400" dirty="0"/>
+          </a:p>
+        </p:txBody>
+      </p:sp>
+      <p:sp>
+        <p:nvSpPr>
+          <p:cNvPr id="9" name="Text 7"/>
+          <p:cNvSpPr/>
+          <p:nvPr/>
+        </p:nvSpPr>
+        <p:spPr>
+          <a:xfrm>
+            <a:off x="868680" y="1508760"/>
+            <a:ext cx="6537960" cy="4160520"/>
           </a:xfrm>
           <a:prstGeom prst="rect">
             <a:avLst/>
@@ -6128,7 +6359,7 @@
           <a:lstStyle/>
           <a:p>
             <a:r>
-              <a:rPr lang="en-US" sz="1700" dirty="0">
+              <a:rPr lang="en-US" sz="2100" dirty="0">
                 <a:solidFill>
                   <a:srgbClr val="17364A"/>
                 </a:solidFill>
@@ -6138,11 +6369,11 @@
               </a:rPr>
               <a:t>Which safeguards should be required before pilot testing?</a:t>
             </a:r>
-            <a:endParaRPr lang="en-US" sz="1700" dirty="0"/>
-          </a:p>
-          <a:p>
-            <a:r>
-              <a:rPr lang="en-US" sz="1700" dirty="0">
+            <a:endParaRPr lang="en-US" sz="2100" dirty="0"/>
+          </a:p>
+          <a:p>
+            <a:r>
+              <a:rPr lang="en-US" sz="2100" dirty="0">
                 <a:solidFill>
                   <a:srgbClr val="17364A"/>
                 </a:solidFill>
@@ -6152,13 +6383,13 @@
               </a:rPr>
               <a:t>Who owns ongoing monitoring and review?</a:t>
             </a:r>
-            <a:endParaRPr lang="en-US" sz="1700" dirty="0"/>
-          </a:p>
-        </p:txBody>
-      </p:sp>
-      <p:sp>
-        <p:nvSpPr>
-          <p:cNvPr id="9" name="Shape 7"/>
+            <a:endParaRPr lang="en-US" sz="2100" dirty="0"/>
+          </a:p>
+        </p:txBody>
+      </p:sp>
+      <p:sp>
+        <p:nvSpPr>
+          <p:cNvPr id="10" name="Shape 8"/>
           <p:cNvSpPr/>
           <p:nvPr/>
         </p:nvSpPr>
@@ -6185,14 +6416,14 @@
       </p:sp>
       <p:sp>
         <p:nvSpPr>
-          <p:cNvPr id="10" name="Text 8"/>
+          <p:cNvPr id="11" name="Text 9"/>
           <p:cNvSpPr/>
           <p:nvPr/>
         </p:nvSpPr>
         <p:spPr>
           <a:xfrm>
             <a:off x="8074152" y="1563624"/>
-            <a:ext cx="2825496" cy="201168"/>
+            <a:ext cx="2825496" cy="256032"/>
           </a:xfrm>
           <a:prstGeom prst="rect">
             <a:avLst/>
@@ -6208,7 +6439,7 @@
               <a:buNone/>
             </a:pPr>
             <a:r>
-              <a:rPr lang="en-US" sz="950" b="1" dirty="0">
+              <a:rPr lang="en-US" sz="1300" b="1" dirty="0">
                 <a:solidFill>
                   <a:srgbClr val="0068B7"/>
                 </a:solidFill>
@@ -6218,20 +6449,20 @@
               </a:rPr>
               <a:t>Key idea</a:t>
             </a:r>
-            <a:endParaRPr lang="en-US" sz="950" dirty="0"/>
-          </a:p>
-        </p:txBody>
-      </p:sp>
-      <p:sp>
-        <p:nvSpPr>
-          <p:cNvPr id="11" name="Text 9"/>
-          <p:cNvSpPr/>
-          <p:nvPr/>
-        </p:nvSpPr>
-        <p:spPr>
-          <a:xfrm>
-            <a:off x="8074152" y="1856232"/>
-            <a:ext cx="2825496" cy="1261872"/>
+            <a:endParaRPr lang="en-US" sz="1300" dirty="0"/>
+          </a:p>
+        </p:txBody>
+      </p:sp>
+      <p:sp>
+        <p:nvSpPr>
+          <p:cNvPr id="12" name="Text 10"/>
+          <p:cNvSpPr/>
+          <p:nvPr/>
+        </p:nvSpPr>
+        <p:spPr>
+          <a:xfrm>
+            <a:off x="8074152" y="1920240"/>
+            <a:ext cx="2825496" cy="1188720"/>
           </a:xfrm>
           <a:prstGeom prst="rect">
             <a:avLst/>
@@ -6249,7 +6480,7 @@
               <a:buNone/>
             </a:pPr>
             <a:r>
-              <a:rPr lang="en-US" sz="1250" dirty="0">
+              <a:rPr lang="en-US" sz="1550" dirty="0">
                 <a:solidFill>
                   <a:srgbClr val="17364A"/>
                 </a:solidFill>
@@ -6259,13 +6490,13 @@
               </a:rPr>
               <a:t>Which safeguards should be required before pilot testing?</a:t>
             </a:r>
-            <a:endParaRPr lang="en-US" sz="1250" dirty="0"/>
-          </a:p>
-        </p:txBody>
-      </p:sp>
-      <p:sp>
-        <p:nvSpPr>
-          <p:cNvPr id="12" name="Shape 10"/>
+            <a:endParaRPr lang="en-US" sz="1550" dirty="0"/>
+          </a:p>
+        </p:txBody>
+      </p:sp>
+      <p:sp>
+        <p:nvSpPr>
+          <p:cNvPr id="13" name="Shape 11"/>
           <p:cNvSpPr/>
           <p:nvPr/>
         </p:nvSpPr>
@@ -6292,14 +6523,14 @@
       </p:sp>
       <p:sp>
         <p:nvSpPr>
-          <p:cNvPr id="13" name="Text 11"/>
+          <p:cNvPr id="14" name="Text 12"/>
           <p:cNvSpPr/>
           <p:nvPr/>
         </p:nvSpPr>
         <p:spPr>
           <a:xfrm>
             <a:off x="8074152" y="3666744"/>
-            <a:ext cx="2825496" cy="201168"/>
+            <a:ext cx="2825496" cy="256032"/>
           </a:xfrm>
           <a:prstGeom prst="rect">
             <a:avLst/>
@@ -6315,7 +6546,7 @@
               <a:buNone/>
             </a:pPr>
             <a:r>
-              <a:rPr lang="en-US" sz="950" b="1" dirty="0">
+              <a:rPr lang="en-US" sz="1300" b="1" dirty="0">
                 <a:solidFill>
                   <a:srgbClr val="0068B7"/>
                 </a:solidFill>
@@ -6325,20 +6556,20 @@
               </a:rPr>
               <a:t>Use this for</a:t>
             </a:r>
-            <a:endParaRPr lang="en-US" sz="950" dirty="0"/>
-          </a:p>
-        </p:txBody>
-      </p:sp>
-      <p:sp>
-        <p:nvSpPr>
-          <p:cNvPr id="14" name="Text 12"/>
-          <p:cNvSpPr/>
-          <p:nvPr/>
-        </p:nvSpPr>
-        <p:spPr>
-          <a:xfrm>
-            <a:off x="8074152" y="3959352"/>
-            <a:ext cx="2825496" cy="1170432"/>
+            <a:endParaRPr lang="en-US" sz="1300" dirty="0"/>
+          </a:p>
+        </p:txBody>
+      </p:sp>
+      <p:sp>
+        <p:nvSpPr>
+          <p:cNvPr id="15" name="Text 13"/>
+          <p:cNvSpPr/>
+          <p:nvPr/>
+        </p:nvSpPr>
+        <p:spPr>
+          <a:xfrm>
+            <a:off x="8074152" y="4023360"/>
+            <a:ext cx="2825496" cy="1097280"/>
           </a:xfrm>
           <a:prstGeom prst="rect">
             <a:avLst/>
@@ -6356,7 +6587,7 @@
               <a:buNone/>
             </a:pPr>
             <a:r>
-              <a:rPr lang="en-US" sz="1250" dirty="0">
+              <a:rPr lang="en-US" sz="1550" dirty="0">
                 <a:solidFill>
                   <a:srgbClr val="17364A"/>
                 </a:solidFill>
@@ -6366,7 +6597,7 @@
               </a:rPr>
               <a:t>Connect the concept to public health decisions, safeguards, documentation, or implementation work.</a:t>
             </a:r>
-            <a:endParaRPr lang="en-US" sz="1250" dirty="0"/>
+            <a:endParaRPr lang="en-US" sz="1550" dirty="0"/>
           </a:p>
         </p:txBody>
       </p:sp>
@@ -6563,7 +6794,7 @@
                 <a:ea typeface="Aptos" pitchFamily="34" charset="-122"/>
                 <a:cs typeface="Aptos" pitchFamily="34" charset="-120"/>
               </a:rPr>
-              <a:t>© Paula Soper</a:t>
+              <a:t>Â© Paula Soper</a:t>
             </a:r>
             <a:endParaRPr lang="en-US" sz="800" dirty="0"/>
           </a:p>
@@ -6571,7 +6802,46 @@
       </p:sp>
       <p:sp>
         <p:nvSpPr>
-          <p:cNvPr id="7" name="Shape 5"/>
+          <p:cNvPr id="7" name="Text 5"/>
+          <p:cNvSpPr/>
+          <p:nvPr/>
+        </p:nvSpPr>
+        <p:spPr>
+          <a:xfrm>
+            <a:off x="11137392" y="6510528"/>
+            <a:ext cx="411480" cy="201168"/>
+          </a:xfrm>
+          <a:prstGeom prst="rect">
+            <a:avLst/>
+          </a:prstGeom>
+          <a:noFill/>
+          <a:ln/>
+        </p:spPr>
+        <p:txBody>
+          <a:bodyPr wrap="square" lIns="0" tIns="0" rIns="0" bIns="0" rtlCol="0" anchor="ctr"/>
+          <a:lstStyle/>
+          <a:p>
+            <a:pPr algn="r" indent="0" marL="0">
+              <a:buNone/>
+            </a:pPr>
+            <a:r>
+              <a:rPr lang="en-US" sz="900" dirty="0">
+                <a:solidFill>
+                  <a:srgbClr val="5F7181"/>
+                </a:solidFill>
+                <a:latin typeface="Aptos" pitchFamily="34" charset="0"/>
+                <a:ea typeface="Aptos" pitchFamily="34" charset="-122"/>
+                <a:cs typeface="Aptos" pitchFamily="34" charset="-120"/>
+              </a:rPr>
+              <a:t>16</a:t>
+            </a:r>
+            <a:endParaRPr lang="en-US" sz="900" dirty="0"/>
+          </a:p>
+        </p:txBody>
+      </p:sp>
+      <p:sp>
+        <p:nvSpPr>
+          <p:cNvPr id="8" name="Shape 6"/>
           <p:cNvSpPr/>
           <p:nvPr/>
         </p:nvSpPr>
@@ -6596,7 +6866,7 @@
       </p:sp>
       <p:sp>
         <p:nvSpPr>
-          <p:cNvPr id="8" name="Text 6"/>
+          <p:cNvPr id="9" name="Text 7"/>
           <p:cNvSpPr/>
           <p:nvPr/>
         </p:nvSpPr>
@@ -6635,14 +6905,14 @@
       </p:sp>
       <p:sp>
         <p:nvSpPr>
-          <p:cNvPr id="9" name="Text 7"/>
+          <p:cNvPr id="10" name="Text 8"/>
           <p:cNvSpPr/>
           <p:nvPr/>
         </p:nvSpPr>
         <p:spPr>
           <a:xfrm>
             <a:off x="640080" y="621792"/>
-            <a:ext cx="10881360" cy="566928"/>
+            <a:ext cx="10881360" cy="713232"/>
           </a:xfrm>
           <a:prstGeom prst="rect">
             <a:avLst/>
@@ -6660,7 +6930,7 @@
               <a:buNone/>
             </a:pPr>
             <a:r>
-              <a:rPr lang="en-US" sz="2700" b="1" dirty="0">
+              <a:rPr lang="en-US" sz="3400" b="1" dirty="0">
                 <a:solidFill>
                   <a:srgbClr val="003A63"/>
                 </a:solidFill>
@@ -6670,20 +6940,20 @@
               </a:rPr>
               <a:t>Practical Exercise</a:t>
             </a:r>
-            <a:endParaRPr lang="en-US" sz="2700" dirty="0"/>
-          </a:p>
-        </p:txBody>
-      </p:sp>
-      <p:sp>
-        <p:nvSpPr>
-          <p:cNvPr id="10" name="Text 8"/>
-          <p:cNvSpPr/>
-          <p:nvPr/>
-        </p:nvSpPr>
-        <p:spPr>
-          <a:xfrm>
-            <a:off x="868680" y="1417320"/>
-            <a:ext cx="6675120" cy="4434840"/>
+            <a:endParaRPr lang="en-US" sz="3400" dirty="0"/>
+          </a:p>
+        </p:txBody>
+      </p:sp>
+      <p:sp>
+        <p:nvSpPr>
+          <p:cNvPr id="11" name="Text 9"/>
+          <p:cNvSpPr/>
+          <p:nvPr/>
+        </p:nvSpPr>
+        <p:spPr>
+          <a:xfrm>
+            <a:off x="868680" y="1508760"/>
+            <a:ext cx="6537960" cy="4160520"/>
           </a:xfrm>
           <a:prstGeom prst="rect">
             <a:avLst/>
@@ -6698,7 +6968,7 @@
           <a:lstStyle/>
           <a:p>
             <a:r>
-              <a:rPr lang="en-US" sz="1700" dirty="0">
+              <a:rPr lang="en-US" sz="2100" dirty="0">
                 <a:solidFill>
                   <a:srgbClr val="17364A"/>
                 </a:solidFill>
@@ -6708,11 +6978,11 @@
               </a:rPr>
               <a:t>Create a synthetic dataset assessment for one real or realistic public health AI workflow.</a:t>
             </a:r>
-            <a:endParaRPr lang="en-US" sz="1700" dirty="0"/>
-          </a:p>
-          <a:p>
-            <a:r>
-              <a:rPr lang="en-US" sz="1700" dirty="0">
+            <a:endParaRPr lang="en-US" sz="2100" dirty="0"/>
+          </a:p>
+          <a:p>
+            <a:r>
+              <a:rPr lang="en-US" sz="2100" dirty="0">
                 <a:solidFill>
                   <a:srgbClr val="17364A"/>
                 </a:solidFill>
@@ -6720,13 +6990,13 @@
                 <a:ea typeface="Aptos" pitchFamily="34" charset="-122"/>
                 <a:cs typeface="Aptos" pitchFamily="34" charset="-120"/>
               </a:rPr>
-              <a:t>The artifact should describe the use case, affected users, data sources, system dependencies, risks, guardrails, review.</a:t>
-            </a:r>
-            <a:endParaRPr lang="en-US" sz="1700" dirty="0"/>
-          </a:p>
-          <a:p>
-            <a:r>
-              <a:rPr lang="en-US" sz="1700" dirty="0">
+              <a:t>The artifact should describe the use case, affected users, data sources, system dependencies, risks,.</a:t>
+            </a:r>
+            <a:endParaRPr lang="en-US" sz="2100" dirty="0"/>
+          </a:p>
+          <a:p>
+            <a:r>
+              <a:rPr lang="en-US" sz="2100" dirty="0">
                 <a:solidFill>
                   <a:srgbClr val="17364A"/>
                 </a:solidFill>
@@ -6734,29 +7004,15 @@
                 <a:ea typeface="Aptos" pitchFamily="34" charset="-122"/>
                 <a:cs typeface="Aptos" pitchFamily="34" charset="-120"/>
               </a:rPr>
-              <a:t>The exercise should produce a work product that could be used in a governance meeting, procurement review, implementation.</a:t>
-            </a:r>
-            <a:endParaRPr lang="en-US" sz="1700" dirty="0"/>
-          </a:p>
-          <a:p>
-            <a:r>
-              <a:rPr lang="en-US" sz="1700" dirty="0">
-                <a:solidFill>
-                  <a:srgbClr val="17364A"/>
-                </a:solidFill>
-                <a:latin typeface="Aptos" pitchFamily="34" charset="0"/>
-                <a:ea typeface="Aptos" pitchFamily="34" charset="-122"/>
-                <a:cs typeface="Aptos" pitchFamily="34" charset="-120"/>
-              </a:rPr>
-              <a:t>Learners should document assumptions and identify which staff or partners need to be consulted.</a:t>
-            </a:r>
-            <a:endParaRPr lang="en-US" sz="1700" dirty="0"/>
-          </a:p>
-        </p:txBody>
-      </p:sp>
-      <p:sp>
-        <p:nvSpPr>
-          <p:cNvPr id="11" name="Shape 9"/>
+              <a:t>The exercise should produce a work product that could be used in a governance meeting, procurement.</a:t>
+            </a:r>
+            <a:endParaRPr lang="en-US" sz="2100" dirty="0"/>
+          </a:p>
+        </p:txBody>
+      </p:sp>
+      <p:sp>
+        <p:nvSpPr>
+          <p:cNvPr id="12" name="Shape 10"/>
           <p:cNvSpPr/>
           <p:nvPr/>
         </p:nvSpPr>
@@ -6783,14 +7039,14 @@
       </p:sp>
       <p:sp>
         <p:nvSpPr>
-          <p:cNvPr id="12" name="Text 10"/>
+          <p:cNvPr id="13" name="Text 11"/>
           <p:cNvSpPr/>
           <p:nvPr/>
         </p:nvSpPr>
         <p:spPr>
           <a:xfrm>
             <a:off x="8074152" y="1563624"/>
-            <a:ext cx="2825496" cy="201168"/>
+            <a:ext cx="2825496" cy="256032"/>
           </a:xfrm>
           <a:prstGeom prst="rect">
             <a:avLst/>
@@ -6806,7 +7062,7 @@
               <a:buNone/>
             </a:pPr>
             <a:r>
-              <a:rPr lang="en-US" sz="950" b="1" dirty="0">
+              <a:rPr lang="en-US" sz="1300" b="1" dirty="0">
                 <a:solidFill>
                   <a:srgbClr val="0068B7"/>
                 </a:solidFill>
@@ -6816,20 +7072,20 @@
               </a:rPr>
               <a:t>Key idea</a:t>
             </a:r>
-            <a:endParaRPr lang="en-US" sz="950" dirty="0"/>
-          </a:p>
-        </p:txBody>
-      </p:sp>
-      <p:sp>
-        <p:nvSpPr>
-          <p:cNvPr id="13" name="Text 11"/>
-          <p:cNvSpPr/>
-          <p:nvPr/>
-        </p:nvSpPr>
-        <p:spPr>
-          <a:xfrm>
-            <a:off x="8074152" y="1856232"/>
-            <a:ext cx="2825496" cy="1261872"/>
+            <a:endParaRPr lang="en-US" sz="1300" dirty="0"/>
+          </a:p>
+        </p:txBody>
+      </p:sp>
+      <p:sp>
+        <p:nvSpPr>
+          <p:cNvPr id="14" name="Text 12"/>
+          <p:cNvSpPr/>
+          <p:nvPr/>
+        </p:nvSpPr>
+        <p:spPr>
+          <a:xfrm>
+            <a:off x="8074152" y="1920240"/>
+            <a:ext cx="2825496" cy="1188720"/>
           </a:xfrm>
           <a:prstGeom prst="rect">
             <a:avLst/>
@@ -6847,7 +7103,7 @@
               <a:buNone/>
             </a:pPr>
             <a:r>
-              <a:rPr lang="en-US" sz="1250" dirty="0">
+              <a:rPr lang="en-US" sz="1550" dirty="0">
                 <a:solidFill>
                   <a:srgbClr val="17364A"/>
                 </a:solidFill>
@@ -6857,13 +7113,13 @@
               </a:rPr>
               <a:t>Create a synthetic dataset assessment for one real or realistic public health AI workflow.</a:t>
             </a:r>
-            <a:endParaRPr lang="en-US" sz="1250" dirty="0"/>
-          </a:p>
-        </p:txBody>
-      </p:sp>
-      <p:sp>
-        <p:nvSpPr>
-          <p:cNvPr id="14" name="Shape 12"/>
+            <a:endParaRPr lang="en-US" sz="1550" dirty="0"/>
+          </a:p>
+        </p:txBody>
+      </p:sp>
+      <p:sp>
+        <p:nvSpPr>
+          <p:cNvPr id="15" name="Shape 13"/>
           <p:cNvSpPr/>
           <p:nvPr/>
         </p:nvSpPr>
@@ -6890,14 +7146,14 @@
       </p:sp>
       <p:sp>
         <p:nvSpPr>
-          <p:cNvPr id="15" name="Text 13"/>
+          <p:cNvPr id="16" name="Text 14"/>
           <p:cNvSpPr/>
           <p:nvPr/>
         </p:nvSpPr>
         <p:spPr>
           <a:xfrm>
             <a:off x="8074152" y="3666744"/>
-            <a:ext cx="2825496" cy="201168"/>
+            <a:ext cx="2825496" cy="256032"/>
           </a:xfrm>
           <a:prstGeom prst="rect">
             <a:avLst/>
@@ -6913,7 +7169,7 @@
               <a:buNone/>
             </a:pPr>
             <a:r>
-              <a:rPr lang="en-US" sz="950" b="1" dirty="0">
+              <a:rPr lang="en-US" sz="1300" b="1" dirty="0">
                 <a:solidFill>
                   <a:srgbClr val="0068B7"/>
                 </a:solidFill>
@@ -6923,20 +7179,20 @@
               </a:rPr>
               <a:t>Use this for</a:t>
             </a:r>
-            <a:endParaRPr lang="en-US" sz="950" dirty="0"/>
-          </a:p>
-        </p:txBody>
-      </p:sp>
-      <p:sp>
-        <p:nvSpPr>
-          <p:cNvPr id="16" name="Text 14"/>
-          <p:cNvSpPr/>
-          <p:nvPr/>
-        </p:nvSpPr>
-        <p:spPr>
-          <a:xfrm>
-            <a:off x="8074152" y="3959352"/>
-            <a:ext cx="2825496" cy="1170432"/>
+            <a:endParaRPr lang="en-US" sz="1300" dirty="0"/>
+          </a:p>
+        </p:txBody>
+      </p:sp>
+      <p:sp>
+        <p:nvSpPr>
+          <p:cNvPr id="17" name="Text 15"/>
+          <p:cNvSpPr/>
+          <p:nvPr/>
+        </p:nvSpPr>
+        <p:spPr>
+          <a:xfrm>
+            <a:off x="8074152" y="4023360"/>
+            <a:ext cx="2825496" cy="1097280"/>
           </a:xfrm>
           <a:prstGeom prst="rect">
             <a:avLst/>
@@ -6954,7 +7210,7 @@
               <a:buNone/>
             </a:pPr>
             <a:r>
-              <a:rPr lang="en-US" sz="1250" dirty="0">
+              <a:rPr lang="en-US" sz="1550" dirty="0">
                 <a:solidFill>
                   <a:srgbClr val="17364A"/>
                 </a:solidFill>
@@ -6964,7 +7220,7 @@
               </a:rPr>
               <a:t>Connect the concept to public health decisions, safeguards, documentation, or implementation work.</a:t>
             </a:r>
-            <a:endParaRPr lang="en-US" sz="1250" dirty="0"/>
+            <a:endParaRPr lang="en-US" sz="1550" dirty="0"/>
           </a:p>
         </p:txBody>
       </p:sp>
@@ -7161,7 +7417,7 @@
                 <a:ea typeface="Aptos" pitchFamily="34" charset="-122"/>
                 <a:cs typeface="Aptos" pitchFamily="34" charset="-120"/>
               </a:rPr>
-              <a:t>© Paula Soper</a:t>
+              <a:t>Â© Paula Soper</a:t>
             </a:r>
             <a:endParaRPr lang="en-US" sz="800" dirty="0"/>
           </a:p>
@@ -7169,7 +7425,46 @@
       </p:sp>
       <p:sp>
         <p:nvSpPr>
-          <p:cNvPr id="7" name="Shape 5"/>
+          <p:cNvPr id="7" name="Text 5"/>
+          <p:cNvSpPr/>
+          <p:nvPr/>
+        </p:nvSpPr>
+        <p:spPr>
+          <a:xfrm>
+            <a:off x="11137392" y="6510528"/>
+            <a:ext cx="411480" cy="201168"/>
+          </a:xfrm>
+          <a:prstGeom prst="rect">
+            <a:avLst/>
+          </a:prstGeom>
+          <a:noFill/>
+          <a:ln/>
+        </p:spPr>
+        <p:txBody>
+          <a:bodyPr wrap="square" lIns="0" tIns="0" rIns="0" bIns="0" rtlCol="0" anchor="ctr"/>
+          <a:lstStyle/>
+          <a:p>
+            <a:pPr algn="r" indent="0" marL="0">
+              <a:buNone/>
+            </a:pPr>
+            <a:r>
+              <a:rPr lang="en-US" sz="900" dirty="0">
+                <a:solidFill>
+                  <a:srgbClr val="5F7181"/>
+                </a:solidFill>
+                <a:latin typeface="Aptos" pitchFamily="34" charset="0"/>
+                <a:ea typeface="Aptos" pitchFamily="34" charset="-122"/>
+                <a:cs typeface="Aptos" pitchFamily="34" charset="-120"/>
+              </a:rPr>
+              <a:t>17</a:t>
+            </a:r>
+            <a:endParaRPr lang="en-US" sz="900" dirty="0"/>
+          </a:p>
+        </p:txBody>
+      </p:sp>
+      <p:sp>
+        <p:nvSpPr>
+          <p:cNvPr id="8" name="Shape 6"/>
           <p:cNvSpPr/>
           <p:nvPr/>
         </p:nvSpPr>
@@ -7194,7 +7489,7 @@
       </p:sp>
       <p:sp>
         <p:nvSpPr>
-          <p:cNvPr id="8" name="Text 6"/>
+          <p:cNvPr id="9" name="Text 7"/>
           <p:cNvSpPr/>
           <p:nvPr/>
         </p:nvSpPr>
@@ -7233,14 +7528,14 @@
       </p:sp>
       <p:sp>
         <p:nvSpPr>
-          <p:cNvPr id="9" name="Text 7"/>
+          <p:cNvPr id="10" name="Text 8"/>
           <p:cNvSpPr/>
           <p:nvPr/>
         </p:nvSpPr>
         <p:spPr>
           <a:xfrm>
             <a:off x="640080" y="621792"/>
-            <a:ext cx="10881360" cy="566928"/>
+            <a:ext cx="10881360" cy="713232"/>
           </a:xfrm>
           <a:prstGeom prst="rect">
             <a:avLst/>
@@ -7258,7 +7553,7 @@
               <a:buNone/>
             </a:pPr>
             <a:r>
-              <a:rPr lang="en-US" sz="2700" b="1" dirty="0">
+              <a:rPr lang="en-US" sz="3400" b="1" dirty="0">
                 <a:solidFill>
                   <a:srgbClr val="003A63"/>
                 </a:solidFill>
@@ -7268,20 +7563,20 @@
               </a:rPr>
               <a:t>Expected Artifact or Evidence</a:t>
             </a:r>
-            <a:endParaRPr lang="en-US" sz="2700" dirty="0"/>
-          </a:p>
-        </p:txBody>
-      </p:sp>
-      <p:sp>
-        <p:nvSpPr>
-          <p:cNvPr id="10" name="Text 8"/>
-          <p:cNvSpPr/>
-          <p:nvPr/>
-        </p:nvSpPr>
-        <p:spPr>
-          <a:xfrm>
-            <a:off x="868680" y="1417320"/>
-            <a:ext cx="6675120" cy="4434840"/>
+            <a:endParaRPr lang="en-US" sz="3400" dirty="0"/>
+          </a:p>
+        </p:txBody>
+      </p:sp>
+      <p:sp>
+        <p:nvSpPr>
+          <p:cNvPr id="11" name="Text 9"/>
+          <p:cNvSpPr/>
+          <p:nvPr/>
+        </p:nvSpPr>
+        <p:spPr>
+          <a:xfrm>
+            <a:off x="868680" y="1508760"/>
+            <a:ext cx="6537960" cy="4160520"/>
           </a:xfrm>
           <a:prstGeom prst="rect">
             <a:avLst/>
@@ -7296,7 +7591,7 @@
           <a:lstStyle/>
           <a:p>
             <a:r>
-              <a:rPr lang="en-US" sz="1700" dirty="0">
+              <a:rPr lang="en-US" sz="2100" dirty="0">
                 <a:solidFill>
                   <a:srgbClr val="17364A"/>
                 </a:solidFill>
@@ -7306,11 +7601,11 @@
               </a:rPr>
               <a:t>The expected artifact is a completed synthetic dataset assessment.</a:t>
             </a:r>
-            <a:endParaRPr lang="en-US" sz="1700" dirty="0"/>
-          </a:p>
-          <a:p>
-            <a:r>
-              <a:rPr lang="en-US" sz="1700" dirty="0">
+            <a:endParaRPr lang="en-US" sz="2100" dirty="0"/>
+          </a:p>
+          <a:p>
+            <a:r>
+              <a:rPr lang="en-US" sz="2100" dirty="0">
                 <a:solidFill>
                   <a:srgbClr val="17364A"/>
                 </a:solidFill>
@@ -7318,15 +7613,15 @@
                 <a:ea typeface="Aptos" pitchFamily="34" charset="-122"/>
                 <a:cs typeface="Aptos" pitchFamily="34" charset="-120"/>
               </a:rPr>
-              <a:t>It should be specific to a public health workflow and should include technical dependencies, governance questions, human.</a:t>
-            </a:r>
-            <a:endParaRPr lang="en-US" sz="1700" dirty="0"/>
-          </a:p>
-        </p:txBody>
-      </p:sp>
-      <p:sp>
-        <p:nvSpPr>
-          <p:cNvPr id="11" name="Shape 9"/>
+              <a:t>It should be specific to a public health workflow and should include technical dependencies, governance.</a:t>
+            </a:r>
+            <a:endParaRPr lang="en-US" sz="2100" dirty="0"/>
+          </a:p>
+        </p:txBody>
+      </p:sp>
+      <p:sp>
+        <p:nvSpPr>
+          <p:cNvPr id="12" name="Shape 10"/>
           <p:cNvSpPr/>
           <p:nvPr/>
         </p:nvSpPr>
@@ -7353,14 +7648,14 @@
       </p:sp>
       <p:sp>
         <p:nvSpPr>
-          <p:cNvPr id="12" name="Text 10"/>
+          <p:cNvPr id="13" name="Text 11"/>
           <p:cNvSpPr/>
           <p:nvPr/>
         </p:nvSpPr>
         <p:spPr>
           <a:xfrm>
             <a:off x="8074152" y="1563624"/>
-            <a:ext cx="2825496" cy="201168"/>
+            <a:ext cx="2825496" cy="256032"/>
           </a:xfrm>
           <a:prstGeom prst="rect">
             <a:avLst/>
@@ -7376,7 +7671,7 @@
               <a:buNone/>
             </a:pPr>
             <a:r>
-              <a:rPr lang="en-US" sz="950" b="1" dirty="0">
+              <a:rPr lang="en-US" sz="1300" b="1" dirty="0">
                 <a:solidFill>
                   <a:srgbClr val="0068B7"/>
                 </a:solidFill>
@@ -7386,20 +7681,20 @@
               </a:rPr>
               <a:t>Key idea</a:t>
             </a:r>
-            <a:endParaRPr lang="en-US" sz="950" dirty="0"/>
-          </a:p>
-        </p:txBody>
-      </p:sp>
-      <p:sp>
-        <p:nvSpPr>
-          <p:cNvPr id="13" name="Text 11"/>
-          <p:cNvSpPr/>
-          <p:nvPr/>
-        </p:nvSpPr>
-        <p:spPr>
-          <a:xfrm>
-            <a:off x="8074152" y="1856232"/>
-            <a:ext cx="2825496" cy="1261872"/>
+            <a:endParaRPr lang="en-US" sz="1300" dirty="0"/>
+          </a:p>
+        </p:txBody>
+      </p:sp>
+      <p:sp>
+        <p:nvSpPr>
+          <p:cNvPr id="14" name="Text 12"/>
+          <p:cNvSpPr/>
+          <p:nvPr/>
+        </p:nvSpPr>
+        <p:spPr>
+          <a:xfrm>
+            <a:off x="8074152" y="1920240"/>
+            <a:ext cx="2825496" cy="1188720"/>
           </a:xfrm>
           <a:prstGeom prst="rect">
             <a:avLst/>
@@ -7417,7 +7712,7 @@
               <a:buNone/>
             </a:pPr>
             <a:r>
-              <a:rPr lang="en-US" sz="1250" dirty="0">
+              <a:rPr lang="en-US" sz="1550" dirty="0">
                 <a:solidFill>
                   <a:srgbClr val="17364A"/>
                 </a:solidFill>
@@ -7427,13 +7722,13 @@
               </a:rPr>
               <a:t>The expected artifact is a completed synthetic dataset assessment.</a:t>
             </a:r>
-            <a:endParaRPr lang="en-US" sz="1250" dirty="0"/>
-          </a:p>
-        </p:txBody>
-      </p:sp>
-      <p:sp>
-        <p:nvSpPr>
-          <p:cNvPr id="14" name="Shape 12"/>
+            <a:endParaRPr lang="en-US" sz="1550" dirty="0"/>
+          </a:p>
+        </p:txBody>
+      </p:sp>
+      <p:sp>
+        <p:nvSpPr>
+          <p:cNvPr id="15" name="Shape 13"/>
           <p:cNvSpPr/>
           <p:nvPr/>
         </p:nvSpPr>
@@ -7460,14 +7755,14 @@
       </p:sp>
       <p:sp>
         <p:nvSpPr>
-          <p:cNvPr id="15" name="Text 13"/>
+          <p:cNvPr id="16" name="Text 14"/>
           <p:cNvSpPr/>
           <p:nvPr/>
         </p:nvSpPr>
         <p:spPr>
           <a:xfrm>
             <a:off x="8074152" y="3666744"/>
-            <a:ext cx="2825496" cy="201168"/>
+            <a:ext cx="2825496" cy="256032"/>
           </a:xfrm>
           <a:prstGeom prst="rect">
             <a:avLst/>
@@ -7483,7 +7778,7 @@
               <a:buNone/>
             </a:pPr>
             <a:r>
-              <a:rPr lang="en-US" sz="950" b="1" dirty="0">
+              <a:rPr lang="en-US" sz="1300" b="1" dirty="0">
                 <a:solidFill>
                   <a:srgbClr val="0068B7"/>
                 </a:solidFill>
@@ -7493,20 +7788,20 @@
               </a:rPr>
               <a:t>Use this for</a:t>
             </a:r>
-            <a:endParaRPr lang="en-US" sz="950" dirty="0"/>
-          </a:p>
-        </p:txBody>
-      </p:sp>
-      <p:sp>
-        <p:nvSpPr>
-          <p:cNvPr id="16" name="Text 14"/>
-          <p:cNvSpPr/>
-          <p:nvPr/>
-        </p:nvSpPr>
-        <p:spPr>
-          <a:xfrm>
-            <a:off x="8074152" y="3959352"/>
-            <a:ext cx="2825496" cy="1170432"/>
+            <a:endParaRPr lang="en-US" sz="1300" dirty="0"/>
+          </a:p>
+        </p:txBody>
+      </p:sp>
+      <p:sp>
+        <p:nvSpPr>
+          <p:cNvPr id="17" name="Text 15"/>
+          <p:cNvSpPr/>
+          <p:nvPr/>
+        </p:nvSpPr>
+        <p:spPr>
+          <a:xfrm>
+            <a:off x="8074152" y="4023360"/>
+            <a:ext cx="2825496" cy="1097280"/>
           </a:xfrm>
           <a:prstGeom prst="rect">
             <a:avLst/>
@@ -7524,7 +7819,7 @@
               <a:buNone/>
             </a:pPr>
             <a:r>
-              <a:rPr lang="en-US" sz="1250" dirty="0">
+              <a:rPr lang="en-US" sz="1550" dirty="0">
                 <a:solidFill>
                   <a:srgbClr val="17364A"/>
                 </a:solidFill>
@@ -7534,7 +7829,7 @@
               </a:rPr>
               <a:t>Connect the concept to public health decisions, safeguards, documentation, or implementation work.</a:t>
             </a:r>
-            <a:endParaRPr lang="en-US" sz="1250" dirty="0"/>
+            <a:endParaRPr lang="en-US" sz="1550" dirty="0"/>
           </a:p>
         </p:txBody>
       </p:sp>
@@ -7731,7 +8026,7 @@
                 <a:ea typeface="Aptos" pitchFamily="34" charset="-122"/>
                 <a:cs typeface="Aptos" pitchFamily="34" charset="-120"/>
               </a:rPr>
-              <a:t>© Paula Soper</a:t>
+              <a:t>Â© Paula Soper</a:t>
             </a:r>
             <a:endParaRPr lang="en-US" sz="800" dirty="0"/>
           </a:p>
@@ -7739,7 +8034,46 @@
       </p:sp>
       <p:sp>
         <p:nvSpPr>
-          <p:cNvPr id="7" name="Shape 5"/>
+          <p:cNvPr id="7" name="Text 5"/>
+          <p:cNvSpPr/>
+          <p:nvPr/>
+        </p:nvSpPr>
+        <p:spPr>
+          <a:xfrm>
+            <a:off x="11137392" y="6510528"/>
+            <a:ext cx="411480" cy="201168"/>
+          </a:xfrm>
+          <a:prstGeom prst="rect">
+            <a:avLst/>
+          </a:prstGeom>
+          <a:noFill/>
+          <a:ln/>
+        </p:spPr>
+        <p:txBody>
+          <a:bodyPr wrap="square" lIns="0" tIns="0" rIns="0" bIns="0" rtlCol="0" anchor="ctr"/>
+          <a:lstStyle/>
+          <a:p>
+            <a:pPr algn="r" indent="0" marL="0">
+              <a:buNone/>
+            </a:pPr>
+            <a:r>
+              <a:rPr lang="en-US" sz="900" dirty="0">
+                <a:solidFill>
+                  <a:srgbClr val="5F7181"/>
+                </a:solidFill>
+                <a:latin typeface="Aptos" pitchFamily="34" charset="0"/>
+                <a:ea typeface="Aptos" pitchFamily="34" charset="-122"/>
+                <a:cs typeface="Aptos" pitchFamily="34" charset="-120"/>
+              </a:rPr>
+              <a:t>18</a:t>
+            </a:r>
+            <a:endParaRPr lang="en-US" sz="900" dirty="0"/>
+          </a:p>
+        </p:txBody>
+      </p:sp>
+      <p:sp>
+        <p:nvSpPr>
+          <p:cNvPr id="8" name="Shape 6"/>
           <p:cNvSpPr/>
           <p:nvPr/>
         </p:nvSpPr>
@@ -7764,7 +8098,7 @@
       </p:sp>
       <p:sp>
         <p:nvSpPr>
-          <p:cNvPr id="8" name="Text 6"/>
+          <p:cNvPr id="9" name="Text 7"/>
           <p:cNvSpPr/>
           <p:nvPr/>
         </p:nvSpPr>
@@ -7803,14 +8137,14 @@
       </p:sp>
       <p:sp>
         <p:nvSpPr>
-          <p:cNvPr id="9" name="Text 7"/>
+          <p:cNvPr id="10" name="Text 8"/>
           <p:cNvSpPr/>
           <p:nvPr/>
         </p:nvSpPr>
         <p:spPr>
           <a:xfrm>
             <a:off x="640080" y="621792"/>
-            <a:ext cx="10881360" cy="566928"/>
+            <a:ext cx="10881360" cy="713232"/>
           </a:xfrm>
           <a:prstGeom prst="rect">
             <a:avLst/>
@@ -7828,7 +8162,7 @@
               <a:buNone/>
             </a:pPr>
             <a:r>
-              <a:rPr lang="en-US" sz="2700" b="1" dirty="0">
+              <a:rPr lang="en-US" sz="3400" b="1" dirty="0">
                 <a:solidFill>
                   <a:srgbClr val="003A63"/>
                 </a:solidFill>
@@ -7838,20 +8172,20 @@
               </a:rPr>
               <a:t>Expected Assignment</a:t>
             </a:r>
-            <a:endParaRPr lang="en-US" sz="2700" dirty="0"/>
-          </a:p>
-        </p:txBody>
-      </p:sp>
-      <p:sp>
-        <p:nvSpPr>
-          <p:cNvPr id="10" name="Text 8"/>
-          <p:cNvSpPr/>
-          <p:nvPr/>
-        </p:nvSpPr>
-        <p:spPr>
-          <a:xfrm>
-            <a:off x="868680" y="1417320"/>
-            <a:ext cx="6675120" cy="4434840"/>
+            <a:endParaRPr lang="en-US" sz="3400" dirty="0"/>
+          </a:p>
+        </p:txBody>
+      </p:sp>
+      <p:sp>
+        <p:nvSpPr>
+          <p:cNvPr id="11" name="Text 9"/>
+          <p:cNvSpPr/>
+          <p:nvPr/>
+        </p:nvSpPr>
+        <p:spPr>
+          <a:xfrm>
+            <a:off x="868680" y="1508760"/>
+            <a:ext cx="6537960" cy="4160520"/>
           </a:xfrm>
           <a:prstGeom prst="rect">
             <a:avLst/>
@@ -7866,7 +8200,7 @@
           <a:lstStyle/>
           <a:p>
             <a:r>
-              <a:rPr lang="en-US" sz="1700" dirty="0">
+              <a:rPr lang="en-US" sz="2100" dirty="0">
                 <a:solidFill>
                   <a:srgbClr val="17364A"/>
                 </a:solidFill>
@@ -7874,15 +8208,15 @@
                 <a:ea typeface="Aptos" pitchFamily="34" charset="-122"/>
                 <a:cs typeface="Aptos" pitchFamily="34" charset="-120"/>
               </a:rPr>
-              <a:t>The expected artifact is a completed synthetic dataset assessment. It should be specific to a public health workflow and.</a:t>
-            </a:r>
-            <a:endParaRPr lang="en-US" sz="1700" dirty="0"/>
-          </a:p>
-        </p:txBody>
-      </p:sp>
-      <p:sp>
-        <p:nvSpPr>
-          <p:cNvPr id="11" name="Shape 9"/>
+              <a:t>The expected artifact is a completed synthetic dataset assessment. It should be specific to a public.</a:t>
+            </a:r>
+            <a:endParaRPr lang="en-US" sz="2100" dirty="0"/>
+          </a:p>
+        </p:txBody>
+      </p:sp>
+      <p:sp>
+        <p:nvSpPr>
+          <p:cNvPr id="12" name="Shape 10"/>
           <p:cNvSpPr/>
           <p:nvPr/>
         </p:nvSpPr>
@@ -7909,14 +8243,14 @@
       </p:sp>
       <p:sp>
         <p:nvSpPr>
-          <p:cNvPr id="12" name="Text 10"/>
+          <p:cNvPr id="13" name="Text 11"/>
           <p:cNvSpPr/>
           <p:nvPr/>
         </p:nvSpPr>
         <p:spPr>
           <a:xfrm>
             <a:off x="8074152" y="1563624"/>
-            <a:ext cx="2825496" cy="201168"/>
+            <a:ext cx="2825496" cy="256032"/>
           </a:xfrm>
           <a:prstGeom prst="rect">
             <a:avLst/>
@@ -7932,7 +8266,7 @@
               <a:buNone/>
             </a:pPr>
             <a:r>
-              <a:rPr lang="en-US" sz="950" b="1" dirty="0">
+              <a:rPr lang="en-US" sz="1300" b="1" dirty="0">
                 <a:solidFill>
                   <a:srgbClr val="0068B7"/>
                 </a:solidFill>
@@ -7942,20 +8276,20 @@
               </a:rPr>
               <a:t>Key idea</a:t>
             </a:r>
-            <a:endParaRPr lang="en-US" sz="950" dirty="0"/>
-          </a:p>
-        </p:txBody>
-      </p:sp>
-      <p:sp>
-        <p:nvSpPr>
-          <p:cNvPr id="13" name="Text 11"/>
-          <p:cNvSpPr/>
-          <p:nvPr/>
-        </p:nvSpPr>
-        <p:spPr>
-          <a:xfrm>
-            <a:off x="8074152" y="1856232"/>
-            <a:ext cx="2825496" cy="1261872"/>
+            <a:endParaRPr lang="en-US" sz="1300" dirty="0"/>
+          </a:p>
+        </p:txBody>
+      </p:sp>
+      <p:sp>
+        <p:nvSpPr>
+          <p:cNvPr id="14" name="Text 12"/>
+          <p:cNvSpPr/>
+          <p:nvPr/>
+        </p:nvSpPr>
+        <p:spPr>
+          <a:xfrm>
+            <a:off x="8074152" y="1920240"/>
+            <a:ext cx="2825496" cy="1188720"/>
           </a:xfrm>
           <a:prstGeom prst="rect">
             <a:avLst/>
@@ -7973,7 +8307,7 @@
               <a:buNone/>
             </a:pPr>
             <a:r>
-              <a:rPr lang="en-US" sz="1250" dirty="0">
+              <a:rPr lang="en-US" sz="1550" dirty="0">
                 <a:solidFill>
                   <a:srgbClr val="17364A"/>
                 </a:solidFill>
@@ -7981,15 +8315,15 @@
                 <a:ea typeface="Aptos" pitchFamily="34" charset="-122"/>
                 <a:cs typeface="Aptos" pitchFamily="34" charset="-120"/>
               </a:rPr>
-              <a:t>The expected artifact is a completed synthetic dataset assessment. It should be specific to a public health workflow and.</a:t>
-            </a:r>
-            <a:endParaRPr lang="en-US" sz="1250" dirty="0"/>
-          </a:p>
-        </p:txBody>
-      </p:sp>
-      <p:sp>
-        <p:nvSpPr>
-          <p:cNvPr id="14" name="Shape 12"/>
+              <a:t>The expected artifact is a completed synthetic dataset assessment. It should be specific to a public.</a:t>
+            </a:r>
+            <a:endParaRPr lang="en-US" sz="1550" dirty="0"/>
+          </a:p>
+        </p:txBody>
+      </p:sp>
+      <p:sp>
+        <p:nvSpPr>
+          <p:cNvPr id="15" name="Shape 13"/>
           <p:cNvSpPr/>
           <p:nvPr/>
         </p:nvSpPr>
@@ -8016,14 +8350,14 @@
       </p:sp>
       <p:sp>
         <p:nvSpPr>
-          <p:cNvPr id="15" name="Text 13"/>
+          <p:cNvPr id="16" name="Text 14"/>
           <p:cNvSpPr/>
           <p:nvPr/>
         </p:nvSpPr>
         <p:spPr>
           <a:xfrm>
             <a:off x="8074152" y="3666744"/>
-            <a:ext cx="2825496" cy="201168"/>
+            <a:ext cx="2825496" cy="256032"/>
           </a:xfrm>
           <a:prstGeom prst="rect">
             <a:avLst/>
@@ -8039,7 +8373,7 @@
               <a:buNone/>
             </a:pPr>
             <a:r>
-              <a:rPr lang="en-US" sz="950" b="1" dirty="0">
+              <a:rPr lang="en-US" sz="1300" b="1" dirty="0">
                 <a:solidFill>
                   <a:srgbClr val="0068B7"/>
                 </a:solidFill>
@@ -8049,20 +8383,20 @@
               </a:rPr>
               <a:t>Use this for</a:t>
             </a:r>
-            <a:endParaRPr lang="en-US" sz="950" dirty="0"/>
-          </a:p>
-        </p:txBody>
-      </p:sp>
-      <p:sp>
-        <p:nvSpPr>
-          <p:cNvPr id="16" name="Text 14"/>
-          <p:cNvSpPr/>
-          <p:nvPr/>
-        </p:nvSpPr>
-        <p:spPr>
-          <a:xfrm>
-            <a:off x="8074152" y="3959352"/>
-            <a:ext cx="2825496" cy="1170432"/>
+            <a:endParaRPr lang="en-US" sz="1300" dirty="0"/>
+          </a:p>
+        </p:txBody>
+      </p:sp>
+      <p:sp>
+        <p:nvSpPr>
+          <p:cNvPr id="17" name="Text 15"/>
+          <p:cNvSpPr/>
+          <p:nvPr/>
+        </p:nvSpPr>
+        <p:spPr>
+          <a:xfrm>
+            <a:off x="8074152" y="4023360"/>
+            <a:ext cx="2825496" cy="1097280"/>
           </a:xfrm>
           <a:prstGeom prst="rect">
             <a:avLst/>
@@ -8080,7 +8414,7 @@
               <a:buNone/>
             </a:pPr>
             <a:r>
-              <a:rPr lang="en-US" sz="1250" dirty="0">
+              <a:rPr lang="en-US" sz="1550" dirty="0">
                 <a:solidFill>
                   <a:srgbClr val="17364A"/>
                 </a:solidFill>
@@ -8090,7 +8424,7 @@
               </a:rPr>
               <a:t>Connect the concept to public health decisions, safeguards, documentation, or implementation work.</a:t>
             </a:r>
-            <a:endParaRPr lang="en-US" sz="1250" dirty="0"/>
+            <a:endParaRPr lang="en-US" sz="1550" dirty="0"/>
           </a:p>
         </p:txBody>
       </p:sp>
@@ -8287,7 +8621,7 @@
                 <a:ea typeface="Aptos" pitchFamily="34" charset="-122"/>
                 <a:cs typeface="Aptos" pitchFamily="34" charset="-120"/>
               </a:rPr>
-              <a:t>© Paula Soper</a:t>
+              <a:t>Â© Paula Soper</a:t>
             </a:r>
             <a:endParaRPr lang="en-US" sz="800" dirty="0"/>
           </a:p>
@@ -8295,7 +8629,46 @@
       </p:sp>
       <p:sp>
         <p:nvSpPr>
-          <p:cNvPr id="7" name="Shape 5"/>
+          <p:cNvPr id="7" name="Text 5"/>
+          <p:cNvSpPr/>
+          <p:nvPr/>
+        </p:nvSpPr>
+        <p:spPr>
+          <a:xfrm>
+            <a:off x="11137392" y="6510528"/>
+            <a:ext cx="411480" cy="201168"/>
+          </a:xfrm>
+          <a:prstGeom prst="rect">
+            <a:avLst/>
+          </a:prstGeom>
+          <a:noFill/>
+          <a:ln/>
+        </p:spPr>
+        <p:txBody>
+          <a:bodyPr wrap="square" lIns="0" tIns="0" rIns="0" bIns="0" rtlCol="0" anchor="ctr"/>
+          <a:lstStyle/>
+          <a:p>
+            <a:pPr algn="r" indent="0" marL="0">
+              <a:buNone/>
+            </a:pPr>
+            <a:r>
+              <a:rPr lang="en-US" sz="900" dirty="0">
+                <a:solidFill>
+                  <a:srgbClr val="5F7181"/>
+                </a:solidFill>
+                <a:latin typeface="Aptos" pitchFamily="34" charset="0"/>
+                <a:ea typeface="Aptos" pitchFamily="34" charset="-122"/>
+                <a:cs typeface="Aptos" pitchFamily="34" charset="-120"/>
+              </a:rPr>
+              <a:t>19</a:t>
+            </a:r>
+            <a:endParaRPr lang="en-US" sz="900" dirty="0"/>
+          </a:p>
+        </p:txBody>
+      </p:sp>
+      <p:sp>
+        <p:nvSpPr>
+          <p:cNvPr id="8" name="Shape 6"/>
           <p:cNvSpPr/>
           <p:nvPr/>
         </p:nvSpPr>
@@ -8320,7 +8693,7 @@
       </p:sp>
       <p:sp>
         <p:nvSpPr>
-          <p:cNvPr id="8" name="Text 6"/>
+          <p:cNvPr id="9" name="Text 7"/>
           <p:cNvSpPr/>
           <p:nvPr/>
         </p:nvSpPr>
@@ -8359,14 +8732,14 @@
       </p:sp>
       <p:sp>
         <p:nvSpPr>
-          <p:cNvPr id="9" name="Text 7"/>
+          <p:cNvPr id="10" name="Text 8"/>
           <p:cNvSpPr/>
           <p:nvPr/>
         </p:nvSpPr>
         <p:spPr>
           <a:xfrm>
             <a:off x="640080" y="621792"/>
-            <a:ext cx="10881360" cy="566928"/>
+            <a:ext cx="10881360" cy="713232"/>
           </a:xfrm>
           <a:prstGeom prst="rect">
             <a:avLst/>
@@ -8384,7 +8757,7 @@
               <a:buNone/>
             </a:pPr>
             <a:r>
-              <a:rPr lang="en-US" sz="2700" b="1" dirty="0">
+              <a:rPr lang="en-US" sz="3400" b="1" dirty="0">
                 <a:solidFill>
                   <a:srgbClr val="003A63"/>
                 </a:solidFill>
@@ -8394,20 +8767,20 @@
               </a:rPr>
               <a:t>Knowledge Check</a:t>
             </a:r>
-            <a:endParaRPr lang="en-US" sz="2700" dirty="0"/>
-          </a:p>
-        </p:txBody>
-      </p:sp>
-      <p:sp>
-        <p:nvSpPr>
-          <p:cNvPr id="10" name="Text 8"/>
-          <p:cNvSpPr/>
-          <p:nvPr/>
-        </p:nvSpPr>
-        <p:spPr>
-          <a:xfrm>
-            <a:off x="868680" y="1417320"/>
-            <a:ext cx="6675120" cy="4434840"/>
+            <a:endParaRPr lang="en-US" sz="3400" dirty="0"/>
+          </a:p>
+        </p:txBody>
+      </p:sp>
+      <p:sp>
+        <p:nvSpPr>
+          <p:cNvPr id="11" name="Text 9"/>
+          <p:cNvSpPr/>
+          <p:nvPr/>
+        </p:nvSpPr>
+        <p:spPr>
+          <a:xfrm>
+            <a:off x="868680" y="1508760"/>
+            <a:ext cx="6537960" cy="4160520"/>
           </a:xfrm>
           <a:prstGeom prst="rect">
             <a:avLst/>
@@ -8422,7 +8795,7 @@
           <a:lstStyle/>
           <a:p>
             <a:r>
-              <a:rPr lang="en-US" sz="1700" dirty="0">
+              <a:rPr lang="en-US" sz="2100" dirty="0">
                 <a:solidFill>
                   <a:srgbClr val="17364A"/>
                 </a:solidFill>
@@ -8432,11 +8805,11 @@
               </a:rPr>
               <a:t>1. What is the best reason to address synthetic data for public health ai before deployment?</a:t>
             </a:r>
-            <a:endParaRPr lang="en-US" sz="1700" dirty="0"/>
-          </a:p>
-          <a:p>
-            <a:r>
-              <a:rPr lang="en-US" sz="1700" dirty="0">
+            <a:endParaRPr lang="en-US" sz="2100" dirty="0"/>
+          </a:p>
+          <a:p>
+            <a:r>
+              <a:rPr lang="en-US" sz="2100" dirty="0">
                 <a:solidFill>
                   <a:srgbClr val="17364A"/>
                 </a:solidFill>
@@ -8446,11 +8819,11 @@
               </a:rPr>
               <a:t>2. Which practice best supports responsible implementation?</a:t>
             </a:r>
-            <a:endParaRPr lang="en-US" sz="1700" dirty="0"/>
-          </a:p>
-          <a:p>
-            <a:r>
-              <a:rPr lang="en-US" sz="1700" dirty="0">
+            <a:endParaRPr lang="en-US" sz="2100" dirty="0"/>
+          </a:p>
+          <a:p>
+            <a:r>
+              <a:rPr lang="en-US" sz="2100" dirty="0">
                 <a:solidFill>
                   <a:srgbClr val="17364A"/>
                 </a:solidFill>
@@ -8460,27 +8833,13 @@
               </a:rPr>
               <a:t>3. Which statement best describes a common failure mode?</a:t>
             </a:r>
-            <a:endParaRPr lang="en-US" sz="1700" dirty="0"/>
-          </a:p>
-          <a:p>
-            <a:r>
-              <a:rPr lang="en-US" sz="1700" dirty="0">
-                <a:solidFill>
-                  <a:srgbClr val="17364A"/>
-                </a:solidFill>
-                <a:latin typeface="Aptos" pitchFamily="34" charset="0"/>
-                <a:ea typeface="Aptos" pitchFamily="34" charset="-122"/>
-                <a:cs typeface="Aptos" pitchFamily="34" charset="-120"/>
-              </a:rPr>
-              <a:t>4. What should be included in the practical artifact for this module?</a:t>
-            </a:r>
-            <a:endParaRPr lang="en-US" sz="1700" dirty="0"/>
-          </a:p>
-        </p:txBody>
-      </p:sp>
-      <p:sp>
-        <p:nvSpPr>
-          <p:cNvPr id="11" name="Shape 9"/>
+            <a:endParaRPr lang="en-US" sz="2100" dirty="0"/>
+          </a:p>
+        </p:txBody>
+      </p:sp>
+      <p:sp>
+        <p:nvSpPr>
+          <p:cNvPr id="12" name="Shape 10"/>
           <p:cNvSpPr/>
           <p:nvPr/>
         </p:nvSpPr>
@@ -8507,14 +8866,14 @@
       </p:sp>
       <p:sp>
         <p:nvSpPr>
-          <p:cNvPr id="12" name="Text 10"/>
+          <p:cNvPr id="13" name="Text 11"/>
           <p:cNvSpPr/>
           <p:nvPr/>
         </p:nvSpPr>
         <p:spPr>
           <a:xfrm>
             <a:off x="8074152" y="1563624"/>
-            <a:ext cx="2825496" cy="201168"/>
+            <a:ext cx="2825496" cy="256032"/>
           </a:xfrm>
           <a:prstGeom prst="rect">
             <a:avLst/>
@@ -8530,7 +8889,7 @@
               <a:buNone/>
             </a:pPr>
             <a:r>
-              <a:rPr lang="en-US" sz="950" b="1" dirty="0">
+              <a:rPr lang="en-US" sz="1300" b="1" dirty="0">
                 <a:solidFill>
                   <a:srgbClr val="0068B7"/>
                 </a:solidFill>
@@ -8540,20 +8899,20 @@
               </a:rPr>
               <a:t>Key idea</a:t>
             </a:r>
-            <a:endParaRPr lang="en-US" sz="950" dirty="0"/>
-          </a:p>
-        </p:txBody>
-      </p:sp>
-      <p:sp>
-        <p:nvSpPr>
-          <p:cNvPr id="13" name="Text 11"/>
-          <p:cNvSpPr/>
-          <p:nvPr/>
-        </p:nvSpPr>
-        <p:spPr>
-          <a:xfrm>
-            <a:off x="8074152" y="1856232"/>
-            <a:ext cx="2825496" cy="1261872"/>
+            <a:endParaRPr lang="en-US" sz="1300" dirty="0"/>
+          </a:p>
+        </p:txBody>
+      </p:sp>
+      <p:sp>
+        <p:nvSpPr>
+          <p:cNvPr id="14" name="Text 12"/>
+          <p:cNvSpPr/>
+          <p:nvPr/>
+        </p:nvSpPr>
+        <p:spPr>
+          <a:xfrm>
+            <a:off x="8074152" y="1920240"/>
+            <a:ext cx="2825496" cy="1188720"/>
           </a:xfrm>
           <a:prstGeom prst="rect">
             <a:avLst/>
@@ -8571,7 +8930,7 @@
               <a:buNone/>
             </a:pPr>
             <a:r>
-              <a:rPr lang="en-US" sz="1250" dirty="0">
+              <a:rPr lang="en-US" sz="1550" dirty="0">
                 <a:solidFill>
                   <a:srgbClr val="17364A"/>
                 </a:solidFill>
@@ -8581,13 +8940,13 @@
               </a:rPr>
               <a:t>1. What is the best reason to address synthetic data for public health ai before deployment?</a:t>
             </a:r>
-            <a:endParaRPr lang="en-US" sz="1250" dirty="0"/>
-          </a:p>
-        </p:txBody>
-      </p:sp>
-      <p:sp>
-        <p:nvSpPr>
-          <p:cNvPr id="14" name="Shape 12"/>
+            <a:endParaRPr lang="en-US" sz="1550" dirty="0"/>
+          </a:p>
+        </p:txBody>
+      </p:sp>
+      <p:sp>
+        <p:nvSpPr>
+          <p:cNvPr id="15" name="Shape 13"/>
           <p:cNvSpPr/>
           <p:nvPr/>
         </p:nvSpPr>
@@ -8614,14 +8973,14 @@
       </p:sp>
       <p:sp>
         <p:nvSpPr>
-          <p:cNvPr id="15" name="Text 13"/>
+          <p:cNvPr id="16" name="Text 14"/>
           <p:cNvSpPr/>
           <p:nvPr/>
         </p:nvSpPr>
         <p:spPr>
           <a:xfrm>
             <a:off x="8074152" y="3666744"/>
-            <a:ext cx="2825496" cy="201168"/>
+            <a:ext cx="2825496" cy="256032"/>
           </a:xfrm>
           <a:prstGeom prst="rect">
             <a:avLst/>
@@ -8637,7 +8996,7 @@
               <a:buNone/>
             </a:pPr>
             <a:r>
-              <a:rPr lang="en-US" sz="950" b="1" dirty="0">
+              <a:rPr lang="en-US" sz="1300" b="1" dirty="0">
                 <a:solidFill>
                   <a:srgbClr val="0068B7"/>
                 </a:solidFill>
@@ -8647,20 +9006,20 @@
               </a:rPr>
               <a:t>Use this for</a:t>
             </a:r>
-            <a:endParaRPr lang="en-US" sz="950" dirty="0"/>
-          </a:p>
-        </p:txBody>
-      </p:sp>
-      <p:sp>
-        <p:nvSpPr>
-          <p:cNvPr id="16" name="Text 14"/>
-          <p:cNvSpPr/>
-          <p:nvPr/>
-        </p:nvSpPr>
-        <p:spPr>
-          <a:xfrm>
-            <a:off x="8074152" y="3959352"/>
-            <a:ext cx="2825496" cy="1170432"/>
+            <a:endParaRPr lang="en-US" sz="1300" dirty="0"/>
+          </a:p>
+        </p:txBody>
+      </p:sp>
+      <p:sp>
+        <p:nvSpPr>
+          <p:cNvPr id="17" name="Text 15"/>
+          <p:cNvSpPr/>
+          <p:nvPr/>
+        </p:nvSpPr>
+        <p:spPr>
+          <a:xfrm>
+            <a:off x="8074152" y="4023360"/>
+            <a:ext cx="2825496" cy="1097280"/>
           </a:xfrm>
           <a:prstGeom prst="rect">
             <a:avLst/>
@@ -8678,7 +9037,7 @@
               <a:buNone/>
             </a:pPr>
             <a:r>
-              <a:rPr lang="en-US" sz="1250" dirty="0">
+              <a:rPr lang="en-US" sz="1550" dirty="0">
                 <a:solidFill>
                   <a:srgbClr val="17364A"/>
                 </a:solidFill>
@@ -8688,7 +9047,7 @@
               </a:rPr>
               <a:t>Connect the concept to public health decisions, safeguards, documentation, or implementation work.</a:t>
             </a:r>
-            <a:endParaRPr lang="en-US" sz="1250" dirty="0"/>
+            <a:endParaRPr lang="en-US" sz="1550" dirty="0"/>
           </a:p>
         </p:txBody>
       </p:sp>
@@ -8885,7 +9244,7 @@
                 <a:ea typeface="Aptos" pitchFamily="34" charset="-122"/>
                 <a:cs typeface="Aptos" pitchFamily="34" charset="-120"/>
               </a:rPr>
-              <a:t>© Paula Soper</a:t>
+              <a:t>Â© Paula Soper</a:t>
             </a:r>
             <a:endParaRPr lang="en-US" sz="800" dirty="0"/>
           </a:p>
@@ -8899,8 +9258,47 @@
         </p:nvSpPr>
         <p:spPr>
           <a:xfrm>
+            <a:off x="11137392" y="6510528"/>
+            <a:ext cx="411480" cy="201168"/>
+          </a:xfrm>
+          <a:prstGeom prst="rect">
+            <a:avLst/>
+          </a:prstGeom>
+          <a:noFill/>
+          <a:ln/>
+        </p:spPr>
+        <p:txBody>
+          <a:bodyPr wrap="square" lIns="0" tIns="0" rIns="0" bIns="0" rtlCol="0" anchor="ctr"/>
+          <a:lstStyle/>
+          <a:p>
+            <a:pPr algn="r" indent="0" marL="0">
+              <a:buNone/>
+            </a:pPr>
+            <a:r>
+              <a:rPr lang="en-US" sz="900" dirty="0">
+                <a:solidFill>
+                  <a:srgbClr val="5F7181"/>
+                </a:solidFill>
+                <a:latin typeface="Aptos" pitchFamily="34" charset="0"/>
+                <a:ea typeface="Aptos" pitchFamily="34" charset="-122"/>
+                <a:cs typeface="Aptos" pitchFamily="34" charset="-120"/>
+              </a:rPr>
+              <a:t>2</a:t>
+            </a:r>
+            <a:endParaRPr lang="en-US" sz="900" dirty="0"/>
+          </a:p>
+        </p:txBody>
+      </p:sp>
+      <p:sp>
+        <p:nvSpPr>
+          <p:cNvPr id="8" name="Text 6"/>
+          <p:cNvSpPr/>
+          <p:nvPr/>
+        </p:nvSpPr>
+        <p:spPr>
+          <a:xfrm>
             <a:off x="640080" y="658368"/>
-            <a:ext cx="10881360" cy="566928"/>
+            <a:ext cx="10881360" cy="713232"/>
           </a:xfrm>
           <a:prstGeom prst="rect">
             <a:avLst/>
@@ -8918,7 +9316,7 @@
               <a:buNone/>
             </a:pPr>
             <a:r>
-              <a:rPr lang="en-US" sz="2700" b="1" dirty="0">
+              <a:rPr lang="en-US" sz="3400" b="1" dirty="0">
                 <a:solidFill>
                   <a:srgbClr val="003A63"/>
                 </a:solidFill>
@@ -8928,20 +9326,20 @@
               </a:rPr>
               <a:t>What this module helps you do</a:t>
             </a:r>
-            <a:endParaRPr lang="en-US" sz="2700" dirty="0"/>
-          </a:p>
-        </p:txBody>
-      </p:sp>
-      <p:sp>
-        <p:nvSpPr>
-          <p:cNvPr id="8" name="Text 6"/>
-          <p:cNvSpPr/>
-          <p:nvPr/>
-        </p:nvSpPr>
-        <p:spPr>
-          <a:xfrm>
-            <a:off x="868680" y="1417320"/>
-            <a:ext cx="6675120" cy="3291840"/>
+            <a:endParaRPr lang="en-US" sz="3400" dirty="0"/>
+          </a:p>
+        </p:txBody>
+      </p:sp>
+      <p:sp>
+        <p:nvSpPr>
+          <p:cNvPr id="9" name="Text 7"/>
+          <p:cNvSpPr/>
+          <p:nvPr/>
+        </p:nvSpPr>
+        <p:spPr>
+          <a:xfrm>
+            <a:off x="868680" y="1508760"/>
+            <a:ext cx="6446520" cy="2926080"/>
           </a:xfrm>
           <a:prstGeom prst="rect">
             <a:avLst/>
@@ -8956,7 +9354,7 @@
           <a:lstStyle/>
           <a:p>
             <a:r>
-              <a:rPr lang="en-US" sz="1700" dirty="0">
+              <a:rPr lang="en-US" sz="2100" dirty="0">
                 <a:solidFill>
                   <a:srgbClr val="17364A"/>
                 </a:solidFill>
@@ -8964,13 +9362,13 @@
                 <a:ea typeface="Aptos" pitchFamily="34" charset="-122"/>
                 <a:cs typeface="Aptos" pitchFamily="34" charset="-120"/>
               </a:rPr>
-              <a:t>Synthetic data are artificially generated data that are designed to resemble real data without directly copying every record from a real person.</a:t>
-            </a:r>
-            <a:endParaRPr lang="en-US" sz="1700" dirty="0"/>
-          </a:p>
-          <a:p>
-            <a:r>
-              <a:rPr lang="en-US" sz="1700" dirty="0">
+              <a:t>Synthetic data are artificially generated data that are designed to resemble real data without directly copying.</a:t>
+            </a:r>
+            <a:endParaRPr lang="en-US" sz="2100" dirty="0"/>
+          </a:p>
+          <a:p>
+            <a:r>
+              <a:rPr lang="en-US" sz="2100" dirty="0">
                 <a:solidFill>
                   <a:srgbClr val="17364A"/>
                 </a:solidFill>
@@ -8978,13 +9376,13 @@
                 <a:ea typeface="Aptos" pitchFamily="34" charset="-122"/>
                 <a:cs typeface="Aptos" pitchFamily="34" charset="-120"/>
               </a:rPr>
-              <a:t>In public health, synthetic data can support training, software testing, demonstrations, model prototyping, and vendor evaluation when real data are.</a:t>
-            </a:r>
-            <a:endParaRPr lang="en-US" sz="1700" dirty="0"/>
-          </a:p>
-          <a:p>
-            <a:r>
-              <a:rPr lang="en-US" sz="1700" dirty="0">
+              <a:t>In public health, synthetic data can support training, software testing, demonstrations, model prototyping, and.</a:t>
+            </a:r>
+            <a:endParaRPr lang="en-US" sz="2100" dirty="0"/>
+          </a:p>
+          <a:p>
+            <a:r>
+              <a:rPr lang="en-US" sz="2100" dirty="0">
                 <a:solidFill>
                   <a:srgbClr val="17364A"/>
                 </a:solidFill>
@@ -8992,15 +9390,15 @@
                 <a:ea typeface="Aptos" pitchFamily="34" charset="-122"/>
                 <a:cs typeface="Aptos" pitchFamily="34" charset="-120"/>
               </a:rPr>
-              <a:t>This module helps learners understand both the promise and limitations of synthetic data, including privacy risk, analytic utility,.</a:t>
-            </a:r>
-            <a:endParaRPr lang="en-US" sz="1700" dirty="0"/>
-          </a:p>
-        </p:txBody>
-      </p:sp>
-      <p:sp>
-        <p:nvSpPr>
-          <p:cNvPr id="9" name="Shape 7"/>
+              <a:t>This module helps learners understand both the promise and limitations of synthetic data, including privacy risk,.</a:t>
+            </a:r>
+            <a:endParaRPr lang="en-US" sz="2100" dirty="0"/>
+          </a:p>
+        </p:txBody>
+      </p:sp>
+      <p:sp>
+        <p:nvSpPr>
+          <p:cNvPr id="10" name="Shape 8"/>
           <p:cNvSpPr/>
           <p:nvPr/>
         </p:nvSpPr>
@@ -9027,14 +9425,14 @@
       </p:sp>
       <p:sp>
         <p:nvSpPr>
-          <p:cNvPr id="10" name="Text 8"/>
+          <p:cNvPr id="11" name="Text 9"/>
           <p:cNvSpPr/>
           <p:nvPr/>
         </p:nvSpPr>
         <p:spPr>
           <a:xfrm>
             <a:off x="8074152" y="1563624"/>
-            <a:ext cx="2825496" cy="201168"/>
+            <a:ext cx="2825496" cy="256032"/>
           </a:xfrm>
           <a:prstGeom prst="rect">
             <a:avLst/>
@@ -9050,7 +9448,7 @@
               <a:buNone/>
             </a:pPr>
             <a:r>
-              <a:rPr lang="en-US" sz="950" b="1" dirty="0">
+              <a:rPr lang="en-US" sz="1300" b="1" dirty="0">
                 <a:solidFill>
                   <a:srgbClr val="0068B7"/>
                 </a:solidFill>
@@ -9060,20 +9458,20 @@
               </a:rPr>
               <a:t>Module details</a:t>
             </a:r>
-            <a:endParaRPr lang="en-US" sz="950" dirty="0"/>
-          </a:p>
-        </p:txBody>
-      </p:sp>
-      <p:sp>
-        <p:nvSpPr>
-          <p:cNvPr id="11" name="Text 9"/>
-          <p:cNvSpPr/>
-          <p:nvPr/>
-        </p:nvSpPr>
-        <p:spPr>
-          <a:xfrm>
-            <a:off x="8074152" y="1856232"/>
-            <a:ext cx="2825496" cy="1353312"/>
+            <a:endParaRPr lang="en-US" sz="1300" dirty="0"/>
+          </a:p>
+        </p:txBody>
+      </p:sp>
+      <p:sp>
+        <p:nvSpPr>
+          <p:cNvPr id="12" name="Text 10"/>
+          <p:cNvSpPr/>
+          <p:nvPr/>
+        </p:nvSpPr>
+        <p:spPr>
+          <a:xfrm>
+            <a:off x="8074152" y="1920240"/>
+            <a:ext cx="2825496" cy="1280160"/>
           </a:xfrm>
           <a:prstGeom prst="rect">
             <a:avLst/>
@@ -9091,7 +9489,7 @@
               <a:buNone/>
             </a:pPr>
             <a:r>
-              <a:rPr lang="en-US" sz="1250" dirty="0">
+              <a:rPr lang="en-US" sz="1550" dirty="0">
                 <a:solidFill>
                   <a:srgbClr val="17364A"/>
                 </a:solidFill>
@@ -9101,14 +9499,14 @@
               </a:rPr>
               <a:t>Level: intermediate/practitioner</a:t>
             </a:r>
-            <a:endParaRPr lang="en-US" sz="1250" dirty="0"/>
+            <a:endParaRPr lang="en-US" sz="1550" dirty="0"/>
           </a:p>
           <a:p>
             <a:pPr indent="0" marL="0">
               <a:buNone/>
             </a:pPr>
             <a:r>
-              <a:rPr lang="en-US" sz="1250" dirty="0">
+              <a:rPr lang="en-US" sz="1550" dirty="0">
                 <a:solidFill>
                   <a:srgbClr val="17364A"/>
                 </a:solidFill>
@@ -9118,14 +9516,14 @@
               </a:rPr>
               <a:t>Primary track: Analytics and Modeling Track</a:t>
             </a:r>
-            <a:endParaRPr lang="en-US" sz="1250" dirty="0"/>
+            <a:endParaRPr lang="en-US" sz="1550" dirty="0"/>
           </a:p>
           <a:p>
             <a:pPr indent="0" marL="0">
               <a:buNone/>
             </a:pPr>
             <a:r>
-              <a:rPr lang="en-US" sz="1250" dirty="0">
+              <a:rPr lang="en-US" sz="1550" dirty="0">
                 <a:solidFill>
                   <a:srgbClr val="17364A"/>
                 </a:solidFill>
@@ -9135,32 +9533,32 @@
               </a:rPr>
               <a:t>Appears in tracks: operations-data-quality</a:t>
             </a:r>
-            <a:endParaRPr lang="en-US" sz="1250" dirty="0"/>
-          </a:p>
-        </p:txBody>
-      </p:sp>
-      <p:sp>
-        <p:nvSpPr>
-          <p:cNvPr id="12" name="Shape 10"/>
-          <p:cNvSpPr/>
-          <p:nvPr/>
-        </p:nvSpPr>
-        <p:spPr>
-          <a:xfrm>
-            <a:off x="7909560" y="3611880"/>
-            <a:ext cx="3154680" cy="1783080"/>
+            <a:endParaRPr lang="en-US" sz="1550" dirty="0"/>
+          </a:p>
+        </p:txBody>
+      </p:sp>
+      <p:sp>
+        <p:nvSpPr>
+          <p:cNvPr id="13" name="Shape 11"/>
+          <p:cNvSpPr/>
+          <p:nvPr/>
+        </p:nvSpPr>
+        <p:spPr>
+          <a:xfrm>
+            <a:off x="7635240" y="3730752"/>
+            <a:ext cx="1033272" cy="749808"/>
           </a:xfrm>
           <a:prstGeom prst="roundRect">
             <a:avLst>
-              <a:gd name="adj" fmla="val 6154"/>
+              <a:gd name="adj" fmla="val 14634"/>
             </a:avLst>
           </a:prstGeom>
           <a:solidFill>
-            <a:srgbClr val="EEF8ED"/>
+            <a:srgbClr val="0068B7"/>
           </a:solidFill>
           <a:ln w="12700">
             <a:solidFill>
-              <a:srgbClr val="B9D7E6"/>
+              <a:srgbClr val="0068B7"/>
             </a:solidFill>
             <a:prstDash val="solid"/>
           </a:ln>
@@ -9168,81 +9566,256 @@
       </p:sp>
       <p:sp>
         <p:nvSpPr>
-          <p:cNvPr id="13" name="Text 11"/>
-          <p:cNvSpPr/>
-          <p:nvPr/>
-        </p:nvSpPr>
-        <p:spPr>
-          <a:xfrm>
-            <a:off x="8074152" y="3758184"/>
-            <a:ext cx="2825496" cy="201168"/>
-          </a:xfrm>
-          <a:prstGeom prst="rect">
-            <a:avLst/>
-          </a:prstGeom>
-          <a:noFill/>
-          <a:ln/>
-        </p:spPr>
-        <p:txBody>
-          <a:bodyPr wrap="square" lIns="0" tIns="0" rIns="0" bIns="0" rtlCol="0" anchor="ctr"/>
-          <a:lstStyle/>
-          <a:p>
-            <a:pPr indent="0" marL="0">
-              <a:buNone/>
-            </a:pPr>
-            <a:r>
-              <a:rPr lang="en-US" sz="950" b="1" dirty="0">
-                <a:solidFill>
-                  <a:srgbClr val="0068B7"/>
-                </a:solidFill>
-                <a:latin typeface="Aptos" pitchFamily="34" charset="0"/>
-                <a:ea typeface="Aptos" pitchFamily="34" charset="-122"/>
-                <a:cs typeface="Aptos" pitchFamily="34" charset="-120"/>
-              </a:rPr>
-              <a:t>Learning approach</a:t>
-            </a:r>
-            <a:endParaRPr lang="en-US" sz="950" dirty="0"/>
-          </a:p>
-        </p:txBody>
-      </p:sp>
-      <p:sp>
-        <p:nvSpPr>
           <p:cNvPr id="14" name="Text 12"/>
           <p:cNvSpPr/>
           <p:nvPr/>
         </p:nvSpPr>
         <p:spPr>
           <a:xfrm>
-            <a:off x="8074152" y="4050792"/>
-            <a:ext cx="2825496" cy="1216152"/>
-          </a:xfrm>
-          <a:prstGeom prst="rect">
-            <a:avLst/>
-          </a:prstGeom>
-          <a:noFill/>
-          <a:ln/>
-        </p:spPr>
-        <p:txBody>
-          <a:bodyPr wrap="square" lIns="0" tIns="0" rIns="0" bIns="0" rtlCol="0" anchor="t">
+            <a:off x="7708392" y="3922776"/>
+            <a:ext cx="886968" cy="310896"/>
+          </a:xfrm>
+          <a:prstGeom prst="rect">
+            <a:avLst/>
+          </a:prstGeom>
+          <a:noFill/>
+          <a:ln/>
+        </p:spPr>
+        <p:txBody>
+          <a:bodyPr wrap="square" lIns="0" tIns="0" rIns="0" bIns="0" rtlCol="0" anchor="ctr">
             <a:normAutofit/>
           </a:bodyPr>
           <a:lstStyle/>
           <a:p>
-            <a:pPr indent="0" marL="0">
-              <a:buNone/>
-            </a:pPr>
-            <a:r>
-              <a:rPr lang="en-US" sz="1250" dirty="0">
-                <a:solidFill>
-                  <a:srgbClr val="17364A"/>
-                </a:solidFill>
-                <a:latin typeface="Aptos" pitchFamily="34" charset="0"/>
-                <a:ea typeface="Aptos" pitchFamily="34" charset="-122"/>
-                <a:cs typeface="Aptos" pitchFamily="34" charset="-120"/>
-              </a:rPr>
-              <a:t>Review the core ideas, complete the practical exercise, check your understanding, and use the related plays and tools to apply the lesson.</a:t>
-            </a:r>
-            <a:endParaRPr lang="en-US" sz="1250" dirty="0"/>
+            <a:pPr algn="ctr" indent="0" marL="0">
+              <a:buNone/>
+            </a:pPr>
+            <a:r>
+              <a:rPr lang="en-US" sz="1500" b="1" dirty="0">
+                <a:solidFill>
+                  <a:srgbClr val="FFFFFF"/>
+                </a:solidFill>
+                <a:latin typeface="Aptos" pitchFamily="34" charset="0"/>
+                <a:ea typeface="Aptos" pitchFamily="34" charset="-122"/>
+                <a:cs typeface="Aptos" pitchFamily="34" charset="-120"/>
+              </a:rPr>
+              <a:t>Learn</a:t>
+            </a:r>
+            <a:endParaRPr lang="en-US" sz="1500" dirty="0"/>
+          </a:p>
+        </p:txBody>
+      </p:sp>
+      <p:sp>
+        <p:nvSpPr>
+          <p:cNvPr id="15" name="Text 13"/>
+          <p:cNvSpPr/>
+          <p:nvPr/>
+        </p:nvSpPr>
+        <p:spPr>
+          <a:xfrm>
+            <a:off x="8695944" y="3941064"/>
+            <a:ext cx="201168" cy="256032"/>
+          </a:xfrm>
+          <a:prstGeom prst="rect">
+            <a:avLst/>
+          </a:prstGeom>
+          <a:noFill/>
+          <a:ln/>
+        </p:spPr>
+        <p:txBody>
+          <a:bodyPr wrap="square" lIns="0" tIns="0" rIns="0" bIns="0" rtlCol="0" anchor="ctr"/>
+          <a:lstStyle/>
+          <a:p>
+            <a:pPr algn="ctr" indent="0" marL="0">
+              <a:buNone/>
+            </a:pPr>
+            <a:r>
+              <a:rPr lang="en-US" sz="1800" b="1" dirty="0">
+                <a:solidFill>
+                  <a:srgbClr val="0068B7"/>
+                </a:solidFill>
+                <a:latin typeface="Aptos" pitchFamily="34" charset="0"/>
+                <a:ea typeface="Aptos" pitchFamily="34" charset="-122"/>
+                <a:cs typeface="Aptos" pitchFamily="34" charset="-120"/>
+              </a:rPr>
+              <a:t>â†’</a:t>
+            </a:r>
+            <a:endParaRPr lang="en-US" sz="1800" dirty="0"/>
+          </a:p>
+        </p:txBody>
+      </p:sp>
+      <p:sp>
+        <p:nvSpPr>
+          <p:cNvPr id="16" name="Shape 14"/>
+          <p:cNvSpPr/>
+          <p:nvPr/>
+        </p:nvSpPr>
+        <p:spPr>
+          <a:xfrm>
+            <a:off x="8924544" y="3730752"/>
+            <a:ext cx="1033272" cy="749808"/>
+          </a:xfrm>
+          <a:prstGeom prst="roundRect">
+            <a:avLst>
+              <a:gd name="adj" fmla="val 14634"/>
+            </a:avLst>
+          </a:prstGeom>
+          <a:solidFill>
+            <a:srgbClr val="2F8A28"/>
+          </a:solidFill>
+          <a:ln w="12700">
+            <a:solidFill>
+              <a:srgbClr val="2F8A28"/>
+            </a:solidFill>
+            <a:prstDash val="solid"/>
+          </a:ln>
+        </p:spPr>
+      </p:sp>
+      <p:sp>
+        <p:nvSpPr>
+          <p:cNvPr id="17" name="Text 15"/>
+          <p:cNvSpPr/>
+          <p:nvPr/>
+        </p:nvSpPr>
+        <p:spPr>
+          <a:xfrm>
+            <a:off x="8997696" y="3922776"/>
+            <a:ext cx="886968" cy="310896"/>
+          </a:xfrm>
+          <a:prstGeom prst="rect">
+            <a:avLst/>
+          </a:prstGeom>
+          <a:noFill/>
+          <a:ln/>
+        </p:spPr>
+        <p:txBody>
+          <a:bodyPr wrap="square" lIns="0" tIns="0" rIns="0" bIns="0" rtlCol="0" anchor="ctr">
+            <a:normAutofit/>
+          </a:bodyPr>
+          <a:lstStyle/>
+          <a:p>
+            <a:pPr algn="ctr" indent="0" marL="0">
+              <a:buNone/>
+            </a:pPr>
+            <a:r>
+              <a:rPr lang="en-US" sz="1500" b="1" dirty="0">
+                <a:solidFill>
+                  <a:srgbClr val="FFFFFF"/>
+                </a:solidFill>
+                <a:latin typeface="Aptos" pitchFamily="34" charset="0"/>
+                <a:ea typeface="Aptos" pitchFamily="34" charset="-122"/>
+                <a:cs typeface="Aptos" pitchFamily="34" charset="-120"/>
+              </a:rPr>
+              <a:t>Apply</a:t>
+            </a:r>
+            <a:endParaRPr lang="en-US" sz="1500" dirty="0"/>
+          </a:p>
+        </p:txBody>
+      </p:sp>
+      <p:sp>
+        <p:nvSpPr>
+          <p:cNvPr id="18" name="Text 16"/>
+          <p:cNvSpPr/>
+          <p:nvPr/>
+        </p:nvSpPr>
+        <p:spPr>
+          <a:xfrm>
+            <a:off x="9985248" y="3941064"/>
+            <a:ext cx="201168" cy="256032"/>
+          </a:xfrm>
+          <a:prstGeom prst="rect">
+            <a:avLst/>
+          </a:prstGeom>
+          <a:noFill/>
+          <a:ln/>
+        </p:spPr>
+        <p:txBody>
+          <a:bodyPr wrap="square" lIns="0" tIns="0" rIns="0" bIns="0" rtlCol="0" anchor="ctr"/>
+          <a:lstStyle/>
+          <a:p>
+            <a:pPr algn="ctr" indent="0" marL="0">
+              <a:buNone/>
+            </a:pPr>
+            <a:r>
+              <a:rPr lang="en-US" sz="1800" b="1" dirty="0">
+                <a:solidFill>
+                  <a:srgbClr val="0068B7"/>
+                </a:solidFill>
+                <a:latin typeface="Aptos" pitchFamily="34" charset="0"/>
+                <a:ea typeface="Aptos" pitchFamily="34" charset="-122"/>
+                <a:cs typeface="Aptos" pitchFamily="34" charset="-120"/>
+              </a:rPr>
+              <a:t>â†’</a:t>
+            </a:r>
+            <a:endParaRPr lang="en-US" sz="1800" dirty="0"/>
+          </a:p>
+        </p:txBody>
+      </p:sp>
+      <p:sp>
+        <p:nvSpPr>
+          <p:cNvPr id="19" name="Shape 17"/>
+          <p:cNvSpPr/>
+          <p:nvPr/>
+        </p:nvSpPr>
+        <p:spPr>
+          <a:xfrm>
+            <a:off x="10213848" y="3730752"/>
+            <a:ext cx="1033272" cy="749808"/>
+          </a:xfrm>
+          <a:prstGeom prst="roundRect">
+            <a:avLst>
+              <a:gd name="adj" fmla="val 14634"/>
+            </a:avLst>
+          </a:prstGeom>
+          <a:solidFill>
+            <a:srgbClr val="6A4CA3"/>
+          </a:solidFill>
+          <a:ln w="12700">
+            <a:solidFill>
+              <a:srgbClr val="6A4CA3"/>
+            </a:solidFill>
+            <a:prstDash val="solid"/>
+          </a:ln>
+        </p:spPr>
+      </p:sp>
+      <p:sp>
+        <p:nvSpPr>
+          <p:cNvPr id="20" name="Text 18"/>
+          <p:cNvSpPr/>
+          <p:nvPr/>
+        </p:nvSpPr>
+        <p:spPr>
+          <a:xfrm>
+            <a:off x="10287000" y="3922776"/>
+            <a:ext cx="886968" cy="310896"/>
+          </a:xfrm>
+          <a:prstGeom prst="rect">
+            <a:avLst/>
+          </a:prstGeom>
+          <a:noFill/>
+          <a:ln/>
+        </p:spPr>
+        <p:txBody>
+          <a:bodyPr wrap="square" lIns="0" tIns="0" rIns="0" bIns="0" rtlCol="0" anchor="ctr">
+            <a:normAutofit/>
+          </a:bodyPr>
+          <a:lstStyle/>
+          <a:p>
+            <a:pPr algn="ctr" indent="0" marL="0">
+              <a:buNone/>
+            </a:pPr>
+            <a:r>
+              <a:rPr lang="en-US" sz="1500" b="1" dirty="0">
+                <a:solidFill>
+                  <a:srgbClr val="FFFFFF"/>
+                </a:solidFill>
+                <a:latin typeface="Aptos" pitchFamily="34" charset="0"/>
+                <a:ea typeface="Aptos" pitchFamily="34" charset="-122"/>
+                <a:cs typeface="Aptos" pitchFamily="34" charset="-120"/>
+              </a:rPr>
+              <a:t>Document</a:t>
+            </a:r>
+            <a:endParaRPr lang="en-US" sz="1500" dirty="0"/>
           </a:p>
         </p:txBody>
       </p:sp>
@@ -9439,7 +10012,7 @@
                 <a:ea typeface="Aptos" pitchFamily="34" charset="-122"/>
                 <a:cs typeface="Aptos" pitchFamily="34" charset="-120"/>
               </a:rPr>
-              <a:t>© Paula Soper</a:t>
+              <a:t>Â© Paula Soper</a:t>
             </a:r>
             <a:endParaRPr lang="en-US" sz="800" dirty="0"/>
           </a:p>
@@ -9447,7 +10020,46 @@
       </p:sp>
       <p:sp>
         <p:nvSpPr>
-          <p:cNvPr id="7" name="Shape 5"/>
+          <p:cNvPr id="7" name="Text 5"/>
+          <p:cNvSpPr/>
+          <p:nvPr/>
+        </p:nvSpPr>
+        <p:spPr>
+          <a:xfrm>
+            <a:off x="11137392" y="6510528"/>
+            <a:ext cx="411480" cy="201168"/>
+          </a:xfrm>
+          <a:prstGeom prst="rect">
+            <a:avLst/>
+          </a:prstGeom>
+          <a:noFill/>
+          <a:ln/>
+        </p:spPr>
+        <p:txBody>
+          <a:bodyPr wrap="square" lIns="0" tIns="0" rIns="0" bIns="0" rtlCol="0" anchor="ctr"/>
+          <a:lstStyle/>
+          <a:p>
+            <a:pPr algn="r" indent="0" marL="0">
+              <a:buNone/>
+            </a:pPr>
+            <a:r>
+              <a:rPr lang="en-US" sz="900" dirty="0">
+                <a:solidFill>
+                  <a:srgbClr val="5F7181"/>
+                </a:solidFill>
+                <a:latin typeface="Aptos" pitchFamily="34" charset="0"/>
+                <a:ea typeface="Aptos" pitchFamily="34" charset="-122"/>
+                <a:cs typeface="Aptos" pitchFamily="34" charset="-120"/>
+              </a:rPr>
+              <a:t>20</a:t>
+            </a:r>
+            <a:endParaRPr lang="en-US" sz="900" dirty="0"/>
+          </a:p>
+        </p:txBody>
+      </p:sp>
+      <p:sp>
+        <p:nvSpPr>
+          <p:cNvPr id="8" name="Shape 6"/>
           <p:cNvSpPr/>
           <p:nvPr/>
         </p:nvSpPr>
@@ -9472,7 +10084,7 @@
       </p:sp>
       <p:sp>
         <p:nvSpPr>
-          <p:cNvPr id="8" name="Text 6"/>
+          <p:cNvPr id="9" name="Text 7"/>
           <p:cNvSpPr/>
           <p:nvPr/>
         </p:nvSpPr>
@@ -9511,14 +10123,14 @@
       </p:sp>
       <p:sp>
         <p:nvSpPr>
-          <p:cNvPr id="9" name="Text 7"/>
+          <p:cNvPr id="10" name="Text 8"/>
           <p:cNvSpPr/>
           <p:nvPr/>
         </p:nvSpPr>
         <p:spPr>
           <a:xfrm>
             <a:off x="640080" y="621792"/>
-            <a:ext cx="10881360" cy="566928"/>
+            <a:ext cx="10881360" cy="713232"/>
           </a:xfrm>
           <a:prstGeom prst="rect">
             <a:avLst/>
@@ -9536,7 +10148,7 @@
               <a:buNone/>
             </a:pPr>
             <a:r>
-              <a:rPr lang="en-US" sz="2700" b="1" dirty="0">
+              <a:rPr lang="en-US" sz="3400" b="1" dirty="0">
                 <a:solidFill>
                   <a:srgbClr val="003A63"/>
                 </a:solidFill>
@@ -9546,20 +10158,20 @@
               </a:rPr>
               <a:t>References and Resources</a:t>
             </a:r>
-            <a:endParaRPr lang="en-US" sz="2700" dirty="0"/>
-          </a:p>
-        </p:txBody>
-      </p:sp>
-      <p:sp>
-        <p:nvSpPr>
-          <p:cNvPr id="10" name="Text 8"/>
-          <p:cNvSpPr/>
-          <p:nvPr/>
-        </p:nvSpPr>
-        <p:spPr>
-          <a:xfrm>
-            <a:off x="868680" y="1417320"/>
-            <a:ext cx="6675120" cy="4434840"/>
+            <a:endParaRPr lang="en-US" sz="3400" dirty="0"/>
+          </a:p>
+        </p:txBody>
+      </p:sp>
+      <p:sp>
+        <p:nvSpPr>
+          <p:cNvPr id="11" name="Text 9"/>
+          <p:cNvSpPr/>
+          <p:nvPr/>
+        </p:nvSpPr>
+        <p:spPr>
+          <a:xfrm>
+            <a:off x="868680" y="1508760"/>
+            <a:ext cx="6537960" cy="4160520"/>
           </a:xfrm>
           <a:prstGeom prst="rect">
             <a:avLst/>
@@ -9574,7 +10186,7 @@
           <a:lstStyle/>
           <a:p>
             <a:r>
-              <a:rPr lang="en-US" sz="1700" dirty="0">
+              <a:rPr lang="en-US" sz="2100" dirty="0">
                 <a:solidFill>
                   <a:srgbClr val="17364A"/>
                 </a:solidFill>
@@ -9584,11 +10196,11 @@
               </a:rPr>
               <a:t>NIST AI Risk Management Framework: https://www.nist.gov/itl/ai-risk-management-framework</a:t>
             </a:r>
-            <a:endParaRPr lang="en-US" sz="1700" dirty="0"/>
-          </a:p>
-          <a:p>
-            <a:r>
-              <a:rPr lang="en-US" sz="1700" dirty="0">
+            <a:endParaRPr lang="en-US" sz="2100" dirty="0"/>
+          </a:p>
+          <a:p>
+            <a:r>
+              <a:rPr lang="en-US" sz="2100" dirty="0">
                 <a:solidFill>
                   <a:srgbClr val="17364A"/>
                 </a:solidFill>
@@ -9598,11 +10210,11 @@
               </a:rPr>
               <a:t>NIST Privacy Framework and differential privacy resources</a:t>
             </a:r>
-            <a:endParaRPr lang="en-US" sz="1700" dirty="0"/>
-          </a:p>
-          <a:p>
-            <a:r>
-              <a:rPr lang="en-US" sz="1700" dirty="0">
+            <a:endParaRPr lang="en-US" sz="2100" dirty="0"/>
+          </a:p>
+          <a:p>
+            <a:r>
+              <a:rPr lang="en-US" sz="2100" dirty="0">
                 <a:solidFill>
                   <a:srgbClr val="17364A"/>
                 </a:solidFill>
@@ -9612,27 +10224,13 @@
               </a:rPr>
               <a:t>NIST Generative AI Profile:.</a:t>
             </a:r>
-            <a:endParaRPr lang="en-US" sz="1700" dirty="0"/>
-          </a:p>
-          <a:p>
-            <a:r>
-              <a:rPr lang="en-US" sz="1700" dirty="0">
-                <a:solidFill>
-                  <a:srgbClr val="17364A"/>
-                </a:solidFill>
-                <a:latin typeface="Aptos" pitchFamily="34" charset="0"/>
-                <a:ea typeface="Aptos" pitchFamily="34" charset="-122"/>
-                <a:cs typeface="Aptos" pitchFamily="34" charset="-120"/>
-              </a:rPr>
-              <a:t>CDC Public Health Data Strategy and Data Modernization resources:.</a:t>
-            </a:r>
-            <a:endParaRPr lang="en-US" sz="1700" dirty="0"/>
-          </a:p>
-        </p:txBody>
-      </p:sp>
-      <p:sp>
-        <p:nvSpPr>
-          <p:cNvPr id="11" name="Shape 9"/>
+            <a:endParaRPr lang="en-US" sz="2100" dirty="0"/>
+          </a:p>
+        </p:txBody>
+      </p:sp>
+      <p:sp>
+        <p:nvSpPr>
+          <p:cNvPr id="12" name="Shape 10"/>
           <p:cNvSpPr/>
           <p:nvPr/>
         </p:nvSpPr>
@@ -9659,14 +10257,14 @@
       </p:sp>
       <p:sp>
         <p:nvSpPr>
-          <p:cNvPr id="12" name="Text 10"/>
+          <p:cNvPr id="13" name="Text 11"/>
           <p:cNvSpPr/>
           <p:nvPr/>
         </p:nvSpPr>
         <p:spPr>
           <a:xfrm>
             <a:off x="8074152" y="1563624"/>
-            <a:ext cx="2825496" cy="201168"/>
+            <a:ext cx="2825496" cy="256032"/>
           </a:xfrm>
           <a:prstGeom prst="rect">
             <a:avLst/>
@@ -9682,7 +10280,7 @@
               <a:buNone/>
             </a:pPr>
             <a:r>
-              <a:rPr lang="en-US" sz="950" b="1" dirty="0">
+              <a:rPr lang="en-US" sz="1300" b="1" dirty="0">
                 <a:solidFill>
                   <a:srgbClr val="0068B7"/>
                 </a:solidFill>
@@ -9692,20 +10290,20 @@
               </a:rPr>
               <a:t>Key idea</a:t>
             </a:r>
-            <a:endParaRPr lang="en-US" sz="950" dirty="0"/>
-          </a:p>
-        </p:txBody>
-      </p:sp>
-      <p:sp>
-        <p:nvSpPr>
-          <p:cNvPr id="13" name="Text 11"/>
-          <p:cNvSpPr/>
-          <p:nvPr/>
-        </p:nvSpPr>
-        <p:spPr>
-          <a:xfrm>
-            <a:off x="8074152" y="1856232"/>
-            <a:ext cx="2825496" cy="1261872"/>
+            <a:endParaRPr lang="en-US" sz="1300" dirty="0"/>
+          </a:p>
+        </p:txBody>
+      </p:sp>
+      <p:sp>
+        <p:nvSpPr>
+          <p:cNvPr id="14" name="Text 12"/>
+          <p:cNvSpPr/>
+          <p:nvPr/>
+        </p:nvSpPr>
+        <p:spPr>
+          <a:xfrm>
+            <a:off x="8074152" y="1920240"/>
+            <a:ext cx="2825496" cy="1188720"/>
           </a:xfrm>
           <a:prstGeom prst="rect">
             <a:avLst/>
@@ -9723,7 +10321,7 @@
               <a:buNone/>
             </a:pPr>
             <a:r>
-              <a:rPr lang="en-US" sz="1250" dirty="0">
+              <a:rPr lang="en-US" sz="1550" dirty="0">
                 <a:solidFill>
                   <a:srgbClr val="17364A"/>
                 </a:solidFill>
@@ -9733,13 +10331,13 @@
               </a:rPr>
               <a:t>NIST AI Risk Management Framework: https://www.nist.gov/itl/ai-risk-management-framework</a:t>
             </a:r>
-            <a:endParaRPr lang="en-US" sz="1250" dirty="0"/>
-          </a:p>
-        </p:txBody>
-      </p:sp>
-      <p:sp>
-        <p:nvSpPr>
-          <p:cNvPr id="14" name="Shape 12"/>
+            <a:endParaRPr lang="en-US" sz="1550" dirty="0"/>
+          </a:p>
+        </p:txBody>
+      </p:sp>
+      <p:sp>
+        <p:nvSpPr>
+          <p:cNvPr id="15" name="Shape 13"/>
           <p:cNvSpPr/>
           <p:nvPr/>
         </p:nvSpPr>
@@ -9766,14 +10364,14 @@
       </p:sp>
       <p:sp>
         <p:nvSpPr>
-          <p:cNvPr id="15" name="Text 13"/>
+          <p:cNvPr id="16" name="Text 14"/>
           <p:cNvSpPr/>
           <p:nvPr/>
         </p:nvSpPr>
         <p:spPr>
           <a:xfrm>
             <a:off x="8074152" y="3666744"/>
-            <a:ext cx="2825496" cy="201168"/>
+            <a:ext cx="2825496" cy="256032"/>
           </a:xfrm>
           <a:prstGeom prst="rect">
             <a:avLst/>
@@ -9789,7 +10387,7 @@
               <a:buNone/>
             </a:pPr>
             <a:r>
-              <a:rPr lang="en-US" sz="950" b="1" dirty="0">
+              <a:rPr lang="en-US" sz="1300" b="1" dirty="0">
                 <a:solidFill>
                   <a:srgbClr val="0068B7"/>
                 </a:solidFill>
@@ -9799,20 +10397,20 @@
               </a:rPr>
               <a:t>Use this for</a:t>
             </a:r>
-            <a:endParaRPr lang="en-US" sz="950" dirty="0"/>
-          </a:p>
-        </p:txBody>
-      </p:sp>
-      <p:sp>
-        <p:nvSpPr>
-          <p:cNvPr id="16" name="Text 14"/>
-          <p:cNvSpPr/>
-          <p:nvPr/>
-        </p:nvSpPr>
-        <p:spPr>
-          <a:xfrm>
-            <a:off x="8074152" y="3959352"/>
-            <a:ext cx="2825496" cy="1170432"/>
+            <a:endParaRPr lang="en-US" sz="1300" dirty="0"/>
+          </a:p>
+        </p:txBody>
+      </p:sp>
+      <p:sp>
+        <p:nvSpPr>
+          <p:cNvPr id="17" name="Text 15"/>
+          <p:cNvSpPr/>
+          <p:nvPr/>
+        </p:nvSpPr>
+        <p:spPr>
+          <a:xfrm>
+            <a:off x="8074152" y="4023360"/>
+            <a:ext cx="2825496" cy="1097280"/>
           </a:xfrm>
           <a:prstGeom prst="rect">
             <a:avLst/>
@@ -9830,7 +10428,7 @@
               <a:buNone/>
             </a:pPr>
             <a:r>
-              <a:rPr lang="en-US" sz="1250" dirty="0">
+              <a:rPr lang="en-US" sz="1550" dirty="0">
                 <a:solidFill>
                   <a:srgbClr val="17364A"/>
                 </a:solidFill>
@@ -9840,7 +10438,7 @@
               </a:rPr>
               <a:t>Connect the concept to public health decisions, safeguards, documentation, or implementation work.</a:t>
             </a:r>
-            <a:endParaRPr lang="en-US" sz="1250" dirty="0"/>
+            <a:endParaRPr lang="en-US" sz="1550" dirty="0"/>
           </a:p>
         </p:txBody>
       </p:sp>
@@ -10037,7 +10635,7 @@
                 <a:ea typeface="Aptos" pitchFamily="34" charset="-122"/>
                 <a:cs typeface="Aptos" pitchFamily="34" charset="-120"/>
               </a:rPr>
-              <a:t>© Paula Soper</a:t>
+              <a:t>Â© Paula Soper</a:t>
             </a:r>
             <a:endParaRPr lang="en-US" sz="800" dirty="0"/>
           </a:p>
@@ -10051,8 +10649,47 @@
         </p:nvSpPr>
         <p:spPr>
           <a:xfrm>
+            <a:off x="11137392" y="6510528"/>
+            <a:ext cx="411480" cy="201168"/>
+          </a:xfrm>
+          <a:prstGeom prst="rect">
+            <a:avLst/>
+          </a:prstGeom>
+          <a:noFill/>
+          <a:ln/>
+        </p:spPr>
+        <p:txBody>
+          <a:bodyPr wrap="square" lIns="0" tIns="0" rIns="0" bIns="0" rtlCol="0" anchor="ctr"/>
+          <a:lstStyle/>
+          <a:p>
+            <a:pPr algn="r" indent="0" marL="0">
+              <a:buNone/>
+            </a:pPr>
+            <a:r>
+              <a:rPr lang="en-US" sz="900" dirty="0">
+                <a:solidFill>
+                  <a:srgbClr val="5F7181"/>
+                </a:solidFill>
+                <a:latin typeface="Aptos" pitchFamily="34" charset="0"/>
+                <a:ea typeface="Aptos" pitchFamily="34" charset="-122"/>
+                <a:cs typeface="Aptos" pitchFamily="34" charset="-120"/>
+              </a:rPr>
+              <a:t>21</a:t>
+            </a:r>
+            <a:endParaRPr lang="en-US" sz="900" dirty="0"/>
+          </a:p>
+        </p:txBody>
+      </p:sp>
+      <p:sp>
+        <p:nvSpPr>
+          <p:cNvPr id="8" name="Text 6"/>
+          <p:cNvSpPr/>
+          <p:nvPr/>
+        </p:nvSpPr>
+        <p:spPr>
+          <a:xfrm>
             <a:off x="640080" y="658368"/>
-            <a:ext cx="10881360" cy="566928"/>
+            <a:ext cx="10881360" cy="713232"/>
           </a:xfrm>
           <a:prstGeom prst="rect">
             <a:avLst/>
@@ -10070,7 +10707,7 @@
               <a:buNone/>
             </a:pPr>
             <a:r>
-              <a:rPr lang="en-US" sz="2700" b="1" dirty="0">
+              <a:rPr lang="en-US" sz="3400" b="1" dirty="0">
                 <a:solidFill>
                   <a:srgbClr val="003A63"/>
                 </a:solidFill>
@@ -10080,20 +10717,20 @@
               </a:rPr>
               <a:t>References and Resources Continued</a:t>
             </a:r>
-            <a:endParaRPr lang="en-US" sz="2700" dirty="0"/>
-          </a:p>
-        </p:txBody>
-      </p:sp>
-      <p:sp>
-        <p:nvSpPr>
-          <p:cNvPr id="8" name="Text 6"/>
-          <p:cNvSpPr/>
-          <p:nvPr/>
-        </p:nvSpPr>
-        <p:spPr>
-          <a:xfrm>
-            <a:off x="868680" y="1417320"/>
-            <a:ext cx="6675120" cy="4434840"/>
+            <a:endParaRPr lang="en-US" sz="3400" dirty="0"/>
+          </a:p>
+        </p:txBody>
+      </p:sp>
+      <p:sp>
+        <p:nvSpPr>
+          <p:cNvPr id="9" name="Text 7"/>
+          <p:cNvSpPr/>
+          <p:nvPr/>
+        </p:nvSpPr>
+        <p:spPr>
+          <a:xfrm>
+            <a:off x="868680" y="1508760"/>
+            <a:ext cx="6537960" cy="4160520"/>
           </a:xfrm>
           <a:prstGeom prst="rect">
             <a:avLst/>
@@ -10108,7 +10745,7 @@
           <a:lstStyle/>
           <a:p>
             <a:r>
-              <a:rPr lang="en-US" sz="1700" dirty="0">
+              <a:rPr lang="en-US" sz="2100" dirty="0">
                 <a:solidFill>
                   <a:srgbClr val="17364A"/>
                 </a:solidFill>
@@ -10118,13 +10755,13 @@
               </a:rPr>
               <a:t>Agency privacy, cybersecurity, data governance, procurement, and records management policies</a:t>
             </a:r>
-            <a:endParaRPr lang="en-US" sz="1700" dirty="0"/>
-          </a:p>
-        </p:txBody>
-      </p:sp>
-      <p:sp>
-        <p:nvSpPr>
-          <p:cNvPr id="9" name="Shape 7"/>
+            <a:endParaRPr lang="en-US" sz="2100" dirty="0"/>
+          </a:p>
+        </p:txBody>
+      </p:sp>
+      <p:sp>
+        <p:nvSpPr>
+          <p:cNvPr id="10" name="Shape 8"/>
           <p:cNvSpPr/>
           <p:nvPr/>
         </p:nvSpPr>
@@ -10151,14 +10788,14 @@
       </p:sp>
       <p:sp>
         <p:nvSpPr>
-          <p:cNvPr id="10" name="Text 8"/>
+          <p:cNvPr id="11" name="Text 9"/>
           <p:cNvSpPr/>
           <p:nvPr/>
         </p:nvSpPr>
         <p:spPr>
           <a:xfrm>
             <a:off x="8074152" y="1563624"/>
-            <a:ext cx="2825496" cy="201168"/>
+            <a:ext cx="2825496" cy="256032"/>
           </a:xfrm>
           <a:prstGeom prst="rect">
             <a:avLst/>
@@ -10174,7 +10811,7 @@
               <a:buNone/>
             </a:pPr>
             <a:r>
-              <a:rPr lang="en-US" sz="950" b="1" dirty="0">
+              <a:rPr lang="en-US" sz="1300" b="1" dirty="0">
                 <a:solidFill>
                   <a:srgbClr val="0068B7"/>
                 </a:solidFill>
@@ -10184,20 +10821,20 @@
               </a:rPr>
               <a:t>Key idea</a:t>
             </a:r>
-            <a:endParaRPr lang="en-US" sz="950" dirty="0"/>
-          </a:p>
-        </p:txBody>
-      </p:sp>
-      <p:sp>
-        <p:nvSpPr>
-          <p:cNvPr id="11" name="Text 9"/>
-          <p:cNvSpPr/>
-          <p:nvPr/>
-        </p:nvSpPr>
-        <p:spPr>
-          <a:xfrm>
-            <a:off x="8074152" y="1856232"/>
-            <a:ext cx="2825496" cy="1261872"/>
+            <a:endParaRPr lang="en-US" sz="1300" dirty="0"/>
+          </a:p>
+        </p:txBody>
+      </p:sp>
+      <p:sp>
+        <p:nvSpPr>
+          <p:cNvPr id="12" name="Text 10"/>
+          <p:cNvSpPr/>
+          <p:nvPr/>
+        </p:nvSpPr>
+        <p:spPr>
+          <a:xfrm>
+            <a:off x="8074152" y="1920240"/>
+            <a:ext cx="2825496" cy="1188720"/>
           </a:xfrm>
           <a:prstGeom prst="rect">
             <a:avLst/>
@@ -10215,7 +10852,7 @@
               <a:buNone/>
             </a:pPr>
             <a:r>
-              <a:rPr lang="en-US" sz="1250" dirty="0">
+              <a:rPr lang="en-US" sz="1550" dirty="0">
                 <a:solidFill>
                   <a:srgbClr val="17364A"/>
                 </a:solidFill>
@@ -10225,13 +10862,13 @@
               </a:rPr>
               <a:t>Agency privacy, cybersecurity, data governance, procurement, and records management policies</a:t>
             </a:r>
-            <a:endParaRPr lang="en-US" sz="1250" dirty="0"/>
-          </a:p>
-        </p:txBody>
-      </p:sp>
-      <p:sp>
-        <p:nvSpPr>
-          <p:cNvPr id="12" name="Shape 10"/>
+            <a:endParaRPr lang="en-US" sz="1550" dirty="0"/>
+          </a:p>
+        </p:txBody>
+      </p:sp>
+      <p:sp>
+        <p:nvSpPr>
+          <p:cNvPr id="13" name="Shape 11"/>
           <p:cNvSpPr/>
           <p:nvPr/>
         </p:nvSpPr>
@@ -10258,14 +10895,14 @@
       </p:sp>
       <p:sp>
         <p:nvSpPr>
-          <p:cNvPr id="13" name="Text 11"/>
+          <p:cNvPr id="14" name="Text 12"/>
           <p:cNvSpPr/>
           <p:nvPr/>
         </p:nvSpPr>
         <p:spPr>
           <a:xfrm>
             <a:off x="8074152" y="3666744"/>
-            <a:ext cx="2825496" cy="201168"/>
+            <a:ext cx="2825496" cy="256032"/>
           </a:xfrm>
           <a:prstGeom prst="rect">
             <a:avLst/>
@@ -10281,7 +10918,7 @@
               <a:buNone/>
             </a:pPr>
             <a:r>
-              <a:rPr lang="en-US" sz="950" b="1" dirty="0">
+              <a:rPr lang="en-US" sz="1300" b="1" dirty="0">
                 <a:solidFill>
                   <a:srgbClr val="0068B7"/>
                 </a:solidFill>
@@ -10291,20 +10928,20 @@
               </a:rPr>
               <a:t>Use this for</a:t>
             </a:r>
-            <a:endParaRPr lang="en-US" sz="950" dirty="0"/>
-          </a:p>
-        </p:txBody>
-      </p:sp>
-      <p:sp>
-        <p:nvSpPr>
-          <p:cNvPr id="14" name="Text 12"/>
-          <p:cNvSpPr/>
-          <p:nvPr/>
-        </p:nvSpPr>
-        <p:spPr>
-          <a:xfrm>
-            <a:off x="8074152" y="3959352"/>
-            <a:ext cx="2825496" cy="1170432"/>
+            <a:endParaRPr lang="en-US" sz="1300" dirty="0"/>
+          </a:p>
+        </p:txBody>
+      </p:sp>
+      <p:sp>
+        <p:nvSpPr>
+          <p:cNvPr id="15" name="Text 13"/>
+          <p:cNvSpPr/>
+          <p:nvPr/>
+        </p:nvSpPr>
+        <p:spPr>
+          <a:xfrm>
+            <a:off x="8074152" y="4023360"/>
+            <a:ext cx="2825496" cy="1097280"/>
           </a:xfrm>
           <a:prstGeom prst="rect">
             <a:avLst/>
@@ -10322,7 +10959,7 @@
               <a:buNone/>
             </a:pPr>
             <a:r>
-              <a:rPr lang="en-US" sz="1250" dirty="0">
+              <a:rPr lang="en-US" sz="1550" dirty="0">
                 <a:solidFill>
                   <a:srgbClr val="17364A"/>
                 </a:solidFill>
@@ -10332,7 +10969,7 @@
               </a:rPr>
               <a:t>Connect the concept to public health decisions, safeguards, documentation, or implementation work.</a:t>
             </a:r>
-            <a:endParaRPr lang="en-US" sz="1250" dirty="0"/>
+            <a:endParaRPr lang="en-US" sz="1550" dirty="0"/>
           </a:p>
         </p:txBody>
       </p:sp>
@@ -10529,7 +11166,7 @@
                 <a:ea typeface="Aptos" pitchFamily="34" charset="-122"/>
                 <a:cs typeface="Aptos" pitchFamily="34" charset="-120"/>
               </a:rPr>
-              <a:t>© Paula Soper</a:t>
+              <a:t>Â© Paula Soper</a:t>
             </a:r>
             <a:endParaRPr lang="en-US" sz="800" dirty="0"/>
           </a:p>
@@ -10543,8 +11180,47 @@
         </p:nvSpPr>
         <p:spPr>
           <a:xfrm>
+            <a:off x="11137392" y="6510528"/>
+            <a:ext cx="411480" cy="201168"/>
+          </a:xfrm>
+          <a:prstGeom prst="rect">
+            <a:avLst/>
+          </a:prstGeom>
+          <a:noFill/>
+          <a:ln/>
+        </p:spPr>
+        <p:txBody>
+          <a:bodyPr wrap="square" lIns="0" tIns="0" rIns="0" bIns="0" rtlCol="0" anchor="ctr"/>
+          <a:lstStyle/>
+          <a:p>
+            <a:pPr algn="r" indent="0" marL="0">
+              <a:buNone/>
+            </a:pPr>
+            <a:r>
+              <a:rPr lang="en-US" sz="900" dirty="0">
+                <a:solidFill>
+                  <a:srgbClr val="5F7181"/>
+                </a:solidFill>
+                <a:latin typeface="Aptos" pitchFamily="34" charset="0"/>
+                <a:ea typeface="Aptos" pitchFamily="34" charset="-122"/>
+                <a:cs typeface="Aptos" pitchFamily="34" charset="-120"/>
+              </a:rPr>
+              <a:t>3</a:t>
+            </a:r>
+            <a:endParaRPr lang="en-US" sz="900" dirty="0"/>
+          </a:p>
+        </p:txBody>
+      </p:sp>
+      <p:sp>
+        <p:nvSpPr>
+          <p:cNvPr id="8" name="Text 6"/>
+          <p:cNvSpPr/>
+          <p:nvPr/>
+        </p:nvSpPr>
+        <p:spPr>
+          <a:xfrm>
             <a:off x="640080" y="658368"/>
-            <a:ext cx="10881360" cy="566928"/>
+            <a:ext cx="10881360" cy="713232"/>
           </a:xfrm>
           <a:prstGeom prst="rect">
             <a:avLst/>
@@ -10562,7 +11238,7 @@
               <a:buNone/>
             </a:pPr>
             <a:r>
-              <a:rPr lang="en-US" sz="2700" b="1" dirty="0">
+              <a:rPr lang="en-US" sz="3400" b="1" dirty="0">
                 <a:solidFill>
                   <a:srgbClr val="003A63"/>
                 </a:solidFill>
@@ -10572,20 +11248,20 @@
               </a:rPr>
               <a:t>How this module connects to the playbook</a:t>
             </a:r>
-            <a:endParaRPr lang="en-US" sz="2700" dirty="0"/>
-          </a:p>
-        </p:txBody>
-      </p:sp>
-      <p:sp>
-        <p:nvSpPr>
-          <p:cNvPr id="8" name="Text 6"/>
-          <p:cNvSpPr/>
-          <p:nvPr/>
-        </p:nvSpPr>
-        <p:spPr>
-          <a:xfrm>
-            <a:off x="868680" y="1417320"/>
-            <a:ext cx="6903720" cy="4480560"/>
+            <a:endParaRPr lang="en-US" sz="3400" dirty="0"/>
+          </a:p>
+        </p:txBody>
+      </p:sp>
+      <p:sp>
+        <p:nvSpPr>
+          <p:cNvPr id="9" name="Text 7"/>
+          <p:cNvSpPr/>
+          <p:nvPr/>
+        </p:nvSpPr>
+        <p:spPr>
+          <a:xfrm>
+            <a:off x="868680" y="1508760"/>
+            <a:ext cx="6812280" cy="3977640"/>
           </a:xfrm>
           <a:prstGeom prst="rect">
             <a:avLst/>
@@ -10600,7 +11276,7 @@
           <a:lstStyle/>
           <a:p>
             <a:r>
-              <a:rPr lang="en-US" sz="1540" dirty="0">
+              <a:rPr lang="en-US" sz="1900" dirty="0">
                 <a:solidFill>
                   <a:srgbClr val="17364A"/>
                 </a:solidFill>
@@ -10608,13 +11284,13 @@
                 <a:ea typeface="Aptos" pitchFamily="34" charset="-122"/>
                 <a:cs typeface="Aptos" pitchFamily="34" charset="-120"/>
               </a:rPr>
-              <a:t>Play 11: Build and Deploy AI Solutions - This lesson informs Play 11 by helping learners connect the lesson topic to build and deploy.</a:t>
-            </a:r>
-            <a:endParaRPr lang="en-US" sz="1540" dirty="0"/>
-          </a:p>
-          <a:p>
-            <a:r>
-              <a:rPr lang="en-US" sz="1540" dirty="0">
+              <a:t>Play 11: Build and Deploy AI Solutions - This lesson informs Play 11 by helping learners connect the lesson.</a:t>
+            </a:r>
+            <a:endParaRPr lang="en-US" sz="1900" dirty="0"/>
+          </a:p>
+          <a:p>
+            <a:r>
+              <a:rPr lang="en-US" sz="1900" dirty="0">
                 <a:solidFill>
                   <a:srgbClr val="17364A"/>
                 </a:solidFill>
@@ -10622,13 +11298,13 @@
                 <a:ea typeface="Aptos" pitchFamily="34" charset="-122"/>
                 <a:cs typeface="Aptos" pitchFamily="34" charset="-120"/>
               </a:rPr>
-              <a:t>Play 2: Readiness Assessment - This lesson informs Play 2 by helping learners connect the lesson topic to readiness assessment work.</a:t>
-            </a:r>
-            <a:endParaRPr lang="en-US" sz="1540" dirty="0"/>
-          </a:p>
-          <a:p>
-            <a:r>
-              <a:rPr lang="en-US" sz="1540" dirty="0">
+              <a:t>Play 2: Readiness Assessment - This lesson informs Play 2 by helping learners connect the lesson topic to.</a:t>
+            </a:r>
+            <a:endParaRPr lang="en-US" sz="1900" dirty="0"/>
+          </a:p>
+          <a:p>
+            <a:r>
+              <a:rPr lang="en-US" sz="1900" dirty="0">
                 <a:solidFill>
                   <a:srgbClr val="17364A"/>
                 </a:solidFill>
@@ -10636,13 +11312,13 @@
                 <a:ea typeface="Aptos" pitchFamily="34" charset="-122"/>
                 <a:cs typeface="Aptos" pitchFamily="34" charset="-120"/>
               </a:rPr>
-              <a:t>Play 1: Vision &amp; Guardrails - This lesson informs Play 1 by helping learners connect the lesson topic to vision &amp; guardrails work in.</a:t>
-            </a:r>
-            <a:endParaRPr lang="en-US" sz="1540" dirty="0"/>
-          </a:p>
-          <a:p>
-            <a:r>
-              <a:rPr lang="en-US" sz="1540" dirty="0">
+              <a:t>Play 1: Vision &amp; Guardrails - This lesson informs Play 1 by helping learners connect the lesson topic to.</a:t>
+            </a:r>
+            <a:endParaRPr lang="en-US" sz="1900" dirty="0"/>
+          </a:p>
+          <a:p>
+            <a:r>
+              <a:rPr lang="en-US" sz="1900" dirty="0">
                 <a:solidFill>
                   <a:srgbClr val="17364A"/>
                 </a:solidFill>
@@ -10650,15 +11326,15 @@
                 <a:ea typeface="Aptos" pitchFamily="34" charset="-122"/>
                 <a:cs typeface="Aptos" pitchFamily="34" charset="-120"/>
               </a:rPr>
-              <a:t>Play 7: Prioritize Use Cases - This lesson informs Play 7 by helping learners connect the lesson topic to prioritize use cases work.</a:t>
-            </a:r>
-            <a:endParaRPr lang="en-US" sz="1540" dirty="0"/>
-          </a:p>
-        </p:txBody>
-      </p:sp>
-      <p:sp>
-        <p:nvSpPr>
-          <p:cNvPr id="9" name="Shape 7"/>
+              <a:t>Play 7: Prioritize Use Cases - This lesson informs Play 7 by helping learners connect the lesson topic to.</a:t>
+            </a:r>
+            <a:endParaRPr lang="en-US" sz="1900" dirty="0"/>
+          </a:p>
+        </p:txBody>
+      </p:sp>
+      <p:sp>
+        <p:nvSpPr>
+          <p:cNvPr id="10" name="Shape 8"/>
           <p:cNvSpPr/>
           <p:nvPr/>
         </p:nvSpPr>
@@ -10685,14 +11361,14 @@
       </p:sp>
       <p:sp>
         <p:nvSpPr>
-          <p:cNvPr id="10" name="Text 8"/>
+          <p:cNvPr id="11" name="Text 9"/>
           <p:cNvSpPr/>
           <p:nvPr/>
         </p:nvSpPr>
         <p:spPr>
           <a:xfrm>
             <a:off x="8211312" y="1563624"/>
-            <a:ext cx="2734056" cy="201168"/>
+            <a:ext cx="2734056" cy="256032"/>
           </a:xfrm>
           <a:prstGeom prst="rect">
             <a:avLst/>
@@ -10708,7 +11384,7 @@
               <a:buNone/>
             </a:pPr>
             <a:r>
-              <a:rPr lang="en-US" sz="950" b="1" dirty="0">
+              <a:rPr lang="en-US" sz="1300" b="1" dirty="0">
                 <a:solidFill>
                   <a:srgbClr val="0068B7"/>
                 </a:solidFill>
@@ -10718,20 +11394,20 @@
               </a:rPr>
               <a:t>Apply the lesson</a:t>
             </a:r>
-            <a:endParaRPr lang="en-US" sz="950" dirty="0"/>
-          </a:p>
-        </p:txBody>
-      </p:sp>
-      <p:sp>
-        <p:nvSpPr>
-          <p:cNvPr id="11" name="Text 9"/>
-          <p:cNvSpPr/>
-          <p:nvPr/>
-        </p:nvSpPr>
-        <p:spPr>
-          <a:xfrm>
-            <a:off x="8211312" y="1856232"/>
-            <a:ext cx="2734056" cy="1536192"/>
+            <a:endParaRPr lang="en-US" sz="1300" dirty="0"/>
+          </a:p>
+        </p:txBody>
+      </p:sp>
+      <p:sp>
+        <p:nvSpPr>
+          <p:cNvPr id="12" name="Text 10"/>
+          <p:cNvSpPr/>
+          <p:nvPr/>
+        </p:nvSpPr>
+        <p:spPr>
+          <a:xfrm>
+            <a:off x="8211312" y="1920240"/>
+            <a:ext cx="2734056" cy="1463040"/>
           </a:xfrm>
           <a:prstGeom prst="rect">
             <a:avLst/>
@@ -10749,7 +11425,7 @@
               <a:buNone/>
             </a:pPr>
             <a:r>
-              <a:rPr lang="en-US" sz="1250" dirty="0">
+              <a:rPr lang="en-US" sz="1550" dirty="0">
                 <a:solidFill>
                   <a:srgbClr val="17364A"/>
                 </a:solidFill>
@@ -10759,32 +11435,32 @@
               </a:rPr>
               <a:t>Use the related plays to identify decisions, participants, timing, approvals, and documentation needed for responsible implementation.</a:t>
             </a:r>
-            <a:endParaRPr lang="en-US" sz="1250" dirty="0"/>
-          </a:p>
-        </p:txBody>
-      </p:sp>
-      <p:sp>
-        <p:nvSpPr>
-          <p:cNvPr id="12" name="Shape 10"/>
-          <p:cNvSpPr/>
-          <p:nvPr/>
-        </p:nvSpPr>
-        <p:spPr>
-          <a:xfrm>
-            <a:off x="8046720" y="3794760"/>
-            <a:ext cx="3063240" cy="1508760"/>
+            <a:endParaRPr lang="en-US" sz="1550" dirty="0"/>
+          </a:p>
+        </p:txBody>
+      </p:sp>
+      <p:sp>
+        <p:nvSpPr>
+          <p:cNvPr id="13" name="Shape 11"/>
+          <p:cNvSpPr/>
+          <p:nvPr/>
+        </p:nvSpPr>
+        <p:spPr>
+          <a:xfrm>
+            <a:off x="7818120" y="3977640"/>
+            <a:ext cx="972312" cy="749808"/>
           </a:xfrm>
           <a:prstGeom prst="roundRect">
             <a:avLst>
-              <a:gd name="adj" fmla="val 7273"/>
+              <a:gd name="adj" fmla="val 14634"/>
             </a:avLst>
           </a:prstGeom>
           <a:solidFill>
-            <a:srgbClr val="FFF4D9"/>
+            <a:srgbClr val="0068B7"/>
           </a:solidFill>
           <a:ln w="12700">
             <a:solidFill>
-              <a:srgbClr val="B9D7E6"/>
+              <a:srgbClr val="0068B7"/>
             </a:solidFill>
             <a:prstDash val="solid"/>
           </a:ln>
@@ -10792,81 +11468,256 @@
       </p:sp>
       <p:sp>
         <p:nvSpPr>
-          <p:cNvPr id="13" name="Text 11"/>
-          <p:cNvSpPr/>
-          <p:nvPr/>
-        </p:nvSpPr>
-        <p:spPr>
-          <a:xfrm>
-            <a:off x="8211312" y="3941064"/>
-            <a:ext cx="2734056" cy="201168"/>
-          </a:xfrm>
-          <a:prstGeom prst="rect">
-            <a:avLst/>
-          </a:prstGeom>
-          <a:noFill/>
-          <a:ln/>
-        </p:spPr>
-        <p:txBody>
-          <a:bodyPr wrap="square" lIns="0" tIns="0" rIns="0" bIns="0" rtlCol="0" anchor="ctr"/>
-          <a:lstStyle/>
-          <a:p>
-            <a:pPr indent="0" marL="0">
-              <a:buNone/>
-            </a:pPr>
-            <a:r>
-              <a:rPr lang="en-US" sz="950" b="1" dirty="0">
-                <a:solidFill>
-                  <a:srgbClr val="0068B7"/>
-                </a:solidFill>
-                <a:latin typeface="Aptos" pitchFamily="34" charset="0"/>
-                <a:ea typeface="Aptos" pitchFamily="34" charset="-122"/>
-                <a:cs typeface="Aptos" pitchFamily="34" charset="-120"/>
-              </a:rPr>
-              <a:t>Keep in mind</a:t>
-            </a:r>
-            <a:endParaRPr lang="en-US" sz="950" dirty="0"/>
-          </a:p>
-        </p:txBody>
-      </p:sp>
-      <p:sp>
-        <p:nvSpPr>
           <p:cNvPr id="14" name="Text 12"/>
           <p:cNvSpPr/>
           <p:nvPr/>
         </p:nvSpPr>
         <p:spPr>
           <a:xfrm>
-            <a:off x="8211312" y="4233672"/>
-            <a:ext cx="2734056" cy="941832"/>
-          </a:xfrm>
-          <a:prstGeom prst="rect">
-            <a:avLst/>
-          </a:prstGeom>
-          <a:noFill/>
-          <a:ln/>
-        </p:spPr>
-        <p:txBody>
-          <a:bodyPr wrap="square" lIns="0" tIns="0" rIns="0" bIns="0" rtlCol="0" anchor="t">
+            <a:off x="7891272" y="4169664"/>
+            <a:ext cx="826008" cy="310896"/>
+          </a:xfrm>
+          <a:prstGeom prst="rect">
+            <a:avLst/>
+          </a:prstGeom>
+          <a:noFill/>
+          <a:ln/>
+        </p:spPr>
+        <p:txBody>
+          <a:bodyPr wrap="square" lIns="0" tIns="0" rIns="0" bIns="0" rtlCol="0" anchor="ctr">
             <a:normAutofit/>
           </a:bodyPr>
           <a:lstStyle/>
           <a:p>
-            <a:pPr indent="0" marL="0">
-              <a:buNone/>
-            </a:pPr>
-            <a:r>
-              <a:rPr lang="en-US" sz="1250" dirty="0">
-                <a:solidFill>
-                  <a:srgbClr val="17364A"/>
-                </a:solidFill>
-                <a:latin typeface="Aptos" pitchFamily="34" charset="0"/>
-                <a:ea typeface="Aptos" pitchFamily="34" charset="-122"/>
-                <a:cs typeface="Aptos" pitchFamily="34" charset="-120"/>
-              </a:rPr>
-              <a:t>The playbook connection helps turn training into agency work, not just individual knowledge.</a:t>
-            </a:r>
-            <a:endParaRPr lang="en-US" sz="1250" dirty="0"/>
+            <a:pPr algn="ctr" indent="0" marL="0">
+              <a:buNone/>
+            </a:pPr>
+            <a:r>
+              <a:rPr lang="en-US" sz="1500" b="1" dirty="0">
+                <a:solidFill>
+                  <a:srgbClr val="FFFFFF"/>
+                </a:solidFill>
+                <a:latin typeface="Aptos" pitchFamily="34" charset="0"/>
+                <a:ea typeface="Aptos" pitchFamily="34" charset="-122"/>
+                <a:cs typeface="Aptos" pitchFamily="34" charset="-120"/>
+              </a:rPr>
+              <a:t>Lesson</a:t>
+            </a:r>
+            <a:endParaRPr lang="en-US" sz="1500" dirty="0"/>
+          </a:p>
+        </p:txBody>
+      </p:sp>
+      <p:sp>
+        <p:nvSpPr>
+          <p:cNvPr id="15" name="Text 13"/>
+          <p:cNvSpPr/>
+          <p:nvPr/>
+        </p:nvSpPr>
+        <p:spPr>
+          <a:xfrm>
+            <a:off x="8817864" y="4187952"/>
+            <a:ext cx="201168" cy="256032"/>
+          </a:xfrm>
+          <a:prstGeom prst="rect">
+            <a:avLst/>
+          </a:prstGeom>
+          <a:noFill/>
+          <a:ln/>
+        </p:spPr>
+        <p:txBody>
+          <a:bodyPr wrap="square" lIns="0" tIns="0" rIns="0" bIns="0" rtlCol="0" anchor="ctr"/>
+          <a:lstStyle/>
+          <a:p>
+            <a:pPr algn="ctr" indent="0" marL="0">
+              <a:buNone/>
+            </a:pPr>
+            <a:r>
+              <a:rPr lang="en-US" sz="1800" b="1" dirty="0">
+                <a:solidFill>
+                  <a:srgbClr val="0068B7"/>
+                </a:solidFill>
+                <a:latin typeface="Aptos" pitchFamily="34" charset="0"/>
+                <a:ea typeface="Aptos" pitchFamily="34" charset="-122"/>
+                <a:cs typeface="Aptos" pitchFamily="34" charset="-120"/>
+              </a:rPr>
+              <a:t>â†’</a:t>
+            </a:r>
+            <a:endParaRPr lang="en-US" sz="1800" dirty="0"/>
+          </a:p>
+        </p:txBody>
+      </p:sp>
+      <p:sp>
+        <p:nvSpPr>
+          <p:cNvPr id="16" name="Shape 14"/>
+          <p:cNvSpPr/>
+          <p:nvPr/>
+        </p:nvSpPr>
+        <p:spPr>
+          <a:xfrm>
+            <a:off x="9046464" y="3977640"/>
+            <a:ext cx="972312" cy="749808"/>
+          </a:xfrm>
+          <a:prstGeom prst="roundRect">
+            <a:avLst>
+              <a:gd name="adj" fmla="val 14634"/>
+            </a:avLst>
+          </a:prstGeom>
+          <a:solidFill>
+            <a:srgbClr val="2F8A28"/>
+          </a:solidFill>
+          <a:ln w="12700">
+            <a:solidFill>
+              <a:srgbClr val="2F8A28"/>
+            </a:solidFill>
+            <a:prstDash val="solid"/>
+          </a:ln>
+        </p:spPr>
+      </p:sp>
+      <p:sp>
+        <p:nvSpPr>
+          <p:cNvPr id="17" name="Text 15"/>
+          <p:cNvSpPr/>
+          <p:nvPr/>
+        </p:nvSpPr>
+        <p:spPr>
+          <a:xfrm>
+            <a:off x="9119616" y="4169664"/>
+            <a:ext cx="826008" cy="310896"/>
+          </a:xfrm>
+          <a:prstGeom prst="rect">
+            <a:avLst/>
+          </a:prstGeom>
+          <a:noFill/>
+          <a:ln/>
+        </p:spPr>
+        <p:txBody>
+          <a:bodyPr wrap="square" lIns="0" tIns="0" rIns="0" bIns="0" rtlCol="0" anchor="ctr">
+            <a:normAutofit/>
+          </a:bodyPr>
+          <a:lstStyle/>
+          <a:p>
+            <a:pPr algn="ctr" indent="0" marL="0">
+              <a:buNone/>
+            </a:pPr>
+            <a:r>
+              <a:rPr lang="en-US" sz="1500" b="1" dirty="0">
+                <a:solidFill>
+                  <a:srgbClr val="FFFFFF"/>
+                </a:solidFill>
+                <a:latin typeface="Aptos" pitchFamily="34" charset="0"/>
+                <a:ea typeface="Aptos" pitchFamily="34" charset="-122"/>
+                <a:cs typeface="Aptos" pitchFamily="34" charset="-120"/>
+              </a:rPr>
+              <a:t>Plays</a:t>
+            </a:r>
+            <a:endParaRPr lang="en-US" sz="1500" dirty="0"/>
+          </a:p>
+        </p:txBody>
+      </p:sp>
+      <p:sp>
+        <p:nvSpPr>
+          <p:cNvPr id="18" name="Text 16"/>
+          <p:cNvSpPr/>
+          <p:nvPr/>
+        </p:nvSpPr>
+        <p:spPr>
+          <a:xfrm>
+            <a:off x="10046208" y="4187952"/>
+            <a:ext cx="201168" cy="256032"/>
+          </a:xfrm>
+          <a:prstGeom prst="rect">
+            <a:avLst/>
+          </a:prstGeom>
+          <a:noFill/>
+          <a:ln/>
+        </p:spPr>
+        <p:txBody>
+          <a:bodyPr wrap="square" lIns="0" tIns="0" rIns="0" bIns="0" rtlCol="0" anchor="ctr"/>
+          <a:lstStyle/>
+          <a:p>
+            <a:pPr algn="ctr" indent="0" marL="0">
+              <a:buNone/>
+            </a:pPr>
+            <a:r>
+              <a:rPr lang="en-US" sz="1800" b="1" dirty="0">
+                <a:solidFill>
+                  <a:srgbClr val="0068B7"/>
+                </a:solidFill>
+                <a:latin typeface="Aptos" pitchFamily="34" charset="0"/>
+                <a:ea typeface="Aptos" pitchFamily="34" charset="-122"/>
+                <a:cs typeface="Aptos" pitchFamily="34" charset="-120"/>
+              </a:rPr>
+              <a:t>â†’</a:t>
+            </a:r>
+            <a:endParaRPr lang="en-US" sz="1800" dirty="0"/>
+          </a:p>
+        </p:txBody>
+      </p:sp>
+      <p:sp>
+        <p:nvSpPr>
+          <p:cNvPr id="19" name="Shape 17"/>
+          <p:cNvSpPr/>
+          <p:nvPr/>
+        </p:nvSpPr>
+        <p:spPr>
+          <a:xfrm>
+            <a:off x="10274808" y="3977640"/>
+            <a:ext cx="972312" cy="749808"/>
+          </a:xfrm>
+          <a:prstGeom prst="roundRect">
+            <a:avLst>
+              <a:gd name="adj" fmla="val 14634"/>
+            </a:avLst>
+          </a:prstGeom>
+          <a:solidFill>
+            <a:srgbClr val="6A4CA3"/>
+          </a:solidFill>
+          <a:ln w="12700">
+            <a:solidFill>
+              <a:srgbClr val="6A4CA3"/>
+            </a:solidFill>
+            <a:prstDash val="solid"/>
+          </a:ln>
+        </p:spPr>
+      </p:sp>
+      <p:sp>
+        <p:nvSpPr>
+          <p:cNvPr id="20" name="Text 18"/>
+          <p:cNvSpPr/>
+          <p:nvPr/>
+        </p:nvSpPr>
+        <p:spPr>
+          <a:xfrm>
+            <a:off x="10347960" y="4169664"/>
+            <a:ext cx="826008" cy="310896"/>
+          </a:xfrm>
+          <a:prstGeom prst="rect">
+            <a:avLst/>
+          </a:prstGeom>
+          <a:noFill/>
+          <a:ln/>
+        </p:spPr>
+        <p:txBody>
+          <a:bodyPr wrap="square" lIns="0" tIns="0" rIns="0" bIns="0" rtlCol="0" anchor="ctr">
+            <a:normAutofit/>
+          </a:bodyPr>
+          <a:lstStyle/>
+          <a:p>
+            <a:pPr algn="ctr" indent="0" marL="0">
+              <a:buNone/>
+            </a:pPr>
+            <a:r>
+              <a:rPr lang="en-US" sz="1500" b="1" dirty="0">
+                <a:solidFill>
+                  <a:srgbClr val="FFFFFF"/>
+                </a:solidFill>
+                <a:latin typeface="Aptos" pitchFamily="34" charset="0"/>
+                <a:ea typeface="Aptos" pitchFamily="34" charset="-122"/>
+                <a:cs typeface="Aptos" pitchFamily="34" charset="-120"/>
+              </a:rPr>
+              <a:t>Action</a:t>
+            </a:r>
+            <a:endParaRPr lang="en-US" sz="1500" dirty="0"/>
           </a:p>
         </p:txBody>
       </p:sp>
@@ -11063,7 +11914,7 @@
                 <a:ea typeface="Aptos" pitchFamily="34" charset="-122"/>
                 <a:cs typeface="Aptos" pitchFamily="34" charset="-120"/>
               </a:rPr>
-              <a:t>© Paula Soper</a:t>
+              <a:t>Â© Paula Soper</a:t>
             </a:r>
             <a:endParaRPr lang="en-US" sz="800" dirty="0"/>
           </a:p>
@@ -11077,8 +11928,47 @@
         </p:nvSpPr>
         <p:spPr>
           <a:xfrm>
+            <a:off x="11137392" y="6510528"/>
+            <a:ext cx="411480" cy="201168"/>
+          </a:xfrm>
+          <a:prstGeom prst="rect">
+            <a:avLst/>
+          </a:prstGeom>
+          <a:noFill/>
+          <a:ln/>
+        </p:spPr>
+        <p:txBody>
+          <a:bodyPr wrap="square" lIns="0" tIns="0" rIns="0" bIns="0" rtlCol="0" anchor="ctr"/>
+          <a:lstStyle/>
+          <a:p>
+            <a:pPr algn="r" indent="0" marL="0">
+              <a:buNone/>
+            </a:pPr>
+            <a:r>
+              <a:rPr lang="en-US" sz="900" dirty="0">
+                <a:solidFill>
+                  <a:srgbClr val="5F7181"/>
+                </a:solidFill>
+                <a:latin typeface="Aptos" pitchFamily="34" charset="0"/>
+                <a:ea typeface="Aptos" pitchFamily="34" charset="-122"/>
+                <a:cs typeface="Aptos" pitchFamily="34" charset="-120"/>
+              </a:rPr>
+              <a:t>4</a:t>
+            </a:r>
+            <a:endParaRPr lang="en-US" sz="900" dirty="0"/>
+          </a:p>
+        </p:txBody>
+      </p:sp>
+      <p:sp>
+        <p:nvSpPr>
+          <p:cNvPr id="8" name="Text 6"/>
+          <p:cNvSpPr/>
+          <p:nvPr/>
+        </p:nvSpPr>
+        <p:spPr>
+          <a:xfrm>
             <a:off x="640080" y="658368"/>
-            <a:ext cx="10881360" cy="566928"/>
+            <a:ext cx="10881360" cy="713232"/>
           </a:xfrm>
           <a:prstGeom prst="rect">
             <a:avLst/>
@@ -11096,7 +11986,7 @@
               <a:buNone/>
             </a:pPr>
             <a:r>
-              <a:rPr lang="en-US" sz="2700" b="1" dirty="0">
+              <a:rPr lang="en-US" sz="3400" b="1" dirty="0">
                 <a:solidFill>
                   <a:srgbClr val="003A63"/>
                 </a:solidFill>
@@ -11106,20 +11996,20 @@
               </a:rPr>
               <a:t>Related toolkit resources</a:t>
             </a:r>
-            <a:endParaRPr lang="en-US" sz="2700" dirty="0"/>
-          </a:p>
-        </p:txBody>
-      </p:sp>
-      <p:sp>
-        <p:nvSpPr>
-          <p:cNvPr id="8" name="Text 6"/>
-          <p:cNvSpPr/>
-          <p:nvPr/>
-        </p:nvSpPr>
-        <p:spPr>
-          <a:xfrm>
-            <a:off x="868680" y="1417320"/>
-            <a:ext cx="6903720" cy="4480560"/>
+            <a:endParaRPr lang="en-US" sz="3400" dirty="0"/>
+          </a:p>
+        </p:txBody>
+      </p:sp>
+      <p:sp>
+        <p:nvSpPr>
+          <p:cNvPr id="9" name="Text 7"/>
+          <p:cNvSpPr/>
+          <p:nvPr/>
+        </p:nvSpPr>
+        <p:spPr>
+          <a:xfrm>
+            <a:off x="868680" y="1508760"/>
+            <a:ext cx="6812280" cy="3977640"/>
           </a:xfrm>
           <a:prstGeom prst="rect">
             <a:avLst/>
@@ -11134,7 +12024,7 @@
           <a:lstStyle/>
           <a:p>
             <a:r>
-              <a:rPr lang="en-US" sz="1460" dirty="0">
+              <a:rPr lang="en-US" sz="1850" dirty="0">
                 <a:solidFill>
                   <a:srgbClr val="17364A"/>
                 </a:solidFill>
@@ -11142,13 +12032,13 @@
                 <a:ea typeface="Aptos" pitchFamily="34" charset="-122"/>
                 <a:cs typeface="Aptos" pitchFamily="34" charset="-120"/>
               </a:rPr>
-              <a:t>Tool 4: AI Policy Landscape Scan (Worksheet) - Use AI Policy Landscape Scan to translate this lesson into a documented public health.</a:t>
-            </a:r>
-            <a:endParaRPr lang="en-US" sz="1460" dirty="0"/>
-          </a:p>
-          <a:p>
-            <a:r>
-              <a:rPr lang="en-US" sz="1460" dirty="0">
+              <a:t>Tool 4: AI Policy Landscape Scan (Worksheet) - Use AI Policy Landscape Scan to translate this lesson into a.</a:t>
+            </a:r>
+            <a:endParaRPr lang="en-US" sz="1850" dirty="0"/>
+          </a:p>
+          <a:p>
+            <a:r>
+              <a:rPr lang="en-US" sz="1850" dirty="0">
                 <a:solidFill>
                   <a:srgbClr val="17364A"/>
                 </a:solidFill>
@@ -11156,13 +12046,13 @@
                 <a:ea typeface="Aptos" pitchFamily="34" charset="-122"/>
                 <a:cs typeface="Aptos" pitchFamily="34" charset="-120"/>
               </a:rPr>
-              <a:t>Tool 5: AI Environmental and Resource Impact Review (Checklist) - Use this tool to complete or strengthen the practical exercise for.</a:t>
-            </a:r>
-            <a:endParaRPr lang="en-US" sz="1460" dirty="0"/>
-          </a:p>
-          <a:p>
-            <a:r>
-              <a:rPr lang="en-US" sz="1460" dirty="0">
+              <a:t>Tool 5: AI Environmental and Resource Impact Review (Checklist) - Use this tool to complete or strengthen.</a:t>
+            </a:r>
+            <a:endParaRPr lang="en-US" sz="1850" dirty="0"/>
+          </a:p>
+          <a:p>
+            <a:r>
+              <a:rPr lang="en-US" sz="1850" dirty="0">
                 <a:solidFill>
                   <a:srgbClr val="17364A"/>
                 </a:solidFill>
@@ -11170,13 +12060,13 @@
                 <a:ea typeface="Aptos" pitchFamily="34" charset="-122"/>
                 <a:cs typeface="Aptos" pitchFamily="34" charset="-120"/>
               </a:rPr>
-              <a:t>Tool 6: Human-Centered AI Decision Rule Checklist (Checklist) - Use Human-Centered AI Decision Rule Checklist to translate this.</a:t>
-            </a:r>
-            <a:endParaRPr lang="en-US" sz="1460" dirty="0"/>
-          </a:p>
-          <a:p>
-            <a:r>
-              <a:rPr lang="en-US" sz="1460" dirty="0">
+              <a:t>Tool 6: Human-Centered AI Decision Rule Checklist (Checklist) - Use Human-Centered AI Decision Rule.</a:t>
+            </a:r>
+            <a:endParaRPr lang="en-US" sz="1850" dirty="0"/>
+          </a:p>
+          <a:p>
+            <a:r>
+              <a:rPr lang="en-US" sz="1850" dirty="0">
                 <a:solidFill>
                   <a:srgbClr val="17364A"/>
                 </a:solidFill>
@@ -11184,29 +12074,15 @@
                 <a:ea typeface="Aptos" pitchFamily="34" charset="-122"/>
                 <a:cs typeface="Aptos" pitchFamily="34" charset="-120"/>
               </a:rPr>
-              <a:t>Tool 8: AI Project Charter (Planning) - Use AI Project Charter to translate this lesson into a documented public health AI planning,.</a:t>
-            </a:r>
-            <a:endParaRPr lang="en-US" sz="1460" dirty="0"/>
-          </a:p>
-          <a:p>
-            <a:r>
-              <a:rPr lang="en-US" sz="1460" dirty="0">
-                <a:solidFill>
-                  <a:srgbClr val="17364A"/>
-                </a:solidFill>
-                <a:latin typeface="Aptos" pitchFamily="34" charset="0"/>
-                <a:ea typeface="Aptos" pitchFamily="34" charset="-122"/>
-                <a:cs typeface="Aptos" pitchFamily="34" charset="-120"/>
-              </a:rPr>
-              <a:t>Tool 9: Data Quality Assessment Checklist (Checklist) - Use this tool to complete or strengthen the practical exercise for the module.</a:t>
-            </a:r>
-            <a:endParaRPr lang="en-US" sz="1460" dirty="0"/>
-          </a:p>
-        </p:txBody>
-      </p:sp>
-      <p:sp>
-        <p:nvSpPr>
-          <p:cNvPr id="9" name="Shape 7"/>
+              <a:t>Tool 8: AI Project Charter (Planning) - Use AI Project Charter to translate this lesson into a documented.</a:t>
+            </a:r>
+            <a:endParaRPr lang="en-US" sz="1850" dirty="0"/>
+          </a:p>
+        </p:txBody>
+      </p:sp>
+      <p:sp>
+        <p:nvSpPr>
+          <p:cNvPr id="10" name="Shape 8"/>
           <p:cNvSpPr/>
           <p:nvPr/>
         </p:nvSpPr>
@@ -11233,14 +12109,14 @@
       </p:sp>
       <p:sp>
         <p:nvSpPr>
-          <p:cNvPr id="10" name="Text 8"/>
+          <p:cNvPr id="11" name="Text 9"/>
           <p:cNvSpPr/>
           <p:nvPr/>
         </p:nvSpPr>
         <p:spPr>
           <a:xfrm>
             <a:off x="8211312" y="1563624"/>
-            <a:ext cx="2734056" cy="201168"/>
+            <a:ext cx="2734056" cy="256032"/>
           </a:xfrm>
           <a:prstGeom prst="rect">
             <a:avLst/>
@@ -11256,7 +12132,7 @@
               <a:buNone/>
             </a:pPr>
             <a:r>
-              <a:rPr lang="en-US" sz="950" b="1" dirty="0">
+              <a:rPr lang="en-US" sz="1300" b="1" dirty="0">
                 <a:solidFill>
                   <a:srgbClr val="0068B7"/>
                 </a:solidFill>
@@ -11266,20 +12142,20 @@
               </a:rPr>
               <a:t>Use the tools</a:t>
             </a:r>
-            <a:endParaRPr lang="en-US" sz="950" dirty="0"/>
-          </a:p>
-        </p:txBody>
-      </p:sp>
-      <p:sp>
-        <p:nvSpPr>
-          <p:cNvPr id="11" name="Text 9"/>
-          <p:cNvSpPr/>
-          <p:nvPr/>
-        </p:nvSpPr>
-        <p:spPr>
-          <a:xfrm>
-            <a:off x="8211312" y="1856232"/>
-            <a:ext cx="2734056" cy="1536192"/>
+            <a:endParaRPr lang="en-US" sz="1300" dirty="0"/>
+          </a:p>
+        </p:txBody>
+      </p:sp>
+      <p:sp>
+        <p:nvSpPr>
+          <p:cNvPr id="12" name="Text 10"/>
+          <p:cNvSpPr/>
+          <p:nvPr/>
+        </p:nvSpPr>
+        <p:spPr>
+          <a:xfrm>
+            <a:off x="8211312" y="1920240"/>
+            <a:ext cx="2734056" cy="1463040"/>
           </a:xfrm>
           <a:prstGeom prst="rect">
             <a:avLst/>
@@ -11297,7 +12173,7 @@
               <a:buNone/>
             </a:pPr>
             <a:r>
-              <a:rPr lang="en-US" sz="1250" dirty="0">
+              <a:rPr lang="en-US" sz="1550" dirty="0">
                 <a:solidFill>
                   <a:srgbClr val="17364A"/>
                 </a:solidFill>
@@ -11307,32 +12183,32 @@
               </a:rPr>
               <a:t>Use linked tools when your department needs a structured worksheet, template, checklist, review process, or documentation artifact.</a:t>
             </a:r>
-            <a:endParaRPr lang="en-US" sz="1250" dirty="0"/>
-          </a:p>
-        </p:txBody>
-      </p:sp>
-      <p:sp>
-        <p:nvSpPr>
-          <p:cNvPr id="12" name="Shape 10"/>
-          <p:cNvSpPr/>
-          <p:nvPr/>
-        </p:nvSpPr>
-        <p:spPr>
-          <a:xfrm>
-            <a:off x="8046720" y="3794760"/>
-            <a:ext cx="3063240" cy="1508760"/>
+            <a:endParaRPr lang="en-US" sz="1550" dirty="0"/>
+          </a:p>
+        </p:txBody>
+      </p:sp>
+      <p:sp>
+        <p:nvSpPr>
+          <p:cNvPr id="13" name="Shape 11"/>
+          <p:cNvSpPr/>
+          <p:nvPr/>
+        </p:nvSpPr>
+        <p:spPr>
+          <a:xfrm>
+            <a:off x="7818120" y="3977640"/>
+            <a:ext cx="972312" cy="749808"/>
           </a:xfrm>
           <a:prstGeom prst="roundRect">
             <a:avLst>
-              <a:gd name="adj" fmla="val 7273"/>
+              <a:gd name="adj" fmla="val 14634"/>
             </a:avLst>
           </a:prstGeom>
           <a:solidFill>
-            <a:srgbClr val="EEF8ED"/>
+            <a:srgbClr val="0068B7"/>
           </a:solidFill>
           <a:ln w="12700">
             <a:solidFill>
-              <a:srgbClr val="B9D7E6"/>
+              <a:srgbClr val="0068B7"/>
             </a:solidFill>
             <a:prstDash val="solid"/>
           </a:ln>
@@ -11340,81 +12216,256 @@
       </p:sp>
       <p:sp>
         <p:nvSpPr>
-          <p:cNvPr id="13" name="Text 11"/>
-          <p:cNvSpPr/>
-          <p:nvPr/>
-        </p:nvSpPr>
-        <p:spPr>
-          <a:xfrm>
-            <a:off x="8211312" y="3941064"/>
-            <a:ext cx="2734056" cy="201168"/>
-          </a:xfrm>
-          <a:prstGeom prst="rect">
-            <a:avLst/>
-          </a:prstGeom>
-          <a:noFill/>
-          <a:ln/>
-        </p:spPr>
-        <p:txBody>
-          <a:bodyPr wrap="square" lIns="0" tIns="0" rIns="0" bIns="0" rtlCol="0" anchor="ctr"/>
-          <a:lstStyle/>
-          <a:p>
-            <a:pPr indent="0" marL="0">
-              <a:buNone/>
-            </a:pPr>
-            <a:r>
-              <a:rPr lang="en-US" sz="950" b="1" dirty="0">
-                <a:solidFill>
-                  <a:srgbClr val="0068B7"/>
-                </a:solidFill>
-                <a:latin typeface="Aptos" pitchFamily="34" charset="0"/>
-                <a:ea typeface="Aptos" pitchFamily="34" charset="-122"/>
-                <a:cs typeface="Aptos" pitchFamily="34" charset="-120"/>
-              </a:rPr>
-              <a:t>Avoid duplication</a:t>
-            </a:r>
-            <a:endParaRPr lang="en-US" sz="950" dirty="0"/>
-          </a:p>
-        </p:txBody>
-      </p:sp>
-      <p:sp>
-        <p:nvSpPr>
           <p:cNvPr id="14" name="Text 12"/>
           <p:cNvSpPr/>
           <p:nvPr/>
         </p:nvSpPr>
         <p:spPr>
           <a:xfrm>
-            <a:off x="8211312" y="4233672"/>
-            <a:ext cx="2734056" cy="941832"/>
-          </a:xfrm>
-          <a:prstGeom prst="rect">
-            <a:avLst/>
-          </a:prstGeom>
-          <a:noFill/>
-          <a:ln/>
-        </p:spPr>
-        <p:txBody>
-          <a:bodyPr wrap="square" lIns="0" tIns="0" rIns="0" bIns="0" rtlCol="0" anchor="t">
+            <a:off x="7891272" y="4169664"/>
+            <a:ext cx="826008" cy="310896"/>
+          </a:xfrm>
+          <a:prstGeom prst="rect">
+            <a:avLst/>
+          </a:prstGeom>
+          <a:noFill/>
+          <a:ln/>
+        </p:spPr>
+        <p:txBody>
+          <a:bodyPr wrap="square" lIns="0" tIns="0" rIns="0" bIns="0" rtlCol="0" anchor="ctr">
             <a:normAutofit/>
           </a:bodyPr>
           <a:lstStyle/>
           <a:p>
-            <a:pPr indent="0" marL="0">
-              <a:buNone/>
-            </a:pPr>
-            <a:r>
-              <a:rPr lang="en-US" sz="1250" dirty="0">
-                <a:solidFill>
-                  <a:srgbClr val="17364A"/>
-                </a:solidFill>
-                <a:latin typeface="Aptos" pitchFamily="34" charset="0"/>
-                <a:ea typeface="Aptos" pitchFamily="34" charset="-122"/>
-                <a:cs typeface="Aptos" pitchFamily="34" charset="-120"/>
-              </a:rPr>
-              <a:t>If your department already has a strong equivalent tool, adapt or use the existing process instead of recreating it.</a:t>
-            </a:r>
-            <a:endParaRPr lang="en-US" sz="1250" dirty="0"/>
+            <a:pPr algn="ctr" indent="0" marL="0">
+              <a:buNone/>
+            </a:pPr>
+            <a:r>
+              <a:rPr lang="en-US" sz="1500" b="1" dirty="0">
+                <a:solidFill>
+                  <a:srgbClr val="FFFFFF"/>
+                </a:solidFill>
+                <a:latin typeface="Aptos" pitchFamily="34" charset="0"/>
+                <a:ea typeface="Aptos" pitchFamily="34" charset="-122"/>
+                <a:cs typeface="Aptos" pitchFamily="34" charset="-120"/>
+              </a:rPr>
+              <a:t>Concept</a:t>
+            </a:r>
+            <a:endParaRPr lang="en-US" sz="1500" dirty="0"/>
+          </a:p>
+        </p:txBody>
+      </p:sp>
+      <p:sp>
+        <p:nvSpPr>
+          <p:cNvPr id="15" name="Text 13"/>
+          <p:cNvSpPr/>
+          <p:nvPr/>
+        </p:nvSpPr>
+        <p:spPr>
+          <a:xfrm>
+            <a:off x="8817864" y="4187952"/>
+            <a:ext cx="201168" cy="256032"/>
+          </a:xfrm>
+          <a:prstGeom prst="rect">
+            <a:avLst/>
+          </a:prstGeom>
+          <a:noFill/>
+          <a:ln/>
+        </p:spPr>
+        <p:txBody>
+          <a:bodyPr wrap="square" lIns="0" tIns="0" rIns="0" bIns="0" rtlCol="0" anchor="ctr"/>
+          <a:lstStyle/>
+          <a:p>
+            <a:pPr algn="ctr" indent="0" marL="0">
+              <a:buNone/>
+            </a:pPr>
+            <a:r>
+              <a:rPr lang="en-US" sz="1800" b="1" dirty="0">
+                <a:solidFill>
+                  <a:srgbClr val="0068B7"/>
+                </a:solidFill>
+                <a:latin typeface="Aptos" pitchFamily="34" charset="0"/>
+                <a:ea typeface="Aptos" pitchFamily="34" charset="-122"/>
+                <a:cs typeface="Aptos" pitchFamily="34" charset="-120"/>
+              </a:rPr>
+              <a:t>â†’</a:t>
+            </a:r>
+            <a:endParaRPr lang="en-US" sz="1800" dirty="0"/>
+          </a:p>
+        </p:txBody>
+      </p:sp>
+      <p:sp>
+        <p:nvSpPr>
+          <p:cNvPr id="16" name="Shape 14"/>
+          <p:cNvSpPr/>
+          <p:nvPr/>
+        </p:nvSpPr>
+        <p:spPr>
+          <a:xfrm>
+            <a:off x="9046464" y="3977640"/>
+            <a:ext cx="972312" cy="749808"/>
+          </a:xfrm>
+          <a:prstGeom prst="roundRect">
+            <a:avLst>
+              <a:gd name="adj" fmla="val 14634"/>
+            </a:avLst>
+          </a:prstGeom>
+          <a:solidFill>
+            <a:srgbClr val="2F8A28"/>
+          </a:solidFill>
+          <a:ln w="12700">
+            <a:solidFill>
+              <a:srgbClr val="2F8A28"/>
+            </a:solidFill>
+            <a:prstDash val="solid"/>
+          </a:ln>
+        </p:spPr>
+      </p:sp>
+      <p:sp>
+        <p:nvSpPr>
+          <p:cNvPr id="17" name="Text 15"/>
+          <p:cNvSpPr/>
+          <p:nvPr/>
+        </p:nvSpPr>
+        <p:spPr>
+          <a:xfrm>
+            <a:off x="9119616" y="4169664"/>
+            <a:ext cx="826008" cy="310896"/>
+          </a:xfrm>
+          <a:prstGeom prst="rect">
+            <a:avLst/>
+          </a:prstGeom>
+          <a:noFill/>
+          <a:ln/>
+        </p:spPr>
+        <p:txBody>
+          <a:bodyPr wrap="square" lIns="0" tIns="0" rIns="0" bIns="0" rtlCol="0" anchor="ctr">
+            <a:normAutofit/>
+          </a:bodyPr>
+          <a:lstStyle/>
+          <a:p>
+            <a:pPr algn="ctr" indent="0" marL="0">
+              <a:buNone/>
+            </a:pPr>
+            <a:r>
+              <a:rPr lang="en-US" sz="1500" b="1" dirty="0">
+                <a:solidFill>
+                  <a:srgbClr val="FFFFFF"/>
+                </a:solidFill>
+                <a:latin typeface="Aptos" pitchFamily="34" charset="0"/>
+                <a:ea typeface="Aptos" pitchFamily="34" charset="-122"/>
+                <a:cs typeface="Aptos" pitchFamily="34" charset="-120"/>
+              </a:rPr>
+              <a:t>Tool</a:t>
+            </a:r>
+            <a:endParaRPr lang="en-US" sz="1500" dirty="0"/>
+          </a:p>
+        </p:txBody>
+      </p:sp>
+      <p:sp>
+        <p:nvSpPr>
+          <p:cNvPr id="18" name="Text 16"/>
+          <p:cNvSpPr/>
+          <p:nvPr/>
+        </p:nvSpPr>
+        <p:spPr>
+          <a:xfrm>
+            <a:off x="10046208" y="4187952"/>
+            <a:ext cx="201168" cy="256032"/>
+          </a:xfrm>
+          <a:prstGeom prst="rect">
+            <a:avLst/>
+          </a:prstGeom>
+          <a:noFill/>
+          <a:ln/>
+        </p:spPr>
+        <p:txBody>
+          <a:bodyPr wrap="square" lIns="0" tIns="0" rIns="0" bIns="0" rtlCol="0" anchor="ctr"/>
+          <a:lstStyle/>
+          <a:p>
+            <a:pPr algn="ctr" indent="0" marL="0">
+              <a:buNone/>
+            </a:pPr>
+            <a:r>
+              <a:rPr lang="en-US" sz="1800" b="1" dirty="0">
+                <a:solidFill>
+                  <a:srgbClr val="0068B7"/>
+                </a:solidFill>
+                <a:latin typeface="Aptos" pitchFamily="34" charset="0"/>
+                <a:ea typeface="Aptos" pitchFamily="34" charset="-122"/>
+                <a:cs typeface="Aptos" pitchFamily="34" charset="-120"/>
+              </a:rPr>
+              <a:t>â†’</a:t>
+            </a:r>
+            <a:endParaRPr lang="en-US" sz="1800" dirty="0"/>
+          </a:p>
+        </p:txBody>
+      </p:sp>
+      <p:sp>
+        <p:nvSpPr>
+          <p:cNvPr id="19" name="Shape 17"/>
+          <p:cNvSpPr/>
+          <p:nvPr/>
+        </p:nvSpPr>
+        <p:spPr>
+          <a:xfrm>
+            <a:off x="10274808" y="3977640"/>
+            <a:ext cx="972312" cy="749808"/>
+          </a:xfrm>
+          <a:prstGeom prst="roundRect">
+            <a:avLst>
+              <a:gd name="adj" fmla="val 14634"/>
+            </a:avLst>
+          </a:prstGeom>
+          <a:solidFill>
+            <a:srgbClr val="D69A2D"/>
+          </a:solidFill>
+          <a:ln w="12700">
+            <a:solidFill>
+              <a:srgbClr val="D69A2D"/>
+            </a:solidFill>
+            <a:prstDash val="solid"/>
+          </a:ln>
+        </p:spPr>
+      </p:sp>
+      <p:sp>
+        <p:nvSpPr>
+          <p:cNvPr id="20" name="Text 18"/>
+          <p:cNvSpPr/>
+          <p:nvPr/>
+        </p:nvSpPr>
+        <p:spPr>
+          <a:xfrm>
+            <a:off x="10347960" y="4169664"/>
+            <a:ext cx="826008" cy="310896"/>
+          </a:xfrm>
+          <a:prstGeom prst="rect">
+            <a:avLst/>
+          </a:prstGeom>
+          <a:noFill/>
+          <a:ln/>
+        </p:spPr>
+        <p:txBody>
+          <a:bodyPr wrap="square" lIns="0" tIns="0" rIns="0" bIns="0" rtlCol="0" anchor="ctr">
+            <a:normAutofit/>
+          </a:bodyPr>
+          <a:lstStyle/>
+          <a:p>
+            <a:pPr algn="ctr" indent="0" marL="0">
+              <a:buNone/>
+            </a:pPr>
+            <a:r>
+              <a:rPr lang="en-US" sz="1500" b="1" dirty="0">
+                <a:solidFill>
+                  <a:srgbClr val="FFFFFF"/>
+                </a:solidFill>
+                <a:latin typeface="Aptos" pitchFamily="34" charset="0"/>
+                <a:ea typeface="Aptos" pitchFamily="34" charset="-122"/>
+                <a:cs typeface="Aptos" pitchFamily="34" charset="-120"/>
+              </a:rPr>
+              <a:t>Artifact</a:t>
+            </a:r>
+            <a:endParaRPr lang="en-US" sz="1500" dirty="0"/>
           </a:p>
         </p:txBody>
       </p:sp>
@@ -11611,7 +12662,7 @@
                 <a:ea typeface="Aptos" pitchFamily="34" charset="-122"/>
                 <a:cs typeface="Aptos" pitchFamily="34" charset="-120"/>
               </a:rPr>
-              <a:t>© Paula Soper</a:t>
+              <a:t>Â© Paula Soper</a:t>
             </a:r>
             <a:endParaRPr lang="en-US" sz="800" dirty="0"/>
           </a:p>
@@ -11619,7 +12670,46 @@
       </p:sp>
       <p:sp>
         <p:nvSpPr>
-          <p:cNvPr id="7" name="Shape 5"/>
+          <p:cNvPr id="7" name="Text 5"/>
+          <p:cNvSpPr/>
+          <p:nvPr/>
+        </p:nvSpPr>
+        <p:spPr>
+          <a:xfrm>
+            <a:off x="11137392" y="6510528"/>
+            <a:ext cx="411480" cy="201168"/>
+          </a:xfrm>
+          <a:prstGeom prst="rect">
+            <a:avLst/>
+          </a:prstGeom>
+          <a:noFill/>
+          <a:ln/>
+        </p:spPr>
+        <p:txBody>
+          <a:bodyPr wrap="square" lIns="0" tIns="0" rIns="0" bIns="0" rtlCol="0" anchor="ctr"/>
+          <a:lstStyle/>
+          <a:p>
+            <a:pPr algn="r" indent="0" marL="0">
+              <a:buNone/>
+            </a:pPr>
+            <a:r>
+              <a:rPr lang="en-US" sz="900" dirty="0">
+                <a:solidFill>
+                  <a:srgbClr val="5F7181"/>
+                </a:solidFill>
+                <a:latin typeface="Aptos" pitchFamily="34" charset="0"/>
+                <a:ea typeface="Aptos" pitchFamily="34" charset="-122"/>
+                <a:cs typeface="Aptos" pitchFamily="34" charset="-120"/>
+              </a:rPr>
+              <a:t>5</a:t>
+            </a:r>
+            <a:endParaRPr lang="en-US" sz="900" dirty="0"/>
+          </a:p>
+        </p:txBody>
+      </p:sp>
+      <p:sp>
+        <p:nvSpPr>
+          <p:cNvPr id="8" name="Shape 6"/>
           <p:cNvSpPr/>
           <p:nvPr/>
         </p:nvSpPr>
@@ -11644,7 +12734,7 @@
       </p:sp>
       <p:sp>
         <p:nvSpPr>
-          <p:cNvPr id="8" name="Text 6"/>
+          <p:cNvPr id="9" name="Text 7"/>
           <p:cNvSpPr/>
           <p:nvPr/>
         </p:nvSpPr>
@@ -11683,14 +12773,14 @@
       </p:sp>
       <p:sp>
         <p:nvSpPr>
-          <p:cNvPr id="9" name="Text 7"/>
+          <p:cNvPr id="10" name="Text 8"/>
           <p:cNvSpPr/>
           <p:nvPr/>
         </p:nvSpPr>
         <p:spPr>
           <a:xfrm>
             <a:off x="640080" y="621792"/>
-            <a:ext cx="10881360" cy="566928"/>
+            <a:ext cx="10881360" cy="713232"/>
           </a:xfrm>
           <a:prstGeom prst="rect">
             <a:avLst/>
@@ -11708,7 +12798,7 @@
               <a:buNone/>
             </a:pPr>
             <a:r>
-              <a:rPr lang="en-US" sz="2700" b="1" dirty="0">
+              <a:rPr lang="en-US" sz="3400" b="1" dirty="0">
                 <a:solidFill>
                   <a:srgbClr val="003A63"/>
                 </a:solidFill>
@@ -11718,20 +12808,20 @@
               </a:rPr>
               <a:t>Learning Objectives</a:t>
             </a:r>
-            <a:endParaRPr lang="en-US" sz="2700" dirty="0"/>
-          </a:p>
-        </p:txBody>
-      </p:sp>
-      <p:sp>
-        <p:nvSpPr>
-          <p:cNvPr id="10" name="Text 8"/>
-          <p:cNvSpPr/>
-          <p:nvPr/>
-        </p:nvSpPr>
-        <p:spPr>
-          <a:xfrm>
-            <a:off x="868680" y="1417320"/>
-            <a:ext cx="6675120" cy="4434840"/>
+            <a:endParaRPr lang="en-US" sz="3400" dirty="0"/>
+          </a:p>
+        </p:txBody>
+      </p:sp>
+      <p:sp>
+        <p:nvSpPr>
+          <p:cNvPr id="11" name="Text 9"/>
+          <p:cNvSpPr/>
+          <p:nvPr/>
+        </p:nvSpPr>
+        <p:spPr>
+          <a:xfrm>
+            <a:off x="868680" y="1508760"/>
+            <a:ext cx="6537960" cy="4160520"/>
           </a:xfrm>
           <a:prstGeom prst="rect">
             <a:avLst/>
@@ -11746,7 +12836,7 @@
           <a:lstStyle/>
           <a:p>
             <a:r>
-              <a:rPr lang="en-US" sz="1700" dirty="0">
+              <a:rPr lang="en-US" sz="2100" dirty="0">
                 <a:solidFill>
                   <a:srgbClr val="17364A"/>
                 </a:solidFill>
@@ -11756,11 +12846,11 @@
               </a:rPr>
               <a:t>Explain the purpose of synthetic data for public health ai in public health AI work.</a:t>
             </a:r>
-            <a:endParaRPr lang="en-US" sz="1700" dirty="0"/>
-          </a:p>
-          <a:p>
-            <a:r>
-              <a:rPr lang="en-US" sz="1700" dirty="0">
+            <a:endParaRPr lang="en-US" sz="2100" dirty="0"/>
+          </a:p>
+          <a:p>
+            <a:r>
+              <a:rPr lang="en-US" sz="2100" dirty="0">
                 <a:solidFill>
                   <a:srgbClr val="17364A"/>
                 </a:solidFill>
@@ -11768,13 +12858,13 @@
                 <a:ea typeface="Aptos" pitchFamily="34" charset="-122"/>
                 <a:cs typeface="Aptos" pitchFamily="34" charset="-120"/>
               </a:rPr>
-              <a:t>Identify the technical, operational, privacy, security, equity, and governance issues associated with the topic.</a:t>
-            </a:r>
-            <a:endParaRPr lang="en-US" sz="1700" dirty="0"/>
-          </a:p>
-          <a:p>
-            <a:r>
-              <a:rPr lang="en-US" sz="1700" dirty="0">
+              <a:t>Identify the technical, operational, privacy, security, equity, and governance issues associated with.</a:t>
+            </a:r>
+            <a:endParaRPr lang="en-US" sz="2100" dirty="0"/>
+          </a:p>
+          <a:p>
+            <a:r>
+              <a:rPr lang="en-US" sz="2100" dirty="0">
                 <a:solidFill>
                   <a:srgbClr val="17364A"/>
                 </a:solidFill>
@@ -11784,27 +12874,13 @@
               </a:rPr>
               <a:t>Apply the topic to a real or realistic public health workflow, system, or implementation scenario.</a:t>
             </a:r>
-            <a:endParaRPr lang="en-US" sz="1700" dirty="0"/>
-          </a:p>
-          <a:p>
-            <a:r>
-              <a:rPr lang="en-US" sz="1700" dirty="0">
-                <a:solidFill>
-                  <a:srgbClr val="17364A"/>
-                </a:solidFill>
-                <a:latin typeface="Aptos" pitchFamily="34" charset="0"/>
-                <a:ea typeface="Aptos" pitchFamily="34" charset="-122"/>
-                <a:cs typeface="Aptos" pitchFamily="34" charset="-120"/>
-              </a:rPr>
-              <a:t>Recognize common failure modes that can affect safety, accuracy, trust, workflow fit, or sustainability.</a:t>
-            </a:r>
-            <a:endParaRPr lang="en-US" sz="1700" dirty="0"/>
-          </a:p>
-        </p:txBody>
-      </p:sp>
-      <p:sp>
-        <p:nvSpPr>
-          <p:cNvPr id="11" name="Shape 9"/>
+            <a:endParaRPr lang="en-US" sz="2100" dirty="0"/>
+          </a:p>
+        </p:txBody>
+      </p:sp>
+      <p:sp>
+        <p:nvSpPr>
+          <p:cNvPr id="12" name="Shape 10"/>
           <p:cNvSpPr/>
           <p:nvPr/>
         </p:nvSpPr>
@@ -11831,14 +12907,14 @@
       </p:sp>
       <p:sp>
         <p:nvSpPr>
-          <p:cNvPr id="12" name="Text 10"/>
+          <p:cNvPr id="13" name="Text 11"/>
           <p:cNvSpPr/>
           <p:nvPr/>
         </p:nvSpPr>
         <p:spPr>
           <a:xfrm>
             <a:off x="8074152" y="1563624"/>
-            <a:ext cx="2825496" cy="201168"/>
+            <a:ext cx="2825496" cy="256032"/>
           </a:xfrm>
           <a:prstGeom prst="rect">
             <a:avLst/>
@@ -11854,7 +12930,7 @@
               <a:buNone/>
             </a:pPr>
             <a:r>
-              <a:rPr lang="en-US" sz="950" b="1" dirty="0">
+              <a:rPr lang="en-US" sz="1300" b="1" dirty="0">
                 <a:solidFill>
                   <a:srgbClr val="0068B7"/>
                 </a:solidFill>
@@ -11864,20 +12940,20 @@
               </a:rPr>
               <a:t>Key idea</a:t>
             </a:r>
-            <a:endParaRPr lang="en-US" sz="950" dirty="0"/>
-          </a:p>
-        </p:txBody>
-      </p:sp>
-      <p:sp>
-        <p:nvSpPr>
-          <p:cNvPr id="13" name="Text 11"/>
-          <p:cNvSpPr/>
-          <p:nvPr/>
-        </p:nvSpPr>
-        <p:spPr>
-          <a:xfrm>
-            <a:off x="8074152" y="1856232"/>
-            <a:ext cx="2825496" cy="1261872"/>
+            <a:endParaRPr lang="en-US" sz="1300" dirty="0"/>
+          </a:p>
+        </p:txBody>
+      </p:sp>
+      <p:sp>
+        <p:nvSpPr>
+          <p:cNvPr id="14" name="Text 12"/>
+          <p:cNvSpPr/>
+          <p:nvPr/>
+        </p:nvSpPr>
+        <p:spPr>
+          <a:xfrm>
+            <a:off x="8074152" y="1920240"/>
+            <a:ext cx="2825496" cy="1188720"/>
           </a:xfrm>
           <a:prstGeom prst="rect">
             <a:avLst/>
@@ -11895,7 +12971,7 @@
               <a:buNone/>
             </a:pPr>
             <a:r>
-              <a:rPr lang="en-US" sz="1250" dirty="0">
+              <a:rPr lang="en-US" sz="1550" dirty="0">
                 <a:solidFill>
                   <a:srgbClr val="17364A"/>
                 </a:solidFill>
@@ -11905,13 +12981,13 @@
               </a:rPr>
               <a:t>Explain the purpose of synthetic data for public health ai in public health AI work.</a:t>
             </a:r>
-            <a:endParaRPr lang="en-US" sz="1250" dirty="0"/>
-          </a:p>
-        </p:txBody>
-      </p:sp>
-      <p:sp>
-        <p:nvSpPr>
-          <p:cNvPr id="14" name="Shape 12"/>
+            <a:endParaRPr lang="en-US" sz="1550" dirty="0"/>
+          </a:p>
+        </p:txBody>
+      </p:sp>
+      <p:sp>
+        <p:nvSpPr>
+          <p:cNvPr id="15" name="Shape 13"/>
           <p:cNvSpPr/>
           <p:nvPr/>
         </p:nvSpPr>
@@ -11938,14 +13014,14 @@
       </p:sp>
       <p:sp>
         <p:nvSpPr>
-          <p:cNvPr id="15" name="Text 13"/>
+          <p:cNvPr id="16" name="Text 14"/>
           <p:cNvSpPr/>
           <p:nvPr/>
         </p:nvSpPr>
         <p:spPr>
           <a:xfrm>
             <a:off x="8074152" y="3666744"/>
-            <a:ext cx="2825496" cy="201168"/>
+            <a:ext cx="2825496" cy="256032"/>
           </a:xfrm>
           <a:prstGeom prst="rect">
             <a:avLst/>
@@ -11961,7 +13037,7 @@
               <a:buNone/>
             </a:pPr>
             <a:r>
-              <a:rPr lang="en-US" sz="950" b="1" dirty="0">
+              <a:rPr lang="en-US" sz="1300" b="1" dirty="0">
                 <a:solidFill>
                   <a:srgbClr val="0068B7"/>
                 </a:solidFill>
@@ -11971,20 +13047,20 @@
               </a:rPr>
               <a:t>Use this for</a:t>
             </a:r>
-            <a:endParaRPr lang="en-US" sz="950" dirty="0"/>
-          </a:p>
-        </p:txBody>
-      </p:sp>
-      <p:sp>
-        <p:nvSpPr>
-          <p:cNvPr id="16" name="Text 14"/>
-          <p:cNvSpPr/>
-          <p:nvPr/>
-        </p:nvSpPr>
-        <p:spPr>
-          <a:xfrm>
-            <a:off x="8074152" y="3959352"/>
-            <a:ext cx="2825496" cy="1170432"/>
+            <a:endParaRPr lang="en-US" sz="1300" dirty="0"/>
+          </a:p>
+        </p:txBody>
+      </p:sp>
+      <p:sp>
+        <p:nvSpPr>
+          <p:cNvPr id="17" name="Text 15"/>
+          <p:cNvSpPr/>
+          <p:nvPr/>
+        </p:nvSpPr>
+        <p:spPr>
+          <a:xfrm>
+            <a:off x="8074152" y="4023360"/>
+            <a:ext cx="2825496" cy="1097280"/>
           </a:xfrm>
           <a:prstGeom prst="rect">
             <a:avLst/>
@@ -12002,7 +13078,7 @@
               <a:buNone/>
             </a:pPr>
             <a:r>
-              <a:rPr lang="en-US" sz="1250" dirty="0">
+              <a:rPr lang="en-US" sz="1550" dirty="0">
                 <a:solidFill>
                   <a:srgbClr val="17364A"/>
                 </a:solidFill>
@@ -12012,7 +13088,7 @@
               </a:rPr>
               <a:t>Connect the concept to public health decisions, safeguards, documentation, or implementation work.</a:t>
             </a:r>
-            <a:endParaRPr lang="en-US" sz="1250" dirty="0"/>
+            <a:endParaRPr lang="en-US" sz="1550" dirty="0"/>
           </a:p>
         </p:txBody>
       </p:sp>
@@ -12209,7 +13285,7 @@
                 <a:ea typeface="Aptos" pitchFamily="34" charset="-122"/>
                 <a:cs typeface="Aptos" pitchFamily="34" charset="-120"/>
               </a:rPr>
-              <a:t>© Paula Soper</a:t>
+              <a:t>Â© Paula Soper</a:t>
             </a:r>
             <a:endParaRPr lang="en-US" sz="800" dirty="0"/>
           </a:p>
@@ -12223,8 +13299,47 @@
         </p:nvSpPr>
         <p:spPr>
           <a:xfrm>
+            <a:off x="11137392" y="6510528"/>
+            <a:ext cx="411480" cy="201168"/>
+          </a:xfrm>
+          <a:prstGeom prst="rect">
+            <a:avLst/>
+          </a:prstGeom>
+          <a:noFill/>
+          <a:ln/>
+        </p:spPr>
+        <p:txBody>
+          <a:bodyPr wrap="square" lIns="0" tIns="0" rIns="0" bIns="0" rtlCol="0" anchor="ctr"/>
+          <a:lstStyle/>
+          <a:p>
+            <a:pPr algn="r" indent="0" marL="0">
+              <a:buNone/>
+            </a:pPr>
+            <a:r>
+              <a:rPr lang="en-US" sz="900" dirty="0">
+                <a:solidFill>
+                  <a:srgbClr val="5F7181"/>
+                </a:solidFill>
+                <a:latin typeface="Aptos" pitchFamily="34" charset="0"/>
+                <a:ea typeface="Aptos" pitchFamily="34" charset="-122"/>
+                <a:cs typeface="Aptos" pitchFamily="34" charset="-120"/>
+              </a:rPr>
+              <a:t>6</a:t>
+            </a:r>
+            <a:endParaRPr lang="en-US" sz="900" dirty="0"/>
+          </a:p>
+        </p:txBody>
+      </p:sp>
+      <p:sp>
+        <p:nvSpPr>
+          <p:cNvPr id="8" name="Text 6"/>
+          <p:cNvSpPr/>
+          <p:nvPr/>
+        </p:nvSpPr>
+        <p:spPr>
+          <a:xfrm>
             <a:off x="640080" y="658368"/>
-            <a:ext cx="10881360" cy="566928"/>
+            <a:ext cx="10881360" cy="713232"/>
           </a:xfrm>
           <a:prstGeom prst="rect">
             <a:avLst/>
@@ -12242,7 +13357,7 @@
               <a:buNone/>
             </a:pPr>
             <a:r>
-              <a:rPr lang="en-US" sz="2700" b="1" dirty="0">
+              <a:rPr lang="en-US" sz="3400" b="1" dirty="0">
                 <a:solidFill>
                   <a:srgbClr val="003A63"/>
                 </a:solidFill>
@@ -12252,20 +13367,20 @@
               </a:rPr>
               <a:t>Learning Objectives Continued</a:t>
             </a:r>
-            <a:endParaRPr lang="en-US" sz="2700" dirty="0"/>
-          </a:p>
-        </p:txBody>
-      </p:sp>
-      <p:sp>
-        <p:nvSpPr>
-          <p:cNvPr id="8" name="Text 6"/>
-          <p:cNvSpPr/>
-          <p:nvPr/>
-        </p:nvSpPr>
-        <p:spPr>
-          <a:xfrm>
-            <a:off x="868680" y="1417320"/>
-            <a:ext cx="6675120" cy="4434840"/>
+            <a:endParaRPr lang="en-US" sz="3400" dirty="0"/>
+          </a:p>
+        </p:txBody>
+      </p:sp>
+      <p:sp>
+        <p:nvSpPr>
+          <p:cNvPr id="9" name="Text 7"/>
+          <p:cNvSpPr/>
+          <p:nvPr/>
+        </p:nvSpPr>
+        <p:spPr>
+          <a:xfrm>
+            <a:off x="868680" y="1508760"/>
+            <a:ext cx="6537960" cy="4160520"/>
           </a:xfrm>
           <a:prstGeom prst="rect">
             <a:avLst/>
@@ -12280,7 +13395,7 @@
           <a:lstStyle/>
           <a:p>
             <a:r>
-              <a:rPr lang="en-US" sz="1700" dirty="0">
+              <a:rPr lang="en-US" sz="2100" dirty="0">
                 <a:solidFill>
                   <a:srgbClr val="17364A"/>
                 </a:solidFill>
@@ -12288,15 +13403,15 @@
                 <a:ea typeface="Aptos" pitchFamily="34" charset="-122"/>
                 <a:cs typeface="Aptos" pitchFamily="34" charset="-120"/>
               </a:rPr>
-              <a:t>Produce a synthetic dataset assessment that can support readiness assessment, governance review, procurement, implementation,.</a:t>
-            </a:r>
-            <a:endParaRPr lang="en-US" sz="1700" dirty="0"/>
-          </a:p>
-        </p:txBody>
-      </p:sp>
-      <p:sp>
-        <p:nvSpPr>
-          <p:cNvPr id="9" name="Shape 7"/>
+              <a:t>Produce a synthetic dataset assessment that can support readiness assessment, governance review,.</a:t>
+            </a:r>
+            <a:endParaRPr lang="en-US" sz="2100" dirty="0"/>
+          </a:p>
+        </p:txBody>
+      </p:sp>
+      <p:sp>
+        <p:nvSpPr>
+          <p:cNvPr id="10" name="Shape 8"/>
           <p:cNvSpPr/>
           <p:nvPr/>
         </p:nvSpPr>
@@ -12323,14 +13438,14 @@
       </p:sp>
       <p:sp>
         <p:nvSpPr>
-          <p:cNvPr id="10" name="Text 8"/>
+          <p:cNvPr id="11" name="Text 9"/>
           <p:cNvSpPr/>
           <p:nvPr/>
         </p:nvSpPr>
         <p:spPr>
           <a:xfrm>
             <a:off x="8074152" y="1563624"/>
-            <a:ext cx="2825496" cy="201168"/>
+            <a:ext cx="2825496" cy="256032"/>
           </a:xfrm>
           <a:prstGeom prst="rect">
             <a:avLst/>
@@ -12346,7 +13461,7 @@
               <a:buNone/>
             </a:pPr>
             <a:r>
-              <a:rPr lang="en-US" sz="950" b="1" dirty="0">
+              <a:rPr lang="en-US" sz="1300" b="1" dirty="0">
                 <a:solidFill>
                   <a:srgbClr val="0068B7"/>
                 </a:solidFill>
@@ -12356,20 +13471,20 @@
               </a:rPr>
               <a:t>Key idea</a:t>
             </a:r>
-            <a:endParaRPr lang="en-US" sz="950" dirty="0"/>
-          </a:p>
-        </p:txBody>
-      </p:sp>
-      <p:sp>
-        <p:nvSpPr>
-          <p:cNvPr id="11" name="Text 9"/>
-          <p:cNvSpPr/>
-          <p:nvPr/>
-        </p:nvSpPr>
-        <p:spPr>
-          <a:xfrm>
-            <a:off x="8074152" y="1856232"/>
-            <a:ext cx="2825496" cy="1261872"/>
+            <a:endParaRPr lang="en-US" sz="1300" dirty="0"/>
+          </a:p>
+        </p:txBody>
+      </p:sp>
+      <p:sp>
+        <p:nvSpPr>
+          <p:cNvPr id="12" name="Text 10"/>
+          <p:cNvSpPr/>
+          <p:nvPr/>
+        </p:nvSpPr>
+        <p:spPr>
+          <a:xfrm>
+            <a:off x="8074152" y="1920240"/>
+            <a:ext cx="2825496" cy="1188720"/>
           </a:xfrm>
           <a:prstGeom prst="rect">
             <a:avLst/>
@@ -12387,7 +13502,7 @@
               <a:buNone/>
             </a:pPr>
             <a:r>
-              <a:rPr lang="en-US" sz="1250" dirty="0">
+              <a:rPr lang="en-US" sz="1550" dirty="0">
                 <a:solidFill>
                   <a:srgbClr val="17364A"/>
                 </a:solidFill>
@@ -12395,15 +13510,15 @@
                 <a:ea typeface="Aptos" pitchFamily="34" charset="-122"/>
                 <a:cs typeface="Aptos" pitchFamily="34" charset="-120"/>
               </a:rPr>
-              <a:t>Produce a synthetic dataset assessment that can support readiness assessment, governance review, procurement, implementation,.</a:t>
-            </a:r>
-            <a:endParaRPr lang="en-US" sz="1250" dirty="0"/>
-          </a:p>
-        </p:txBody>
-      </p:sp>
-      <p:sp>
-        <p:nvSpPr>
-          <p:cNvPr id="12" name="Shape 10"/>
+              <a:t>Produce a synthetic dataset assessment that can support readiness assessment, governance review,.</a:t>
+            </a:r>
+            <a:endParaRPr lang="en-US" sz="1550" dirty="0"/>
+          </a:p>
+        </p:txBody>
+      </p:sp>
+      <p:sp>
+        <p:nvSpPr>
+          <p:cNvPr id="13" name="Shape 11"/>
           <p:cNvSpPr/>
           <p:nvPr/>
         </p:nvSpPr>
@@ -12430,14 +13545,14 @@
       </p:sp>
       <p:sp>
         <p:nvSpPr>
-          <p:cNvPr id="13" name="Text 11"/>
+          <p:cNvPr id="14" name="Text 12"/>
           <p:cNvSpPr/>
           <p:nvPr/>
         </p:nvSpPr>
         <p:spPr>
           <a:xfrm>
             <a:off x="8074152" y="3666744"/>
-            <a:ext cx="2825496" cy="201168"/>
+            <a:ext cx="2825496" cy="256032"/>
           </a:xfrm>
           <a:prstGeom prst="rect">
             <a:avLst/>
@@ -12453,7 +13568,7 @@
               <a:buNone/>
             </a:pPr>
             <a:r>
-              <a:rPr lang="en-US" sz="950" b="1" dirty="0">
+              <a:rPr lang="en-US" sz="1300" b="1" dirty="0">
                 <a:solidFill>
                   <a:srgbClr val="0068B7"/>
                 </a:solidFill>
@@ -12463,20 +13578,20 @@
               </a:rPr>
               <a:t>Use this for</a:t>
             </a:r>
-            <a:endParaRPr lang="en-US" sz="950" dirty="0"/>
-          </a:p>
-        </p:txBody>
-      </p:sp>
-      <p:sp>
-        <p:nvSpPr>
-          <p:cNvPr id="14" name="Text 12"/>
-          <p:cNvSpPr/>
-          <p:nvPr/>
-        </p:nvSpPr>
-        <p:spPr>
-          <a:xfrm>
-            <a:off x="8074152" y="3959352"/>
-            <a:ext cx="2825496" cy="1170432"/>
+            <a:endParaRPr lang="en-US" sz="1300" dirty="0"/>
+          </a:p>
+        </p:txBody>
+      </p:sp>
+      <p:sp>
+        <p:nvSpPr>
+          <p:cNvPr id="15" name="Text 13"/>
+          <p:cNvSpPr/>
+          <p:nvPr/>
+        </p:nvSpPr>
+        <p:spPr>
+          <a:xfrm>
+            <a:off x="8074152" y="4023360"/>
+            <a:ext cx="2825496" cy="1097280"/>
           </a:xfrm>
           <a:prstGeom prst="rect">
             <a:avLst/>
@@ -12494,7 +13609,7 @@
               <a:buNone/>
             </a:pPr>
             <a:r>
-              <a:rPr lang="en-US" sz="1250" dirty="0">
+              <a:rPr lang="en-US" sz="1550" dirty="0">
                 <a:solidFill>
                   <a:srgbClr val="17364A"/>
                 </a:solidFill>
@@ -12504,7 +13619,7 @@
               </a:rPr>
               <a:t>Connect the concept to public health decisions, safeguards, documentation, or implementation work.</a:t>
             </a:r>
-            <a:endParaRPr lang="en-US" sz="1250" dirty="0"/>
+            <a:endParaRPr lang="en-US" sz="1550" dirty="0"/>
           </a:p>
         </p:txBody>
       </p:sp>
@@ -12701,7 +13816,7 @@
                 <a:ea typeface="Aptos" pitchFamily="34" charset="-122"/>
                 <a:cs typeface="Aptos" pitchFamily="34" charset="-120"/>
               </a:rPr>
-              <a:t>© Paula Soper</a:t>
+              <a:t>Â© Paula Soper</a:t>
             </a:r>
             <a:endParaRPr lang="en-US" sz="800" dirty="0"/>
           </a:p>
@@ -12709,7 +13824,46 @@
       </p:sp>
       <p:sp>
         <p:nvSpPr>
-          <p:cNvPr id="7" name="Shape 5"/>
+          <p:cNvPr id="7" name="Text 5"/>
+          <p:cNvSpPr/>
+          <p:nvPr/>
+        </p:nvSpPr>
+        <p:spPr>
+          <a:xfrm>
+            <a:off x="11137392" y="6510528"/>
+            <a:ext cx="411480" cy="201168"/>
+          </a:xfrm>
+          <a:prstGeom prst="rect">
+            <a:avLst/>
+          </a:prstGeom>
+          <a:noFill/>
+          <a:ln/>
+        </p:spPr>
+        <p:txBody>
+          <a:bodyPr wrap="square" lIns="0" tIns="0" rIns="0" bIns="0" rtlCol="0" anchor="ctr"/>
+          <a:lstStyle/>
+          <a:p>
+            <a:pPr algn="r" indent="0" marL="0">
+              <a:buNone/>
+            </a:pPr>
+            <a:r>
+              <a:rPr lang="en-US" sz="900" dirty="0">
+                <a:solidFill>
+                  <a:srgbClr val="5F7181"/>
+                </a:solidFill>
+                <a:latin typeface="Aptos" pitchFamily="34" charset="0"/>
+                <a:ea typeface="Aptos" pitchFamily="34" charset="-122"/>
+                <a:cs typeface="Aptos" pitchFamily="34" charset="-120"/>
+              </a:rPr>
+              <a:t>7</a:t>
+            </a:r>
+            <a:endParaRPr lang="en-US" sz="900" dirty="0"/>
+          </a:p>
+        </p:txBody>
+      </p:sp>
+      <p:sp>
+        <p:nvSpPr>
+          <p:cNvPr id="8" name="Shape 6"/>
           <p:cNvSpPr/>
           <p:nvPr/>
         </p:nvSpPr>
@@ -12734,7 +13888,7 @@
       </p:sp>
       <p:sp>
         <p:nvSpPr>
-          <p:cNvPr id="8" name="Text 6"/>
+          <p:cNvPr id="9" name="Text 7"/>
           <p:cNvSpPr/>
           <p:nvPr/>
         </p:nvSpPr>
@@ -12773,14 +13927,14 @@
       </p:sp>
       <p:sp>
         <p:nvSpPr>
-          <p:cNvPr id="9" name="Text 7"/>
+          <p:cNvPr id="10" name="Text 8"/>
           <p:cNvSpPr/>
           <p:nvPr/>
         </p:nvSpPr>
         <p:spPr>
           <a:xfrm>
             <a:off x="640080" y="621792"/>
-            <a:ext cx="10881360" cy="566928"/>
+            <a:ext cx="10881360" cy="713232"/>
           </a:xfrm>
           <a:prstGeom prst="rect">
             <a:avLst/>
@@ -12798,7 +13952,7 @@
               <a:buNone/>
             </a:pPr>
             <a:r>
-              <a:rPr lang="en-US" sz="2700" b="1" dirty="0">
+              <a:rPr lang="en-US" sz="3400" b="1" dirty="0">
                 <a:solidFill>
                   <a:srgbClr val="003A63"/>
                 </a:solidFill>
@@ -12808,20 +13962,20 @@
               </a:rPr>
               <a:t>Module Overview</a:t>
             </a:r>
-            <a:endParaRPr lang="en-US" sz="2700" dirty="0"/>
-          </a:p>
-        </p:txBody>
-      </p:sp>
-      <p:sp>
-        <p:nvSpPr>
-          <p:cNvPr id="10" name="Text 8"/>
-          <p:cNvSpPr/>
-          <p:nvPr/>
-        </p:nvSpPr>
-        <p:spPr>
-          <a:xfrm>
-            <a:off x="868680" y="1417320"/>
-            <a:ext cx="6675120" cy="4434840"/>
+            <a:endParaRPr lang="en-US" sz="3400" dirty="0"/>
+          </a:p>
+        </p:txBody>
+      </p:sp>
+      <p:sp>
+        <p:nvSpPr>
+          <p:cNvPr id="11" name="Text 9"/>
+          <p:cNvSpPr/>
+          <p:nvPr/>
+        </p:nvSpPr>
+        <p:spPr>
+          <a:xfrm>
+            <a:off x="868680" y="1508760"/>
+            <a:ext cx="6537960" cy="4160520"/>
           </a:xfrm>
           <a:prstGeom prst="rect">
             <a:avLst/>
@@ -12836,7 +13990,7 @@
           <a:lstStyle/>
           <a:p>
             <a:r>
-              <a:rPr lang="en-US" sz="1700" dirty="0">
+              <a:rPr lang="en-US" sz="2100" dirty="0">
                 <a:solidFill>
                   <a:srgbClr val="17364A"/>
                 </a:solidFill>
@@ -12844,13 +13998,13 @@
                 <a:ea typeface="Aptos" pitchFamily="34" charset="-122"/>
                 <a:cs typeface="Aptos" pitchFamily="34" charset="-120"/>
               </a:rPr>
-              <a:t>Synthetic data are artificially generated data that are designed to resemble real data without directly copying every.</a:t>
-            </a:r>
-            <a:endParaRPr lang="en-US" sz="1700" dirty="0"/>
-          </a:p>
-          <a:p>
-            <a:r>
-              <a:rPr lang="en-US" sz="1700" dirty="0">
+              <a:t>Synthetic data are artificially generated data that are designed to resemble real data without directly.</a:t>
+            </a:r>
+            <a:endParaRPr lang="en-US" sz="2100" dirty="0"/>
+          </a:p>
+          <a:p>
+            <a:r>
+              <a:rPr lang="en-US" sz="2100" dirty="0">
                 <a:solidFill>
                   <a:srgbClr val="17364A"/>
                 </a:solidFill>
@@ -12858,13 +14012,13 @@
                 <a:ea typeface="Aptos" pitchFamily="34" charset="-122"/>
                 <a:cs typeface="Aptos" pitchFamily="34" charset="-120"/>
               </a:rPr>
-              <a:t>In public health, synthetic data can support training, software testing, demonstrations, model prototyping, and vendor.</a:t>
-            </a:r>
-            <a:endParaRPr lang="en-US" sz="1700" dirty="0"/>
-          </a:p>
-          <a:p>
-            <a:r>
-              <a:rPr lang="en-US" sz="1700" dirty="0">
+              <a:t>In public health, synthetic data can support training, software testing, demonstrations, model.</a:t>
+            </a:r>
+            <a:endParaRPr lang="en-US" sz="2100" dirty="0"/>
+          </a:p>
+          <a:p>
+            <a:r>
+              <a:rPr lang="en-US" sz="2100" dirty="0">
                 <a:solidFill>
                   <a:srgbClr val="17364A"/>
                 </a:solidFill>
@@ -12872,15 +14026,15 @@
                 <a:ea typeface="Aptos" pitchFamily="34" charset="-122"/>
                 <a:cs typeface="Aptos" pitchFamily="34" charset="-120"/>
               </a:rPr>
-              <a:t>This module helps learners understand both the promise and limitations of synthetic data, including privacy risk, analytic.</a:t>
-            </a:r>
-            <a:endParaRPr lang="en-US" sz="1700" dirty="0"/>
-          </a:p>
-        </p:txBody>
-      </p:sp>
-      <p:sp>
-        <p:nvSpPr>
-          <p:cNvPr id="11" name="Shape 9"/>
+              <a:t>This module helps learners understand both the promise and limitations of synthetic data, including.</a:t>
+            </a:r>
+            <a:endParaRPr lang="en-US" sz="2100" dirty="0"/>
+          </a:p>
+        </p:txBody>
+      </p:sp>
+      <p:sp>
+        <p:nvSpPr>
+          <p:cNvPr id="12" name="Shape 10"/>
           <p:cNvSpPr/>
           <p:nvPr/>
         </p:nvSpPr>
@@ -12907,14 +14061,14 @@
       </p:sp>
       <p:sp>
         <p:nvSpPr>
-          <p:cNvPr id="12" name="Text 10"/>
+          <p:cNvPr id="13" name="Text 11"/>
           <p:cNvSpPr/>
           <p:nvPr/>
         </p:nvSpPr>
         <p:spPr>
           <a:xfrm>
             <a:off x="8074152" y="1563624"/>
-            <a:ext cx="2825496" cy="201168"/>
+            <a:ext cx="2825496" cy="256032"/>
           </a:xfrm>
           <a:prstGeom prst="rect">
             <a:avLst/>
@@ -12930,7 +14084,7 @@
               <a:buNone/>
             </a:pPr>
             <a:r>
-              <a:rPr lang="en-US" sz="950" b="1" dirty="0">
+              <a:rPr lang="en-US" sz="1300" b="1" dirty="0">
                 <a:solidFill>
                   <a:srgbClr val="0068B7"/>
                 </a:solidFill>
@@ -12940,20 +14094,20 @@
               </a:rPr>
               <a:t>Key idea</a:t>
             </a:r>
-            <a:endParaRPr lang="en-US" sz="950" dirty="0"/>
-          </a:p>
-        </p:txBody>
-      </p:sp>
-      <p:sp>
-        <p:nvSpPr>
-          <p:cNvPr id="13" name="Text 11"/>
-          <p:cNvSpPr/>
-          <p:nvPr/>
-        </p:nvSpPr>
-        <p:spPr>
-          <a:xfrm>
-            <a:off x="8074152" y="1856232"/>
-            <a:ext cx="2825496" cy="1261872"/>
+            <a:endParaRPr lang="en-US" sz="1300" dirty="0"/>
+          </a:p>
+        </p:txBody>
+      </p:sp>
+      <p:sp>
+        <p:nvSpPr>
+          <p:cNvPr id="14" name="Text 12"/>
+          <p:cNvSpPr/>
+          <p:nvPr/>
+        </p:nvSpPr>
+        <p:spPr>
+          <a:xfrm>
+            <a:off x="8074152" y="1920240"/>
+            <a:ext cx="2825496" cy="1188720"/>
           </a:xfrm>
           <a:prstGeom prst="rect">
             <a:avLst/>
@@ -12971,7 +14125,7 @@
               <a:buNone/>
             </a:pPr>
             <a:r>
-              <a:rPr lang="en-US" sz="1250" dirty="0">
+              <a:rPr lang="en-US" sz="1550" dirty="0">
                 <a:solidFill>
                   <a:srgbClr val="17364A"/>
                 </a:solidFill>
@@ -12979,15 +14133,15 @@
                 <a:ea typeface="Aptos" pitchFamily="34" charset="-122"/>
                 <a:cs typeface="Aptos" pitchFamily="34" charset="-120"/>
               </a:rPr>
-              <a:t>Synthetic data are artificially generated data that are designed to resemble real data without directly copying every.</a:t>
-            </a:r>
-            <a:endParaRPr lang="en-US" sz="1250" dirty="0"/>
-          </a:p>
-        </p:txBody>
-      </p:sp>
-      <p:sp>
-        <p:nvSpPr>
-          <p:cNvPr id="14" name="Shape 12"/>
+              <a:t>Synthetic data are artificially generated data that are designed to resemble real data without directly.</a:t>
+            </a:r>
+            <a:endParaRPr lang="en-US" sz="1550" dirty="0"/>
+          </a:p>
+        </p:txBody>
+      </p:sp>
+      <p:sp>
+        <p:nvSpPr>
+          <p:cNvPr id="15" name="Shape 13"/>
           <p:cNvSpPr/>
           <p:nvPr/>
         </p:nvSpPr>
@@ -13014,14 +14168,14 @@
       </p:sp>
       <p:sp>
         <p:nvSpPr>
-          <p:cNvPr id="15" name="Text 13"/>
+          <p:cNvPr id="16" name="Text 14"/>
           <p:cNvSpPr/>
           <p:nvPr/>
         </p:nvSpPr>
         <p:spPr>
           <a:xfrm>
             <a:off x="8074152" y="3666744"/>
-            <a:ext cx="2825496" cy="201168"/>
+            <a:ext cx="2825496" cy="256032"/>
           </a:xfrm>
           <a:prstGeom prst="rect">
             <a:avLst/>
@@ -13037,7 +14191,7 @@
               <a:buNone/>
             </a:pPr>
             <a:r>
-              <a:rPr lang="en-US" sz="950" b="1" dirty="0">
+              <a:rPr lang="en-US" sz="1300" b="1" dirty="0">
                 <a:solidFill>
                   <a:srgbClr val="0068B7"/>
                 </a:solidFill>
@@ -13047,20 +14201,20 @@
               </a:rPr>
               <a:t>Use this for</a:t>
             </a:r>
-            <a:endParaRPr lang="en-US" sz="950" dirty="0"/>
-          </a:p>
-        </p:txBody>
-      </p:sp>
-      <p:sp>
-        <p:nvSpPr>
-          <p:cNvPr id="16" name="Text 14"/>
-          <p:cNvSpPr/>
-          <p:nvPr/>
-        </p:nvSpPr>
-        <p:spPr>
-          <a:xfrm>
-            <a:off x="8074152" y="3959352"/>
-            <a:ext cx="2825496" cy="1170432"/>
+            <a:endParaRPr lang="en-US" sz="1300" dirty="0"/>
+          </a:p>
+        </p:txBody>
+      </p:sp>
+      <p:sp>
+        <p:nvSpPr>
+          <p:cNvPr id="17" name="Text 15"/>
+          <p:cNvSpPr/>
+          <p:nvPr/>
+        </p:nvSpPr>
+        <p:spPr>
+          <a:xfrm>
+            <a:off x="8074152" y="4023360"/>
+            <a:ext cx="2825496" cy="1097280"/>
           </a:xfrm>
           <a:prstGeom prst="rect">
             <a:avLst/>
@@ -13078,7 +14232,7 @@
               <a:buNone/>
             </a:pPr>
             <a:r>
-              <a:rPr lang="en-US" sz="1250" dirty="0">
+              <a:rPr lang="en-US" sz="1550" dirty="0">
                 <a:solidFill>
                   <a:srgbClr val="17364A"/>
                 </a:solidFill>
@@ -13088,7 +14242,7 @@
               </a:rPr>
               <a:t>Connect the concept to public health decisions, safeguards, documentation, or implementation work.</a:t>
             </a:r>
-            <a:endParaRPr lang="en-US" sz="1250" dirty="0"/>
+            <a:endParaRPr lang="en-US" sz="1550" dirty="0"/>
           </a:p>
         </p:txBody>
       </p:sp>
@@ -13285,7 +14439,7 @@
                 <a:ea typeface="Aptos" pitchFamily="34" charset="-122"/>
                 <a:cs typeface="Aptos" pitchFamily="34" charset="-120"/>
               </a:rPr>
-              <a:t>© Paula Soper</a:t>
+              <a:t>Â© Paula Soper</a:t>
             </a:r>
             <a:endParaRPr lang="en-US" sz="800" dirty="0"/>
           </a:p>
@@ -13293,7 +14447,46 @@
       </p:sp>
       <p:sp>
         <p:nvSpPr>
-          <p:cNvPr id="7" name="Shape 5"/>
+          <p:cNvPr id="7" name="Text 5"/>
+          <p:cNvSpPr/>
+          <p:nvPr/>
+        </p:nvSpPr>
+        <p:spPr>
+          <a:xfrm>
+            <a:off x="11137392" y="6510528"/>
+            <a:ext cx="411480" cy="201168"/>
+          </a:xfrm>
+          <a:prstGeom prst="rect">
+            <a:avLst/>
+          </a:prstGeom>
+          <a:noFill/>
+          <a:ln/>
+        </p:spPr>
+        <p:txBody>
+          <a:bodyPr wrap="square" lIns="0" tIns="0" rIns="0" bIns="0" rtlCol="0" anchor="ctr"/>
+          <a:lstStyle/>
+          <a:p>
+            <a:pPr algn="r" indent="0" marL="0">
+              <a:buNone/>
+            </a:pPr>
+            <a:r>
+              <a:rPr lang="en-US" sz="900" dirty="0">
+                <a:solidFill>
+                  <a:srgbClr val="5F7181"/>
+                </a:solidFill>
+                <a:latin typeface="Aptos" pitchFamily="34" charset="0"/>
+                <a:ea typeface="Aptos" pitchFamily="34" charset="-122"/>
+                <a:cs typeface="Aptos" pitchFamily="34" charset="-120"/>
+              </a:rPr>
+              <a:t>8</a:t>
+            </a:r>
+            <a:endParaRPr lang="en-US" sz="900" dirty="0"/>
+          </a:p>
+        </p:txBody>
+      </p:sp>
+      <p:sp>
+        <p:nvSpPr>
+          <p:cNvPr id="8" name="Shape 6"/>
           <p:cNvSpPr/>
           <p:nvPr/>
         </p:nvSpPr>
@@ -13318,7 +14511,7 @@
       </p:sp>
       <p:sp>
         <p:nvSpPr>
-          <p:cNvPr id="8" name="Text 6"/>
+          <p:cNvPr id="9" name="Text 7"/>
           <p:cNvSpPr/>
           <p:nvPr/>
         </p:nvSpPr>
@@ -13357,14 +14550,14 @@
       </p:sp>
       <p:sp>
         <p:nvSpPr>
-          <p:cNvPr id="9" name="Text 7"/>
+          <p:cNvPr id="10" name="Text 8"/>
           <p:cNvSpPr/>
           <p:nvPr/>
         </p:nvSpPr>
         <p:spPr>
           <a:xfrm>
             <a:off x="640080" y="621792"/>
-            <a:ext cx="10881360" cy="566928"/>
+            <a:ext cx="10881360" cy="713232"/>
           </a:xfrm>
           <a:prstGeom prst="rect">
             <a:avLst/>
@@ -13382,7 +14575,7 @@
               <a:buNone/>
             </a:pPr>
             <a:r>
-              <a:rPr lang="en-US" sz="2700" b="1" dirty="0">
+              <a:rPr lang="en-US" sz="3400" b="1" dirty="0">
                 <a:solidFill>
                   <a:srgbClr val="003A63"/>
                 </a:solidFill>
@@ -13392,20 +14585,20 @@
               </a:rPr>
               <a:t>Why This Topic Matters for Public Health AI</a:t>
             </a:r>
-            <a:endParaRPr lang="en-US" sz="2700" dirty="0"/>
-          </a:p>
-        </p:txBody>
-      </p:sp>
-      <p:sp>
-        <p:nvSpPr>
-          <p:cNvPr id="10" name="Text 8"/>
-          <p:cNvSpPr/>
-          <p:nvPr/>
-        </p:nvSpPr>
-        <p:spPr>
-          <a:xfrm>
-            <a:off x="868680" y="1417320"/>
-            <a:ext cx="6675120" cy="4434840"/>
+            <a:endParaRPr lang="en-US" sz="3400" dirty="0"/>
+          </a:p>
+        </p:txBody>
+      </p:sp>
+      <p:sp>
+        <p:nvSpPr>
+          <p:cNvPr id="11" name="Text 9"/>
+          <p:cNvSpPr/>
+          <p:nvPr/>
+        </p:nvSpPr>
+        <p:spPr>
+          <a:xfrm>
+            <a:off x="868680" y="1508760"/>
+            <a:ext cx="6537960" cy="4160520"/>
           </a:xfrm>
           <a:prstGeom prst="rect">
             <a:avLst/>
@@ -13420,7 +14613,7 @@
           <a:lstStyle/>
           <a:p>
             <a:r>
-              <a:rPr lang="en-US" sz="1700" dirty="0">
+              <a:rPr lang="en-US" sz="2100" dirty="0">
                 <a:solidFill>
                   <a:srgbClr val="17364A"/>
                 </a:solidFill>
@@ -13428,13 +14621,13 @@
                 <a:ea typeface="Aptos" pitchFamily="34" charset="-122"/>
                 <a:cs typeface="Aptos" pitchFamily="34" charset="-120"/>
               </a:rPr>
-              <a:t>Synthetic Data for Public Health AI matters because AI systems are embedded in public health programs, data systems, and.</a:t>
-            </a:r>
-            <a:endParaRPr lang="en-US" sz="1700" dirty="0"/>
-          </a:p>
-          <a:p>
-            <a:r>
-              <a:rPr lang="en-US" sz="1700" dirty="0">
+              <a:t>Synthetic Data for Public Health AI matters because AI systems are embedded in public health programs,.</a:t>
+            </a:r>
+            <a:endParaRPr lang="en-US" sz="2100" dirty="0"/>
+          </a:p>
+          <a:p>
+            <a:r>
+              <a:rPr lang="en-US" sz="2100" dirty="0">
                 <a:solidFill>
                   <a:srgbClr val="17364A"/>
                 </a:solidFill>
@@ -13444,11 +14637,11 @@
               </a:rPr>
               <a:t>The topic affects whether AI outputs are accurate, explainable, safe, equitable, secure, and sustainable.</a:t>
             </a:r>
-            <a:endParaRPr lang="en-US" sz="1700" dirty="0"/>
-          </a:p>
-          <a:p>
-            <a:r>
-              <a:rPr lang="en-US" sz="1700" dirty="0">
+            <a:endParaRPr lang="en-US" sz="2100" dirty="0"/>
+          </a:p>
+          <a:p>
+            <a:r>
+              <a:rPr lang="en-US" sz="2100" dirty="0">
                 <a:solidFill>
                   <a:srgbClr val="17364A"/>
                 </a:solidFill>
@@ -13458,27 +14651,13 @@
               </a:rPr>
               <a:t>Agencies that ignore this area may create tools that work in a demonstration but fail in actual practice.</a:t>
             </a:r>
-            <a:endParaRPr lang="en-US" sz="1700" dirty="0"/>
-          </a:p>
-          <a:p>
-            <a:r>
-              <a:rPr lang="en-US" sz="1700" dirty="0">
-                <a:solidFill>
-                  <a:srgbClr val="17364A"/>
-                </a:solidFill>
-                <a:latin typeface="Aptos" pitchFamily="34" charset="0"/>
-                <a:ea typeface="Aptos" pitchFamily="34" charset="-122"/>
-                <a:cs typeface="Aptos" pitchFamily="34" charset="-120"/>
-              </a:rPr>
-              <a:t>The topic also affects accountability.</a:t>
-            </a:r>
-            <a:endParaRPr lang="en-US" sz="1700" dirty="0"/>
-          </a:p>
-        </p:txBody>
-      </p:sp>
-      <p:sp>
-        <p:nvSpPr>
-          <p:cNvPr id="11" name="Shape 9"/>
+            <a:endParaRPr lang="en-US" sz="2100" dirty="0"/>
+          </a:p>
+        </p:txBody>
+      </p:sp>
+      <p:sp>
+        <p:nvSpPr>
+          <p:cNvPr id="12" name="Shape 10"/>
           <p:cNvSpPr/>
           <p:nvPr/>
         </p:nvSpPr>
@@ -13505,14 +14684,14 @@
       </p:sp>
       <p:sp>
         <p:nvSpPr>
-          <p:cNvPr id="12" name="Text 10"/>
+          <p:cNvPr id="13" name="Text 11"/>
           <p:cNvSpPr/>
           <p:nvPr/>
         </p:nvSpPr>
         <p:spPr>
           <a:xfrm>
             <a:off x="8074152" y="1563624"/>
-            <a:ext cx="2825496" cy="201168"/>
+            <a:ext cx="2825496" cy="256032"/>
           </a:xfrm>
           <a:prstGeom prst="rect">
             <a:avLst/>
@@ -13528,7 +14707,7 @@
               <a:buNone/>
             </a:pPr>
             <a:r>
-              <a:rPr lang="en-US" sz="950" b="1" dirty="0">
+              <a:rPr lang="en-US" sz="1300" b="1" dirty="0">
                 <a:solidFill>
                   <a:srgbClr val="0068B7"/>
                 </a:solidFill>
@@ -13538,20 +14717,20 @@
               </a:rPr>
               <a:t>Key idea</a:t>
             </a:r>
-            <a:endParaRPr lang="en-US" sz="950" dirty="0"/>
-          </a:p>
-        </p:txBody>
-      </p:sp>
-      <p:sp>
-        <p:nvSpPr>
-          <p:cNvPr id="13" name="Text 11"/>
-          <p:cNvSpPr/>
-          <p:nvPr/>
-        </p:nvSpPr>
-        <p:spPr>
-          <a:xfrm>
-            <a:off x="8074152" y="1856232"/>
-            <a:ext cx="2825496" cy="1261872"/>
+            <a:endParaRPr lang="en-US" sz="1300" dirty="0"/>
+          </a:p>
+        </p:txBody>
+      </p:sp>
+      <p:sp>
+        <p:nvSpPr>
+          <p:cNvPr id="14" name="Text 12"/>
+          <p:cNvSpPr/>
+          <p:nvPr/>
+        </p:nvSpPr>
+        <p:spPr>
+          <a:xfrm>
+            <a:off x="8074152" y="1920240"/>
+            <a:ext cx="2825496" cy="1188720"/>
           </a:xfrm>
           <a:prstGeom prst="rect">
             <a:avLst/>
@@ -13569,7 +14748,7 @@
               <a:buNone/>
             </a:pPr>
             <a:r>
-              <a:rPr lang="en-US" sz="1250" dirty="0">
+              <a:rPr lang="en-US" sz="1550" dirty="0">
                 <a:solidFill>
                   <a:srgbClr val="17364A"/>
                 </a:solidFill>
@@ -13577,15 +14756,15 @@
                 <a:ea typeface="Aptos" pitchFamily="34" charset="-122"/>
                 <a:cs typeface="Aptos" pitchFamily="34" charset="-120"/>
               </a:rPr>
-              <a:t>Synthetic Data for Public Health AI matters because AI systems are embedded in public health programs, data systems, and.</a:t>
-            </a:r>
-            <a:endParaRPr lang="en-US" sz="1250" dirty="0"/>
-          </a:p>
-        </p:txBody>
-      </p:sp>
-      <p:sp>
-        <p:nvSpPr>
-          <p:cNvPr id="14" name="Shape 12"/>
+              <a:t>Synthetic Data for Public Health AI matters because AI systems are embedded in public health programs,.</a:t>
+            </a:r>
+            <a:endParaRPr lang="en-US" sz="1550" dirty="0"/>
+          </a:p>
+        </p:txBody>
+      </p:sp>
+      <p:sp>
+        <p:nvSpPr>
+          <p:cNvPr id="15" name="Shape 13"/>
           <p:cNvSpPr/>
           <p:nvPr/>
         </p:nvSpPr>
@@ -13612,14 +14791,14 @@
       </p:sp>
       <p:sp>
         <p:nvSpPr>
-          <p:cNvPr id="15" name="Text 13"/>
+          <p:cNvPr id="16" name="Text 14"/>
           <p:cNvSpPr/>
           <p:nvPr/>
         </p:nvSpPr>
         <p:spPr>
           <a:xfrm>
             <a:off x="8074152" y="3666744"/>
-            <a:ext cx="2825496" cy="201168"/>
+            <a:ext cx="2825496" cy="256032"/>
           </a:xfrm>
           <a:prstGeom prst="rect">
             <a:avLst/>
@@ -13635,7 +14814,7 @@
               <a:buNone/>
             </a:pPr>
             <a:r>
-              <a:rPr lang="en-US" sz="950" b="1" dirty="0">
+              <a:rPr lang="en-US" sz="1300" b="1" dirty="0">
                 <a:solidFill>
                   <a:srgbClr val="0068B7"/>
                 </a:solidFill>
@@ -13645,20 +14824,20 @@
               </a:rPr>
               <a:t>Use this for</a:t>
             </a:r>
-            <a:endParaRPr lang="en-US" sz="950" dirty="0"/>
-          </a:p>
-        </p:txBody>
-      </p:sp>
-      <p:sp>
-        <p:nvSpPr>
-          <p:cNvPr id="16" name="Text 14"/>
-          <p:cNvSpPr/>
-          <p:nvPr/>
-        </p:nvSpPr>
-        <p:spPr>
-          <a:xfrm>
-            <a:off x="8074152" y="3959352"/>
-            <a:ext cx="2825496" cy="1170432"/>
+            <a:endParaRPr lang="en-US" sz="1300" dirty="0"/>
+          </a:p>
+        </p:txBody>
+      </p:sp>
+      <p:sp>
+        <p:nvSpPr>
+          <p:cNvPr id="17" name="Text 15"/>
+          <p:cNvSpPr/>
+          <p:nvPr/>
+        </p:nvSpPr>
+        <p:spPr>
+          <a:xfrm>
+            <a:off x="8074152" y="4023360"/>
+            <a:ext cx="2825496" cy="1097280"/>
           </a:xfrm>
           <a:prstGeom prst="rect">
             <a:avLst/>
@@ -13676,7 +14855,7 @@
               <a:buNone/>
             </a:pPr>
             <a:r>
-              <a:rPr lang="en-US" sz="1250" dirty="0">
+              <a:rPr lang="en-US" sz="1550" dirty="0">
                 <a:solidFill>
                   <a:srgbClr val="17364A"/>
                 </a:solidFill>
@@ -13686,7 +14865,7 @@
               </a:rPr>
               <a:t>Connect the concept to public health decisions, safeguards, documentation, or implementation work.</a:t>
             </a:r>
-            <a:endParaRPr lang="en-US" sz="1250" dirty="0"/>
+            <a:endParaRPr lang="en-US" sz="1550" dirty="0"/>
           </a:p>
         </p:txBody>
       </p:sp>
@@ -13883,7 +15062,7 @@
                 <a:ea typeface="Aptos" pitchFamily="34" charset="-122"/>
                 <a:cs typeface="Aptos" pitchFamily="34" charset="-120"/>
               </a:rPr>
-              <a:t>© Paula Soper</a:t>
+              <a:t>Â© Paula Soper</a:t>
             </a:r>
             <a:endParaRPr lang="en-US" sz="800" dirty="0"/>
           </a:p>
@@ -13891,7 +15070,46 @@
       </p:sp>
       <p:sp>
         <p:nvSpPr>
-          <p:cNvPr id="7" name="Shape 5"/>
+          <p:cNvPr id="7" name="Text 5"/>
+          <p:cNvSpPr/>
+          <p:nvPr/>
+        </p:nvSpPr>
+        <p:spPr>
+          <a:xfrm>
+            <a:off x="11137392" y="6510528"/>
+            <a:ext cx="411480" cy="201168"/>
+          </a:xfrm>
+          <a:prstGeom prst="rect">
+            <a:avLst/>
+          </a:prstGeom>
+          <a:noFill/>
+          <a:ln/>
+        </p:spPr>
+        <p:txBody>
+          <a:bodyPr wrap="square" lIns="0" tIns="0" rIns="0" bIns="0" rtlCol="0" anchor="ctr"/>
+          <a:lstStyle/>
+          <a:p>
+            <a:pPr algn="r" indent="0" marL="0">
+              <a:buNone/>
+            </a:pPr>
+            <a:r>
+              <a:rPr lang="en-US" sz="900" dirty="0">
+                <a:solidFill>
+                  <a:srgbClr val="5F7181"/>
+                </a:solidFill>
+                <a:latin typeface="Aptos" pitchFamily="34" charset="0"/>
+                <a:ea typeface="Aptos" pitchFamily="34" charset="-122"/>
+                <a:cs typeface="Aptos" pitchFamily="34" charset="-120"/>
+              </a:rPr>
+              <a:t>9</a:t>
+            </a:r>
+            <a:endParaRPr lang="en-US" sz="900" dirty="0"/>
+          </a:p>
+        </p:txBody>
+      </p:sp>
+      <p:sp>
+        <p:nvSpPr>
+          <p:cNvPr id="8" name="Shape 6"/>
           <p:cNvSpPr/>
           <p:nvPr/>
         </p:nvSpPr>
@@ -13916,7 +15134,7 @@
       </p:sp>
       <p:sp>
         <p:nvSpPr>
-          <p:cNvPr id="8" name="Text 6"/>
+          <p:cNvPr id="9" name="Text 7"/>
           <p:cNvSpPr/>
           <p:nvPr/>
         </p:nvSpPr>
@@ -13955,14 +15173,14 @@
       </p:sp>
       <p:sp>
         <p:nvSpPr>
-          <p:cNvPr id="9" name="Text 7"/>
+          <p:cNvPr id="10" name="Text 8"/>
           <p:cNvSpPr/>
           <p:nvPr/>
         </p:nvSpPr>
         <p:spPr>
           <a:xfrm>
             <a:off x="640080" y="621792"/>
-            <a:ext cx="10881360" cy="566928"/>
+            <a:ext cx="10881360" cy="713232"/>
           </a:xfrm>
           <a:prstGeom prst="rect">
             <a:avLst/>
@@ -13980,7 +15198,7 @@
               <a:buNone/>
             </a:pPr>
             <a:r>
-              <a:rPr lang="en-US" sz="2700" b="1" dirty="0">
+              <a:rPr lang="en-US" sz="3400" b="1" dirty="0">
                 <a:solidFill>
                   <a:srgbClr val="003A63"/>
                 </a:solidFill>
@@ -13990,20 +15208,20 @@
               </a:rPr>
               <a:t>Core Concepts</a:t>
             </a:r>
-            <a:endParaRPr lang="en-US" sz="2700" dirty="0"/>
-          </a:p>
-        </p:txBody>
-      </p:sp>
-      <p:sp>
-        <p:nvSpPr>
-          <p:cNvPr id="10" name="Text 8"/>
-          <p:cNvSpPr/>
-          <p:nvPr/>
-        </p:nvSpPr>
-        <p:spPr>
-          <a:xfrm>
-            <a:off x="868680" y="1417320"/>
-            <a:ext cx="6675120" cy="4434840"/>
+            <a:endParaRPr lang="en-US" sz="3400" dirty="0"/>
+          </a:p>
+        </p:txBody>
+      </p:sp>
+      <p:sp>
+        <p:nvSpPr>
+          <p:cNvPr id="11" name="Text 9"/>
+          <p:cNvSpPr/>
+          <p:nvPr/>
+        </p:nvSpPr>
+        <p:spPr>
+          <a:xfrm>
+            <a:off x="868680" y="1508760"/>
+            <a:ext cx="6537960" cy="4160520"/>
           </a:xfrm>
           <a:prstGeom prst="rect">
             <a:avLst/>
@@ -14018,7 +15236,7 @@
           <a:lstStyle/>
           <a:p>
             <a:r>
-              <a:rPr lang="en-US" sz="1700" dirty="0">
+              <a:rPr lang="en-US" sz="2100" dirty="0">
                 <a:solidFill>
                   <a:srgbClr val="17364A"/>
                 </a:solidFill>
@@ -14026,13 +15244,13 @@
                 <a:ea typeface="Aptos" pitchFamily="34" charset="-122"/>
                 <a:cs typeface="Aptos" pitchFamily="34" charset="-120"/>
               </a:rPr>
-              <a:t>Synthetic data are generated data designed to preserve selected patterns of a source dataset while reducing reliance on.</a:t>
-            </a:r>
-            <a:endParaRPr lang="en-US" sz="1700" dirty="0"/>
-          </a:p>
-          <a:p>
-            <a:r>
-              <a:rPr lang="en-US" sz="1700" dirty="0">
+              <a:t>Synthetic data are generated data designed to preserve selected patterns of a source dataset while.</a:t>
+            </a:r>
+            <a:endParaRPr lang="en-US" sz="2100" dirty="0"/>
+          </a:p>
+          <a:p>
+            <a:r>
+              <a:rPr lang="en-US" sz="2100" dirty="0">
                 <a:solidFill>
                   <a:srgbClr val="17364A"/>
                 </a:solidFill>
@@ -14042,11 +15260,11 @@
               </a:rPr>
               <a:t>The value of synthetic data depends on the purpose.</a:t>
             </a:r>
-            <a:endParaRPr lang="en-US" sz="1700" dirty="0"/>
-          </a:p>
-          <a:p>
-            <a:r>
-              <a:rPr lang="en-US" sz="1700" dirty="0">
+            <a:endParaRPr lang="en-US" sz="2100" dirty="0"/>
+          </a:p>
+          <a:p>
+            <a:r>
+              <a:rPr lang="en-US" sz="2100" dirty="0">
                 <a:solidFill>
                   <a:srgbClr val="17364A"/>
                 </a:solidFill>
@@ -14054,29 +15272,15 @@
                 <a:ea typeface="Aptos" pitchFamily="34" charset="-122"/>
                 <a:cs typeface="Aptos" pitchFamily="34" charset="-120"/>
               </a:rPr>
-              <a:t>A dataset that is useful for training staff on a dashboard may not be valid for evaluating a predictive model or testing.</a:t>
-            </a:r>
-            <a:endParaRPr lang="en-US" sz="1700" dirty="0"/>
-          </a:p>
-          <a:p>
-            <a:r>
-              <a:rPr lang="en-US" sz="1700" dirty="0">
-                <a:solidFill>
-                  <a:srgbClr val="17364A"/>
-                </a:solidFill>
-                <a:latin typeface="Aptos" pitchFamily="34" charset="0"/>
-                <a:ea typeface="Aptos" pitchFamily="34" charset="-122"/>
-                <a:cs typeface="Aptos" pitchFamily="34" charset="-120"/>
-              </a:rPr>
-              <a:t>Privacy risk does not disappear simply because data are synthetic.</a:t>
-            </a:r>
-            <a:endParaRPr lang="en-US" sz="1700" dirty="0"/>
-          </a:p>
-        </p:txBody>
-      </p:sp>
-      <p:sp>
-        <p:nvSpPr>
-          <p:cNvPr id="11" name="Shape 9"/>
+              <a:t>A dataset that is useful for training staff on a dashboard may not be valid for evaluating a predictive.</a:t>
+            </a:r>
+            <a:endParaRPr lang="en-US" sz="2100" dirty="0"/>
+          </a:p>
+        </p:txBody>
+      </p:sp>
+      <p:sp>
+        <p:nvSpPr>
+          <p:cNvPr id="12" name="Shape 10"/>
           <p:cNvSpPr/>
           <p:nvPr/>
         </p:nvSpPr>
@@ -14103,14 +15307,14 @@
       </p:sp>
       <p:sp>
         <p:nvSpPr>
-          <p:cNvPr id="12" name="Text 10"/>
+          <p:cNvPr id="13" name="Text 11"/>
           <p:cNvSpPr/>
           <p:nvPr/>
         </p:nvSpPr>
         <p:spPr>
           <a:xfrm>
             <a:off x="8074152" y="1563624"/>
-            <a:ext cx="2825496" cy="201168"/>
+            <a:ext cx="2825496" cy="256032"/>
           </a:xfrm>
           <a:prstGeom prst="rect">
             <a:avLst/>
@@ -14126,7 +15330,7 @@
               <a:buNone/>
             </a:pPr>
             <a:r>
-              <a:rPr lang="en-US" sz="950" b="1" dirty="0">
+              <a:rPr lang="en-US" sz="1300" b="1" dirty="0">
                 <a:solidFill>
                   <a:srgbClr val="0068B7"/>
                 </a:solidFill>
@@ -14136,20 +15340,20 @@
               </a:rPr>
               <a:t>Key idea</a:t>
             </a:r>
-            <a:endParaRPr lang="en-US" sz="950" dirty="0"/>
-          </a:p>
-        </p:txBody>
-      </p:sp>
-      <p:sp>
-        <p:nvSpPr>
-          <p:cNvPr id="13" name="Text 11"/>
-          <p:cNvSpPr/>
-          <p:nvPr/>
-        </p:nvSpPr>
-        <p:spPr>
-          <a:xfrm>
-            <a:off x="8074152" y="1856232"/>
-            <a:ext cx="2825496" cy="1261872"/>
+            <a:endParaRPr lang="en-US" sz="1300" dirty="0"/>
+          </a:p>
+        </p:txBody>
+      </p:sp>
+      <p:sp>
+        <p:nvSpPr>
+          <p:cNvPr id="14" name="Text 12"/>
+          <p:cNvSpPr/>
+          <p:nvPr/>
+        </p:nvSpPr>
+        <p:spPr>
+          <a:xfrm>
+            <a:off x="8074152" y="1920240"/>
+            <a:ext cx="2825496" cy="1188720"/>
           </a:xfrm>
           <a:prstGeom prst="rect">
             <a:avLst/>
@@ -14167,7 +15371,7 @@
               <a:buNone/>
             </a:pPr>
             <a:r>
-              <a:rPr lang="en-US" sz="1250" dirty="0">
+              <a:rPr lang="en-US" sz="1550" dirty="0">
                 <a:solidFill>
                   <a:srgbClr val="17364A"/>
                 </a:solidFill>
@@ -14175,15 +15379,15 @@
                 <a:ea typeface="Aptos" pitchFamily="34" charset="-122"/>
                 <a:cs typeface="Aptos" pitchFamily="34" charset="-120"/>
               </a:rPr>
-              <a:t>Synthetic data are generated data designed to preserve selected patterns of a source dataset while reducing reliance on.</a:t>
-            </a:r>
-            <a:endParaRPr lang="en-US" sz="1250" dirty="0"/>
-          </a:p>
-        </p:txBody>
-      </p:sp>
-      <p:sp>
-        <p:nvSpPr>
-          <p:cNvPr id="14" name="Shape 12"/>
+              <a:t>Synthetic data are generated data designed to preserve selected patterns of a source dataset while.</a:t>
+            </a:r>
+            <a:endParaRPr lang="en-US" sz="1550" dirty="0"/>
+          </a:p>
+        </p:txBody>
+      </p:sp>
+      <p:sp>
+        <p:nvSpPr>
+          <p:cNvPr id="15" name="Shape 13"/>
           <p:cNvSpPr/>
           <p:nvPr/>
         </p:nvSpPr>
@@ -14210,14 +15414,14 @@
       </p:sp>
       <p:sp>
         <p:nvSpPr>
-          <p:cNvPr id="15" name="Text 13"/>
+          <p:cNvPr id="16" name="Text 14"/>
           <p:cNvSpPr/>
           <p:nvPr/>
         </p:nvSpPr>
         <p:spPr>
           <a:xfrm>
             <a:off x="8074152" y="3666744"/>
-            <a:ext cx="2825496" cy="201168"/>
+            <a:ext cx="2825496" cy="256032"/>
           </a:xfrm>
           <a:prstGeom prst="rect">
             <a:avLst/>
@@ -14233,7 +15437,7 @@
               <a:buNone/>
             </a:pPr>
             <a:r>
-              <a:rPr lang="en-US" sz="950" b="1" dirty="0">
+              <a:rPr lang="en-US" sz="1300" b="1" dirty="0">
                 <a:solidFill>
                   <a:srgbClr val="0068B7"/>
                 </a:solidFill>
@@ -14243,20 +15447,20 @@
               </a:rPr>
               <a:t>Use this for</a:t>
             </a:r>
-            <a:endParaRPr lang="en-US" sz="950" dirty="0"/>
-          </a:p>
-        </p:txBody>
-      </p:sp>
-      <p:sp>
-        <p:nvSpPr>
-          <p:cNvPr id="16" name="Text 14"/>
-          <p:cNvSpPr/>
-          <p:nvPr/>
-        </p:nvSpPr>
-        <p:spPr>
-          <a:xfrm>
-            <a:off x="8074152" y="3959352"/>
-            <a:ext cx="2825496" cy="1170432"/>
+            <a:endParaRPr lang="en-US" sz="1300" dirty="0"/>
+          </a:p>
+        </p:txBody>
+      </p:sp>
+      <p:sp>
+        <p:nvSpPr>
+          <p:cNvPr id="17" name="Text 15"/>
+          <p:cNvSpPr/>
+          <p:nvPr/>
+        </p:nvSpPr>
+        <p:spPr>
+          <a:xfrm>
+            <a:off x="8074152" y="4023360"/>
+            <a:ext cx="2825496" cy="1097280"/>
           </a:xfrm>
           <a:prstGeom prst="rect">
             <a:avLst/>
@@ -14274,7 +15478,7 @@
               <a:buNone/>
             </a:pPr>
             <a:r>
-              <a:rPr lang="en-US" sz="1250" dirty="0">
+              <a:rPr lang="en-US" sz="1550" dirty="0">
                 <a:solidFill>
                   <a:srgbClr val="17364A"/>
                 </a:solidFill>
@@ -14284,7 +15488,7 @@
               </a:rPr>
               <a:t>Connect the concept to public health decisions, safeguards, documentation, or implementation work.</a:t>
             </a:r>
-            <a:endParaRPr lang="en-US" sz="1250" dirty="0"/>
+            <a:endParaRPr lang="en-US" sz="1550" dirty="0"/>
           </a:p>
         </p:txBody>
       </p:sp>
